--- a/7.pptx
+++ b/7.pptx
@@ -19,6 +19,12 @@
     <p:sldId id="268" r:id="rId13"/>
     <p:sldId id="269" r:id="rId14"/>
     <p:sldId id="270" r:id="rId15"/>
+    <p:sldId id="271" r:id="rId16"/>
+    <p:sldId id="272" r:id="rId17"/>
+    <p:sldId id="273" r:id="rId18"/>
+    <p:sldId id="274" r:id="rId19"/>
+    <p:sldId id="275" r:id="rId20"/>
+    <p:sldId id="276" r:id="rId21"/>
   </p:sldIdLst>
   <p:sldSz cx="9144000" cy="6858000" type="screen4x3"/>
   <p:notesSz cx="6858000" cy="9144000"/>
@@ -301,7 +307,7 @@
           <a:p>
             <a:fld id="{69E8F881-5088-4687-AB6A-7968DC3F49CA}" type="datetimeFigureOut">
               <a:rPr lang="en-GB" smtClean="0"/>
-              <a:t>30/11/2025</a:t>
+              <a:t>09/12/2025</a:t>
             </a:fld>
             <a:endParaRPr lang="en-GB"/>
           </a:p>
@@ -471,7 +477,7 @@
           <a:p>
             <a:fld id="{69E8F881-5088-4687-AB6A-7968DC3F49CA}" type="datetimeFigureOut">
               <a:rPr lang="en-GB" smtClean="0"/>
-              <a:t>30/11/2025</a:t>
+              <a:t>09/12/2025</a:t>
             </a:fld>
             <a:endParaRPr lang="en-GB"/>
           </a:p>
@@ -651,7 +657,7 @@
           <a:p>
             <a:fld id="{69E8F881-5088-4687-AB6A-7968DC3F49CA}" type="datetimeFigureOut">
               <a:rPr lang="en-GB" smtClean="0"/>
-              <a:t>30/11/2025</a:t>
+              <a:t>09/12/2025</a:t>
             </a:fld>
             <a:endParaRPr lang="en-GB"/>
           </a:p>
@@ -821,7 +827,7 @@
           <a:p>
             <a:fld id="{69E8F881-5088-4687-AB6A-7968DC3F49CA}" type="datetimeFigureOut">
               <a:rPr lang="en-GB" smtClean="0"/>
-              <a:t>30/11/2025</a:t>
+              <a:t>09/12/2025</a:t>
             </a:fld>
             <a:endParaRPr lang="en-GB"/>
           </a:p>
@@ -1067,7 +1073,7 @@
           <a:p>
             <a:fld id="{69E8F881-5088-4687-AB6A-7968DC3F49CA}" type="datetimeFigureOut">
               <a:rPr lang="en-GB" smtClean="0"/>
-              <a:t>30/11/2025</a:t>
+              <a:t>09/12/2025</a:t>
             </a:fld>
             <a:endParaRPr lang="en-GB"/>
           </a:p>
@@ -1355,7 +1361,7 @@
           <a:p>
             <a:fld id="{69E8F881-5088-4687-AB6A-7968DC3F49CA}" type="datetimeFigureOut">
               <a:rPr lang="en-GB" smtClean="0"/>
-              <a:t>30/11/2025</a:t>
+              <a:t>09/12/2025</a:t>
             </a:fld>
             <a:endParaRPr lang="en-GB"/>
           </a:p>
@@ -1777,7 +1783,7 @@
           <a:p>
             <a:fld id="{69E8F881-5088-4687-AB6A-7968DC3F49CA}" type="datetimeFigureOut">
               <a:rPr lang="en-GB" smtClean="0"/>
-              <a:t>30/11/2025</a:t>
+              <a:t>09/12/2025</a:t>
             </a:fld>
             <a:endParaRPr lang="en-GB"/>
           </a:p>
@@ -1895,7 +1901,7 @@
           <a:p>
             <a:fld id="{69E8F881-5088-4687-AB6A-7968DC3F49CA}" type="datetimeFigureOut">
               <a:rPr lang="en-GB" smtClean="0"/>
-              <a:t>30/11/2025</a:t>
+              <a:t>09/12/2025</a:t>
             </a:fld>
             <a:endParaRPr lang="en-GB"/>
           </a:p>
@@ -1990,7 +1996,7 @@
           <a:p>
             <a:fld id="{69E8F881-5088-4687-AB6A-7968DC3F49CA}" type="datetimeFigureOut">
               <a:rPr lang="en-GB" smtClean="0"/>
-              <a:t>30/11/2025</a:t>
+              <a:t>09/12/2025</a:t>
             </a:fld>
             <a:endParaRPr lang="en-GB"/>
           </a:p>
@@ -2267,7 +2273,7 @@
           <a:p>
             <a:fld id="{69E8F881-5088-4687-AB6A-7968DC3F49CA}" type="datetimeFigureOut">
               <a:rPr lang="en-GB" smtClean="0"/>
-              <a:t>30/11/2025</a:t>
+              <a:t>09/12/2025</a:t>
             </a:fld>
             <a:endParaRPr lang="en-GB"/>
           </a:p>
@@ -2520,7 +2526,7 @@
           <a:p>
             <a:fld id="{69E8F881-5088-4687-AB6A-7968DC3F49CA}" type="datetimeFigureOut">
               <a:rPr lang="en-GB" smtClean="0"/>
-              <a:t>30/11/2025</a:t>
+              <a:t>09/12/2025</a:t>
             </a:fld>
             <a:endParaRPr lang="en-GB"/>
           </a:p>
@@ -2733,7 +2739,7 @@
           <a:p>
             <a:fld id="{69E8F881-5088-4687-AB6A-7968DC3F49CA}" type="datetimeFigureOut">
               <a:rPr lang="en-GB" smtClean="0"/>
-              <a:t>30/11/2025</a:t>
+              <a:t>09/12/2025</a:t>
             </a:fld>
             <a:endParaRPr lang="en-GB"/>
           </a:p>
@@ -3199,11 +3205,7 @@
           <a:p>
             <a:r>
               <a:rPr lang="hu-HU" dirty="0" smtClean="0"/>
-              <a:t>December 2, </a:t>
-            </a:r>
-            <a:r>
-              <a:rPr lang="hu-HU" dirty="0" smtClean="0"/>
-              <a:t>2025</a:t>
+              <a:t>December 2, 2025</a:t>
             </a:r>
           </a:p>
           <a:p>
@@ -4565,7 +4567,7 @@
               <a:t> a </a:t>
             </a:r>
             <a:r>
-              <a:rPr lang="hu-HU" dirty="0" err="1" smtClean="0"/>
+              <a:rPr lang="hu-HU" b="1" dirty="0" err="1" smtClean="0"/>
               <a:t>bidirectional</a:t>
             </a:r>
             <a:r>
@@ -4653,71 +4655,71 @@
               <a:t>, </a:t>
             </a:r>
             <a:r>
-              <a:rPr lang="hu-HU" dirty="0" err="1" smtClean="0"/>
+              <a:rPr lang="hu-HU" b="1" dirty="0" err="1" smtClean="0"/>
               <a:t>the</a:t>
             </a:r>
             <a:r>
-              <a:rPr lang="hu-HU" dirty="0" smtClean="0"/>
-              <a:t> </a:t>
-            </a:r>
-            <a:r>
-              <a:rPr lang="hu-HU" dirty="0" err="1" smtClean="0"/>
+              <a:rPr lang="hu-HU" b="1" dirty="0" smtClean="0"/>
+              <a:t> </a:t>
+            </a:r>
+            <a:r>
+              <a:rPr lang="hu-HU" b="1" dirty="0" err="1" smtClean="0"/>
               <a:t>word</a:t>
             </a:r>
             <a:r>
-              <a:rPr lang="hu-HU" dirty="0" smtClean="0"/>
-              <a:t> </a:t>
-            </a:r>
-            <a:r>
-              <a:rPr lang="hu-HU" dirty="0" err="1" smtClean="0"/>
+              <a:rPr lang="hu-HU" b="1" dirty="0" smtClean="0"/>
+              <a:t> </a:t>
+            </a:r>
+            <a:r>
+              <a:rPr lang="hu-HU" b="1" dirty="0" err="1" smtClean="0"/>
               <a:t>in</a:t>
             </a:r>
             <a:r>
-              <a:rPr lang="hu-HU" dirty="0" smtClean="0"/>
-              <a:t> </a:t>
-            </a:r>
-            <a:r>
-              <a:rPr lang="hu-HU" dirty="0" err="1" smtClean="0"/>
+              <a:rPr lang="hu-HU" b="1" dirty="0" smtClean="0"/>
+              <a:t> </a:t>
+            </a:r>
+            <a:r>
+              <a:rPr lang="hu-HU" b="1" dirty="0" err="1" smtClean="0"/>
               <a:t>the</a:t>
             </a:r>
             <a:r>
-              <a:rPr lang="hu-HU" dirty="0" smtClean="0"/>
-              <a:t> </a:t>
-            </a:r>
-            <a:r>
-              <a:rPr lang="hu-HU" dirty="0" err="1" smtClean="0"/>
+              <a:rPr lang="hu-HU" b="1" dirty="0" smtClean="0"/>
+              <a:t> </a:t>
+            </a:r>
+            <a:r>
+              <a:rPr lang="hu-HU" b="1" dirty="0" err="1" smtClean="0"/>
               <a:t>middle</a:t>
             </a:r>
             <a:r>
-              <a:rPr lang="hu-HU" dirty="0" smtClean="0"/>
-              <a:t> </a:t>
-            </a:r>
-            <a:r>
-              <a:rPr lang="hu-HU" dirty="0" err="1" smtClean="0"/>
+              <a:rPr lang="hu-HU" b="1" dirty="0" smtClean="0"/>
+              <a:t> </a:t>
+            </a:r>
+            <a:r>
+              <a:rPr lang="hu-HU" b="1" dirty="0" err="1" smtClean="0"/>
               <a:t>can</a:t>
             </a:r>
             <a:r>
-              <a:rPr lang="hu-HU" dirty="0" smtClean="0"/>
+              <a:rPr lang="hu-HU" b="1" dirty="0" smtClean="0"/>
               <a:t> be </a:t>
             </a:r>
             <a:r>
-              <a:rPr lang="hu-HU" dirty="0" err="1" smtClean="0"/>
+              <a:rPr lang="hu-HU" b="1" dirty="0" err="1" smtClean="0"/>
               <a:t>predicted</a:t>
             </a:r>
             <a:r>
-              <a:rPr lang="hu-HU" dirty="0" smtClean="0"/>
-              <a:t> </a:t>
-            </a:r>
-            <a:r>
-              <a:rPr lang="hu-HU" dirty="0" err="1" smtClean="0"/>
+              <a:rPr lang="hu-HU" b="1" dirty="0" smtClean="0"/>
+              <a:t> </a:t>
+            </a:r>
+            <a:r>
+              <a:rPr lang="hu-HU" b="1" dirty="0" err="1" smtClean="0"/>
               <a:t>much</a:t>
             </a:r>
             <a:r>
-              <a:rPr lang="hu-HU" dirty="0" smtClean="0"/>
+              <a:rPr lang="hu-HU" b="1" dirty="0" smtClean="0"/>
               <a:t> more </a:t>
             </a:r>
             <a:r>
-              <a:rPr lang="hu-HU" dirty="0" err="1" smtClean="0"/>
+              <a:rPr lang="hu-HU" b="1" dirty="0" err="1" smtClean="0"/>
               <a:t>reliably</a:t>
             </a:r>
             <a:r>
@@ -9194,6 +9196,5378 @@
 </p:sld>
 </file>
 
+<file path=ppt/slides/slide15.xml><?xml version="1.0" encoding="utf-8"?>
+<p:sld xmlns:a="http://schemas.openxmlformats.org/drawingml/2006/main" xmlns:r="http://schemas.openxmlformats.org/officeDocument/2006/relationships" xmlns:p="http://schemas.openxmlformats.org/presentationml/2006/main">
+  <p:cSld>
+    <p:spTree>
+      <p:nvGrpSpPr>
+        <p:cNvPr id="1" name=""/>
+        <p:cNvGrpSpPr/>
+        <p:nvPr/>
+      </p:nvGrpSpPr>
+      <p:grpSpPr>
+        <a:xfrm>
+          <a:off x="0" y="0"/>
+          <a:ext cx="0" cy="0"/>
+          <a:chOff x="0" y="0"/>
+          <a:chExt cx="0" cy="0"/>
+        </a:xfrm>
+      </p:grpSpPr>
+      <p:sp>
+        <p:nvSpPr>
+          <p:cNvPr id="2" name="Cím 1"/>
+          <p:cNvSpPr>
+            <a:spLocks noGrp="1"/>
+          </p:cNvSpPr>
+          <p:nvPr>
+            <p:ph type="title"/>
+          </p:nvPr>
+        </p:nvSpPr>
+        <p:spPr/>
+        <p:txBody>
+          <a:bodyPr/>
+          <a:lstStyle/>
+          <a:p>
+            <a:r>
+              <a:rPr lang="hu-HU" dirty="0" err="1" smtClean="0"/>
+              <a:t>Transformer</a:t>
+            </a:r>
+            <a:r>
+              <a:rPr lang="hu-HU" dirty="0" smtClean="0"/>
+              <a:t> </a:t>
+            </a:r>
+            <a:r>
+              <a:rPr lang="hu-HU" dirty="0" err="1" smtClean="0"/>
+              <a:t>Pipelines</a:t>
+            </a:r>
+            <a:endParaRPr lang="en-GB" dirty="0"/>
+          </a:p>
+        </p:txBody>
+      </p:sp>
+      <p:sp>
+        <p:nvSpPr>
+          <p:cNvPr id="3" name="Tartalom helye 2"/>
+          <p:cNvSpPr>
+            <a:spLocks noGrp="1"/>
+          </p:cNvSpPr>
+          <p:nvPr>
+            <p:ph idx="1"/>
+          </p:nvPr>
+        </p:nvSpPr>
+        <p:spPr/>
+        <p:txBody>
+          <a:bodyPr>
+            <a:normAutofit fontScale="62500" lnSpcReduction="20000"/>
+          </a:bodyPr>
+          <a:lstStyle/>
+          <a:p>
+            <a:r>
+              <a:rPr lang="hu-HU" dirty="0" smtClean="0"/>
+              <a:t>The </a:t>
+            </a:r>
+            <a:r>
+              <a:rPr lang="hu-HU" dirty="0" err="1" smtClean="0"/>
+              <a:t>HF</a:t>
+            </a:r>
+            <a:r>
+              <a:rPr lang="hu-HU" dirty="0" smtClean="0"/>
+              <a:t> </a:t>
+            </a:r>
+            <a:r>
+              <a:rPr lang="hu-HU" dirty="0" err="1" smtClean="0"/>
+              <a:t>transformers</a:t>
+            </a:r>
+            <a:r>
+              <a:rPr lang="hu-HU" dirty="0" smtClean="0"/>
+              <a:t> </a:t>
+            </a:r>
+            <a:r>
+              <a:rPr lang="hu-HU" dirty="0" err="1" smtClean="0"/>
+              <a:t>library</a:t>
+            </a:r>
+            <a:r>
+              <a:rPr lang="hu-HU" dirty="0" smtClean="0"/>
+              <a:t> </a:t>
+            </a:r>
+            <a:r>
+              <a:rPr lang="hu-HU" dirty="0" err="1" smtClean="0"/>
+              <a:t>contains</a:t>
+            </a:r>
+            <a:r>
+              <a:rPr lang="hu-HU" dirty="0" smtClean="0"/>
+              <a:t> </a:t>
+            </a:r>
+            <a:r>
+              <a:rPr lang="hu-HU" dirty="0" err="1" smtClean="0"/>
+              <a:t>tool</a:t>
+            </a:r>
+            <a:r>
+              <a:rPr lang="hu-HU" dirty="0" smtClean="0"/>
+              <a:t> </a:t>
+            </a:r>
+            <a:r>
+              <a:rPr lang="hu-HU" dirty="0" err="1" smtClean="0"/>
+              <a:t>that</a:t>
+            </a:r>
+            <a:r>
+              <a:rPr lang="hu-HU" dirty="0" smtClean="0"/>
+              <a:t> </a:t>
+            </a:r>
+            <a:r>
+              <a:rPr lang="hu-HU" dirty="0" err="1" smtClean="0"/>
+              <a:t>sets</a:t>
+            </a:r>
+            <a:r>
+              <a:rPr lang="hu-HU" dirty="0" smtClean="0"/>
+              <a:t> </a:t>
+            </a:r>
+            <a:r>
+              <a:rPr lang="hu-HU" dirty="0" err="1" smtClean="0"/>
+              <a:t>up</a:t>
+            </a:r>
+            <a:r>
+              <a:rPr lang="hu-HU" dirty="0" smtClean="0"/>
+              <a:t> input and output </a:t>
+            </a:r>
+            <a:r>
+              <a:rPr lang="hu-HU" dirty="0" err="1" smtClean="0"/>
+              <a:t>processing</a:t>
+            </a:r>
+            <a:r>
+              <a:rPr lang="hu-HU" dirty="0" smtClean="0"/>
+              <a:t> </a:t>
+            </a:r>
+            <a:r>
+              <a:rPr lang="hu-HU" dirty="0" err="1" smtClean="0"/>
+              <a:t>according</a:t>
+            </a:r>
+            <a:r>
+              <a:rPr lang="hu-HU" dirty="0" smtClean="0"/>
+              <a:t> </a:t>
+            </a:r>
+            <a:r>
+              <a:rPr lang="hu-HU" dirty="0" err="1" smtClean="0"/>
+              <a:t>to</a:t>
+            </a:r>
+            <a:r>
+              <a:rPr lang="hu-HU" dirty="0" smtClean="0"/>
+              <a:t> </a:t>
+            </a:r>
+            <a:r>
+              <a:rPr lang="hu-HU" dirty="0" err="1" smtClean="0"/>
+              <a:t>the</a:t>
+            </a:r>
+            <a:r>
+              <a:rPr lang="hu-HU" dirty="0" smtClean="0"/>
+              <a:t> </a:t>
+            </a:r>
+            <a:r>
+              <a:rPr lang="hu-HU" dirty="0" err="1" smtClean="0"/>
+              <a:t>transfer</a:t>
+            </a:r>
+            <a:r>
+              <a:rPr lang="hu-HU" dirty="0" smtClean="0"/>
+              <a:t> </a:t>
+            </a:r>
+            <a:r>
+              <a:rPr lang="hu-HU" dirty="0" err="1" smtClean="0"/>
+              <a:t>learning</a:t>
+            </a:r>
+            <a:r>
+              <a:rPr lang="hu-HU" dirty="0" smtClean="0"/>
+              <a:t> </a:t>
+            </a:r>
+            <a:r>
+              <a:rPr lang="hu-HU" dirty="0" err="1" smtClean="0"/>
+              <a:t>task</a:t>
+            </a:r>
+            <a:r>
+              <a:rPr lang="hu-HU" dirty="0" smtClean="0"/>
+              <a:t> </a:t>
+            </a:r>
+            <a:r>
+              <a:rPr lang="hu-HU" dirty="0" err="1" smtClean="0"/>
+              <a:t>that</a:t>
+            </a:r>
+            <a:r>
+              <a:rPr lang="hu-HU" dirty="0" smtClean="0"/>
+              <a:t> </a:t>
+            </a:r>
+            <a:r>
+              <a:rPr lang="hu-HU" dirty="0" err="1" smtClean="0"/>
+              <a:t>the</a:t>
+            </a:r>
+            <a:r>
+              <a:rPr lang="hu-HU" dirty="0" smtClean="0"/>
+              <a:t> </a:t>
+            </a:r>
+            <a:r>
+              <a:rPr lang="hu-HU" dirty="0" err="1" smtClean="0"/>
+              <a:t>specific</a:t>
+            </a:r>
+            <a:r>
+              <a:rPr lang="hu-HU" dirty="0" smtClean="0"/>
+              <a:t> </a:t>
+            </a:r>
+            <a:r>
+              <a:rPr lang="hu-HU" dirty="0" err="1" smtClean="0"/>
+              <a:t>model</a:t>
+            </a:r>
+            <a:r>
+              <a:rPr lang="hu-HU" dirty="0" smtClean="0"/>
+              <a:t> has </a:t>
+            </a:r>
+            <a:r>
+              <a:rPr lang="hu-HU" dirty="0" err="1" smtClean="0"/>
+              <a:t>been</a:t>
+            </a:r>
+            <a:r>
+              <a:rPr lang="hu-HU" dirty="0" smtClean="0"/>
+              <a:t> </a:t>
+            </a:r>
+            <a:r>
+              <a:rPr lang="hu-HU" dirty="0" err="1" smtClean="0"/>
+              <a:t>pre-trained</a:t>
+            </a:r>
+            <a:r>
+              <a:rPr lang="hu-HU" dirty="0" smtClean="0"/>
+              <a:t> and </a:t>
+            </a:r>
+            <a:r>
+              <a:rPr lang="hu-HU" dirty="0" err="1" smtClean="0"/>
+              <a:t>fine-tuned</a:t>
+            </a:r>
+            <a:r>
+              <a:rPr lang="hu-HU" dirty="0" smtClean="0"/>
+              <a:t> </a:t>
+            </a:r>
+            <a:r>
+              <a:rPr lang="hu-HU" dirty="0" err="1" smtClean="0"/>
+              <a:t>on</a:t>
+            </a:r>
+            <a:r>
+              <a:rPr lang="hu-HU" dirty="0" smtClean="0"/>
+              <a:t>:</a:t>
+            </a:r>
+          </a:p>
+          <a:p>
+            <a:pPr lvl="1"/>
+            <a:r>
+              <a:rPr lang="hu-HU" dirty="0" smtClean="0"/>
+              <a:t>a </a:t>
+            </a:r>
+            <a:r>
+              <a:rPr lang="hu-HU" b="1" dirty="0" err="1" smtClean="0"/>
+              <a:t>base</a:t>
+            </a:r>
+            <a:r>
+              <a:rPr lang="hu-HU" b="1" dirty="0" smtClean="0"/>
+              <a:t> </a:t>
+            </a:r>
+            <a:r>
+              <a:rPr lang="hu-HU" b="1" dirty="0" err="1" smtClean="0"/>
+              <a:t>class</a:t>
+            </a:r>
+            <a:r>
+              <a:rPr lang="hu-HU" b="1" dirty="0" smtClean="0"/>
+              <a:t> </a:t>
+            </a:r>
+            <a:r>
+              <a:rPr lang="hu-HU" dirty="0" err="1" smtClean="0">
+                <a:latin typeface="Courier New" panose="02070309020205020404" pitchFamily="49" charset="0"/>
+                <a:cs typeface="Courier New" panose="02070309020205020404" pitchFamily="49" charset="0"/>
+              </a:rPr>
+              <a:t>Pipeline</a:t>
+            </a:r>
+            <a:endParaRPr lang="hu-HU" dirty="0" smtClean="0">
+              <a:latin typeface="Courier New" panose="02070309020205020404" pitchFamily="49" charset="0"/>
+              <a:cs typeface="Courier New" panose="02070309020205020404" pitchFamily="49" charset="0"/>
+            </a:endParaRPr>
+          </a:p>
+          <a:p>
+            <a:pPr lvl="1"/>
+            <a:r>
+              <a:rPr lang="hu-HU" dirty="0" err="1" smtClean="0"/>
+              <a:t>numerous</a:t>
+            </a:r>
+            <a:r>
+              <a:rPr lang="hu-HU" dirty="0" smtClean="0"/>
+              <a:t> </a:t>
+            </a:r>
+            <a:r>
+              <a:rPr lang="hu-HU" dirty="0" err="1" smtClean="0"/>
+              <a:t>subclasses</a:t>
+            </a:r>
+            <a:r>
+              <a:rPr lang="hu-HU" dirty="0" smtClean="0"/>
+              <a:t> of </a:t>
+            </a:r>
+            <a:r>
+              <a:rPr lang="hu-HU" dirty="0" err="1" smtClean="0">
+                <a:latin typeface="Courier New" panose="02070309020205020404" pitchFamily="49" charset="0"/>
+                <a:cs typeface="Courier New" panose="02070309020205020404" pitchFamily="49" charset="0"/>
+              </a:rPr>
+              <a:t>Pipeline</a:t>
+            </a:r>
+            <a:r>
+              <a:rPr lang="hu-HU" dirty="0" smtClean="0"/>
+              <a:t> </a:t>
+            </a:r>
+            <a:r>
+              <a:rPr lang="hu-HU" dirty="0" err="1" smtClean="0"/>
+              <a:t>for</a:t>
+            </a:r>
+            <a:r>
+              <a:rPr lang="hu-HU" dirty="0" smtClean="0"/>
+              <a:t> </a:t>
+            </a:r>
+            <a:r>
+              <a:rPr lang="hu-HU" dirty="0" err="1" smtClean="0"/>
+              <a:t>processing</a:t>
+            </a:r>
+            <a:r>
+              <a:rPr lang="hu-HU" dirty="0" smtClean="0"/>
+              <a:t> </a:t>
+            </a:r>
+            <a:r>
+              <a:rPr lang="hu-HU" dirty="0" err="1" smtClean="0"/>
+              <a:t>different</a:t>
+            </a:r>
+            <a:r>
+              <a:rPr lang="hu-HU" dirty="0" smtClean="0"/>
+              <a:t> </a:t>
+            </a:r>
+            <a:r>
+              <a:rPr lang="hu-HU" dirty="0" err="1" smtClean="0"/>
+              <a:t>modalities</a:t>
+            </a:r>
+            <a:r>
+              <a:rPr lang="hu-HU" dirty="0" smtClean="0"/>
+              <a:t>:</a:t>
+            </a:r>
+          </a:p>
+          <a:p>
+            <a:pPr lvl="2"/>
+            <a:r>
+              <a:rPr lang="hu-HU" dirty="0" err="1" smtClean="0"/>
+              <a:t>audio</a:t>
+            </a:r>
+            <a:r>
+              <a:rPr lang="hu-HU" dirty="0" smtClean="0"/>
+              <a:t>, </a:t>
+            </a:r>
+            <a:r>
+              <a:rPr lang="hu-HU" dirty="0" err="1" smtClean="0"/>
+              <a:t>e.g</a:t>
+            </a:r>
+            <a:r>
+              <a:rPr lang="hu-HU" dirty="0" smtClean="0"/>
+              <a:t>. </a:t>
+            </a:r>
+            <a:r>
+              <a:rPr lang="en-GB" dirty="0" err="1" smtClean="0">
+                <a:latin typeface="Courier New" panose="02070309020205020404" pitchFamily="49" charset="0"/>
+                <a:cs typeface="Courier New" panose="02070309020205020404" pitchFamily="49" charset="0"/>
+              </a:rPr>
+              <a:t>AutomaticSpeechRecognitionPipeline</a:t>
+            </a:r>
+            <a:r>
+              <a:rPr lang="hu-HU" dirty="0" smtClean="0"/>
+              <a:t>, </a:t>
+            </a:r>
+            <a:r>
+              <a:rPr lang="en-GB" dirty="0" err="1">
+                <a:latin typeface="Courier New" panose="02070309020205020404" pitchFamily="49" charset="0"/>
+                <a:cs typeface="Courier New" panose="02070309020205020404" pitchFamily="49" charset="0"/>
+              </a:rPr>
+              <a:t>TextToAudioPipeline</a:t>
+            </a:r>
+            <a:endParaRPr lang="en-GB" dirty="0">
+              <a:latin typeface="Courier New" panose="02070309020205020404" pitchFamily="49" charset="0"/>
+              <a:cs typeface="Courier New" panose="02070309020205020404" pitchFamily="49" charset="0"/>
+            </a:endParaRPr>
+          </a:p>
+          <a:p>
+            <a:pPr lvl="2"/>
+            <a:r>
+              <a:rPr lang="hu-HU" dirty="0" smtClean="0"/>
+              <a:t>computer </a:t>
+            </a:r>
+            <a:r>
+              <a:rPr lang="hu-HU" dirty="0" err="1" smtClean="0"/>
+              <a:t>vision</a:t>
+            </a:r>
+            <a:r>
+              <a:rPr lang="hu-HU" dirty="0" smtClean="0"/>
+              <a:t>, </a:t>
+            </a:r>
+            <a:r>
+              <a:rPr lang="hu-HU" dirty="0" err="1" smtClean="0"/>
+              <a:t>e.g</a:t>
+            </a:r>
+            <a:r>
+              <a:rPr lang="hu-HU" dirty="0" smtClean="0"/>
+              <a:t>. </a:t>
+            </a:r>
+            <a:r>
+              <a:rPr lang="en-GB" dirty="0" err="1" smtClean="0">
+                <a:latin typeface="Courier New" panose="02070309020205020404" pitchFamily="49" charset="0"/>
+                <a:cs typeface="Courier New" panose="02070309020205020404" pitchFamily="49" charset="0"/>
+              </a:rPr>
+              <a:t>ImageClassificationPipeline</a:t>
+            </a:r>
+            <a:r>
+              <a:rPr lang="hu-HU" dirty="0" smtClean="0"/>
+              <a:t>, </a:t>
+            </a:r>
+            <a:r>
+              <a:rPr lang="en-GB" dirty="0" err="1" smtClean="0">
+                <a:latin typeface="Courier New" panose="02070309020205020404" pitchFamily="49" charset="0"/>
+                <a:cs typeface="Courier New" panose="02070309020205020404" pitchFamily="49" charset="0"/>
+              </a:rPr>
+              <a:t>ObjectDetectionPipeline</a:t>
+            </a:r>
+            <a:endParaRPr lang="hu-HU" dirty="0">
+              <a:latin typeface="Courier New" panose="02070309020205020404" pitchFamily="49" charset="0"/>
+              <a:cs typeface="Courier New" panose="02070309020205020404" pitchFamily="49" charset="0"/>
+            </a:endParaRPr>
+          </a:p>
+          <a:p>
+            <a:pPr lvl="2"/>
+            <a:r>
+              <a:rPr lang="hu-HU" b="1" dirty="0" err="1" smtClean="0"/>
+              <a:t>NLP</a:t>
+            </a:r>
+            <a:r>
+              <a:rPr lang="hu-HU" dirty="0" smtClean="0"/>
+              <a:t>, </a:t>
+            </a:r>
+            <a:r>
+              <a:rPr lang="hu-HU" dirty="0" err="1" smtClean="0"/>
+              <a:t>e.g</a:t>
+            </a:r>
+            <a:r>
+              <a:rPr lang="hu-HU" dirty="0" smtClean="0"/>
+              <a:t>. </a:t>
+            </a:r>
+            <a:r>
+              <a:rPr lang="en-GB" dirty="0" err="1" smtClean="0">
+                <a:latin typeface="Courier New" panose="02070309020205020404" pitchFamily="49" charset="0"/>
+                <a:cs typeface="Courier New" panose="02070309020205020404" pitchFamily="49" charset="0"/>
+              </a:rPr>
+              <a:t>FillMaskPipeline</a:t>
+            </a:r>
+            <a:r>
+              <a:rPr lang="hu-HU" dirty="0" smtClean="0"/>
+              <a:t>, </a:t>
+            </a:r>
+            <a:r>
+              <a:rPr lang="en-GB" dirty="0" err="1" smtClean="0">
+                <a:latin typeface="Courier New" panose="02070309020205020404" pitchFamily="49" charset="0"/>
+                <a:cs typeface="Courier New" panose="02070309020205020404" pitchFamily="49" charset="0"/>
+              </a:rPr>
+              <a:t>QuestionAnsweringPipeline</a:t>
+            </a:r>
+            <a:r>
+              <a:rPr lang="hu-HU" dirty="0" smtClean="0"/>
+              <a:t>, </a:t>
+            </a:r>
+            <a:r>
+              <a:rPr lang="en-GB" dirty="0" err="1" smtClean="0">
+                <a:latin typeface="Courier New" panose="02070309020205020404" pitchFamily="49" charset="0"/>
+                <a:cs typeface="Courier New" panose="02070309020205020404" pitchFamily="49" charset="0"/>
+              </a:rPr>
+              <a:t>TextClassificationPipeline</a:t>
+            </a:r>
+            <a:endParaRPr lang="hu-HU" dirty="0" smtClean="0">
+              <a:latin typeface="Courier New" panose="02070309020205020404" pitchFamily="49" charset="0"/>
+              <a:cs typeface="Courier New" panose="02070309020205020404" pitchFamily="49" charset="0"/>
+            </a:endParaRPr>
+          </a:p>
+          <a:p>
+            <a:pPr lvl="2"/>
+            <a:r>
+              <a:rPr lang="hu-HU" dirty="0" err="1" smtClean="0"/>
+              <a:t>multimodal</a:t>
+            </a:r>
+            <a:r>
+              <a:rPr lang="hu-HU" dirty="0" smtClean="0"/>
+              <a:t>, </a:t>
+            </a:r>
+            <a:r>
+              <a:rPr lang="hu-HU" dirty="0" err="1" smtClean="0"/>
+              <a:t>e.g</a:t>
+            </a:r>
+            <a:r>
+              <a:rPr lang="hu-HU" dirty="0" smtClean="0"/>
+              <a:t>. </a:t>
+            </a:r>
+            <a:r>
+              <a:rPr lang="en-GB" dirty="0" err="1" smtClean="0">
+                <a:latin typeface="Courier New" panose="02070309020205020404" pitchFamily="49" charset="0"/>
+                <a:cs typeface="Courier New" panose="02070309020205020404" pitchFamily="49" charset="0"/>
+              </a:rPr>
+              <a:t>ImageToTextPipeline</a:t>
+            </a:r>
+            <a:r>
+              <a:rPr lang="hu-HU" dirty="0" smtClean="0"/>
+              <a:t>, </a:t>
+            </a:r>
+            <a:r>
+              <a:rPr lang="en-GB" dirty="0" err="1" smtClean="0">
+                <a:latin typeface="Courier New" panose="02070309020205020404" pitchFamily="49" charset="0"/>
+                <a:cs typeface="Courier New" panose="02070309020205020404" pitchFamily="49" charset="0"/>
+              </a:rPr>
+              <a:t>VisualQuestionAnsweringPipeline</a:t>
+            </a:r>
+            <a:endParaRPr lang="hu-HU" dirty="0" smtClean="0">
+              <a:latin typeface="Courier New" panose="02070309020205020404" pitchFamily="49" charset="0"/>
+              <a:cs typeface="Courier New" panose="02070309020205020404" pitchFamily="49" charset="0"/>
+            </a:endParaRPr>
+          </a:p>
+          <a:p>
+            <a:pPr lvl="1"/>
+            <a:r>
+              <a:rPr lang="hu-HU" dirty="0" smtClean="0"/>
+              <a:t>a </a:t>
+            </a:r>
+            <a:r>
+              <a:rPr lang="hu-HU" b="1" dirty="0" err="1" smtClean="0"/>
+              <a:t>factory</a:t>
+            </a:r>
+            <a:r>
+              <a:rPr lang="hu-HU" b="1" dirty="0" smtClean="0"/>
+              <a:t> </a:t>
+            </a:r>
+            <a:r>
+              <a:rPr lang="hu-HU" b="1" dirty="0" err="1" smtClean="0"/>
+              <a:t>function</a:t>
+            </a:r>
+            <a:r>
+              <a:rPr lang="hu-HU" b="1" dirty="0" smtClean="0"/>
+              <a:t> </a:t>
+            </a:r>
+            <a:r>
+              <a:rPr lang="hu-HU" dirty="0" err="1" smtClean="0"/>
+              <a:t>called</a:t>
+            </a:r>
+            <a:r>
+              <a:rPr lang="hu-HU" dirty="0" smtClean="0"/>
+              <a:t> </a:t>
+            </a:r>
+            <a:r>
+              <a:rPr lang="hu-HU" dirty="0" err="1" smtClean="0">
+                <a:latin typeface="Courier New" panose="02070309020205020404" pitchFamily="49" charset="0"/>
+                <a:cs typeface="Courier New" panose="02070309020205020404" pitchFamily="49" charset="0"/>
+              </a:rPr>
+              <a:t>pipeline</a:t>
+            </a:r>
+            <a:r>
+              <a:rPr lang="hu-HU" dirty="0" smtClean="0"/>
+              <a:t> </a:t>
+            </a:r>
+            <a:r>
+              <a:rPr lang="hu-HU" dirty="0" err="1" smtClean="0"/>
+              <a:t>that</a:t>
+            </a:r>
+            <a:r>
+              <a:rPr lang="hu-HU" dirty="0" smtClean="0"/>
+              <a:t> </a:t>
+            </a:r>
+            <a:r>
+              <a:rPr lang="hu-HU" dirty="0" err="1" smtClean="0"/>
+              <a:t>instantiates</a:t>
+            </a:r>
+            <a:r>
+              <a:rPr lang="hu-HU" dirty="0" smtClean="0"/>
+              <a:t> and </a:t>
+            </a:r>
+            <a:r>
+              <a:rPr lang="hu-HU" dirty="0" err="1" smtClean="0"/>
+              <a:t>returns</a:t>
+            </a:r>
+            <a:r>
+              <a:rPr lang="hu-HU" dirty="0" smtClean="0"/>
+              <a:t> a </a:t>
+            </a:r>
+            <a:r>
+              <a:rPr lang="hu-HU" dirty="0" err="1" smtClean="0"/>
+              <a:t>pipeline</a:t>
+            </a:r>
+            <a:r>
+              <a:rPr lang="hu-HU" dirty="0" smtClean="0"/>
+              <a:t> </a:t>
+            </a:r>
+            <a:r>
+              <a:rPr lang="hu-HU" dirty="0" err="1" smtClean="0"/>
+              <a:t>object</a:t>
+            </a:r>
+            <a:r>
+              <a:rPr lang="hu-HU" dirty="0" smtClean="0"/>
+              <a:t> of </a:t>
+            </a:r>
+            <a:r>
+              <a:rPr lang="hu-HU" dirty="0" err="1" smtClean="0"/>
+              <a:t>the</a:t>
+            </a:r>
+            <a:r>
+              <a:rPr lang="hu-HU" dirty="0" smtClean="0"/>
+              <a:t> </a:t>
+            </a:r>
+            <a:r>
+              <a:rPr lang="hu-HU" dirty="0" err="1" smtClean="0"/>
+              <a:t>correct</a:t>
+            </a:r>
+            <a:r>
+              <a:rPr lang="hu-HU" dirty="0" smtClean="0"/>
+              <a:t> </a:t>
+            </a:r>
+            <a:r>
+              <a:rPr lang="hu-HU" dirty="0" err="1" smtClean="0"/>
+              <a:t>class</a:t>
+            </a:r>
+            <a:endParaRPr lang="hu-HU" dirty="0" smtClean="0"/>
+          </a:p>
+          <a:p>
+            <a:pPr lvl="2"/>
+            <a:r>
+              <a:rPr lang="hu-HU" dirty="0" err="1" smtClean="0"/>
+              <a:t>based</a:t>
+            </a:r>
+            <a:r>
+              <a:rPr lang="hu-HU" dirty="0" smtClean="0"/>
+              <a:t> </a:t>
+            </a:r>
+            <a:r>
+              <a:rPr lang="hu-HU" dirty="0" err="1" smtClean="0"/>
+              <a:t>on</a:t>
+            </a:r>
+            <a:r>
+              <a:rPr lang="hu-HU" dirty="0" smtClean="0"/>
+              <a:t> </a:t>
+            </a:r>
+            <a:r>
+              <a:rPr lang="hu-HU" dirty="0" err="1" smtClean="0"/>
+              <a:t>the</a:t>
+            </a:r>
+            <a:r>
+              <a:rPr lang="hu-HU" dirty="0" smtClean="0"/>
+              <a:t> </a:t>
+            </a:r>
+            <a:r>
+              <a:rPr lang="hu-HU" dirty="0" err="1" smtClean="0">
+                <a:latin typeface="Courier New" panose="02070309020205020404" pitchFamily="49" charset="0"/>
+                <a:cs typeface="Courier New" panose="02070309020205020404" pitchFamily="49" charset="0"/>
+              </a:rPr>
+              <a:t>task</a:t>
+            </a:r>
+            <a:r>
+              <a:rPr lang="hu-HU" dirty="0" smtClean="0"/>
+              <a:t> </a:t>
+            </a:r>
+            <a:r>
+              <a:rPr lang="hu-HU" dirty="0" err="1" smtClean="0"/>
+              <a:t>argument</a:t>
+            </a:r>
+            <a:r>
+              <a:rPr lang="hu-HU" dirty="0" smtClean="0"/>
+              <a:t> </a:t>
+            </a:r>
+            <a:r>
+              <a:rPr lang="hu-HU" dirty="0" err="1" smtClean="0"/>
+              <a:t>specified</a:t>
+            </a:r>
+            <a:r>
+              <a:rPr lang="hu-HU" dirty="0" smtClean="0"/>
+              <a:t> </a:t>
+            </a:r>
+            <a:r>
+              <a:rPr lang="hu-HU" dirty="0" err="1" smtClean="0"/>
+              <a:t>by</a:t>
+            </a:r>
+            <a:r>
+              <a:rPr lang="hu-HU" dirty="0" smtClean="0"/>
+              <a:t> </a:t>
+            </a:r>
+            <a:r>
+              <a:rPr lang="hu-HU" dirty="0" err="1" smtClean="0"/>
+              <a:t>the</a:t>
+            </a:r>
+            <a:r>
+              <a:rPr lang="hu-HU" dirty="0" smtClean="0"/>
+              <a:t> </a:t>
+            </a:r>
+            <a:r>
+              <a:rPr lang="hu-HU" dirty="0" err="1" smtClean="0"/>
+              <a:t>user</a:t>
+            </a:r>
+            <a:r>
+              <a:rPr lang="hu-HU" dirty="0" smtClean="0"/>
+              <a:t> </a:t>
+            </a:r>
+            <a:r>
+              <a:rPr lang="hu-HU" dirty="0" err="1" smtClean="0"/>
+              <a:t>for</a:t>
+            </a:r>
+            <a:r>
+              <a:rPr lang="hu-HU" dirty="0" smtClean="0"/>
+              <a:t> </a:t>
+            </a:r>
+            <a:r>
+              <a:rPr lang="hu-HU" dirty="0" err="1" smtClean="0"/>
+              <a:t>the</a:t>
+            </a:r>
+            <a:r>
+              <a:rPr lang="hu-HU" dirty="0" smtClean="0"/>
+              <a:t> </a:t>
+            </a:r>
+            <a:r>
+              <a:rPr lang="hu-HU" dirty="0" err="1" smtClean="0">
+                <a:latin typeface="Courier New" panose="02070309020205020404" pitchFamily="49" charset="0"/>
+                <a:cs typeface="Courier New" panose="02070309020205020404" pitchFamily="49" charset="0"/>
+              </a:rPr>
+              <a:t>pipeline</a:t>
+            </a:r>
+            <a:r>
+              <a:rPr lang="hu-HU" dirty="0" smtClean="0"/>
+              <a:t> </a:t>
+            </a:r>
+            <a:r>
+              <a:rPr lang="hu-HU" dirty="0" err="1" smtClean="0"/>
+              <a:t>function</a:t>
+            </a:r>
+            <a:r>
+              <a:rPr lang="hu-HU" dirty="0" smtClean="0"/>
+              <a:t> </a:t>
+            </a:r>
+            <a:endParaRPr lang="en-GB" dirty="0"/>
+          </a:p>
+        </p:txBody>
+      </p:sp>
+    </p:spTree>
+    <p:extLst>
+      <p:ext uri="{BB962C8B-B14F-4D97-AF65-F5344CB8AC3E}">
+        <p14:creationId xmlns:p14="http://schemas.microsoft.com/office/powerpoint/2010/main" val="1255041169"/>
+      </p:ext>
+    </p:extLst>
+  </p:cSld>
+  <p:clrMapOvr>
+    <a:masterClrMapping/>
+  </p:clrMapOvr>
+</p:sld>
+</file>
+
+<file path=ppt/slides/slide16.xml><?xml version="1.0" encoding="utf-8"?>
+<p:sld xmlns:a="http://schemas.openxmlformats.org/drawingml/2006/main" xmlns:r="http://schemas.openxmlformats.org/officeDocument/2006/relationships" xmlns:p="http://schemas.openxmlformats.org/presentationml/2006/main">
+  <p:cSld>
+    <p:spTree>
+      <p:nvGrpSpPr>
+        <p:cNvPr id="1" name=""/>
+        <p:cNvGrpSpPr/>
+        <p:nvPr/>
+      </p:nvGrpSpPr>
+      <p:grpSpPr>
+        <a:xfrm>
+          <a:off x="0" y="0"/>
+          <a:ext cx="0" cy="0"/>
+          <a:chOff x="0" y="0"/>
+          <a:chExt cx="0" cy="0"/>
+        </a:xfrm>
+      </p:grpSpPr>
+      <p:sp>
+        <p:nvSpPr>
+          <p:cNvPr id="2" name="Cím 1"/>
+          <p:cNvSpPr>
+            <a:spLocks noGrp="1"/>
+          </p:cNvSpPr>
+          <p:nvPr>
+            <p:ph type="title"/>
+          </p:nvPr>
+        </p:nvSpPr>
+        <p:spPr/>
+        <p:txBody>
+          <a:bodyPr/>
+          <a:lstStyle/>
+          <a:p>
+            <a:r>
+              <a:rPr lang="hu-HU" dirty="0" err="1"/>
+              <a:t>Transformer</a:t>
+            </a:r>
+            <a:r>
+              <a:rPr lang="hu-HU" dirty="0"/>
+              <a:t> </a:t>
+            </a:r>
+            <a:r>
+              <a:rPr lang="hu-HU" dirty="0" err="1"/>
+              <a:t>Pipelines</a:t>
+            </a:r>
+            <a:endParaRPr lang="en-GB" dirty="0"/>
+          </a:p>
+        </p:txBody>
+      </p:sp>
+      <p:sp>
+        <p:nvSpPr>
+          <p:cNvPr id="3" name="Tartalom helye 2"/>
+          <p:cNvSpPr>
+            <a:spLocks noGrp="1"/>
+          </p:cNvSpPr>
+          <p:nvPr>
+            <p:ph idx="1"/>
+          </p:nvPr>
+        </p:nvSpPr>
+        <p:spPr>
+          <a:xfrm>
+            <a:off x="457200" y="1600200"/>
+            <a:ext cx="8229600" cy="4925144"/>
+          </a:xfrm>
+        </p:spPr>
+        <p:txBody>
+          <a:bodyPr>
+            <a:normAutofit fontScale="62500" lnSpcReduction="20000"/>
+          </a:bodyPr>
+          <a:lstStyle/>
+          <a:p>
+            <a:r>
+              <a:rPr lang="hu-HU" dirty="0" err="1" smtClean="0"/>
+              <a:t>NLP</a:t>
+            </a:r>
+            <a:r>
+              <a:rPr lang="hu-HU" dirty="0" smtClean="0"/>
+              <a:t> </a:t>
+            </a:r>
+            <a:r>
+              <a:rPr lang="hu-HU" dirty="0" err="1" smtClean="0"/>
+              <a:t>pipelines</a:t>
+            </a:r>
+            <a:r>
+              <a:rPr lang="hu-HU" dirty="0" smtClean="0"/>
+              <a:t> </a:t>
+            </a:r>
+            <a:r>
+              <a:rPr lang="hu-HU" dirty="0" err="1" smtClean="0"/>
+              <a:t>currently</a:t>
+            </a:r>
+            <a:r>
+              <a:rPr lang="hu-HU" dirty="0" smtClean="0"/>
+              <a:t> </a:t>
+            </a:r>
+            <a:r>
+              <a:rPr lang="hu-HU" dirty="0" err="1" smtClean="0"/>
+              <a:t>supported</a:t>
+            </a:r>
+            <a:r>
+              <a:rPr lang="hu-HU" dirty="0" smtClean="0"/>
+              <a:t> (</a:t>
+            </a:r>
+            <a:r>
+              <a:rPr lang="hu-HU" dirty="0" err="1" smtClean="0"/>
+              <a:t>subclass</a:t>
+            </a:r>
+            <a:r>
+              <a:rPr lang="hu-HU" dirty="0" smtClean="0"/>
+              <a:t> </a:t>
+            </a:r>
+            <a:r>
+              <a:rPr lang="hu-HU" dirty="0" err="1" smtClean="0"/>
+              <a:t>name</a:t>
+            </a:r>
+            <a:r>
+              <a:rPr lang="hu-HU" dirty="0" smtClean="0"/>
+              <a:t> / </a:t>
+            </a:r>
+            <a:r>
+              <a:rPr lang="hu-HU" dirty="0" err="1" smtClean="0">
+                <a:latin typeface="Courier New" panose="02070309020205020404" pitchFamily="49" charset="0"/>
+                <a:cs typeface="Courier New" panose="02070309020205020404" pitchFamily="49" charset="0"/>
+              </a:rPr>
+              <a:t>task</a:t>
+            </a:r>
+            <a:r>
+              <a:rPr lang="hu-HU" dirty="0" smtClean="0"/>
+              <a:t> </a:t>
+            </a:r>
+            <a:r>
+              <a:rPr lang="hu-HU" dirty="0" err="1" smtClean="0"/>
+              <a:t>argument</a:t>
+            </a:r>
+            <a:r>
+              <a:rPr lang="hu-HU" dirty="0" smtClean="0"/>
+              <a:t> </a:t>
+            </a:r>
+            <a:r>
+              <a:rPr lang="hu-HU" dirty="0" err="1" smtClean="0"/>
+              <a:t>value</a:t>
+            </a:r>
+            <a:r>
+              <a:rPr lang="hu-HU" dirty="0" smtClean="0"/>
+              <a:t>):</a:t>
+            </a:r>
+          </a:p>
+          <a:p>
+            <a:pPr lvl="1"/>
+            <a:r>
+              <a:rPr lang="en-GB" b="1" dirty="0" err="1" smtClean="0"/>
+              <a:t>FillMaskPipeline</a:t>
+            </a:r>
+            <a:r>
+              <a:rPr lang="hu-HU" b="1" dirty="0"/>
+              <a:t> </a:t>
+            </a:r>
+            <a:r>
+              <a:rPr lang="hu-HU" b="1" dirty="0" smtClean="0"/>
+              <a:t>/ </a:t>
+            </a:r>
+            <a:r>
+              <a:rPr lang="hu-HU" b="1" dirty="0" err="1" smtClean="0"/>
+              <a:t>fill-mask</a:t>
+            </a:r>
+            <a:r>
+              <a:rPr lang="hu-HU" b="1" dirty="0" smtClean="0"/>
+              <a:t>: </a:t>
+            </a:r>
+            <a:r>
+              <a:rPr lang="hu-HU" dirty="0" err="1" smtClean="0"/>
+              <a:t>for</a:t>
+            </a:r>
+            <a:r>
+              <a:rPr lang="hu-HU" dirty="0" smtClean="0"/>
+              <a:t> </a:t>
+            </a:r>
+            <a:r>
+              <a:rPr lang="hu-HU" dirty="0" err="1"/>
+              <a:t>MLM</a:t>
+            </a:r>
+            <a:r>
+              <a:rPr lang="hu-HU" dirty="0"/>
+              <a:t> </a:t>
+            </a:r>
+            <a:r>
+              <a:rPr lang="hu-HU" dirty="0" err="1"/>
+              <a:t>pre-trained</a:t>
+            </a:r>
+            <a:r>
+              <a:rPr lang="hu-HU" dirty="0"/>
+              <a:t> </a:t>
+            </a:r>
+            <a:r>
+              <a:rPr lang="hu-HU" dirty="0" err="1" smtClean="0"/>
+              <a:t>models</a:t>
+            </a:r>
+            <a:r>
+              <a:rPr lang="hu-HU" dirty="0" smtClean="0"/>
+              <a:t>, </a:t>
+            </a:r>
+            <a:r>
+              <a:rPr lang="hu-HU" dirty="0" err="1" smtClean="0"/>
+              <a:t>returns</a:t>
+            </a:r>
+            <a:r>
+              <a:rPr lang="hu-HU" dirty="0" smtClean="0"/>
+              <a:t> </a:t>
+            </a:r>
+            <a:r>
+              <a:rPr lang="hu-HU" dirty="0" err="1" smtClean="0"/>
+              <a:t>what</a:t>
+            </a:r>
+            <a:r>
+              <a:rPr lang="hu-HU" dirty="0" smtClean="0"/>
+              <a:t> </a:t>
+            </a:r>
+            <a:r>
+              <a:rPr lang="hu-HU" dirty="0" err="1" smtClean="0"/>
+              <a:t>which</a:t>
+            </a:r>
+            <a:r>
+              <a:rPr lang="hu-HU" dirty="0" smtClean="0"/>
+              <a:t> </a:t>
+            </a:r>
+            <a:r>
+              <a:rPr lang="hu-HU" dirty="0" err="1" smtClean="0"/>
+              <a:t>concrete</a:t>
+            </a:r>
+            <a:r>
+              <a:rPr lang="hu-HU" dirty="0" smtClean="0"/>
+              <a:t> </a:t>
+            </a:r>
+            <a:r>
+              <a:rPr lang="hu-HU" dirty="0" err="1" smtClean="0"/>
+              <a:t>token</a:t>
+            </a:r>
+            <a:r>
+              <a:rPr lang="hu-HU" dirty="0" smtClean="0"/>
+              <a:t> </a:t>
+            </a:r>
+            <a:r>
+              <a:rPr lang="hu-HU" dirty="0" err="1" smtClean="0"/>
+              <a:t>the</a:t>
+            </a:r>
+            <a:r>
+              <a:rPr lang="hu-HU" dirty="0" smtClean="0"/>
+              <a:t> </a:t>
+            </a:r>
+            <a:r>
+              <a:rPr lang="hu-HU" dirty="0" err="1" smtClean="0"/>
+              <a:t>model</a:t>
+            </a:r>
+            <a:r>
+              <a:rPr lang="hu-HU" dirty="0" smtClean="0"/>
+              <a:t> </a:t>
+            </a:r>
+            <a:r>
+              <a:rPr lang="hu-HU" dirty="0" err="1" smtClean="0"/>
+              <a:t>predicts</a:t>
+            </a:r>
+            <a:r>
+              <a:rPr lang="hu-HU" dirty="0" smtClean="0"/>
+              <a:t> </a:t>
+            </a:r>
+            <a:r>
+              <a:rPr lang="hu-HU" dirty="0" err="1" smtClean="0"/>
+              <a:t>to</a:t>
+            </a:r>
+            <a:r>
+              <a:rPr lang="hu-HU" dirty="0" smtClean="0"/>
+              <a:t> be most </a:t>
+            </a:r>
+            <a:r>
+              <a:rPr lang="hu-HU" dirty="0" err="1" smtClean="0"/>
+              <a:t>likely</a:t>
+            </a:r>
+            <a:r>
+              <a:rPr lang="hu-HU" dirty="0" smtClean="0"/>
+              <a:t> </a:t>
+            </a:r>
+            <a:r>
+              <a:rPr lang="hu-HU" dirty="0" err="1" smtClean="0"/>
+              <a:t>for</a:t>
+            </a:r>
+            <a:r>
+              <a:rPr lang="hu-HU" dirty="0" smtClean="0"/>
+              <a:t> a </a:t>
+            </a:r>
+            <a:r>
+              <a:rPr lang="hu-HU" dirty="0" err="1" smtClean="0"/>
+              <a:t>masked</a:t>
+            </a:r>
+            <a:r>
+              <a:rPr lang="hu-HU" dirty="0" smtClean="0"/>
+              <a:t> </a:t>
+            </a:r>
+            <a:r>
+              <a:rPr lang="hu-HU" dirty="0" err="1" smtClean="0"/>
+              <a:t>token</a:t>
+            </a:r>
+            <a:r>
+              <a:rPr lang="hu-HU" dirty="0" smtClean="0"/>
+              <a:t> </a:t>
+            </a:r>
+            <a:r>
+              <a:rPr lang="hu-HU" dirty="0" err="1" smtClean="0"/>
+              <a:t>position</a:t>
+            </a:r>
+            <a:r>
+              <a:rPr lang="hu-HU" dirty="0" smtClean="0"/>
+              <a:t> </a:t>
+            </a:r>
+            <a:r>
+              <a:rPr lang="hu-HU" dirty="0" err="1" smtClean="0"/>
+              <a:t>in</a:t>
+            </a:r>
+            <a:r>
+              <a:rPr lang="hu-HU" dirty="0" smtClean="0"/>
+              <a:t> </a:t>
+            </a:r>
+            <a:r>
+              <a:rPr lang="hu-HU" dirty="0" err="1" smtClean="0"/>
+              <a:t>the</a:t>
+            </a:r>
+            <a:r>
+              <a:rPr lang="hu-HU" dirty="0" smtClean="0"/>
+              <a:t> input</a:t>
+            </a:r>
+          </a:p>
+          <a:p>
+            <a:pPr lvl="1"/>
+            <a:r>
+              <a:rPr lang="en-GB" b="1" dirty="0" err="1" smtClean="0"/>
+              <a:t>QuestionAnsweringPipeline</a:t>
+            </a:r>
+            <a:r>
+              <a:rPr lang="hu-HU" b="1" dirty="0" smtClean="0"/>
+              <a:t> / </a:t>
+            </a:r>
+            <a:r>
+              <a:rPr lang="hu-HU" b="1" dirty="0" err="1" smtClean="0"/>
+              <a:t>question-answering</a:t>
+            </a:r>
+            <a:r>
+              <a:rPr lang="hu-HU" b="1" dirty="0" smtClean="0"/>
+              <a:t>: </a:t>
+            </a:r>
+            <a:r>
+              <a:rPr lang="hu-HU" dirty="0" err="1" smtClean="0"/>
+              <a:t>answers</a:t>
+            </a:r>
+            <a:r>
+              <a:rPr lang="hu-HU" dirty="0" smtClean="0"/>
+              <a:t> a </a:t>
+            </a:r>
+            <a:r>
+              <a:rPr lang="hu-HU" dirty="0" err="1" smtClean="0"/>
+              <a:t>given</a:t>
+            </a:r>
+            <a:r>
+              <a:rPr lang="hu-HU" dirty="0" smtClean="0"/>
+              <a:t> input </a:t>
+            </a:r>
+            <a:r>
+              <a:rPr lang="hu-HU" dirty="0" err="1" smtClean="0"/>
+              <a:t>question</a:t>
+            </a:r>
+            <a:r>
+              <a:rPr lang="hu-HU" dirty="0" smtClean="0"/>
+              <a:t> </a:t>
+            </a:r>
+            <a:r>
+              <a:rPr lang="hu-HU" dirty="0" err="1" smtClean="0"/>
+              <a:t>based</a:t>
+            </a:r>
+            <a:r>
+              <a:rPr lang="hu-HU" dirty="0" smtClean="0"/>
+              <a:t> </a:t>
+            </a:r>
+            <a:r>
+              <a:rPr lang="hu-HU" dirty="0" err="1" smtClean="0"/>
+              <a:t>on</a:t>
+            </a:r>
+            <a:r>
+              <a:rPr lang="hu-HU" dirty="0" smtClean="0"/>
+              <a:t> a </a:t>
+            </a:r>
+            <a:r>
+              <a:rPr lang="hu-HU" dirty="0" err="1" smtClean="0"/>
+              <a:t>given</a:t>
+            </a:r>
+            <a:r>
+              <a:rPr lang="hu-HU" dirty="0" smtClean="0"/>
+              <a:t> input </a:t>
+            </a:r>
+            <a:r>
+              <a:rPr lang="hu-HU" dirty="0" err="1" smtClean="0"/>
+              <a:t>context</a:t>
+            </a:r>
+            <a:r>
+              <a:rPr lang="hu-HU" dirty="0"/>
+              <a:t>;</a:t>
+            </a:r>
+            <a:r>
+              <a:rPr lang="hu-HU" dirty="0" smtClean="0"/>
+              <a:t> </a:t>
+            </a:r>
+            <a:r>
+              <a:rPr lang="hu-HU" dirty="0" err="1" smtClean="0"/>
+              <a:t>extractive</a:t>
+            </a:r>
+            <a:r>
+              <a:rPr lang="hu-HU" dirty="0" smtClean="0"/>
+              <a:t>: </a:t>
+            </a:r>
+            <a:r>
+              <a:rPr lang="hu-HU" dirty="0" err="1" smtClean="0"/>
+              <a:t>outputs</a:t>
+            </a:r>
+            <a:r>
+              <a:rPr lang="hu-HU" dirty="0" smtClean="0"/>
+              <a:t> </a:t>
+            </a:r>
+            <a:r>
+              <a:rPr lang="hu-HU" dirty="0" err="1" smtClean="0"/>
+              <a:t>the</a:t>
+            </a:r>
+            <a:r>
+              <a:rPr lang="hu-HU" dirty="0" smtClean="0"/>
+              <a:t> most </a:t>
+            </a:r>
+            <a:r>
+              <a:rPr lang="hu-HU" dirty="0" err="1" smtClean="0"/>
+              <a:t>relevant</a:t>
+            </a:r>
+            <a:r>
+              <a:rPr lang="hu-HU" dirty="0" smtClean="0"/>
+              <a:t> </a:t>
+            </a:r>
+            <a:r>
+              <a:rPr lang="hu-HU" dirty="0" err="1" smtClean="0"/>
+              <a:t>substring</a:t>
+            </a:r>
+            <a:r>
+              <a:rPr lang="hu-HU" dirty="0" smtClean="0"/>
+              <a:t> of </a:t>
+            </a:r>
+            <a:r>
+              <a:rPr lang="hu-HU" dirty="0" err="1" smtClean="0"/>
+              <a:t>the</a:t>
+            </a:r>
+            <a:r>
+              <a:rPr lang="hu-HU" dirty="0" smtClean="0"/>
+              <a:t> </a:t>
+            </a:r>
+            <a:r>
+              <a:rPr lang="hu-HU" dirty="0" err="1" smtClean="0"/>
+              <a:t>context</a:t>
+            </a:r>
+            <a:r>
+              <a:rPr lang="hu-HU" dirty="0" smtClean="0"/>
+              <a:t> </a:t>
+            </a:r>
+            <a:r>
+              <a:rPr lang="hu-HU" dirty="0" err="1" smtClean="0"/>
+              <a:t>that</a:t>
+            </a:r>
+            <a:r>
+              <a:rPr lang="hu-HU" dirty="0" smtClean="0"/>
+              <a:t> is </a:t>
+            </a:r>
+            <a:r>
+              <a:rPr lang="hu-HU" dirty="0" err="1" smtClean="0"/>
+              <a:t>or</a:t>
+            </a:r>
+            <a:r>
+              <a:rPr lang="hu-HU" dirty="0" smtClean="0"/>
+              <a:t> </a:t>
+            </a:r>
+            <a:r>
+              <a:rPr lang="hu-HU" dirty="0" err="1" smtClean="0"/>
+              <a:t>contains</a:t>
+            </a:r>
+            <a:r>
+              <a:rPr lang="hu-HU" dirty="0" smtClean="0"/>
+              <a:t> </a:t>
+            </a:r>
+            <a:r>
+              <a:rPr lang="hu-HU" dirty="0" err="1" smtClean="0"/>
+              <a:t>the</a:t>
+            </a:r>
+            <a:r>
+              <a:rPr lang="hu-HU" dirty="0" smtClean="0"/>
+              <a:t> </a:t>
+            </a:r>
+            <a:r>
+              <a:rPr lang="hu-HU" dirty="0" err="1" smtClean="0"/>
+              <a:t>answer</a:t>
+            </a:r>
+            <a:endParaRPr lang="hu-HU" dirty="0" smtClean="0"/>
+          </a:p>
+          <a:p>
+            <a:pPr lvl="1"/>
+            <a:r>
+              <a:rPr lang="hu-HU" b="1" dirty="0" err="1" smtClean="0"/>
+              <a:t>SummarizationPipeline</a:t>
+            </a:r>
+            <a:r>
+              <a:rPr lang="hu-HU" b="1" dirty="0" smtClean="0"/>
+              <a:t> / </a:t>
+            </a:r>
+            <a:r>
+              <a:rPr lang="hu-HU" b="1" dirty="0" err="1" smtClean="0"/>
+              <a:t>summarization</a:t>
+            </a:r>
+            <a:r>
+              <a:rPr lang="hu-HU" b="1" dirty="0" smtClean="0"/>
+              <a:t>: </a:t>
+            </a:r>
+            <a:r>
+              <a:rPr lang="hu-HU" dirty="0" err="1" smtClean="0"/>
+              <a:t>uses</a:t>
+            </a:r>
+            <a:r>
+              <a:rPr lang="hu-HU" dirty="0" smtClean="0"/>
+              <a:t> an </a:t>
+            </a:r>
+            <a:r>
+              <a:rPr lang="hu-HU" dirty="0" err="1" smtClean="0"/>
+              <a:t>encoder-decoder</a:t>
+            </a:r>
+            <a:r>
+              <a:rPr lang="hu-HU" dirty="0" smtClean="0"/>
+              <a:t> </a:t>
+            </a:r>
+            <a:r>
+              <a:rPr lang="hu-HU" dirty="0" err="1" smtClean="0"/>
+              <a:t>transformer</a:t>
+            </a:r>
+            <a:r>
+              <a:rPr lang="hu-HU" dirty="0" smtClean="0"/>
+              <a:t> (BART </a:t>
+            </a:r>
+            <a:r>
+              <a:rPr lang="hu-HU" dirty="0" err="1" smtClean="0"/>
+              <a:t>or</a:t>
+            </a:r>
+            <a:r>
+              <a:rPr lang="hu-HU" dirty="0" smtClean="0"/>
+              <a:t> T5) </a:t>
+            </a:r>
+            <a:r>
+              <a:rPr lang="hu-HU" dirty="0" err="1" smtClean="0"/>
+              <a:t>to</a:t>
+            </a:r>
+            <a:r>
+              <a:rPr lang="hu-HU" dirty="0" smtClean="0"/>
+              <a:t> </a:t>
+            </a:r>
+            <a:r>
+              <a:rPr lang="hu-HU" dirty="0" err="1" smtClean="0"/>
+              <a:t>generate</a:t>
+            </a:r>
+            <a:r>
+              <a:rPr lang="hu-HU" dirty="0" smtClean="0"/>
+              <a:t> a </a:t>
+            </a:r>
+            <a:r>
+              <a:rPr lang="hu-HU" dirty="0" err="1" smtClean="0"/>
+              <a:t>summary</a:t>
+            </a:r>
+            <a:r>
+              <a:rPr lang="hu-HU" dirty="0" smtClean="0"/>
+              <a:t> </a:t>
+            </a:r>
+            <a:r>
+              <a:rPr lang="hu-HU" dirty="0" err="1" smtClean="0"/>
+              <a:t>for</a:t>
+            </a:r>
+            <a:r>
+              <a:rPr lang="hu-HU" dirty="0" smtClean="0"/>
+              <a:t> </a:t>
+            </a:r>
+            <a:r>
+              <a:rPr lang="hu-HU" dirty="0" err="1" smtClean="0"/>
+              <a:t>the</a:t>
+            </a:r>
+            <a:r>
+              <a:rPr lang="hu-HU" dirty="0" smtClean="0"/>
+              <a:t> input text</a:t>
+            </a:r>
+          </a:p>
+          <a:p>
+            <a:pPr lvl="1"/>
+            <a:r>
+              <a:rPr lang="en-GB" b="1" dirty="0" err="1" smtClean="0"/>
+              <a:t>TextClassificationPipeline</a:t>
+            </a:r>
+            <a:r>
+              <a:rPr lang="hu-HU" b="1" dirty="0" smtClean="0"/>
+              <a:t> / </a:t>
+            </a:r>
+            <a:r>
+              <a:rPr lang="hu-HU" b="1" dirty="0" err="1" smtClean="0"/>
+              <a:t>sentiment-analysis</a:t>
+            </a:r>
+            <a:r>
+              <a:rPr lang="hu-HU" b="1" dirty="0" smtClean="0"/>
+              <a:t>: </a:t>
+            </a:r>
+            <a:r>
+              <a:rPr lang="hu-HU" dirty="0" err="1" smtClean="0"/>
+              <a:t>the</a:t>
+            </a:r>
+            <a:r>
+              <a:rPr lang="hu-HU" dirty="0" smtClean="0"/>
+              <a:t> text (</a:t>
+            </a:r>
+            <a:r>
+              <a:rPr lang="hu-HU" dirty="0" err="1" smtClean="0"/>
+              <a:t>sequence</a:t>
+            </a:r>
+            <a:r>
+              <a:rPr lang="hu-HU" dirty="0" smtClean="0"/>
+              <a:t>) </a:t>
+            </a:r>
+            <a:r>
+              <a:rPr lang="hu-HU" dirty="0" err="1" smtClean="0"/>
+              <a:t>classification</a:t>
+            </a:r>
+            <a:r>
+              <a:rPr lang="hu-HU" dirty="0" smtClean="0"/>
+              <a:t> </a:t>
+            </a:r>
+            <a:r>
+              <a:rPr lang="hu-HU" dirty="0" err="1" smtClean="0"/>
+              <a:t>pipeline</a:t>
+            </a:r>
+            <a:r>
+              <a:rPr lang="hu-HU" dirty="0" smtClean="0"/>
+              <a:t> </a:t>
+            </a:r>
+            <a:r>
+              <a:rPr lang="hu-HU" dirty="0" err="1" smtClean="0"/>
+              <a:t>can</a:t>
+            </a:r>
+            <a:r>
+              <a:rPr lang="hu-HU" dirty="0" smtClean="0"/>
+              <a:t> </a:t>
+            </a:r>
+            <a:r>
+              <a:rPr lang="hu-HU" dirty="0" err="1" smtClean="0"/>
+              <a:t>classify</a:t>
+            </a:r>
+            <a:r>
+              <a:rPr lang="hu-HU" dirty="0" smtClean="0"/>
+              <a:t> an input text </a:t>
+            </a:r>
+            <a:r>
+              <a:rPr lang="hu-HU" dirty="0" err="1" smtClean="0"/>
+              <a:t>into</a:t>
+            </a:r>
+            <a:r>
+              <a:rPr lang="hu-HU" dirty="0" smtClean="0"/>
+              <a:t> </a:t>
+            </a:r>
+            <a:r>
+              <a:rPr lang="hu-HU" dirty="0" err="1" smtClean="0"/>
+              <a:t>any</a:t>
+            </a:r>
+            <a:r>
+              <a:rPr lang="hu-HU" dirty="0" smtClean="0"/>
+              <a:t> </a:t>
+            </a:r>
+            <a:r>
+              <a:rPr lang="hu-HU" dirty="0" err="1" smtClean="0"/>
+              <a:t>categories</a:t>
+            </a:r>
+            <a:r>
+              <a:rPr lang="hu-HU" dirty="0" smtClean="0"/>
+              <a:t>, </a:t>
+            </a:r>
+            <a:r>
+              <a:rPr lang="hu-HU" dirty="0" err="1" smtClean="0"/>
+              <a:t>but</a:t>
+            </a:r>
+            <a:r>
+              <a:rPr lang="hu-HU" dirty="0" smtClean="0"/>
+              <a:t> </a:t>
+            </a:r>
+            <a:r>
+              <a:rPr lang="hu-HU" dirty="0" err="1" smtClean="0"/>
+              <a:t>there</a:t>
+            </a:r>
+            <a:r>
+              <a:rPr lang="hu-HU" dirty="0" smtClean="0"/>
+              <a:t> is </a:t>
+            </a:r>
+            <a:r>
+              <a:rPr lang="hu-HU" dirty="0" err="1" smtClean="0"/>
+              <a:t>only</a:t>
+            </a:r>
+            <a:r>
+              <a:rPr lang="hu-HU" dirty="0" smtClean="0"/>
+              <a:t> a </a:t>
+            </a:r>
+            <a:r>
+              <a:rPr lang="hu-HU" dirty="0" err="1" smtClean="0"/>
+              <a:t>pipeline</a:t>
+            </a:r>
+            <a:r>
+              <a:rPr lang="hu-HU" dirty="0" smtClean="0"/>
+              <a:t> </a:t>
+            </a:r>
+            <a:r>
+              <a:rPr lang="hu-HU" dirty="0" err="1" smtClean="0"/>
+              <a:t>task</a:t>
+            </a:r>
+            <a:r>
+              <a:rPr lang="hu-HU" dirty="0" smtClean="0"/>
+              <a:t> </a:t>
+            </a:r>
+            <a:r>
+              <a:rPr lang="hu-HU" dirty="0" err="1" smtClean="0"/>
+              <a:t>for</a:t>
+            </a:r>
+            <a:r>
+              <a:rPr lang="hu-HU" dirty="0" smtClean="0"/>
+              <a:t> </a:t>
+            </a:r>
+            <a:r>
+              <a:rPr lang="hu-HU" dirty="0" err="1" smtClean="0"/>
+              <a:t>sentiment</a:t>
+            </a:r>
+            <a:r>
+              <a:rPr lang="hu-HU" dirty="0" smtClean="0"/>
+              <a:t> </a:t>
+            </a:r>
+            <a:r>
+              <a:rPr lang="hu-HU" dirty="0" err="1" smtClean="0"/>
+              <a:t>analysis</a:t>
+            </a:r>
+            <a:r>
+              <a:rPr lang="hu-HU" dirty="0" smtClean="0"/>
+              <a:t>, </a:t>
+            </a:r>
+            <a:r>
+              <a:rPr lang="hu-HU" dirty="0" err="1" smtClean="0"/>
+              <a:t>which</a:t>
+            </a:r>
+            <a:r>
+              <a:rPr lang="hu-HU" dirty="0" smtClean="0"/>
+              <a:t> </a:t>
+            </a:r>
+            <a:r>
+              <a:rPr lang="hu-HU" dirty="0" err="1" smtClean="0"/>
+              <a:t>assigns</a:t>
+            </a:r>
+            <a:r>
+              <a:rPr lang="hu-HU" dirty="0" smtClean="0"/>
+              <a:t> a </a:t>
+            </a:r>
+            <a:r>
+              <a:rPr lang="hu-HU" dirty="0" err="1" smtClean="0"/>
+              <a:t>positive</a:t>
+            </a:r>
+            <a:r>
+              <a:rPr lang="hu-HU" dirty="0" smtClean="0"/>
+              <a:t> </a:t>
+            </a:r>
+            <a:r>
+              <a:rPr lang="hu-HU" dirty="0" err="1" smtClean="0"/>
+              <a:t>or</a:t>
+            </a:r>
+            <a:r>
+              <a:rPr lang="hu-HU" dirty="0" smtClean="0"/>
+              <a:t> </a:t>
+            </a:r>
+            <a:r>
+              <a:rPr lang="hu-HU" dirty="0" err="1" smtClean="0"/>
+              <a:t>negative</a:t>
+            </a:r>
+            <a:r>
+              <a:rPr lang="hu-HU" dirty="0" smtClean="0"/>
+              <a:t> </a:t>
+            </a:r>
+            <a:r>
+              <a:rPr lang="hu-HU" dirty="0" err="1" smtClean="0"/>
+              <a:t>label</a:t>
+            </a:r>
+            <a:r>
+              <a:rPr lang="hu-HU" dirty="0" smtClean="0"/>
+              <a:t> </a:t>
+            </a:r>
+            <a:r>
+              <a:rPr lang="hu-HU" dirty="0" err="1" smtClean="0"/>
+              <a:t>to</a:t>
+            </a:r>
+            <a:r>
+              <a:rPr lang="hu-HU" dirty="0" smtClean="0"/>
+              <a:t> </a:t>
+            </a:r>
+            <a:r>
+              <a:rPr lang="hu-HU" dirty="0" err="1" smtClean="0"/>
+              <a:t>the</a:t>
+            </a:r>
+            <a:r>
+              <a:rPr lang="hu-HU" dirty="0" smtClean="0"/>
+              <a:t> </a:t>
+            </a:r>
+            <a:r>
+              <a:rPr lang="hu-HU" dirty="0" err="1" smtClean="0"/>
+              <a:t>entire</a:t>
+            </a:r>
+            <a:r>
+              <a:rPr lang="hu-HU" dirty="0" smtClean="0"/>
+              <a:t> input </a:t>
+            </a:r>
+            <a:r>
+              <a:rPr lang="hu-HU" dirty="0" err="1" smtClean="0"/>
+              <a:t>sequence</a:t>
+            </a:r>
+            <a:endParaRPr lang="en-GB" dirty="0"/>
+          </a:p>
+          <a:p>
+            <a:pPr lvl="1"/>
+            <a:r>
+              <a:rPr lang="hu-HU" b="1" dirty="0" err="1" smtClean="0"/>
+              <a:t>TextGenerationPipeline</a:t>
+            </a:r>
+            <a:r>
+              <a:rPr lang="hu-HU" b="1" dirty="0" smtClean="0"/>
+              <a:t> / </a:t>
+            </a:r>
+            <a:r>
+              <a:rPr lang="hu-HU" b="1" dirty="0" err="1" smtClean="0"/>
+              <a:t>text-generation</a:t>
+            </a:r>
+            <a:r>
+              <a:rPr lang="hu-HU" dirty="0" smtClean="0"/>
+              <a:t>: prompt </a:t>
+            </a:r>
+            <a:r>
+              <a:rPr lang="hu-HU" dirty="0" err="1" smtClean="0"/>
+              <a:t>continuation</a:t>
+            </a:r>
+            <a:r>
+              <a:rPr lang="hu-HU" dirty="0" smtClean="0"/>
+              <a:t> </a:t>
+            </a:r>
+            <a:r>
+              <a:rPr lang="hu-HU" dirty="0" err="1" smtClean="0"/>
+              <a:t>using</a:t>
+            </a:r>
+            <a:r>
+              <a:rPr lang="hu-HU" dirty="0" smtClean="0"/>
+              <a:t> a </a:t>
+            </a:r>
+            <a:r>
+              <a:rPr lang="hu-HU" dirty="0" err="1" smtClean="0"/>
+              <a:t>next-token-prediction</a:t>
+            </a:r>
+            <a:r>
+              <a:rPr lang="hu-HU" dirty="0" smtClean="0"/>
+              <a:t> (</a:t>
+            </a:r>
+            <a:r>
+              <a:rPr lang="hu-HU" dirty="0" err="1" smtClean="0"/>
+              <a:t>so-called</a:t>
+            </a:r>
+            <a:r>
+              <a:rPr lang="hu-HU" dirty="0" smtClean="0"/>
+              <a:t> </a:t>
+            </a:r>
+            <a:r>
+              <a:rPr lang="hu-HU" dirty="0" err="1" smtClean="0"/>
+              <a:t>causal</a:t>
+            </a:r>
+            <a:r>
+              <a:rPr lang="hu-HU" dirty="0" smtClean="0"/>
+              <a:t> LM) </a:t>
+            </a:r>
+            <a:r>
+              <a:rPr lang="hu-HU" dirty="0" err="1" smtClean="0"/>
+              <a:t>GPT-like</a:t>
+            </a:r>
+            <a:r>
+              <a:rPr lang="hu-HU" dirty="0" smtClean="0"/>
+              <a:t> </a:t>
+            </a:r>
+            <a:r>
+              <a:rPr lang="hu-HU" dirty="0" err="1" smtClean="0"/>
+              <a:t>generative</a:t>
+            </a:r>
+            <a:r>
+              <a:rPr lang="hu-HU" dirty="0" smtClean="0"/>
+              <a:t> </a:t>
+            </a:r>
+            <a:r>
+              <a:rPr lang="hu-HU" dirty="0" err="1" smtClean="0"/>
+              <a:t>model</a:t>
+            </a:r>
+            <a:endParaRPr lang="hu-HU" dirty="0" smtClean="0"/>
+          </a:p>
+          <a:p>
+            <a:pPr lvl="1"/>
+            <a:r>
+              <a:rPr lang="hu-HU" b="1" dirty="0" err="1" smtClean="0"/>
+              <a:t>TokenClassificationPipeline</a:t>
+            </a:r>
+            <a:r>
+              <a:rPr lang="hu-HU" b="1" dirty="0" smtClean="0"/>
+              <a:t> / </a:t>
+            </a:r>
+            <a:r>
+              <a:rPr lang="hu-HU" b="1" dirty="0" err="1" smtClean="0"/>
+              <a:t>ner</a:t>
+            </a:r>
+            <a:r>
+              <a:rPr lang="hu-HU" dirty="0" smtClean="0"/>
+              <a:t>: </a:t>
+            </a:r>
+            <a:r>
+              <a:rPr lang="hu-HU" dirty="0" err="1" smtClean="0"/>
+              <a:t>outputs</a:t>
+            </a:r>
+            <a:r>
+              <a:rPr lang="hu-HU" dirty="0" smtClean="0"/>
+              <a:t> a </a:t>
+            </a:r>
+            <a:r>
+              <a:rPr lang="hu-HU" dirty="0" err="1" smtClean="0"/>
+              <a:t>class</a:t>
+            </a:r>
+            <a:r>
+              <a:rPr lang="hu-HU" dirty="0" smtClean="0"/>
+              <a:t> </a:t>
+            </a:r>
+            <a:r>
+              <a:rPr lang="hu-HU" dirty="0" err="1" smtClean="0"/>
+              <a:t>label</a:t>
+            </a:r>
+            <a:r>
+              <a:rPr lang="hu-HU" dirty="0" smtClean="0"/>
+              <a:t> </a:t>
+            </a:r>
+            <a:r>
+              <a:rPr lang="hu-HU" dirty="0" err="1" smtClean="0"/>
+              <a:t>for</a:t>
+            </a:r>
+            <a:r>
+              <a:rPr lang="hu-HU" dirty="0" smtClean="0"/>
+              <a:t> </a:t>
+            </a:r>
+            <a:r>
+              <a:rPr lang="hu-HU" dirty="0" err="1" smtClean="0"/>
+              <a:t>some</a:t>
+            </a:r>
+            <a:r>
+              <a:rPr lang="hu-HU" dirty="0" smtClean="0"/>
+              <a:t> </a:t>
+            </a:r>
+            <a:r>
+              <a:rPr lang="hu-HU" dirty="0" err="1" smtClean="0"/>
+              <a:t>specific</a:t>
+            </a:r>
+            <a:r>
+              <a:rPr lang="hu-HU" dirty="0" smtClean="0"/>
+              <a:t> / </a:t>
+            </a:r>
+            <a:r>
+              <a:rPr lang="hu-HU" dirty="0" err="1" smtClean="0"/>
+              <a:t>all</a:t>
+            </a:r>
+            <a:r>
+              <a:rPr lang="hu-HU" dirty="0" smtClean="0"/>
+              <a:t> </a:t>
+            </a:r>
+            <a:r>
+              <a:rPr lang="hu-HU" dirty="0" err="1" smtClean="0"/>
+              <a:t>tokens</a:t>
+            </a:r>
+            <a:r>
+              <a:rPr lang="hu-HU" dirty="0" smtClean="0"/>
+              <a:t> </a:t>
+            </a:r>
+            <a:r>
+              <a:rPr lang="hu-HU" dirty="0" err="1" smtClean="0"/>
+              <a:t>in</a:t>
+            </a:r>
+            <a:r>
+              <a:rPr lang="hu-HU" dirty="0" smtClean="0"/>
+              <a:t> </a:t>
+            </a:r>
+            <a:r>
+              <a:rPr lang="hu-HU" dirty="0" err="1" smtClean="0"/>
+              <a:t>the</a:t>
+            </a:r>
+            <a:r>
+              <a:rPr lang="hu-HU" dirty="0" smtClean="0"/>
+              <a:t> input </a:t>
+            </a:r>
+            <a:r>
+              <a:rPr lang="hu-HU" dirty="0" err="1" smtClean="0"/>
+              <a:t>sequence</a:t>
+            </a:r>
+            <a:r>
+              <a:rPr lang="hu-HU" dirty="0" smtClean="0"/>
+              <a:t>; </a:t>
+            </a:r>
+            <a:r>
+              <a:rPr lang="hu-HU" dirty="0" err="1" smtClean="0"/>
+              <a:t>could</a:t>
+            </a:r>
+            <a:r>
+              <a:rPr lang="hu-HU" dirty="0" smtClean="0"/>
+              <a:t> be </a:t>
+            </a:r>
+            <a:r>
+              <a:rPr lang="hu-HU" dirty="0" err="1" smtClean="0"/>
+              <a:t>any</a:t>
+            </a:r>
+            <a:r>
+              <a:rPr lang="hu-HU" dirty="0" smtClean="0"/>
+              <a:t> </a:t>
+            </a:r>
+            <a:r>
+              <a:rPr lang="hu-HU" dirty="0" err="1" smtClean="0"/>
+              <a:t>classification</a:t>
+            </a:r>
+            <a:r>
+              <a:rPr lang="hu-HU" dirty="0" smtClean="0"/>
+              <a:t> </a:t>
+            </a:r>
+            <a:r>
+              <a:rPr lang="hu-HU" dirty="0" err="1" smtClean="0"/>
+              <a:t>task</a:t>
+            </a:r>
+            <a:r>
+              <a:rPr lang="hu-HU" dirty="0" smtClean="0"/>
+              <a:t>, </a:t>
+            </a:r>
+            <a:r>
+              <a:rPr lang="hu-HU" dirty="0" err="1" smtClean="0"/>
+              <a:t>but</a:t>
+            </a:r>
+            <a:r>
+              <a:rPr lang="hu-HU" dirty="0" smtClean="0"/>
+              <a:t> </a:t>
+            </a:r>
+            <a:r>
+              <a:rPr lang="hu-HU" dirty="0" err="1" smtClean="0"/>
+              <a:t>there</a:t>
+            </a:r>
+            <a:r>
+              <a:rPr lang="hu-HU" dirty="0" smtClean="0"/>
+              <a:t> is </a:t>
+            </a:r>
+            <a:r>
+              <a:rPr lang="hu-HU" dirty="0" err="1" smtClean="0"/>
+              <a:t>only</a:t>
+            </a:r>
+            <a:r>
+              <a:rPr lang="hu-HU" dirty="0" smtClean="0"/>
+              <a:t> a </a:t>
+            </a:r>
+            <a:r>
+              <a:rPr lang="hu-HU" dirty="0" err="1" smtClean="0"/>
+              <a:t>pre-defined</a:t>
+            </a:r>
+            <a:r>
+              <a:rPr lang="hu-HU" dirty="0" smtClean="0"/>
+              <a:t> </a:t>
+            </a:r>
+            <a:r>
+              <a:rPr lang="hu-HU" dirty="0" err="1" smtClean="0"/>
+              <a:t>task</a:t>
+            </a:r>
+            <a:r>
+              <a:rPr lang="hu-HU" dirty="0" smtClean="0"/>
+              <a:t> </a:t>
+            </a:r>
+            <a:r>
+              <a:rPr lang="hu-HU" dirty="0" err="1" smtClean="0"/>
+              <a:t>argument</a:t>
+            </a:r>
+            <a:r>
+              <a:rPr lang="hu-HU" dirty="0" smtClean="0"/>
+              <a:t> </a:t>
+            </a:r>
+            <a:r>
+              <a:rPr lang="hu-HU" dirty="0" err="1" smtClean="0"/>
+              <a:t>for</a:t>
+            </a:r>
+            <a:r>
+              <a:rPr lang="hu-HU" dirty="0" smtClean="0"/>
+              <a:t> </a:t>
+            </a:r>
+            <a:r>
+              <a:rPr lang="hu-HU" dirty="0" err="1" smtClean="0"/>
+              <a:t>named</a:t>
+            </a:r>
+            <a:r>
+              <a:rPr lang="hu-HU" dirty="0" smtClean="0"/>
+              <a:t> </a:t>
+            </a:r>
+            <a:r>
+              <a:rPr lang="hu-HU" dirty="0" err="1" smtClean="0"/>
+              <a:t>entity</a:t>
+            </a:r>
+            <a:r>
+              <a:rPr lang="hu-HU" dirty="0" smtClean="0"/>
+              <a:t> </a:t>
+            </a:r>
+            <a:r>
+              <a:rPr lang="hu-HU" dirty="0" err="1" smtClean="0"/>
+              <a:t>recognition</a:t>
+            </a:r>
+            <a:endParaRPr lang="hu-HU" dirty="0" smtClean="0"/>
+          </a:p>
+        </p:txBody>
+      </p:sp>
+    </p:spTree>
+    <p:extLst>
+      <p:ext uri="{BB962C8B-B14F-4D97-AF65-F5344CB8AC3E}">
+        <p14:creationId xmlns:p14="http://schemas.microsoft.com/office/powerpoint/2010/main" val="2616093329"/>
+      </p:ext>
+    </p:extLst>
+  </p:cSld>
+  <p:clrMapOvr>
+    <a:masterClrMapping/>
+  </p:clrMapOvr>
+</p:sld>
+</file>
+
+<file path=ppt/slides/slide17.xml><?xml version="1.0" encoding="utf-8"?>
+<p:sld xmlns:a="http://schemas.openxmlformats.org/drawingml/2006/main" xmlns:r="http://schemas.openxmlformats.org/officeDocument/2006/relationships" xmlns:p="http://schemas.openxmlformats.org/presentationml/2006/main">
+  <p:cSld>
+    <p:spTree>
+      <p:nvGrpSpPr>
+        <p:cNvPr id="1" name=""/>
+        <p:cNvGrpSpPr/>
+        <p:nvPr/>
+      </p:nvGrpSpPr>
+      <p:grpSpPr>
+        <a:xfrm>
+          <a:off x="0" y="0"/>
+          <a:ext cx="0" cy="0"/>
+          <a:chOff x="0" y="0"/>
+          <a:chExt cx="0" cy="0"/>
+        </a:xfrm>
+      </p:grpSpPr>
+      <p:sp>
+        <p:nvSpPr>
+          <p:cNvPr id="2" name="Cím 1"/>
+          <p:cNvSpPr>
+            <a:spLocks noGrp="1"/>
+          </p:cNvSpPr>
+          <p:nvPr>
+            <p:ph type="title"/>
+          </p:nvPr>
+        </p:nvSpPr>
+        <p:spPr/>
+        <p:txBody>
+          <a:bodyPr/>
+          <a:lstStyle/>
+          <a:p>
+            <a:r>
+              <a:rPr lang="hu-HU" dirty="0" err="1"/>
+              <a:t>Transformer</a:t>
+            </a:r>
+            <a:r>
+              <a:rPr lang="hu-HU" dirty="0"/>
+              <a:t> </a:t>
+            </a:r>
+            <a:r>
+              <a:rPr lang="hu-HU" dirty="0" err="1"/>
+              <a:t>Pipelines</a:t>
+            </a:r>
+            <a:endParaRPr lang="en-GB" dirty="0"/>
+          </a:p>
+        </p:txBody>
+      </p:sp>
+      <p:sp>
+        <p:nvSpPr>
+          <p:cNvPr id="3" name="Tartalom helye 2"/>
+          <p:cNvSpPr>
+            <a:spLocks noGrp="1"/>
+          </p:cNvSpPr>
+          <p:nvPr>
+            <p:ph idx="1"/>
+          </p:nvPr>
+        </p:nvSpPr>
+        <p:spPr/>
+        <p:txBody>
+          <a:bodyPr>
+            <a:normAutofit fontScale="92500" lnSpcReduction="10000"/>
+          </a:bodyPr>
+          <a:lstStyle/>
+          <a:p>
+            <a:r>
+              <a:rPr lang="hu-HU" dirty="0" err="1"/>
+              <a:t>If</a:t>
+            </a:r>
+            <a:r>
+              <a:rPr lang="hu-HU" dirty="0"/>
+              <a:t> </a:t>
+            </a:r>
+            <a:r>
+              <a:rPr lang="hu-HU" dirty="0" err="1"/>
+              <a:t>you</a:t>
+            </a:r>
+            <a:r>
+              <a:rPr lang="hu-HU" dirty="0"/>
+              <a:t> </a:t>
+            </a:r>
+            <a:r>
+              <a:rPr lang="hu-HU" b="1" dirty="0" err="1"/>
+              <a:t>only</a:t>
+            </a:r>
+            <a:r>
+              <a:rPr lang="hu-HU" b="1" dirty="0"/>
+              <a:t> </a:t>
+            </a:r>
+            <a:r>
+              <a:rPr lang="hu-HU" b="1" dirty="0" err="1"/>
+              <a:t>specify</a:t>
+            </a:r>
+            <a:r>
+              <a:rPr lang="hu-HU" b="1" dirty="0"/>
+              <a:t> a </a:t>
+            </a:r>
+            <a:r>
+              <a:rPr lang="hu-HU" b="1" dirty="0" err="1"/>
+              <a:t>task</a:t>
+            </a:r>
+            <a:r>
+              <a:rPr lang="hu-HU" dirty="0"/>
+              <a:t>, </a:t>
+            </a:r>
+            <a:r>
+              <a:rPr lang="hu-HU" dirty="0" err="1"/>
+              <a:t>the</a:t>
+            </a:r>
+            <a:r>
+              <a:rPr lang="hu-HU" dirty="0"/>
+              <a:t> </a:t>
+            </a:r>
+            <a:r>
+              <a:rPr lang="hu-HU" dirty="0" err="1"/>
+              <a:t>pipeline</a:t>
+            </a:r>
+            <a:r>
+              <a:rPr lang="hu-HU" dirty="0"/>
+              <a:t> </a:t>
+            </a:r>
+            <a:r>
+              <a:rPr lang="hu-HU" dirty="0" err="1"/>
+              <a:t>function</a:t>
+            </a:r>
+            <a:r>
+              <a:rPr lang="hu-HU" dirty="0"/>
+              <a:t> </a:t>
+            </a:r>
+            <a:r>
+              <a:rPr lang="hu-HU" dirty="0" err="1"/>
+              <a:t>will</a:t>
+            </a:r>
+            <a:r>
+              <a:rPr lang="hu-HU" dirty="0"/>
+              <a:t> </a:t>
+            </a:r>
+            <a:r>
+              <a:rPr lang="hu-HU" dirty="0" err="1"/>
+              <a:t>instantiate</a:t>
+            </a:r>
+            <a:r>
+              <a:rPr lang="hu-HU" dirty="0"/>
+              <a:t> </a:t>
+            </a:r>
+            <a:r>
+              <a:rPr lang="hu-HU" dirty="0" err="1"/>
+              <a:t>a</a:t>
+            </a:r>
+            <a:r>
+              <a:rPr lang="hu-HU" dirty="0"/>
+              <a:t> </a:t>
+            </a:r>
+            <a:r>
+              <a:rPr lang="hu-HU" dirty="0" err="1"/>
+              <a:t>Pipeline</a:t>
+            </a:r>
+            <a:r>
+              <a:rPr lang="hu-HU" dirty="0"/>
+              <a:t> </a:t>
+            </a:r>
+            <a:r>
+              <a:rPr lang="hu-HU" dirty="0" err="1"/>
+              <a:t>object</a:t>
+            </a:r>
+            <a:r>
+              <a:rPr lang="hu-HU" dirty="0"/>
+              <a:t> </a:t>
+            </a:r>
+            <a:r>
+              <a:rPr lang="hu-HU" dirty="0" err="1"/>
+              <a:t>based</a:t>
+            </a:r>
+            <a:r>
+              <a:rPr lang="hu-HU" dirty="0"/>
+              <a:t> </a:t>
+            </a:r>
+            <a:r>
+              <a:rPr lang="hu-HU" dirty="0" err="1"/>
+              <a:t>on</a:t>
+            </a:r>
+            <a:r>
+              <a:rPr lang="hu-HU" dirty="0"/>
+              <a:t> </a:t>
+            </a:r>
+            <a:r>
+              <a:rPr lang="hu-HU" dirty="0" err="1"/>
+              <a:t>a</a:t>
+            </a:r>
+            <a:r>
+              <a:rPr lang="hu-HU" dirty="0"/>
+              <a:t> </a:t>
+            </a:r>
+            <a:r>
+              <a:rPr lang="hu-HU" b="1" dirty="0" err="1"/>
+              <a:t>default</a:t>
+            </a:r>
+            <a:r>
+              <a:rPr lang="hu-HU" b="1" dirty="0"/>
+              <a:t> </a:t>
+            </a:r>
+            <a:r>
+              <a:rPr lang="hu-HU" b="1" dirty="0" err="1"/>
+              <a:t>model</a:t>
+            </a:r>
+            <a:r>
+              <a:rPr lang="hu-HU" b="1" dirty="0"/>
+              <a:t> </a:t>
+            </a:r>
+            <a:r>
+              <a:rPr lang="hu-HU" dirty="0" err="1"/>
+              <a:t>for</a:t>
+            </a:r>
+            <a:r>
+              <a:rPr lang="hu-HU" dirty="0"/>
+              <a:t> </a:t>
+            </a:r>
+            <a:r>
+              <a:rPr lang="hu-HU" dirty="0" err="1"/>
+              <a:t>that</a:t>
+            </a:r>
+            <a:r>
+              <a:rPr lang="hu-HU" dirty="0"/>
+              <a:t> </a:t>
+            </a:r>
+            <a:r>
+              <a:rPr lang="hu-HU" dirty="0" err="1"/>
+              <a:t>task</a:t>
+            </a:r>
+            <a:r>
+              <a:rPr lang="hu-HU" dirty="0"/>
+              <a:t>.</a:t>
+            </a:r>
+          </a:p>
+          <a:p>
+            <a:r>
+              <a:rPr lang="hu-HU" dirty="0" err="1"/>
+              <a:t>You</a:t>
+            </a:r>
+            <a:r>
+              <a:rPr lang="hu-HU" dirty="0"/>
+              <a:t> </a:t>
+            </a:r>
+            <a:r>
+              <a:rPr lang="hu-HU" dirty="0" err="1"/>
+              <a:t>can</a:t>
+            </a:r>
+            <a:r>
+              <a:rPr lang="hu-HU" dirty="0"/>
+              <a:t> </a:t>
+            </a:r>
+            <a:r>
+              <a:rPr lang="hu-HU" dirty="0" err="1"/>
+              <a:t>find</a:t>
+            </a:r>
+            <a:r>
+              <a:rPr lang="hu-HU" dirty="0"/>
+              <a:t> </a:t>
+            </a:r>
+            <a:r>
+              <a:rPr lang="hu-HU" dirty="0" err="1"/>
+              <a:t>models</a:t>
+            </a:r>
+            <a:r>
+              <a:rPr lang="hu-HU" dirty="0"/>
+              <a:t> </a:t>
+            </a:r>
+            <a:r>
+              <a:rPr lang="hu-HU" dirty="0" err="1"/>
+              <a:t>that</a:t>
+            </a:r>
+            <a:r>
+              <a:rPr lang="hu-HU" dirty="0"/>
+              <a:t> </a:t>
+            </a:r>
+            <a:r>
+              <a:rPr lang="hu-HU" dirty="0" err="1"/>
+              <a:t>are</a:t>
+            </a:r>
+            <a:r>
+              <a:rPr lang="hu-HU" dirty="0"/>
+              <a:t> </a:t>
+            </a:r>
+            <a:r>
+              <a:rPr lang="hu-HU" dirty="0" err="1"/>
+              <a:t>compatible</a:t>
+            </a:r>
+            <a:r>
+              <a:rPr lang="hu-HU" dirty="0"/>
+              <a:t> </a:t>
+            </a:r>
+            <a:r>
+              <a:rPr lang="hu-HU" dirty="0" err="1"/>
+              <a:t>with</a:t>
+            </a:r>
+            <a:r>
+              <a:rPr lang="hu-HU" dirty="0"/>
+              <a:t> a </a:t>
+            </a:r>
+            <a:r>
+              <a:rPr lang="hu-HU" dirty="0" err="1"/>
+              <a:t>task</a:t>
+            </a:r>
+            <a:r>
+              <a:rPr lang="hu-HU" dirty="0"/>
+              <a:t> </a:t>
+            </a:r>
+            <a:r>
+              <a:rPr lang="hu-HU" dirty="0" err="1"/>
+              <a:t>by</a:t>
+            </a:r>
+            <a:r>
+              <a:rPr lang="hu-HU" dirty="0"/>
+              <a:t> </a:t>
+            </a:r>
+            <a:r>
+              <a:rPr lang="hu-HU" dirty="0" err="1"/>
+              <a:t>searching</a:t>
+            </a:r>
+            <a:r>
+              <a:rPr lang="hu-HU" dirty="0"/>
+              <a:t> </a:t>
+            </a:r>
+            <a:r>
+              <a:rPr lang="hu-HU" dirty="0" err="1"/>
+              <a:t>the</a:t>
+            </a:r>
+            <a:r>
+              <a:rPr lang="hu-HU" dirty="0"/>
+              <a:t> </a:t>
+            </a:r>
+            <a:r>
+              <a:rPr lang="hu-HU" dirty="0" err="1"/>
+              <a:t>Hugging</a:t>
+            </a:r>
+            <a:r>
+              <a:rPr lang="hu-HU" dirty="0"/>
+              <a:t> </a:t>
+            </a:r>
+            <a:r>
+              <a:rPr lang="hu-HU" dirty="0" err="1"/>
+              <a:t>Face</a:t>
+            </a:r>
+            <a:r>
+              <a:rPr lang="hu-HU" dirty="0"/>
+              <a:t> </a:t>
+            </a:r>
+            <a:r>
+              <a:rPr lang="hu-HU" dirty="0" err="1"/>
+              <a:t>model</a:t>
+            </a:r>
+            <a:r>
+              <a:rPr lang="hu-HU" dirty="0"/>
+              <a:t> </a:t>
+            </a:r>
+            <a:r>
+              <a:rPr lang="hu-HU" dirty="0" err="1"/>
+              <a:t>library</a:t>
+            </a:r>
+            <a:r>
+              <a:rPr lang="hu-HU" dirty="0"/>
+              <a:t> </a:t>
+            </a:r>
+            <a:r>
+              <a:rPr lang="hu-HU" dirty="0" err="1"/>
+              <a:t>for</a:t>
+            </a:r>
+            <a:r>
+              <a:rPr lang="hu-HU" dirty="0"/>
+              <a:t> </a:t>
+            </a:r>
+            <a:r>
+              <a:rPr lang="hu-HU" dirty="0" err="1"/>
+              <a:t>the</a:t>
+            </a:r>
+            <a:r>
+              <a:rPr lang="hu-HU" dirty="0"/>
+              <a:t> </a:t>
+            </a:r>
+            <a:r>
+              <a:rPr lang="hu-HU" b="1" dirty="0" err="1"/>
+              <a:t>task</a:t>
+            </a:r>
+            <a:r>
+              <a:rPr lang="hu-HU" b="1" dirty="0"/>
+              <a:t> </a:t>
+            </a:r>
+            <a:r>
+              <a:rPr lang="hu-HU" b="1" dirty="0" err="1"/>
+              <a:t>name</a:t>
+            </a:r>
+            <a:endParaRPr lang="hu-HU" b="1" dirty="0"/>
+          </a:p>
+          <a:p>
+            <a:r>
+              <a:rPr lang="hu-HU" dirty="0" err="1"/>
+              <a:t>Ideally</a:t>
+            </a:r>
+            <a:r>
+              <a:rPr lang="hu-HU" dirty="0"/>
+              <a:t>, </a:t>
+            </a:r>
+            <a:r>
+              <a:rPr lang="hu-HU" dirty="0" err="1"/>
+              <a:t>each</a:t>
+            </a:r>
+            <a:r>
+              <a:rPr lang="hu-HU" dirty="0"/>
+              <a:t> </a:t>
+            </a:r>
+            <a:r>
+              <a:rPr lang="hu-HU" dirty="0" err="1"/>
+              <a:t>model</a:t>
+            </a:r>
+            <a:r>
+              <a:rPr lang="hu-HU" dirty="0"/>
+              <a:t>’s </a:t>
+            </a:r>
+            <a:r>
+              <a:rPr lang="hu-HU" b="1" dirty="0" err="1"/>
+              <a:t>model</a:t>
+            </a:r>
+            <a:r>
+              <a:rPr lang="hu-HU" b="1" dirty="0"/>
+              <a:t> </a:t>
+            </a:r>
+            <a:r>
+              <a:rPr lang="hu-HU" b="1" dirty="0" err="1"/>
+              <a:t>card</a:t>
+            </a:r>
+            <a:r>
+              <a:rPr lang="hu-HU" dirty="0"/>
+              <a:t> </a:t>
+            </a:r>
+            <a:r>
+              <a:rPr lang="hu-HU" dirty="0" err="1"/>
+              <a:t>contains</a:t>
+            </a:r>
+            <a:r>
+              <a:rPr lang="hu-HU" dirty="0"/>
+              <a:t> a </a:t>
+            </a:r>
+            <a:r>
+              <a:rPr lang="hu-HU" dirty="0" err="1"/>
+              <a:t>description</a:t>
+            </a:r>
+            <a:r>
+              <a:rPr lang="hu-HU" dirty="0"/>
+              <a:t> of </a:t>
+            </a:r>
+            <a:r>
+              <a:rPr lang="hu-HU" b="1" dirty="0" err="1"/>
+              <a:t>what</a:t>
+            </a:r>
+            <a:r>
+              <a:rPr lang="hu-HU" b="1" dirty="0"/>
+              <a:t> </a:t>
+            </a:r>
+            <a:r>
+              <a:rPr lang="hu-HU" dirty="0" err="1"/>
+              <a:t>the</a:t>
+            </a:r>
+            <a:r>
+              <a:rPr lang="hu-HU" dirty="0"/>
+              <a:t> </a:t>
+            </a:r>
+            <a:r>
+              <a:rPr lang="hu-HU" dirty="0" err="1"/>
+              <a:t>specific</a:t>
+            </a:r>
+            <a:r>
+              <a:rPr lang="hu-HU" dirty="0"/>
+              <a:t> </a:t>
+            </a:r>
+            <a:r>
+              <a:rPr lang="hu-HU" dirty="0" err="1"/>
+              <a:t>model</a:t>
+            </a:r>
+            <a:r>
+              <a:rPr lang="hu-HU" dirty="0"/>
+              <a:t> is </a:t>
+            </a:r>
+            <a:r>
+              <a:rPr lang="hu-HU" dirty="0" err="1"/>
+              <a:t>doing</a:t>
+            </a:r>
+            <a:r>
+              <a:rPr lang="hu-HU" dirty="0"/>
+              <a:t> and a </a:t>
+            </a:r>
+            <a:r>
+              <a:rPr lang="hu-HU" b="1" dirty="0" err="1"/>
+              <a:t>code</a:t>
+            </a:r>
+            <a:r>
+              <a:rPr lang="hu-HU" b="1" dirty="0"/>
+              <a:t> </a:t>
+            </a:r>
+            <a:r>
+              <a:rPr lang="hu-HU" b="1" dirty="0" err="1"/>
+              <a:t>snippet</a:t>
+            </a:r>
+            <a:r>
+              <a:rPr lang="hu-HU" b="1" dirty="0"/>
+              <a:t> </a:t>
+            </a:r>
+            <a:r>
+              <a:rPr lang="hu-HU" dirty="0" err="1"/>
+              <a:t>that</a:t>
+            </a:r>
+            <a:r>
+              <a:rPr lang="hu-HU" dirty="0"/>
+              <a:t> </a:t>
+            </a:r>
+            <a:r>
+              <a:rPr lang="hu-HU" dirty="0" err="1"/>
+              <a:t>shows</a:t>
+            </a:r>
+            <a:r>
+              <a:rPr lang="hu-HU" dirty="0"/>
+              <a:t> </a:t>
+            </a:r>
+            <a:r>
+              <a:rPr lang="hu-HU" dirty="0" err="1"/>
+              <a:t>how</a:t>
+            </a:r>
+            <a:r>
+              <a:rPr lang="hu-HU" dirty="0"/>
+              <a:t> </a:t>
+            </a:r>
+            <a:r>
+              <a:rPr lang="hu-HU" dirty="0" err="1"/>
+              <a:t>to</a:t>
+            </a:r>
+            <a:r>
+              <a:rPr lang="hu-HU" dirty="0"/>
+              <a:t> </a:t>
+            </a:r>
+            <a:r>
+              <a:rPr lang="hu-HU" dirty="0" err="1"/>
+              <a:t>instantiate</a:t>
+            </a:r>
+            <a:r>
+              <a:rPr lang="hu-HU" dirty="0"/>
+              <a:t> </a:t>
+            </a:r>
+            <a:r>
+              <a:rPr lang="hu-HU" dirty="0" err="1"/>
+              <a:t>a</a:t>
+            </a:r>
+            <a:r>
+              <a:rPr lang="hu-HU" dirty="0"/>
+              <a:t> </a:t>
+            </a:r>
+            <a:r>
+              <a:rPr lang="hu-HU" dirty="0" err="1"/>
+              <a:t>pipeline</a:t>
+            </a:r>
+            <a:r>
+              <a:rPr lang="hu-HU" dirty="0"/>
+              <a:t> </a:t>
+            </a:r>
+            <a:r>
+              <a:rPr lang="hu-HU" dirty="0" err="1"/>
+              <a:t>with</a:t>
+            </a:r>
+            <a:r>
+              <a:rPr lang="hu-HU" dirty="0"/>
+              <a:t> </a:t>
+            </a:r>
+            <a:r>
+              <a:rPr lang="hu-HU" dirty="0" err="1"/>
+              <a:t>it</a:t>
+            </a:r>
+            <a:r>
+              <a:rPr lang="hu-HU" dirty="0" smtClean="0"/>
+              <a:t>.</a:t>
+            </a:r>
+            <a:endParaRPr lang="hu-HU" dirty="0"/>
+          </a:p>
+        </p:txBody>
+      </p:sp>
+    </p:spTree>
+    <p:extLst>
+      <p:ext uri="{BB962C8B-B14F-4D97-AF65-F5344CB8AC3E}">
+        <p14:creationId xmlns:p14="http://schemas.microsoft.com/office/powerpoint/2010/main" val="735834414"/>
+      </p:ext>
+    </p:extLst>
+  </p:cSld>
+  <p:clrMapOvr>
+    <a:masterClrMapping/>
+  </p:clrMapOvr>
+</p:sld>
+</file>
+
+<file path=ppt/slides/slide18.xml><?xml version="1.0" encoding="utf-8"?>
+<p:sld xmlns:a="http://schemas.openxmlformats.org/drawingml/2006/main" xmlns:r="http://schemas.openxmlformats.org/officeDocument/2006/relationships" xmlns:p="http://schemas.openxmlformats.org/presentationml/2006/main">
+  <p:cSld>
+    <p:spTree>
+      <p:nvGrpSpPr>
+        <p:cNvPr id="1" name=""/>
+        <p:cNvGrpSpPr/>
+        <p:nvPr/>
+      </p:nvGrpSpPr>
+      <p:grpSpPr>
+        <a:xfrm>
+          <a:off x="0" y="0"/>
+          <a:ext cx="0" cy="0"/>
+          <a:chOff x="0" y="0"/>
+          <a:chExt cx="0" cy="0"/>
+        </a:xfrm>
+      </p:grpSpPr>
+      <p:sp>
+        <p:nvSpPr>
+          <p:cNvPr id="2" name="Cím 1"/>
+          <p:cNvSpPr>
+            <a:spLocks noGrp="1"/>
+          </p:cNvSpPr>
+          <p:nvPr>
+            <p:ph type="title"/>
+          </p:nvPr>
+        </p:nvSpPr>
+        <p:spPr/>
+        <p:txBody>
+          <a:bodyPr>
+            <a:noAutofit/>
+          </a:bodyPr>
+          <a:lstStyle/>
+          <a:p>
+            <a:r>
+              <a:rPr lang="hu-HU" sz="3200" dirty="0" err="1" smtClean="0"/>
+              <a:t>Generative</a:t>
+            </a:r>
+            <a:r>
+              <a:rPr lang="hu-HU" sz="3200" dirty="0" smtClean="0"/>
+              <a:t> </a:t>
+            </a:r>
+            <a:r>
+              <a:rPr lang="hu-HU" sz="3200" dirty="0" err="1" smtClean="0"/>
+              <a:t>AI</a:t>
+            </a:r>
+            <a:r>
+              <a:rPr lang="hu-HU" sz="3200" dirty="0" smtClean="0"/>
+              <a:t> versus </a:t>
+            </a:r>
+            <a:br>
+              <a:rPr lang="hu-HU" sz="3200" dirty="0" smtClean="0"/>
+            </a:br>
+            <a:r>
+              <a:rPr lang="hu-HU" sz="3200" dirty="0" err="1" smtClean="0"/>
+              <a:t>Fine-Tuned</a:t>
+            </a:r>
+            <a:r>
+              <a:rPr lang="hu-HU" sz="3200" dirty="0" smtClean="0"/>
+              <a:t> </a:t>
+            </a:r>
+            <a:r>
+              <a:rPr lang="hu-HU" sz="3200" dirty="0" err="1" smtClean="0"/>
+              <a:t>Encoder</a:t>
+            </a:r>
+            <a:r>
+              <a:rPr lang="hu-HU" sz="3200" dirty="0" smtClean="0"/>
+              <a:t> </a:t>
+            </a:r>
+            <a:r>
+              <a:rPr lang="hu-HU" sz="3200" dirty="0" err="1" smtClean="0"/>
+              <a:t>Transformers</a:t>
+            </a:r>
+            <a:endParaRPr lang="en-GB" sz="3200" dirty="0"/>
+          </a:p>
+        </p:txBody>
+      </p:sp>
+      <p:sp>
+        <p:nvSpPr>
+          <p:cNvPr id="3" name="Tartalom helye 2"/>
+          <p:cNvSpPr>
+            <a:spLocks noGrp="1"/>
+          </p:cNvSpPr>
+          <p:nvPr>
+            <p:ph idx="1"/>
+          </p:nvPr>
+        </p:nvSpPr>
+        <p:spPr>
+          <a:xfrm>
+            <a:off x="457200" y="1600200"/>
+            <a:ext cx="8229600" cy="4637112"/>
+          </a:xfrm>
+        </p:spPr>
+        <p:txBody>
+          <a:bodyPr>
+            <a:normAutofit fontScale="70000" lnSpcReduction="20000"/>
+          </a:bodyPr>
+          <a:lstStyle/>
+          <a:p>
+            <a:r>
+              <a:rPr lang="hu-HU" dirty="0" smtClean="0"/>
+              <a:t>A </a:t>
+            </a:r>
+            <a:r>
+              <a:rPr lang="hu-HU" dirty="0" err="1" smtClean="0"/>
+              <a:t>generative</a:t>
+            </a:r>
+            <a:r>
+              <a:rPr lang="hu-HU" dirty="0" smtClean="0"/>
+              <a:t> </a:t>
+            </a:r>
+            <a:r>
+              <a:rPr lang="hu-HU" dirty="0" err="1" smtClean="0"/>
+              <a:t>LLM</a:t>
+            </a:r>
+            <a:r>
+              <a:rPr lang="hu-HU" dirty="0" smtClean="0"/>
+              <a:t> (</a:t>
+            </a:r>
+            <a:r>
+              <a:rPr lang="hu-HU" dirty="0" err="1" smtClean="0"/>
+              <a:t>GPT</a:t>
+            </a:r>
+            <a:r>
+              <a:rPr lang="hu-HU" dirty="0" smtClean="0"/>
+              <a:t>, Claude, </a:t>
+            </a:r>
+            <a:r>
+              <a:rPr lang="hu-HU" dirty="0" err="1" smtClean="0"/>
+              <a:t>Gemini</a:t>
+            </a:r>
+            <a:r>
+              <a:rPr lang="hu-HU" dirty="0" smtClean="0"/>
+              <a:t>, Gemma, </a:t>
+            </a:r>
+            <a:r>
+              <a:rPr lang="hu-HU" dirty="0" err="1" smtClean="0"/>
+              <a:t>Llama</a:t>
+            </a:r>
+            <a:r>
+              <a:rPr lang="hu-HU" dirty="0" smtClean="0"/>
+              <a:t>, etc.) is </a:t>
+            </a:r>
+            <a:r>
+              <a:rPr lang="hu-HU" dirty="0" err="1" smtClean="0"/>
+              <a:t>usually</a:t>
+            </a:r>
+            <a:r>
+              <a:rPr lang="hu-HU" dirty="0" smtClean="0"/>
+              <a:t> </a:t>
+            </a:r>
+            <a:r>
+              <a:rPr lang="hu-HU" dirty="0" err="1" smtClean="0"/>
+              <a:t>great</a:t>
+            </a:r>
+            <a:r>
+              <a:rPr lang="hu-HU" dirty="0" smtClean="0"/>
+              <a:t> </a:t>
+            </a:r>
+            <a:r>
+              <a:rPr lang="hu-HU" dirty="0" err="1" smtClean="0"/>
+              <a:t>at</a:t>
+            </a:r>
+            <a:r>
+              <a:rPr lang="hu-HU" dirty="0" smtClean="0"/>
+              <a:t> </a:t>
+            </a:r>
+            <a:r>
+              <a:rPr lang="hu-HU" dirty="0" err="1" smtClean="0"/>
+              <a:t>solving</a:t>
+            </a:r>
+            <a:r>
+              <a:rPr lang="hu-HU" dirty="0" smtClean="0"/>
+              <a:t> </a:t>
+            </a:r>
+            <a:r>
+              <a:rPr lang="hu-HU" dirty="0" err="1" smtClean="0"/>
+              <a:t>natural</a:t>
+            </a:r>
+            <a:r>
+              <a:rPr lang="hu-HU" dirty="0" smtClean="0"/>
+              <a:t> </a:t>
+            </a:r>
+            <a:r>
+              <a:rPr lang="hu-HU" dirty="0" err="1" smtClean="0"/>
+              <a:t>language</a:t>
+            </a:r>
+            <a:r>
+              <a:rPr lang="hu-HU" dirty="0" smtClean="0"/>
+              <a:t> </a:t>
+            </a:r>
+            <a:r>
+              <a:rPr lang="hu-HU" dirty="0" err="1" smtClean="0"/>
+              <a:t>understanding</a:t>
+            </a:r>
+            <a:r>
+              <a:rPr lang="hu-HU" dirty="0" smtClean="0"/>
+              <a:t> (</a:t>
+            </a:r>
+            <a:r>
+              <a:rPr lang="hu-HU" dirty="0" err="1" smtClean="0"/>
+              <a:t>NLU</a:t>
+            </a:r>
+            <a:r>
+              <a:rPr lang="hu-HU" dirty="0" smtClean="0"/>
+              <a:t>) </a:t>
+            </a:r>
+            <a:r>
+              <a:rPr lang="hu-HU" dirty="0" err="1" smtClean="0"/>
+              <a:t>problems</a:t>
+            </a:r>
+            <a:endParaRPr lang="hu-HU" dirty="0"/>
+          </a:p>
+          <a:p>
+            <a:pPr lvl="1"/>
+            <a:r>
+              <a:rPr lang="hu-HU" dirty="0" err="1" smtClean="0"/>
+              <a:t>even</a:t>
+            </a:r>
+            <a:r>
+              <a:rPr lang="hu-HU" dirty="0" smtClean="0"/>
+              <a:t> </a:t>
+            </a:r>
+            <a:r>
+              <a:rPr lang="hu-HU" dirty="0" err="1" smtClean="0"/>
+              <a:t>with</a:t>
+            </a:r>
+            <a:r>
+              <a:rPr lang="hu-HU" dirty="0" smtClean="0"/>
+              <a:t> </a:t>
+            </a:r>
+            <a:r>
+              <a:rPr lang="hu-HU" b="1" dirty="0" err="1" smtClean="0"/>
+              <a:t>zero-shot</a:t>
+            </a:r>
+            <a:r>
+              <a:rPr lang="hu-HU" b="1" dirty="0" smtClean="0"/>
+              <a:t> prompting</a:t>
+            </a:r>
+            <a:r>
+              <a:rPr lang="hu-HU" dirty="0" smtClean="0"/>
+              <a:t>, </a:t>
+            </a:r>
+            <a:r>
+              <a:rPr lang="hu-HU" dirty="0" err="1" smtClean="0"/>
+              <a:t>e.g</a:t>
+            </a:r>
+            <a:r>
+              <a:rPr lang="hu-HU" dirty="0" smtClean="0"/>
+              <a:t>. </a:t>
+            </a:r>
+            <a:r>
+              <a:rPr lang="hu-HU" dirty="0" err="1" smtClean="0"/>
+              <a:t>you</a:t>
+            </a:r>
+            <a:r>
+              <a:rPr lang="hu-HU" dirty="0" smtClean="0"/>
+              <a:t> </a:t>
+            </a:r>
+            <a:r>
+              <a:rPr lang="hu-HU" dirty="0" err="1" smtClean="0"/>
+              <a:t>provide</a:t>
+            </a:r>
+            <a:r>
+              <a:rPr lang="hu-HU" dirty="0" smtClean="0"/>
+              <a:t> </a:t>
+            </a:r>
+            <a:r>
+              <a:rPr lang="hu-HU" dirty="0" err="1" smtClean="0"/>
+              <a:t>the</a:t>
+            </a:r>
+            <a:r>
+              <a:rPr lang="hu-HU" dirty="0" smtClean="0"/>
+              <a:t> </a:t>
+            </a:r>
+            <a:r>
+              <a:rPr lang="hu-HU" b="1" dirty="0" smtClean="0"/>
+              <a:t>input text </a:t>
+            </a:r>
+            <a:r>
+              <a:rPr lang="hu-HU" dirty="0" err="1" smtClean="0"/>
+              <a:t>to</a:t>
+            </a:r>
+            <a:r>
+              <a:rPr lang="hu-HU" dirty="0" smtClean="0"/>
+              <a:t> be </a:t>
+            </a:r>
+            <a:r>
+              <a:rPr lang="hu-HU" dirty="0" err="1" smtClean="0"/>
+              <a:t>classified</a:t>
+            </a:r>
+            <a:r>
+              <a:rPr lang="hu-HU" dirty="0" smtClean="0"/>
+              <a:t>, </a:t>
+            </a:r>
+            <a:r>
+              <a:rPr lang="hu-HU" dirty="0" err="1" smtClean="0"/>
+              <a:t>the</a:t>
+            </a:r>
+            <a:r>
+              <a:rPr lang="hu-HU" dirty="0" smtClean="0"/>
+              <a:t> </a:t>
+            </a:r>
+            <a:r>
+              <a:rPr lang="hu-HU" b="1" dirty="0" err="1" smtClean="0"/>
+              <a:t>list</a:t>
+            </a:r>
+            <a:r>
+              <a:rPr lang="hu-HU" b="1" dirty="0" smtClean="0"/>
+              <a:t> of </a:t>
+            </a:r>
+            <a:r>
+              <a:rPr lang="hu-HU" b="1" dirty="0" err="1" smtClean="0"/>
+              <a:t>labels</a:t>
+            </a:r>
+            <a:r>
+              <a:rPr lang="hu-HU" dirty="0" smtClean="0"/>
+              <a:t>, and </a:t>
+            </a:r>
+            <a:r>
+              <a:rPr lang="hu-HU" dirty="0" err="1" smtClean="0"/>
+              <a:t>tell</a:t>
+            </a:r>
+            <a:r>
+              <a:rPr lang="hu-HU" dirty="0" smtClean="0"/>
+              <a:t> </a:t>
+            </a:r>
+            <a:r>
+              <a:rPr lang="hu-HU" dirty="0" err="1" smtClean="0"/>
+              <a:t>the</a:t>
+            </a:r>
+            <a:r>
+              <a:rPr lang="hu-HU" dirty="0" smtClean="0"/>
+              <a:t> </a:t>
+            </a:r>
+            <a:r>
+              <a:rPr lang="hu-HU" dirty="0" err="1" smtClean="0"/>
+              <a:t>model</a:t>
+            </a:r>
+            <a:r>
+              <a:rPr lang="hu-HU" dirty="0" smtClean="0"/>
+              <a:t> </a:t>
+            </a:r>
+            <a:r>
+              <a:rPr lang="hu-HU" dirty="0" err="1" smtClean="0"/>
+              <a:t>to</a:t>
+            </a:r>
+            <a:r>
+              <a:rPr lang="hu-HU" dirty="0" smtClean="0"/>
+              <a:t> </a:t>
+            </a:r>
+            <a:r>
+              <a:rPr lang="hu-HU" b="1" dirty="0" smtClean="0"/>
+              <a:t>output </a:t>
+            </a:r>
+            <a:r>
+              <a:rPr lang="hu-HU" b="1" dirty="0" err="1" smtClean="0"/>
+              <a:t>the</a:t>
+            </a:r>
+            <a:r>
+              <a:rPr lang="hu-HU" b="1" dirty="0" smtClean="0"/>
+              <a:t> </a:t>
+            </a:r>
+            <a:r>
+              <a:rPr lang="hu-HU" b="1" dirty="0" err="1" smtClean="0"/>
+              <a:t>correct</a:t>
+            </a:r>
+            <a:r>
+              <a:rPr lang="hu-HU" b="1" dirty="0" smtClean="0"/>
+              <a:t> </a:t>
+            </a:r>
+            <a:r>
+              <a:rPr lang="hu-HU" b="1" dirty="0" err="1" smtClean="0"/>
+              <a:t>label</a:t>
+            </a:r>
+            <a:r>
+              <a:rPr lang="hu-HU" b="1" dirty="0" smtClean="0"/>
+              <a:t> </a:t>
+            </a:r>
+            <a:r>
+              <a:rPr lang="hu-HU" dirty="0" err="1" smtClean="0"/>
+              <a:t>belonging</a:t>
+            </a:r>
+            <a:r>
+              <a:rPr lang="hu-HU" dirty="0" smtClean="0"/>
+              <a:t> </a:t>
+            </a:r>
+            <a:r>
+              <a:rPr lang="hu-HU" dirty="0" err="1" smtClean="0"/>
+              <a:t>to</a:t>
+            </a:r>
+            <a:r>
+              <a:rPr lang="hu-HU" dirty="0" smtClean="0"/>
+              <a:t> </a:t>
+            </a:r>
+            <a:r>
+              <a:rPr lang="hu-HU" dirty="0" err="1" smtClean="0"/>
+              <a:t>the</a:t>
+            </a:r>
+            <a:r>
+              <a:rPr lang="hu-HU" dirty="0" smtClean="0"/>
+              <a:t> input text</a:t>
+            </a:r>
+          </a:p>
+          <a:p>
+            <a:pPr lvl="1"/>
+            <a:r>
+              <a:rPr lang="hu-HU" b="1" dirty="0" err="1" smtClean="0"/>
+              <a:t>few-shot</a:t>
+            </a:r>
+            <a:r>
+              <a:rPr lang="hu-HU" b="1" dirty="0" smtClean="0"/>
+              <a:t> prompting </a:t>
+            </a:r>
+            <a:r>
+              <a:rPr lang="hu-HU" dirty="0" err="1" smtClean="0"/>
+              <a:t>tends</a:t>
+            </a:r>
+            <a:r>
+              <a:rPr lang="hu-HU" dirty="0" smtClean="0"/>
+              <a:t> </a:t>
+            </a:r>
+            <a:r>
+              <a:rPr lang="hu-HU" dirty="0" err="1" smtClean="0"/>
+              <a:t>to</a:t>
+            </a:r>
+            <a:r>
+              <a:rPr lang="hu-HU" dirty="0" smtClean="0"/>
+              <a:t> </a:t>
+            </a:r>
+            <a:r>
+              <a:rPr lang="hu-HU" b="1" dirty="0" err="1" smtClean="0"/>
+              <a:t>improve</a:t>
+            </a:r>
+            <a:r>
+              <a:rPr lang="hu-HU" b="1" dirty="0" smtClean="0"/>
+              <a:t> </a:t>
+            </a:r>
+            <a:r>
+              <a:rPr lang="hu-HU" b="1" dirty="0" err="1" smtClean="0"/>
+              <a:t>label</a:t>
+            </a:r>
+            <a:r>
+              <a:rPr lang="hu-HU" b="1" dirty="0" smtClean="0"/>
+              <a:t> </a:t>
+            </a:r>
+            <a:r>
+              <a:rPr lang="hu-HU" b="1" dirty="0" err="1" smtClean="0"/>
+              <a:t>accuracy</a:t>
+            </a:r>
+            <a:r>
+              <a:rPr lang="hu-HU" b="1" dirty="0" smtClean="0"/>
+              <a:t> </a:t>
+            </a:r>
+            <a:r>
+              <a:rPr lang="hu-HU" b="1" dirty="0" err="1" smtClean="0"/>
+              <a:t>considerably</a:t>
+            </a:r>
+            <a:r>
+              <a:rPr lang="hu-HU" dirty="0" smtClean="0"/>
+              <a:t>: </a:t>
+            </a:r>
+            <a:r>
+              <a:rPr lang="hu-HU" dirty="0" err="1" smtClean="0"/>
+              <a:t>in</a:t>
+            </a:r>
+            <a:r>
+              <a:rPr lang="hu-HU" dirty="0" smtClean="0"/>
+              <a:t> </a:t>
+            </a:r>
+            <a:r>
+              <a:rPr lang="hu-HU" dirty="0" err="1" smtClean="0"/>
+              <a:t>addition</a:t>
+            </a:r>
+            <a:r>
+              <a:rPr lang="hu-HU" dirty="0" smtClean="0"/>
+              <a:t> </a:t>
+            </a:r>
+            <a:r>
+              <a:rPr lang="hu-HU" dirty="0" err="1" smtClean="0"/>
+              <a:t>to</a:t>
+            </a:r>
+            <a:r>
+              <a:rPr lang="hu-HU" dirty="0" smtClean="0"/>
+              <a:t> </a:t>
+            </a:r>
+            <a:r>
+              <a:rPr lang="hu-HU" dirty="0" err="1" smtClean="0"/>
+              <a:t>the</a:t>
+            </a:r>
+            <a:r>
+              <a:rPr lang="hu-HU" dirty="0" smtClean="0"/>
+              <a:t> </a:t>
+            </a:r>
+            <a:r>
+              <a:rPr lang="hu-HU" dirty="0" err="1" smtClean="0"/>
+              <a:t>list</a:t>
+            </a:r>
+            <a:r>
+              <a:rPr lang="hu-HU" dirty="0" smtClean="0"/>
+              <a:t> of </a:t>
+            </a:r>
+            <a:r>
+              <a:rPr lang="hu-HU" dirty="0" err="1" smtClean="0"/>
+              <a:t>labels</a:t>
+            </a:r>
+            <a:r>
+              <a:rPr lang="hu-HU" dirty="0" smtClean="0"/>
+              <a:t>, </a:t>
+            </a:r>
+            <a:r>
+              <a:rPr lang="hu-HU" dirty="0" err="1" smtClean="0"/>
+              <a:t>you</a:t>
+            </a:r>
+            <a:r>
+              <a:rPr lang="hu-HU" dirty="0" smtClean="0"/>
+              <a:t> </a:t>
+            </a:r>
+            <a:r>
+              <a:rPr lang="hu-HU" dirty="0" err="1" smtClean="0"/>
+              <a:t>also</a:t>
+            </a:r>
+            <a:r>
+              <a:rPr lang="hu-HU" dirty="0" smtClean="0"/>
+              <a:t> </a:t>
+            </a:r>
+            <a:r>
+              <a:rPr lang="hu-HU" dirty="0" err="1" smtClean="0"/>
+              <a:t>provide</a:t>
+            </a:r>
+            <a:r>
+              <a:rPr lang="hu-HU" dirty="0" smtClean="0"/>
+              <a:t> a </a:t>
+            </a:r>
+            <a:r>
+              <a:rPr lang="hu-HU" dirty="0" err="1" smtClean="0"/>
+              <a:t>few</a:t>
+            </a:r>
+            <a:r>
+              <a:rPr lang="hu-HU" dirty="0" smtClean="0"/>
+              <a:t> </a:t>
+            </a:r>
+            <a:r>
+              <a:rPr lang="hu-HU" dirty="0" err="1" smtClean="0"/>
+              <a:t>examples</a:t>
+            </a:r>
+            <a:r>
+              <a:rPr lang="hu-HU" dirty="0" smtClean="0"/>
+              <a:t> </a:t>
+            </a:r>
+            <a:r>
+              <a:rPr lang="hu-HU" dirty="0" err="1" smtClean="0"/>
+              <a:t>for</a:t>
+            </a:r>
+            <a:r>
+              <a:rPr lang="hu-HU" dirty="0" smtClean="0"/>
+              <a:t> </a:t>
+            </a:r>
+            <a:r>
+              <a:rPr lang="hu-HU" dirty="0" err="1" smtClean="0"/>
+              <a:t>each</a:t>
+            </a:r>
+            <a:r>
+              <a:rPr lang="hu-HU" dirty="0" smtClean="0"/>
+              <a:t> </a:t>
+            </a:r>
+            <a:r>
+              <a:rPr lang="hu-HU" dirty="0" err="1" smtClean="0"/>
+              <a:t>label</a:t>
+            </a:r>
+            <a:r>
+              <a:rPr lang="hu-HU" dirty="0" smtClean="0"/>
+              <a:t> </a:t>
+            </a:r>
+            <a:r>
+              <a:rPr lang="hu-HU" dirty="0" err="1" smtClean="0"/>
+              <a:t>to</a:t>
+            </a:r>
+            <a:r>
+              <a:rPr lang="hu-HU" dirty="0" smtClean="0"/>
+              <a:t> </a:t>
+            </a:r>
+            <a:r>
+              <a:rPr lang="hu-HU" dirty="0" err="1" smtClean="0"/>
+              <a:t>illustrate</a:t>
+            </a:r>
+            <a:r>
+              <a:rPr lang="hu-HU" dirty="0" smtClean="0"/>
+              <a:t> </a:t>
+            </a:r>
+            <a:r>
+              <a:rPr lang="hu-HU" dirty="0" err="1" smtClean="0"/>
+              <a:t>what</a:t>
+            </a:r>
+            <a:r>
+              <a:rPr lang="hu-HU" dirty="0" smtClean="0"/>
+              <a:t> </a:t>
+            </a:r>
+            <a:r>
+              <a:rPr lang="hu-HU" dirty="0" err="1" smtClean="0"/>
+              <a:t>they</a:t>
+            </a:r>
+            <a:r>
+              <a:rPr lang="hu-HU" dirty="0" smtClean="0"/>
+              <a:t> </a:t>
+            </a:r>
+            <a:r>
+              <a:rPr lang="hu-HU" dirty="0" err="1" smtClean="0"/>
+              <a:t>mean</a:t>
+            </a:r>
+            <a:r>
+              <a:rPr lang="hu-HU" dirty="0" smtClean="0"/>
+              <a:t> </a:t>
+            </a:r>
+            <a:r>
+              <a:rPr lang="hu-HU" dirty="0" err="1" smtClean="0"/>
+              <a:t>inside</a:t>
+            </a:r>
+            <a:r>
+              <a:rPr lang="hu-HU" dirty="0" smtClean="0"/>
+              <a:t> </a:t>
+            </a:r>
+            <a:r>
+              <a:rPr lang="hu-HU" dirty="0" err="1" smtClean="0"/>
+              <a:t>the</a:t>
+            </a:r>
+            <a:r>
+              <a:rPr lang="hu-HU" dirty="0" smtClean="0"/>
+              <a:t> prompt</a:t>
+            </a:r>
+          </a:p>
+          <a:p>
+            <a:pPr lvl="1"/>
+            <a:r>
+              <a:rPr lang="hu-HU" b="1" dirty="0" smtClean="0"/>
+              <a:t>no </a:t>
+            </a:r>
+            <a:r>
+              <a:rPr lang="hu-HU" b="1" dirty="0" err="1" smtClean="0"/>
+              <a:t>need</a:t>
+            </a:r>
+            <a:r>
+              <a:rPr lang="hu-HU" b="1" dirty="0" smtClean="0"/>
+              <a:t> </a:t>
+            </a:r>
+            <a:r>
+              <a:rPr lang="hu-HU" b="1" dirty="0" err="1" smtClean="0"/>
+              <a:t>for</a:t>
+            </a:r>
+            <a:r>
+              <a:rPr lang="hu-HU" b="1" dirty="0" smtClean="0"/>
+              <a:t> </a:t>
+            </a:r>
+            <a:r>
+              <a:rPr lang="hu-HU" b="1" dirty="0" err="1" smtClean="0"/>
+              <a:t>fine-tuning</a:t>
+            </a:r>
+            <a:r>
+              <a:rPr lang="hu-HU" b="1" dirty="0" smtClean="0"/>
+              <a:t>, </a:t>
+            </a:r>
+            <a:r>
+              <a:rPr lang="hu-HU" dirty="0" err="1" smtClean="0"/>
+              <a:t>model</a:t>
+            </a:r>
+            <a:r>
+              <a:rPr lang="hu-HU" dirty="0" smtClean="0"/>
+              <a:t> </a:t>
+            </a:r>
+            <a:r>
+              <a:rPr lang="hu-HU" dirty="0" err="1" smtClean="0"/>
+              <a:t>can</a:t>
+            </a:r>
+            <a:r>
+              <a:rPr lang="hu-HU" dirty="0" smtClean="0"/>
+              <a:t> be </a:t>
+            </a:r>
+            <a:r>
+              <a:rPr lang="hu-HU" dirty="0" err="1" smtClean="0"/>
+              <a:t>used</a:t>
+            </a:r>
+            <a:r>
+              <a:rPr lang="hu-HU" dirty="0" smtClean="0"/>
+              <a:t> </a:t>
+            </a:r>
+            <a:r>
+              <a:rPr lang="hu-HU" dirty="0" err="1" smtClean="0"/>
+              <a:t>off-the-shelf</a:t>
+            </a:r>
+            <a:endParaRPr lang="hu-HU" dirty="0" smtClean="0"/>
+          </a:p>
+          <a:p>
+            <a:r>
+              <a:rPr lang="hu-HU" dirty="0" err="1" smtClean="0"/>
+              <a:t>Why</a:t>
+            </a:r>
+            <a:r>
+              <a:rPr lang="hu-HU" dirty="0" smtClean="0"/>
+              <a:t> </a:t>
+            </a:r>
+            <a:r>
+              <a:rPr lang="hu-HU" dirty="0" err="1" smtClean="0"/>
+              <a:t>not</a:t>
+            </a:r>
+            <a:r>
+              <a:rPr lang="hu-HU" dirty="0" smtClean="0"/>
+              <a:t> </a:t>
+            </a:r>
+            <a:r>
+              <a:rPr lang="hu-HU" dirty="0" err="1" smtClean="0"/>
+              <a:t>use</a:t>
+            </a:r>
+            <a:r>
+              <a:rPr lang="hu-HU" dirty="0" smtClean="0"/>
+              <a:t> </a:t>
+            </a:r>
+            <a:r>
+              <a:rPr lang="hu-HU" dirty="0" err="1" smtClean="0"/>
+              <a:t>generative</a:t>
+            </a:r>
+            <a:r>
+              <a:rPr lang="hu-HU" dirty="0" smtClean="0"/>
+              <a:t> </a:t>
+            </a:r>
+            <a:r>
+              <a:rPr lang="hu-HU" dirty="0" err="1" smtClean="0"/>
+              <a:t>LLMs</a:t>
+            </a:r>
+            <a:r>
+              <a:rPr lang="hu-HU" dirty="0" smtClean="0"/>
+              <a:t> </a:t>
+            </a:r>
+            <a:r>
+              <a:rPr lang="hu-HU" dirty="0" err="1" smtClean="0"/>
+              <a:t>for</a:t>
+            </a:r>
+            <a:r>
+              <a:rPr lang="hu-HU" dirty="0" smtClean="0"/>
+              <a:t> </a:t>
+            </a:r>
+            <a:r>
+              <a:rPr lang="hu-HU" dirty="0" err="1" smtClean="0"/>
+              <a:t>all</a:t>
+            </a:r>
+            <a:r>
+              <a:rPr lang="hu-HU" dirty="0" smtClean="0"/>
+              <a:t> </a:t>
+            </a:r>
+            <a:r>
+              <a:rPr lang="hu-HU" dirty="0" err="1" smtClean="0"/>
+              <a:t>NLP</a:t>
+            </a:r>
+            <a:r>
+              <a:rPr lang="hu-HU" dirty="0" smtClean="0"/>
+              <a:t> </a:t>
+            </a:r>
+            <a:r>
+              <a:rPr lang="hu-HU" dirty="0" err="1" smtClean="0"/>
+              <a:t>tasks</a:t>
+            </a:r>
+            <a:r>
+              <a:rPr lang="hu-HU" dirty="0" smtClean="0"/>
+              <a:t>, </a:t>
+            </a:r>
+            <a:r>
+              <a:rPr lang="hu-HU" dirty="0" err="1" smtClean="0"/>
+              <a:t>at</a:t>
+            </a:r>
+            <a:r>
+              <a:rPr lang="hu-HU" dirty="0" smtClean="0"/>
+              <a:t> </a:t>
+            </a:r>
+            <a:r>
+              <a:rPr lang="hu-HU" dirty="0" err="1" smtClean="0"/>
+              <a:t>least</a:t>
+            </a:r>
+            <a:r>
+              <a:rPr lang="hu-HU" dirty="0" smtClean="0"/>
+              <a:t> </a:t>
+            </a:r>
+            <a:r>
+              <a:rPr lang="hu-HU" dirty="0" err="1" smtClean="0"/>
+              <a:t>those</a:t>
+            </a:r>
+            <a:r>
+              <a:rPr lang="hu-HU" dirty="0" smtClean="0"/>
+              <a:t> </a:t>
+            </a:r>
+            <a:r>
+              <a:rPr lang="hu-HU" dirty="0" err="1" smtClean="0"/>
+              <a:t>that</a:t>
+            </a:r>
+            <a:r>
+              <a:rPr lang="hu-HU" dirty="0" smtClean="0"/>
+              <a:t> </a:t>
+            </a:r>
+            <a:r>
+              <a:rPr lang="hu-HU" dirty="0" err="1" smtClean="0"/>
+              <a:t>involve</a:t>
+            </a:r>
+            <a:r>
+              <a:rPr lang="hu-HU" dirty="0" smtClean="0"/>
+              <a:t> </a:t>
+            </a:r>
+            <a:r>
+              <a:rPr lang="hu-HU" dirty="0" err="1" smtClean="0"/>
+              <a:t>NLU</a:t>
+            </a:r>
+            <a:r>
+              <a:rPr lang="hu-HU" dirty="0" smtClean="0"/>
+              <a:t>?</a:t>
+            </a:r>
+          </a:p>
+          <a:p>
+            <a:pPr lvl="1"/>
+            <a:r>
+              <a:rPr lang="hu-HU" dirty="0" smtClean="0"/>
+              <a:t>text </a:t>
+            </a:r>
+            <a:r>
+              <a:rPr lang="hu-HU" dirty="0" err="1" smtClean="0"/>
+              <a:t>classification</a:t>
+            </a:r>
+            <a:endParaRPr lang="hu-HU" dirty="0" smtClean="0"/>
+          </a:p>
+          <a:p>
+            <a:pPr lvl="1"/>
+            <a:r>
+              <a:rPr lang="hu-HU" dirty="0" err="1" smtClean="0"/>
+              <a:t>question</a:t>
+            </a:r>
+            <a:r>
+              <a:rPr lang="hu-HU" dirty="0" smtClean="0"/>
+              <a:t> </a:t>
+            </a:r>
+            <a:r>
+              <a:rPr lang="hu-HU" dirty="0" err="1" smtClean="0"/>
+              <a:t>answering</a:t>
+            </a:r>
+            <a:endParaRPr lang="hu-HU" dirty="0" smtClean="0"/>
+          </a:p>
+          <a:p>
+            <a:pPr lvl="1"/>
+            <a:r>
+              <a:rPr lang="hu-HU" dirty="0" err="1" smtClean="0"/>
+              <a:t>abstractive</a:t>
+            </a:r>
+            <a:r>
+              <a:rPr lang="hu-HU" dirty="0" smtClean="0"/>
+              <a:t> </a:t>
+            </a:r>
+            <a:r>
+              <a:rPr lang="hu-HU" dirty="0" err="1" smtClean="0"/>
+              <a:t>summarisation</a:t>
+            </a:r>
+            <a:r>
+              <a:rPr lang="hu-HU" dirty="0" smtClean="0"/>
+              <a:t> (</a:t>
+            </a:r>
+            <a:r>
+              <a:rPr lang="hu-HU" dirty="0" err="1" smtClean="0"/>
+              <a:t>generating</a:t>
+            </a:r>
+            <a:r>
+              <a:rPr lang="hu-HU" dirty="0" smtClean="0"/>
+              <a:t> a </a:t>
+            </a:r>
+            <a:r>
+              <a:rPr lang="hu-HU" dirty="0" err="1" smtClean="0"/>
+              <a:t>summary</a:t>
+            </a:r>
+            <a:r>
+              <a:rPr lang="hu-HU" dirty="0" smtClean="0"/>
+              <a:t> </a:t>
+            </a:r>
+            <a:r>
+              <a:rPr lang="hu-HU" dirty="0" err="1" smtClean="0"/>
+              <a:t>as</a:t>
+            </a:r>
+            <a:r>
+              <a:rPr lang="hu-HU" dirty="0" smtClean="0"/>
+              <a:t> </a:t>
+            </a:r>
+            <a:r>
+              <a:rPr lang="hu-HU" dirty="0" err="1" smtClean="0"/>
+              <a:t>opposed</a:t>
+            </a:r>
+            <a:r>
+              <a:rPr lang="hu-HU" dirty="0" smtClean="0"/>
+              <a:t> </a:t>
+            </a:r>
+            <a:r>
+              <a:rPr lang="hu-HU" dirty="0" err="1" smtClean="0"/>
+              <a:t>to</a:t>
+            </a:r>
+            <a:r>
+              <a:rPr lang="hu-HU" dirty="0" smtClean="0"/>
+              <a:t> </a:t>
+            </a:r>
+            <a:r>
+              <a:rPr lang="hu-HU" dirty="0" err="1" smtClean="0"/>
+              <a:t>extracting</a:t>
+            </a:r>
+            <a:r>
+              <a:rPr lang="hu-HU" dirty="0" smtClean="0"/>
+              <a:t> </a:t>
+            </a:r>
+            <a:r>
+              <a:rPr lang="hu-HU" dirty="0" err="1" smtClean="0"/>
+              <a:t>key</a:t>
+            </a:r>
+            <a:r>
+              <a:rPr lang="hu-HU" dirty="0" smtClean="0"/>
+              <a:t> </a:t>
+            </a:r>
+            <a:r>
+              <a:rPr lang="hu-HU" dirty="0" err="1" smtClean="0"/>
+              <a:t>sentences</a:t>
+            </a:r>
+            <a:r>
+              <a:rPr lang="hu-HU" dirty="0" smtClean="0"/>
+              <a:t>)</a:t>
+            </a:r>
+            <a:endParaRPr lang="en-GB" dirty="0"/>
+          </a:p>
+        </p:txBody>
+      </p:sp>
+    </p:spTree>
+    <p:extLst>
+      <p:ext uri="{BB962C8B-B14F-4D97-AF65-F5344CB8AC3E}">
+        <p14:creationId xmlns:p14="http://schemas.microsoft.com/office/powerpoint/2010/main" val="3814244537"/>
+      </p:ext>
+    </p:extLst>
+  </p:cSld>
+  <p:clrMapOvr>
+    <a:masterClrMapping/>
+  </p:clrMapOvr>
+</p:sld>
+</file>
+
+<file path=ppt/slides/slide19.xml><?xml version="1.0" encoding="utf-8"?>
+<p:sld xmlns:a="http://schemas.openxmlformats.org/drawingml/2006/main" xmlns:r="http://schemas.openxmlformats.org/officeDocument/2006/relationships" xmlns:p="http://schemas.openxmlformats.org/presentationml/2006/main">
+  <p:cSld>
+    <p:spTree>
+      <p:nvGrpSpPr>
+        <p:cNvPr id="1" name=""/>
+        <p:cNvGrpSpPr/>
+        <p:nvPr/>
+      </p:nvGrpSpPr>
+      <p:grpSpPr>
+        <a:xfrm>
+          <a:off x="0" y="0"/>
+          <a:ext cx="0" cy="0"/>
+          <a:chOff x="0" y="0"/>
+          <a:chExt cx="0" cy="0"/>
+        </a:xfrm>
+      </p:grpSpPr>
+      <p:sp>
+        <p:nvSpPr>
+          <p:cNvPr id="2" name="Cím 1"/>
+          <p:cNvSpPr>
+            <a:spLocks noGrp="1"/>
+          </p:cNvSpPr>
+          <p:nvPr>
+            <p:ph type="title"/>
+          </p:nvPr>
+        </p:nvSpPr>
+        <p:spPr/>
+        <p:txBody>
+          <a:bodyPr>
+            <a:noAutofit/>
+          </a:bodyPr>
+          <a:lstStyle/>
+          <a:p>
+            <a:r>
+              <a:rPr lang="hu-HU" sz="3200" dirty="0" err="1"/>
+              <a:t>Generative</a:t>
+            </a:r>
+            <a:r>
+              <a:rPr lang="hu-HU" sz="3200" dirty="0"/>
+              <a:t> </a:t>
+            </a:r>
+            <a:r>
+              <a:rPr lang="hu-HU" sz="3200" dirty="0" err="1"/>
+              <a:t>AI</a:t>
+            </a:r>
+            <a:r>
+              <a:rPr lang="hu-HU" sz="3200" dirty="0"/>
+              <a:t> versus </a:t>
+            </a:r>
+            <a:br>
+              <a:rPr lang="hu-HU" sz="3200" dirty="0"/>
+            </a:br>
+            <a:r>
+              <a:rPr lang="hu-HU" sz="3200" dirty="0" err="1"/>
+              <a:t>Fine-Tuned</a:t>
+            </a:r>
+            <a:r>
+              <a:rPr lang="hu-HU" sz="3200" dirty="0"/>
+              <a:t> </a:t>
+            </a:r>
+            <a:r>
+              <a:rPr lang="hu-HU" sz="3200" dirty="0" err="1"/>
+              <a:t>Encoder</a:t>
+            </a:r>
+            <a:r>
+              <a:rPr lang="hu-HU" sz="3200" dirty="0"/>
+              <a:t> </a:t>
+            </a:r>
+            <a:r>
+              <a:rPr lang="hu-HU" sz="3200" dirty="0" err="1"/>
+              <a:t>Transformers</a:t>
+            </a:r>
+            <a:endParaRPr lang="en-GB" sz="3200" dirty="0"/>
+          </a:p>
+        </p:txBody>
+      </p:sp>
+      <p:sp>
+        <p:nvSpPr>
+          <p:cNvPr id="3" name="Tartalom helye 2"/>
+          <p:cNvSpPr>
+            <a:spLocks noGrp="1"/>
+          </p:cNvSpPr>
+          <p:nvPr>
+            <p:ph idx="1"/>
+          </p:nvPr>
+        </p:nvSpPr>
+        <p:spPr>
+          <a:xfrm>
+            <a:off x="467544" y="1628800"/>
+            <a:ext cx="8229600" cy="4896544"/>
+          </a:xfrm>
+        </p:spPr>
+        <p:txBody>
+          <a:bodyPr>
+            <a:normAutofit fontScale="55000" lnSpcReduction="20000"/>
+          </a:bodyPr>
+          <a:lstStyle/>
+          <a:p>
+            <a:r>
+              <a:rPr lang="hu-HU" dirty="0" err="1"/>
+              <a:t>Why</a:t>
+            </a:r>
+            <a:r>
+              <a:rPr lang="hu-HU" dirty="0"/>
+              <a:t> </a:t>
+            </a:r>
+            <a:r>
+              <a:rPr lang="hu-HU" dirty="0" err="1"/>
+              <a:t>not</a:t>
+            </a:r>
+            <a:r>
+              <a:rPr lang="hu-HU" dirty="0"/>
+              <a:t> </a:t>
+            </a:r>
+            <a:r>
+              <a:rPr lang="hu-HU" dirty="0" err="1"/>
+              <a:t>use</a:t>
+            </a:r>
+            <a:r>
+              <a:rPr lang="hu-HU" dirty="0"/>
+              <a:t> </a:t>
+            </a:r>
+            <a:r>
+              <a:rPr lang="hu-HU" dirty="0" err="1"/>
+              <a:t>generative</a:t>
+            </a:r>
+            <a:r>
+              <a:rPr lang="hu-HU" dirty="0"/>
+              <a:t> </a:t>
+            </a:r>
+            <a:r>
+              <a:rPr lang="hu-HU" dirty="0" err="1"/>
+              <a:t>LLMs</a:t>
+            </a:r>
+            <a:r>
+              <a:rPr lang="hu-HU" dirty="0"/>
+              <a:t> </a:t>
+            </a:r>
+            <a:r>
+              <a:rPr lang="hu-HU" dirty="0" err="1"/>
+              <a:t>for</a:t>
+            </a:r>
+            <a:r>
+              <a:rPr lang="hu-HU" dirty="0"/>
+              <a:t> </a:t>
+            </a:r>
+            <a:r>
+              <a:rPr lang="hu-HU" dirty="0" err="1"/>
+              <a:t>all</a:t>
+            </a:r>
+            <a:r>
+              <a:rPr lang="hu-HU" dirty="0"/>
+              <a:t> </a:t>
+            </a:r>
+            <a:r>
+              <a:rPr lang="hu-HU" dirty="0" err="1"/>
+              <a:t>NLP</a:t>
+            </a:r>
+            <a:r>
+              <a:rPr lang="hu-HU" dirty="0"/>
+              <a:t> </a:t>
+            </a:r>
+            <a:r>
+              <a:rPr lang="hu-HU" dirty="0" err="1" smtClean="0"/>
+              <a:t>tasks</a:t>
+            </a:r>
+            <a:r>
+              <a:rPr lang="hu-HU" dirty="0" smtClean="0"/>
+              <a:t>?</a:t>
+            </a:r>
+          </a:p>
+          <a:p>
+            <a:r>
+              <a:rPr lang="hu-HU" dirty="0" err="1" smtClean="0"/>
+              <a:t>Reason</a:t>
+            </a:r>
+            <a:r>
+              <a:rPr lang="hu-HU" dirty="0" smtClean="0"/>
+              <a:t> 1: </a:t>
+            </a:r>
+            <a:r>
+              <a:rPr lang="hu-HU" b="1" dirty="0" err="1" smtClean="0"/>
+              <a:t>efficiency</a:t>
+            </a:r>
+            <a:endParaRPr lang="hu-HU" b="1" dirty="0" smtClean="0"/>
+          </a:p>
+          <a:p>
+            <a:pPr lvl="1"/>
+            <a:r>
+              <a:rPr lang="hu-HU" dirty="0" smtClean="0"/>
+              <a:t>an </a:t>
+            </a:r>
+            <a:r>
+              <a:rPr lang="hu-HU" b="1" dirty="0" err="1" smtClean="0"/>
+              <a:t>encoder</a:t>
+            </a:r>
+            <a:r>
+              <a:rPr lang="hu-HU" b="1" dirty="0" smtClean="0"/>
+              <a:t> </a:t>
+            </a:r>
+            <a:r>
+              <a:rPr lang="hu-HU" b="1" dirty="0" err="1" smtClean="0"/>
+              <a:t>transformer</a:t>
+            </a:r>
+            <a:r>
+              <a:rPr lang="hu-HU" b="1" dirty="0" smtClean="0"/>
+              <a:t> </a:t>
+            </a:r>
+            <a:r>
+              <a:rPr lang="hu-HU" dirty="0" err="1" smtClean="0"/>
+              <a:t>processes</a:t>
+            </a:r>
+            <a:r>
+              <a:rPr lang="hu-HU" dirty="0" smtClean="0"/>
+              <a:t> </a:t>
+            </a:r>
+            <a:r>
+              <a:rPr lang="hu-HU" dirty="0" err="1" smtClean="0"/>
+              <a:t>the</a:t>
+            </a:r>
+            <a:r>
+              <a:rPr lang="hu-HU" dirty="0" smtClean="0"/>
+              <a:t> input text </a:t>
+            </a:r>
+            <a:r>
+              <a:rPr lang="hu-HU" b="1" dirty="0" err="1" smtClean="0"/>
+              <a:t>exactly</a:t>
+            </a:r>
+            <a:r>
+              <a:rPr lang="hu-HU" b="1" dirty="0" smtClean="0"/>
+              <a:t> </a:t>
+            </a:r>
+            <a:r>
+              <a:rPr lang="hu-HU" b="1" dirty="0" err="1" smtClean="0"/>
+              <a:t>once</a:t>
+            </a:r>
+            <a:r>
+              <a:rPr lang="hu-HU" b="1" dirty="0" smtClean="0"/>
+              <a:t> </a:t>
+            </a:r>
+            <a:r>
+              <a:rPr lang="hu-HU" dirty="0" err="1" smtClean="0"/>
+              <a:t>before</a:t>
+            </a:r>
+            <a:r>
+              <a:rPr lang="hu-HU" dirty="0" smtClean="0"/>
+              <a:t> </a:t>
+            </a:r>
+            <a:r>
+              <a:rPr lang="hu-HU" dirty="0" err="1" smtClean="0"/>
+              <a:t>calculating</a:t>
+            </a:r>
+            <a:r>
+              <a:rPr lang="hu-HU" dirty="0" smtClean="0"/>
+              <a:t> a </a:t>
+            </a:r>
+            <a:r>
+              <a:rPr lang="hu-HU" dirty="0" err="1" smtClean="0"/>
+              <a:t>label</a:t>
+            </a:r>
+            <a:endParaRPr lang="hu-HU" dirty="0" smtClean="0"/>
+          </a:p>
+          <a:p>
+            <a:pPr lvl="2"/>
+            <a:r>
+              <a:rPr lang="hu-HU" dirty="0" err="1" smtClean="0"/>
+              <a:t>either</a:t>
+            </a:r>
+            <a:r>
+              <a:rPr lang="hu-HU" dirty="0" smtClean="0"/>
+              <a:t> </a:t>
+            </a:r>
+            <a:r>
+              <a:rPr lang="hu-HU" dirty="0" err="1" smtClean="0"/>
+              <a:t>for</a:t>
+            </a:r>
+            <a:r>
+              <a:rPr lang="hu-HU" dirty="0" smtClean="0"/>
+              <a:t> </a:t>
+            </a:r>
+            <a:r>
+              <a:rPr lang="hu-HU" dirty="0" err="1" smtClean="0"/>
+              <a:t>the</a:t>
+            </a:r>
+            <a:r>
+              <a:rPr lang="hu-HU" dirty="0" smtClean="0"/>
+              <a:t> </a:t>
+            </a:r>
+            <a:r>
+              <a:rPr lang="hu-HU" dirty="0" err="1" smtClean="0"/>
+              <a:t>whole</a:t>
+            </a:r>
+            <a:r>
+              <a:rPr lang="hu-HU" dirty="0" smtClean="0"/>
+              <a:t> </a:t>
+            </a:r>
+            <a:r>
+              <a:rPr lang="hu-HU" dirty="0" err="1" smtClean="0"/>
+              <a:t>sequence</a:t>
+            </a:r>
+            <a:r>
+              <a:rPr lang="hu-HU" dirty="0" smtClean="0"/>
+              <a:t> </a:t>
+            </a:r>
+            <a:r>
+              <a:rPr lang="hu-HU" dirty="0" err="1" smtClean="0"/>
+              <a:t>or</a:t>
+            </a:r>
+            <a:r>
+              <a:rPr lang="hu-HU" dirty="0" smtClean="0"/>
+              <a:t> </a:t>
+            </a:r>
+            <a:r>
+              <a:rPr lang="hu-HU" dirty="0" err="1" smtClean="0"/>
+              <a:t>each</a:t>
+            </a:r>
+            <a:r>
+              <a:rPr lang="hu-HU" dirty="0" smtClean="0"/>
+              <a:t> </a:t>
+            </a:r>
+            <a:r>
+              <a:rPr lang="hu-HU" dirty="0" err="1" smtClean="0"/>
+              <a:t>token</a:t>
+            </a:r>
+            <a:endParaRPr lang="hu-HU" dirty="0" smtClean="0"/>
+          </a:p>
+          <a:p>
+            <a:pPr lvl="1"/>
+            <a:r>
+              <a:rPr lang="hu-HU" dirty="0" smtClean="0"/>
+              <a:t>a </a:t>
+            </a:r>
+            <a:r>
+              <a:rPr lang="hu-HU" b="1" dirty="0" err="1" smtClean="0"/>
+              <a:t>generative</a:t>
+            </a:r>
+            <a:r>
+              <a:rPr lang="hu-HU" b="1" dirty="0" smtClean="0"/>
+              <a:t> LM </a:t>
+            </a:r>
+            <a:r>
+              <a:rPr lang="hu-HU" dirty="0" err="1" smtClean="0"/>
+              <a:t>processes</a:t>
+            </a:r>
+            <a:r>
+              <a:rPr lang="hu-HU" dirty="0" smtClean="0"/>
+              <a:t> </a:t>
+            </a:r>
+            <a:r>
+              <a:rPr lang="hu-HU" dirty="0" err="1" smtClean="0"/>
+              <a:t>the</a:t>
+            </a:r>
+            <a:r>
+              <a:rPr lang="hu-HU" dirty="0" smtClean="0"/>
+              <a:t> input plus </a:t>
+            </a:r>
+            <a:r>
+              <a:rPr lang="hu-HU" dirty="0" err="1" smtClean="0"/>
+              <a:t>the</a:t>
+            </a:r>
+            <a:r>
+              <a:rPr lang="hu-HU" dirty="0" smtClean="0"/>
+              <a:t> output </a:t>
+            </a:r>
+            <a:r>
+              <a:rPr lang="hu-HU" dirty="0" err="1" smtClean="0"/>
+              <a:t>generated</a:t>
+            </a:r>
+            <a:r>
+              <a:rPr lang="hu-HU" dirty="0" smtClean="0"/>
+              <a:t> </a:t>
+            </a:r>
+            <a:r>
+              <a:rPr lang="hu-HU" dirty="0" err="1" smtClean="0"/>
+              <a:t>so</a:t>
+            </a:r>
+            <a:r>
+              <a:rPr lang="hu-HU" dirty="0" smtClean="0"/>
+              <a:t> far </a:t>
+            </a:r>
+            <a:r>
+              <a:rPr lang="hu-HU" b="1" dirty="0" err="1" smtClean="0"/>
+              <a:t>once</a:t>
+            </a:r>
+            <a:r>
+              <a:rPr lang="hu-HU" b="1" dirty="0" smtClean="0"/>
+              <a:t> </a:t>
+            </a:r>
+            <a:r>
+              <a:rPr lang="hu-HU" b="1" dirty="0" err="1" smtClean="0"/>
+              <a:t>for</a:t>
+            </a:r>
+            <a:r>
+              <a:rPr lang="hu-HU" b="1" dirty="0" smtClean="0"/>
+              <a:t> </a:t>
+            </a:r>
+            <a:r>
+              <a:rPr lang="hu-HU" b="1" dirty="0" err="1" smtClean="0"/>
+              <a:t>each</a:t>
+            </a:r>
+            <a:r>
+              <a:rPr lang="hu-HU" b="1" dirty="0" smtClean="0"/>
+              <a:t> output </a:t>
+            </a:r>
+            <a:r>
+              <a:rPr lang="hu-HU" b="1" dirty="0" err="1" smtClean="0"/>
+              <a:t>token</a:t>
+            </a:r>
+            <a:r>
+              <a:rPr lang="hu-HU" b="1" dirty="0" smtClean="0"/>
+              <a:t> </a:t>
+            </a:r>
+            <a:r>
+              <a:rPr lang="hu-HU" dirty="0" smtClean="0"/>
+              <a:t>being </a:t>
+            </a:r>
+            <a:r>
+              <a:rPr lang="hu-HU" dirty="0" err="1" smtClean="0"/>
+              <a:t>generated</a:t>
+            </a:r>
+            <a:endParaRPr lang="hu-HU" dirty="0" smtClean="0"/>
+          </a:p>
+          <a:p>
+            <a:pPr lvl="2"/>
+            <a:r>
+              <a:rPr lang="hu-HU" dirty="0" err="1" smtClean="0"/>
+              <a:t>n-fold</a:t>
+            </a:r>
+            <a:r>
+              <a:rPr lang="hu-HU" dirty="0" smtClean="0"/>
+              <a:t> </a:t>
+            </a:r>
+            <a:r>
+              <a:rPr lang="hu-HU" dirty="0" err="1" smtClean="0"/>
+              <a:t>increase</a:t>
+            </a:r>
+            <a:r>
+              <a:rPr lang="hu-HU" dirty="0" smtClean="0"/>
+              <a:t> </a:t>
+            </a:r>
+            <a:r>
+              <a:rPr lang="hu-HU" dirty="0" err="1" smtClean="0"/>
+              <a:t>in</a:t>
+            </a:r>
+            <a:r>
+              <a:rPr lang="hu-HU" dirty="0" smtClean="0"/>
+              <a:t> </a:t>
+            </a:r>
+            <a:r>
+              <a:rPr lang="hu-HU" dirty="0" err="1" smtClean="0"/>
+              <a:t>processing</a:t>
+            </a:r>
+            <a:r>
+              <a:rPr lang="hu-HU" dirty="0" smtClean="0"/>
+              <a:t> </a:t>
+            </a:r>
+            <a:r>
+              <a:rPr lang="hu-HU" dirty="0" err="1" smtClean="0"/>
+              <a:t>time</a:t>
+            </a:r>
+            <a:r>
+              <a:rPr lang="hu-HU" dirty="0" smtClean="0"/>
+              <a:t> and </a:t>
+            </a:r>
+            <a:r>
+              <a:rPr lang="hu-HU" dirty="0" err="1" smtClean="0"/>
+              <a:t>cost</a:t>
+            </a:r>
+            <a:endParaRPr lang="hu-HU" dirty="0" smtClean="0"/>
+          </a:p>
+          <a:p>
+            <a:r>
+              <a:rPr lang="hu-HU" dirty="0" err="1" smtClean="0"/>
+              <a:t>Reason</a:t>
+            </a:r>
+            <a:r>
+              <a:rPr lang="hu-HU" dirty="0" smtClean="0"/>
+              <a:t> 2: </a:t>
+            </a:r>
+            <a:r>
+              <a:rPr lang="hu-HU" b="1" dirty="0" err="1" smtClean="0"/>
+              <a:t>reliability</a:t>
+            </a:r>
+            <a:endParaRPr lang="hu-HU" b="1" dirty="0" smtClean="0"/>
+          </a:p>
+          <a:p>
+            <a:pPr lvl="1"/>
+            <a:r>
+              <a:rPr lang="hu-HU" dirty="0" smtClean="0"/>
+              <a:t>an </a:t>
+            </a:r>
+            <a:r>
+              <a:rPr lang="hu-HU" dirty="0" err="1" smtClean="0"/>
+              <a:t>encoder</a:t>
+            </a:r>
+            <a:r>
+              <a:rPr lang="hu-HU" dirty="0" smtClean="0"/>
+              <a:t> </a:t>
+            </a:r>
+            <a:r>
+              <a:rPr lang="hu-HU" dirty="0" err="1" smtClean="0"/>
+              <a:t>transformer</a:t>
+            </a:r>
+            <a:r>
+              <a:rPr lang="hu-HU" dirty="0" smtClean="0"/>
+              <a:t> </a:t>
+            </a:r>
+            <a:r>
+              <a:rPr lang="hu-HU" dirty="0" err="1" smtClean="0"/>
+              <a:t>outputs</a:t>
+            </a:r>
+            <a:r>
+              <a:rPr lang="hu-HU" dirty="0" smtClean="0"/>
+              <a:t> a </a:t>
+            </a:r>
+            <a:r>
+              <a:rPr lang="hu-HU" b="1" dirty="0" err="1" smtClean="0"/>
+              <a:t>single</a:t>
+            </a:r>
+            <a:r>
+              <a:rPr lang="hu-HU" b="1" dirty="0" smtClean="0"/>
+              <a:t> </a:t>
+            </a:r>
+            <a:r>
+              <a:rPr lang="hu-HU" b="1" dirty="0" err="1" smtClean="0"/>
+              <a:t>real</a:t>
+            </a:r>
+            <a:r>
+              <a:rPr lang="hu-HU" b="1" dirty="0" smtClean="0"/>
+              <a:t> </a:t>
+            </a:r>
+            <a:r>
+              <a:rPr lang="hu-HU" b="1" dirty="0" err="1" smtClean="0"/>
+              <a:t>number</a:t>
+            </a:r>
+            <a:r>
+              <a:rPr lang="hu-HU" b="1" dirty="0" smtClean="0"/>
+              <a:t> </a:t>
+            </a:r>
+            <a:r>
+              <a:rPr lang="hu-HU" dirty="0" err="1" smtClean="0"/>
+              <a:t>when</a:t>
+            </a:r>
+            <a:r>
+              <a:rPr lang="hu-HU" dirty="0" smtClean="0"/>
+              <a:t> </a:t>
+            </a:r>
+            <a:r>
+              <a:rPr lang="hu-HU" dirty="0" err="1" smtClean="0"/>
+              <a:t>doing</a:t>
+            </a:r>
+            <a:r>
+              <a:rPr lang="hu-HU" dirty="0" smtClean="0"/>
+              <a:t> </a:t>
+            </a:r>
+            <a:r>
+              <a:rPr lang="hu-HU" dirty="0" err="1" smtClean="0"/>
+              <a:t>binary</a:t>
+            </a:r>
+            <a:r>
+              <a:rPr lang="hu-HU" dirty="0" smtClean="0"/>
+              <a:t> </a:t>
+            </a:r>
+            <a:r>
+              <a:rPr lang="hu-HU" dirty="0" err="1" smtClean="0"/>
+              <a:t>classification</a:t>
+            </a:r>
+            <a:r>
+              <a:rPr lang="hu-HU" dirty="0" smtClean="0"/>
+              <a:t> </a:t>
+            </a:r>
+            <a:r>
+              <a:rPr lang="hu-HU" dirty="0" err="1" smtClean="0"/>
+              <a:t>or</a:t>
+            </a:r>
+            <a:r>
+              <a:rPr lang="hu-HU" dirty="0" smtClean="0"/>
+              <a:t> </a:t>
+            </a:r>
+            <a:r>
+              <a:rPr lang="hu-HU" dirty="0" err="1" smtClean="0"/>
+              <a:t>a</a:t>
+            </a:r>
+            <a:r>
+              <a:rPr lang="hu-HU" dirty="0" smtClean="0"/>
+              <a:t> </a:t>
+            </a:r>
+            <a:r>
+              <a:rPr lang="hu-HU" dirty="0" err="1" smtClean="0"/>
+              <a:t>single</a:t>
+            </a:r>
+            <a:r>
+              <a:rPr lang="hu-HU" dirty="0" smtClean="0"/>
+              <a:t> </a:t>
+            </a:r>
+            <a:r>
+              <a:rPr lang="hu-HU" b="1" dirty="0" err="1" smtClean="0"/>
+              <a:t>real-valued</a:t>
+            </a:r>
+            <a:r>
+              <a:rPr lang="hu-HU" b="1" dirty="0" smtClean="0"/>
+              <a:t> </a:t>
+            </a:r>
+            <a:r>
+              <a:rPr lang="hu-HU" b="1" i="1" dirty="0" err="1" smtClean="0"/>
+              <a:t>k</a:t>
+            </a:r>
+            <a:r>
+              <a:rPr lang="hu-HU" b="1" dirty="0" err="1" smtClean="0"/>
+              <a:t>-dimensional</a:t>
+            </a:r>
+            <a:r>
+              <a:rPr lang="hu-HU" b="1" dirty="0" smtClean="0"/>
+              <a:t> </a:t>
+            </a:r>
+            <a:r>
+              <a:rPr lang="hu-HU" b="1" dirty="0" err="1" smtClean="0"/>
+              <a:t>numeric</a:t>
+            </a:r>
+            <a:r>
+              <a:rPr lang="hu-HU" b="1" dirty="0" smtClean="0"/>
+              <a:t> </a:t>
+            </a:r>
+            <a:r>
+              <a:rPr lang="hu-HU" b="1" dirty="0" err="1" smtClean="0"/>
+              <a:t>vector</a:t>
+            </a:r>
+            <a:r>
+              <a:rPr lang="hu-HU" b="1" dirty="0" smtClean="0"/>
+              <a:t> </a:t>
+            </a:r>
+            <a:r>
+              <a:rPr lang="hu-HU" dirty="0" err="1" smtClean="0"/>
+              <a:t>for</a:t>
+            </a:r>
+            <a:r>
+              <a:rPr lang="hu-HU" dirty="0" smtClean="0"/>
+              <a:t> </a:t>
+            </a:r>
+            <a:r>
+              <a:rPr lang="hu-HU" dirty="0" err="1" smtClean="0"/>
+              <a:t>classification</a:t>
+            </a:r>
+            <a:r>
+              <a:rPr lang="hu-HU" dirty="0" smtClean="0"/>
+              <a:t> </a:t>
+            </a:r>
+            <a:r>
+              <a:rPr lang="hu-HU" dirty="0" err="1" smtClean="0"/>
+              <a:t>into</a:t>
+            </a:r>
+            <a:r>
+              <a:rPr lang="hu-HU" dirty="0" smtClean="0"/>
+              <a:t> </a:t>
+            </a:r>
+            <a:r>
+              <a:rPr lang="hu-HU" i="1" dirty="0" smtClean="0"/>
+              <a:t>k </a:t>
+            </a:r>
+            <a:r>
+              <a:rPr lang="hu-HU" dirty="0" err="1" smtClean="0"/>
+              <a:t>classes</a:t>
+            </a:r>
+            <a:endParaRPr lang="hu-HU" dirty="0" smtClean="0"/>
+          </a:p>
+          <a:p>
+            <a:pPr lvl="2"/>
+            <a:r>
+              <a:rPr lang="hu-HU" dirty="0" err="1" smtClean="0"/>
+              <a:t>these</a:t>
+            </a:r>
+            <a:r>
+              <a:rPr lang="hu-HU" dirty="0" smtClean="0"/>
+              <a:t> </a:t>
+            </a:r>
+            <a:r>
+              <a:rPr lang="hu-HU" dirty="0" err="1" smtClean="0"/>
+              <a:t>numeric</a:t>
+            </a:r>
+            <a:r>
+              <a:rPr lang="hu-HU" dirty="0" smtClean="0"/>
+              <a:t> </a:t>
+            </a:r>
+            <a:r>
+              <a:rPr lang="hu-HU" dirty="0" err="1" smtClean="0"/>
+              <a:t>values</a:t>
+            </a:r>
+            <a:r>
+              <a:rPr lang="hu-HU" dirty="0" smtClean="0"/>
+              <a:t> </a:t>
+            </a:r>
+            <a:r>
+              <a:rPr lang="hu-HU" dirty="0" err="1" smtClean="0"/>
+              <a:t>always</a:t>
+            </a:r>
+            <a:r>
+              <a:rPr lang="hu-HU" dirty="0" smtClean="0"/>
+              <a:t> </a:t>
+            </a:r>
+            <a:r>
+              <a:rPr lang="hu-HU" dirty="0" err="1" smtClean="0"/>
+              <a:t>fall</a:t>
+            </a:r>
+            <a:r>
+              <a:rPr lang="hu-HU" dirty="0" smtClean="0"/>
+              <a:t> </a:t>
+            </a:r>
+            <a:r>
+              <a:rPr lang="hu-HU" dirty="0" err="1" smtClean="0"/>
+              <a:t>between</a:t>
+            </a:r>
+            <a:r>
+              <a:rPr lang="hu-HU" dirty="0" smtClean="0"/>
+              <a:t> 0 and 1, and </a:t>
+            </a:r>
+            <a:r>
+              <a:rPr lang="hu-HU" b="1" dirty="0" err="1" smtClean="0"/>
+              <a:t>can</a:t>
+            </a:r>
+            <a:r>
+              <a:rPr lang="hu-HU" b="1" dirty="0" smtClean="0"/>
+              <a:t> be </a:t>
+            </a:r>
+            <a:r>
+              <a:rPr lang="hu-HU" b="1" dirty="0" err="1" smtClean="0"/>
+              <a:t>interpreted</a:t>
+            </a:r>
+            <a:r>
+              <a:rPr lang="hu-HU" b="1" dirty="0" smtClean="0"/>
+              <a:t> </a:t>
+            </a:r>
+            <a:r>
+              <a:rPr lang="hu-HU" b="1" dirty="0" err="1" smtClean="0"/>
+              <a:t>as</a:t>
+            </a:r>
+            <a:r>
+              <a:rPr lang="hu-HU" b="1" dirty="0" smtClean="0"/>
+              <a:t> a </a:t>
+            </a:r>
+            <a:r>
+              <a:rPr lang="hu-HU" b="1" dirty="0" err="1" smtClean="0"/>
+              <a:t>probability</a:t>
+            </a:r>
+            <a:r>
+              <a:rPr lang="hu-HU" b="1" dirty="0" smtClean="0"/>
+              <a:t> </a:t>
+            </a:r>
+            <a:r>
+              <a:rPr lang="hu-HU" b="1" dirty="0" err="1" smtClean="0"/>
+              <a:t>or</a:t>
+            </a:r>
+            <a:r>
+              <a:rPr lang="hu-HU" b="1" dirty="0" smtClean="0"/>
+              <a:t> </a:t>
+            </a:r>
+            <a:r>
+              <a:rPr lang="hu-HU" b="1" dirty="0" err="1" smtClean="0"/>
+              <a:t>a</a:t>
+            </a:r>
+            <a:r>
+              <a:rPr lang="hu-HU" b="1" dirty="0" smtClean="0"/>
+              <a:t> </a:t>
+            </a:r>
+            <a:r>
+              <a:rPr lang="hu-HU" b="1" dirty="0" err="1" smtClean="0"/>
+              <a:t>confidence</a:t>
+            </a:r>
+            <a:r>
+              <a:rPr lang="hu-HU" b="1" dirty="0" smtClean="0"/>
+              <a:t> </a:t>
+            </a:r>
+            <a:r>
+              <a:rPr lang="hu-HU" b="1" dirty="0" err="1" smtClean="0"/>
+              <a:t>score</a:t>
+            </a:r>
+            <a:r>
+              <a:rPr lang="hu-HU" b="1" dirty="0" smtClean="0"/>
+              <a:t> </a:t>
+            </a:r>
+            <a:r>
+              <a:rPr lang="hu-HU" dirty="0" err="1" smtClean="0"/>
+              <a:t>that</a:t>
+            </a:r>
+            <a:r>
+              <a:rPr lang="hu-HU" dirty="0" smtClean="0"/>
+              <a:t> </a:t>
+            </a:r>
+            <a:r>
+              <a:rPr lang="hu-HU" dirty="0" err="1" smtClean="0"/>
+              <a:t>expresses</a:t>
+            </a:r>
+            <a:r>
+              <a:rPr lang="hu-HU" dirty="0" smtClean="0"/>
+              <a:t> </a:t>
+            </a:r>
+            <a:r>
+              <a:rPr lang="hu-HU" dirty="0" err="1" smtClean="0"/>
+              <a:t>how</a:t>
+            </a:r>
+            <a:r>
+              <a:rPr lang="hu-HU" dirty="0" smtClean="0"/>
+              <a:t> </a:t>
+            </a:r>
+            <a:r>
+              <a:rPr lang="hu-HU" dirty="0" err="1" smtClean="0"/>
+              <a:t>confident</a:t>
+            </a:r>
+            <a:r>
+              <a:rPr lang="hu-HU" dirty="0" smtClean="0"/>
+              <a:t> </a:t>
+            </a:r>
+            <a:r>
+              <a:rPr lang="hu-HU" dirty="0" err="1" smtClean="0"/>
+              <a:t>the</a:t>
+            </a:r>
+            <a:r>
+              <a:rPr lang="hu-HU" dirty="0" smtClean="0"/>
+              <a:t> </a:t>
+            </a:r>
+            <a:r>
+              <a:rPr lang="hu-HU" dirty="0" err="1" smtClean="0"/>
+              <a:t>model</a:t>
+            </a:r>
+            <a:r>
+              <a:rPr lang="hu-HU" dirty="0" smtClean="0"/>
+              <a:t> is </a:t>
+            </a:r>
+            <a:r>
+              <a:rPr lang="hu-HU" dirty="0" err="1" smtClean="0"/>
+              <a:t>in</a:t>
+            </a:r>
+            <a:r>
+              <a:rPr lang="hu-HU" dirty="0" smtClean="0"/>
+              <a:t> </a:t>
+            </a:r>
+            <a:r>
+              <a:rPr lang="hu-HU" dirty="0" err="1" smtClean="0"/>
+              <a:t>assigning</a:t>
+            </a:r>
+            <a:r>
+              <a:rPr lang="hu-HU" dirty="0" smtClean="0"/>
+              <a:t> </a:t>
+            </a:r>
+            <a:r>
+              <a:rPr lang="hu-HU" dirty="0" err="1" smtClean="0"/>
+              <a:t>that</a:t>
+            </a:r>
+            <a:r>
+              <a:rPr lang="hu-HU" dirty="0" smtClean="0"/>
+              <a:t> </a:t>
+            </a:r>
+            <a:r>
+              <a:rPr lang="hu-HU" dirty="0" err="1" smtClean="0"/>
+              <a:t>label</a:t>
+            </a:r>
+            <a:r>
+              <a:rPr lang="hu-HU" dirty="0" smtClean="0"/>
+              <a:t> </a:t>
+            </a:r>
+            <a:r>
+              <a:rPr lang="hu-HU" dirty="0" err="1" smtClean="0"/>
+              <a:t>to</a:t>
+            </a:r>
+            <a:r>
+              <a:rPr lang="hu-HU" dirty="0" smtClean="0"/>
+              <a:t> </a:t>
+            </a:r>
+            <a:r>
+              <a:rPr lang="hu-HU" dirty="0" err="1" smtClean="0"/>
+              <a:t>the</a:t>
+            </a:r>
+            <a:r>
+              <a:rPr lang="hu-HU" dirty="0" smtClean="0"/>
+              <a:t> input</a:t>
+            </a:r>
+          </a:p>
+          <a:p>
+            <a:pPr lvl="1"/>
+            <a:r>
+              <a:rPr lang="hu-HU" dirty="0" smtClean="0"/>
+              <a:t>a </a:t>
+            </a:r>
+            <a:r>
+              <a:rPr lang="hu-HU" dirty="0" err="1" smtClean="0"/>
+              <a:t>generative</a:t>
+            </a:r>
+            <a:r>
+              <a:rPr lang="hu-HU" dirty="0" smtClean="0"/>
+              <a:t> LM </a:t>
+            </a:r>
+            <a:r>
+              <a:rPr lang="hu-HU" b="1" dirty="0" err="1" smtClean="0"/>
+              <a:t>never</a:t>
+            </a:r>
+            <a:r>
+              <a:rPr lang="hu-HU" b="1" dirty="0" smtClean="0"/>
+              <a:t> </a:t>
+            </a:r>
+            <a:r>
+              <a:rPr lang="hu-HU" b="1" dirty="0" err="1" smtClean="0"/>
+              <a:t>calculates</a:t>
+            </a:r>
+            <a:r>
+              <a:rPr lang="hu-HU" b="1" dirty="0" smtClean="0"/>
+              <a:t> a </a:t>
+            </a:r>
+            <a:r>
+              <a:rPr lang="hu-HU" b="1" dirty="0" err="1" smtClean="0"/>
+              <a:t>label</a:t>
+            </a:r>
+            <a:r>
+              <a:rPr lang="hu-HU" dirty="0" smtClean="0"/>
+              <a:t>, </a:t>
+            </a:r>
+            <a:r>
+              <a:rPr lang="hu-HU" dirty="0" err="1" smtClean="0"/>
+              <a:t>it</a:t>
+            </a:r>
+            <a:r>
+              <a:rPr lang="hu-HU" dirty="0" smtClean="0"/>
+              <a:t> </a:t>
+            </a:r>
+            <a:r>
+              <a:rPr lang="hu-HU" b="1" dirty="0" err="1" smtClean="0"/>
+              <a:t>generates</a:t>
+            </a:r>
+            <a:r>
+              <a:rPr lang="hu-HU" b="1" dirty="0" smtClean="0"/>
+              <a:t> </a:t>
+            </a:r>
+            <a:r>
+              <a:rPr lang="hu-HU" b="1" dirty="0" err="1" smtClean="0"/>
+              <a:t>free-form</a:t>
+            </a:r>
+            <a:r>
+              <a:rPr lang="hu-HU" b="1" dirty="0" smtClean="0"/>
+              <a:t> text</a:t>
+            </a:r>
+            <a:r>
+              <a:rPr lang="hu-HU" dirty="0" smtClean="0"/>
+              <a:t>, and </a:t>
+            </a:r>
+            <a:r>
+              <a:rPr lang="hu-HU" dirty="0" err="1" smtClean="0"/>
+              <a:t>there</a:t>
+            </a:r>
+            <a:r>
+              <a:rPr lang="hu-HU" dirty="0" smtClean="0"/>
+              <a:t> </a:t>
+            </a:r>
+            <a:r>
+              <a:rPr lang="hu-HU" dirty="0" err="1" smtClean="0"/>
+              <a:t>can</a:t>
+            </a:r>
+            <a:r>
+              <a:rPr lang="hu-HU" dirty="0" smtClean="0"/>
+              <a:t> be </a:t>
+            </a:r>
+            <a:r>
+              <a:rPr lang="hu-HU" b="1" dirty="0" smtClean="0"/>
+              <a:t>no </a:t>
+            </a:r>
+            <a:r>
+              <a:rPr lang="hu-HU" b="1" dirty="0" err="1" smtClean="0"/>
+              <a:t>guarantee</a:t>
+            </a:r>
+            <a:r>
+              <a:rPr lang="hu-HU" b="1" dirty="0" smtClean="0"/>
+              <a:t> </a:t>
+            </a:r>
+            <a:r>
+              <a:rPr lang="hu-HU" b="1" dirty="0" err="1" smtClean="0"/>
+              <a:t>that</a:t>
+            </a:r>
+            <a:r>
+              <a:rPr lang="hu-HU" b="1" dirty="0" smtClean="0"/>
+              <a:t> </a:t>
+            </a:r>
+            <a:r>
+              <a:rPr lang="hu-HU" b="1" dirty="0" err="1" smtClean="0"/>
+              <a:t>the</a:t>
+            </a:r>
+            <a:r>
+              <a:rPr lang="hu-HU" b="1" dirty="0" smtClean="0"/>
+              <a:t> text being </a:t>
+            </a:r>
+            <a:r>
+              <a:rPr lang="hu-HU" b="1" dirty="0" err="1" smtClean="0"/>
+              <a:t>generated</a:t>
+            </a:r>
+            <a:r>
+              <a:rPr lang="hu-HU" b="1" dirty="0" smtClean="0"/>
+              <a:t> </a:t>
+            </a:r>
+            <a:r>
+              <a:rPr lang="hu-HU" b="1" dirty="0" err="1" smtClean="0"/>
+              <a:t>contains</a:t>
+            </a:r>
+            <a:r>
+              <a:rPr lang="hu-HU" b="1" dirty="0" smtClean="0"/>
+              <a:t> </a:t>
+            </a:r>
+            <a:r>
+              <a:rPr lang="hu-HU" b="1" dirty="0" err="1" smtClean="0"/>
+              <a:t>the</a:t>
+            </a:r>
+            <a:r>
+              <a:rPr lang="hu-HU" b="1" dirty="0" smtClean="0"/>
+              <a:t> </a:t>
+            </a:r>
+            <a:r>
+              <a:rPr lang="hu-HU" b="1" dirty="0" err="1" smtClean="0"/>
+              <a:t>solution</a:t>
+            </a:r>
+            <a:r>
+              <a:rPr lang="hu-HU" b="1" dirty="0" smtClean="0"/>
+              <a:t> </a:t>
+            </a:r>
+            <a:r>
+              <a:rPr lang="hu-HU" b="1" dirty="0" err="1" smtClean="0"/>
+              <a:t>to</a:t>
+            </a:r>
+            <a:r>
+              <a:rPr lang="hu-HU" b="1" dirty="0" smtClean="0"/>
+              <a:t> </a:t>
+            </a:r>
+            <a:r>
+              <a:rPr lang="hu-HU" b="1" dirty="0" err="1" smtClean="0"/>
+              <a:t>the</a:t>
+            </a:r>
+            <a:r>
+              <a:rPr lang="hu-HU" b="1" dirty="0" smtClean="0"/>
+              <a:t> </a:t>
+            </a:r>
+            <a:r>
+              <a:rPr lang="hu-HU" b="1" dirty="0" err="1" smtClean="0"/>
+              <a:t>task</a:t>
+            </a:r>
+            <a:r>
+              <a:rPr lang="hu-HU" dirty="0" smtClean="0"/>
+              <a:t>, </a:t>
+            </a:r>
+            <a:r>
+              <a:rPr lang="hu-HU" dirty="0" err="1" smtClean="0"/>
+              <a:t>e.g</a:t>
+            </a:r>
+            <a:r>
+              <a:rPr lang="hu-HU" dirty="0" smtClean="0"/>
+              <a:t>. </a:t>
+            </a:r>
+            <a:r>
+              <a:rPr lang="hu-HU" dirty="0" err="1" smtClean="0"/>
+              <a:t>the</a:t>
+            </a:r>
+            <a:r>
+              <a:rPr lang="hu-HU" dirty="0" smtClean="0"/>
+              <a:t> </a:t>
+            </a:r>
+            <a:r>
+              <a:rPr lang="hu-HU" dirty="0" err="1" smtClean="0"/>
+              <a:t>class</a:t>
+            </a:r>
+            <a:r>
+              <a:rPr lang="hu-HU" dirty="0" smtClean="0"/>
+              <a:t> </a:t>
+            </a:r>
+            <a:r>
+              <a:rPr lang="hu-HU" dirty="0" err="1" smtClean="0"/>
+              <a:t>label</a:t>
+            </a:r>
+            <a:endParaRPr lang="hu-HU" dirty="0" smtClean="0"/>
+          </a:p>
+          <a:p>
+            <a:pPr lvl="2"/>
+            <a:r>
+              <a:rPr lang="hu-HU" dirty="0" err="1" smtClean="0"/>
+              <a:t>the</a:t>
+            </a:r>
+            <a:r>
+              <a:rPr lang="hu-HU" dirty="0" smtClean="0"/>
+              <a:t> </a:t>
+            </a:r>
+            <a:r>
+              <a:rPr lang="hu-HU" dirty="0" err="1" smtClean="0"/>
+              <a:t>answer</a:t>
+            </a:r>
+            <a:r>
+              <a:rPr lang="hu-HU" dirty="0" smtClean="0"/>
+              <a:t> </a:t>
+            </a:r>
+            <a:r>
+              <a:rPr lang="hu-HU" b="1" dirty="0" err="1" smtClean="0"/>
+              <a:t>might</a:t>
+            </a:r>
+            <a:r>
+              <a:rPr lang="hu-HU" dirty="0" smtClean="0"/>
+              <a:t> </a:t>
+            </a:r>
+            <a:r>
+              <a:rPr lang="hu-HU" dirty="0" err="1" smtClean="0"/>
+              <a:t>contain</a:t>
+            </a:r>
+            <a:r>
+              <a:rPr lang="hu-HU" dirty="0" smtClean="0"/>
+              <a:t> </a:t>
+            </a:r>
+            <a:r>
+              <a:rPr lang="hu-HU" dirty="0" err="1" smtClean="0"/>
+              <a:t>the</a:t>
+            </a:r>
+            <a:r>
+              <a:rPr lang="hu-HU" dirty="0" smtClean="0"/>
+              <a:t> </a:t>
+            </a:r>
+            <a:r>
+              <a:rPr lang="hu-HU" dirty="0" err="1" smtClean="0"/>
+              <a:t>class</a:t>
+            </a:r>
+            <a:r>
+              <a:rPr lang="hu-HU" dirty="0" smtClean="0"/>
+              <a:t> </a:t>
+            </a:r>
+            <a:r>
+              <a:rPr lang="hu-HU" dirty="0" err="1" smtClean="0"/>
+              <a:t>label</a:t>
+            </a:r>
+            <a:r>
+              <a:rPr lang="hu-HU" dirty="0" smtClean="0"/>
+              <a:t> </a:t>
+            </a:r>
+            <a:r>
+              <a:rPr lang="hu-HU" dirty="0" err="1" smtClean="0"/>
+              <a:t>somewhere</a:t>
+            </a:r>
+            <a:r>
+              <a:rPr lang="hu-HU" dirty="0" smtClean="0"/>
+              <a:t> </a:t>
+            </a:r>
+            <a:r>
+              <a:rPr lang="hu-HU" b="1" dirty="0" err="1" smtClean="0"/>
+              <a:t>along</a:t>
+            </a:r>
+            <a:r>
+              <a:rPr lang="hu-HU" b="1" dirty="0" smtClean="0"/>
+              <a:t> </a:t>
+            </a:r>
+            <a:r>
+              <a:rPr lang="hu-HU" b="1" dirty="0" err="1" smtClean="0"/>
+              <a:t>with</a:t>
+            </a:r>
+            <a:r>
+              <a:rPr lang="hu-HU" b="1" dirty="0" smtClean="0"/>
+              <a:t> </a:t>
+            </a:r>
+            <a:r>
+              <a:rPr lang="hu-HU" b="1" dirty="0" err="1" smtClean="0"/>
+              <a:t>other</a:t>
+            </a:r>
+            <a:r>
+              <a:rPr lang="hu-HU" b="1" dirty="0" smtClean="0"/>
+              <a:t> </a:t>
+            </a:r>
+            <a:r>
+              <a:rPr lang="hu-HU" b="1" dirty="0" err="1" smtClean="0"/>
+              <a:t>junk</a:t>
+            </a:r>
+            <a:r>
+              <a:rPr lang="hu-HU" b="1" dirty="0" smtClean="0"/>
+              <a:t> </a:t>
+            </a:r>
+            <a:r>
+              <a:rPr lang="hu-HU" i="1" dirty="0" smtClean="0"/>
+              <a:t>(Of </a:t>
+            </a:r>
+            <a:r>
+              <a:rPr lang="hu-HU" i="1" dirty="0" err="1" smtClean="0"/>
+              <a:t>course</a:t>
+            </a:r>
+            <a:r>
+              <a:rPr lang="hu-HU" i="1" dirty="0" smtClean="0"/>
+              <a:t>. I </a:t>
+            </a:r>
+            <a:r>
+              <a:rPr lang="hu-HU" i="1" dirty="0" err="1" smtClean="0"/>
+              <a:t>will</a:t>
+            </a:r>
+            <a:r>
+              <a:rPr lang="hu-HU" i="1" dirty="0" smtClean="0"/>
+              <a:t> </a:t>
+            </a:r>
+            <a:r>
+              <a:rPr lang="hu-HU" i="1" dirty="0" err="1" smtClean="0"/>
+              <a:t>gladly</a:t>
+            </a:r>
+            <a:r>
+              <a:rPr lang="hu-HU" i="1" dirty="0" smtClean="0"/>
+              <a:t> </a:t>
+            </a:r>
+            <a:r>
+              <a:rPr lang="hu-HU" i="1" dirty="0" err="1" smtClean="0"/>
+              <a:t>help</a:t>
+            </a:r>
+            <a:r>
+              <a:rPr lang="hu-HU" i="1" dirty="0" smtClean="0"/>
+              <a:t> </a:t>
+            </a:r>
+            <a:r>
+              <a:rPr lang="hu-HU" i="1" dirty="0" err="1" smtClean="0"/>
+              <a:t>you</a:t>
+            </a:r>
+            <a:r>
+              <a:rPr lang="hu-HU" i="1" dirty="0" smtClean="0"/>
+              <a:t> </a:t>
+            </a:r>
+            <a:r>
+              <a:rPr lang="hu-HU" i="1" dirty="0" err="1" smtClean="0"/>
+              <a:t>with</a:t>
+            </a:r>
+            <a:r>
+              <a:rPr lang="hu-HU" i="1" dirty="0" smtClean="0"/>
+              <a:t> </a:t>
+            </a:r>
+            <a:r>
+              <a:rPr lang="hu-HU" i="1" dirty="0" err="1" smtClean="0"/>
+              <a:t>this</a:t>
+            </a:r>
+            <a:r>
+              <a:rPr lang="hu-HU" i="1" dirty="0" smtClean="0"/>
+              <a:t>. The </a:t>
+            </a:r>
+            <a:r>
+              <a:rPr lang="hu-HU" i="1" dirty="0" err="1" smtClean="0"/>
+              <a:t>sentence</a:t>
+            </a:r>
+            <a:r>
+              <a:rPr lang="hu-HU" i="1" dirty="0" smtClean="0"/>
+              <a:t> ... </a:t>
+            </a:r>
+            <a:r>
+              <a:rPr lang="hu-HU" i="1" dirty="0" err="1" smtClean="0"/>
+              <a:t>expresses</a:t>
+            </a:r>
+            <a:r>
+              <a:rPr lang="hu-HU" i="1" dirty="0" smtClean="0"/>
+              <a:t> a </a:t>
+            </a:r>
+            <a:r>
+              <a:rPr lang="hu-HU" i="1" u="sng" dirty="0" err="1" smtClean="0"/>
+              <a:t>positive</a:t>
+            </a:r>
+            <a:r>
+              <a:rPr lang="hu-HU" i="1" dirty="0" smtClean="0"/>
+              <a:t> </a:t>
+            </a:r>
+            <a:r>
+              <a:rPr lang="hu-HU" i="1" dirty="0" err="1" smtClean="0"/>
+              <a:t>sentiment</a:t>
+            </a:r>
+            <a:r>
+              <a:rPr lang="hu-HU" i="1" dirty="0" smtClean="0"/>
+              <a:t>.)</a:t>
+            </a:r>
+          </a:p>
+          <a:p>
+            <a:pPr lvl="2"/>
+            <a:r>
+              <a:rPr lang="hu-HU" dirty="0" err="1" smtClean="0"/>
+              <a:t>it</a:t>
+            </a:r>
+            <a:r>
+              <a:rPr lang="hu-HU" dirty="0" smtClean="0"/>
+              <a:t> </a:t>
+            </a:r>
+            <a:r>
+              <a:rPr lang="hu-HU" dirty="0" err="1" smtClean="0"/>
+              <a:t>might</a:t>
+            </a:r>
+            <a:r>
+              <a:rPr lang="hu-HU" dirty="0" smtClean="0"/>
+              <a:t> </a:t>
+            </a:r>
+            <a:r>
+              <a:rPr lang="hu-HU" dirty="0" err="1" smtClean="0"/>
+              <a:t>contain</a:t>
+            </a:r>
+            <a:r>
+              <a:rPr lang="hu-HU" dirty="0" smtClean="0"/>
+              <a:t> a </a:t>
+            </a:r>
+            <a:r>
+              <a:rPr lang="hu-HU" dirty="0" err="1" smtClean="0"/>
+              <a:t>solution</a:t>
+            </a:r>
+            <a:r>
+              <a:rPr lang="hu-HU" dirty="0" smtClean="0"/>
+              <a:t> </a:t>
+            </a:r>
+            <a:r>
+              <a:rPr lang="hu-HU" dirty="0" err="1" smtClean="0"/>
+              <a:t>to</a:t>
+            </a:r>
+            <a:r>
+              <a:rPr lang="hu-HU" dirty="0" smtClean="0"/>
+              <a:t> </a:t>
+            </a:r>
+            <a:r>
+              <a:rPr lang="hu-HU" dirty="0" err="1" smtClean="0"/>
+              <a:t>the</a:t>
+            </a:r>
+            <a:r>
+              <a:rPr lang="hu-HU" dirty="0" smtClean="0"/>
+              <a:t> </a:t>
+            </a:r>
+            <a:r>
+              <a:rPr lang="hu-HU" dirty="0" err="1" smtClean="0"/>
+              <a:t>problem</a:t>
+            </a:r>
+            <a:r>
+              <a:rPr lang="hu-HU" dirty="0" smtClean="0"/>
+              <a:t>, </a:t>
+            </a:r>
+            <a:r>
+              <a:rPr lang="hu-HU" dirty="0" err="1" smtClean="0"/>
+              <a:t>but</a:t>
+            </a:r>
+            <a:r>
+              <a:rPr lang="hu-HU" dirty="0" smtClean="0"/>
+              <a:t> </a:t>
+            </a:r>
+            <a:r>
+              <a:rPr lang="hu-HU" b="1" dirty="0" err="1" smtClean="0"/>
+              <a:t>phrased</a:t>
+            </a:r>
+            <a:r>
+              <a:rPr lang="hu-HU" b="1" dirty="0" smtClean="0"/>
+              <a:t> </a:t>
+            </a:r>
+            <a:r>
+              <a:rPr lang="hu-HU" b="1" dirty="0" err="1" smtClean="0"/>
+              <a:t>in</a:t>
+            </a:r>
+            <a:r>
+              <a:rPr lang="hu-HU" b="1" dirty="0" smtClean="0"/>
+              <a:t> an </a:t>
+            </a:r>
+            <a:r>
+              <a:rPr lang="hu-HU" b="1" dirty="0" err="1" smtClean="0"/>
+              <a:t>unexpected</a:t>
+            </a:r>
+            <a:r>
+              <a:rPr lang="hu-HU" b="1" dirty="0" smtClean="0"/>
+              <a:t> </a:t>
+            </a:r>
+            <a:r>
+              <a:rPr lang="hu-HU" b="1" dirty="0" err="1" smtClean="0"/>
+              <a:t>way</a:t>
+            </a:r>
+            <a:r>
+              <a:rPr lang="hu-HU" b="1" dirty="0" smtClean="0"/>
+              <a:t> </a:t>
+            </a:r>
+            <a:r>
+              <a:rPr lang="hu-HU" i="1" dirty="0" smtClean="0"/>
+              <a:t>(The </a:t>
+            </a:r>
+            <a:r>
+              <a:rPr lang="hu-HU" i="1" dirty="0" err="1" smtClean="0"/>
+              <a:t>sentence</a:t>
+            </a:r>
+            <a:r>
+              <a:rPr lang="hu-HU" i="1" dirty="0" smtClean="0"/>
+              <a:t> </a:t>
+            </a:r>
+            <a:r>
+              <a:rPr lang="hu-HU" i="1" dirty="0" err="1" smtClean="0"/>
+              <a:t>expresses</a:t>
+            </a:r>
+            <a:r>
+              <a:rPr lang="hu-HU" i="1" dirty="0" smtClean="0"/>
+              <a:t> </a:t>
+            </a:r>
+            <a:r>
+              <a:rPr lang="hu-HU" i="1" dirty="0" err="1" smtClean="0"/>
+              <a:t>that</a:t>
+            </a:r>
+            <a:r>
+              <a:rPr lang="hu-HU" i="1" dirty="0" smtClean="0"/>
+              <a:t> </a:t>
+            </a:r>
+            <a:r>
+              <a:rPr lang="hu-HU" i="1" dirty="0" err="1" smtClean="0"/>
+              <a:t>the</a:t>
+            </a:r>
+            <a:r>
+              <a:rPr lang="hu-HU" i="1" dirty="0" smtClean="0"/>
+              <a:t> </a:t>
+            </a:r>
+            <a:r>
+              <a:rPr lang="hu-HU" i="1" dirty="0" err="1" smtClean="0"/>
+              <a:t>customer</a:t>
+            </a:r>
+            <a:r>
+              <a:rPr lang="hu-HU" i="1" dirty="0" smtClean="0"/>
+              <a:t> is </a:t>
+            </a:r>
+            <a:r>
+              <a:rPr lang="hu-HU" i="1" u="sng" dirty="0" err="1" smtClean="0"/>
+              <a:t>pleased</a:t>
+            </a:r>
+            <a:r>
+              <a:rPr lang="hu-HU" i="1" u="sng" dirty="0" smtClean="0"/>
+              <a:t> </a:t>
+            </a:r>
+            <a:r>
+              <a:rPr lang="hu-HU" i="1" u="sng" dirty="0" err="1" smtClean="0"/>
+              <a:t>with</a:t>
+            </a:r>
+            <a:r>
+              <a:rPr lang="hu-HU" i="1" dirty="0" smtClean="0"/>
+              <a:t> </a:t>
+            </a:r>
+            <a:r>
+              <a:rPr lang="hu-HU" i="1" dirty="0" err="1" smtClean="0"/>
+              <a:t>the</a:t>
+            </a:r>
+            <a:r>
+              <a:rPr lang="hu-HU" i="1" dirty="0" smtClean="0"/>
+              <a:t> </a:t>
+            </a:r>
+            <a:r>
+              <a:rPr lang="hu-HU" i="1" dirty="0" err="1" smtClean="0"/>
+              <a:t>product</a:t>
+            </a:r>
+            <a:r>
+              <a:rPr lang="hu-HU" i="1" dirty="0" smtClean="0"/>
+              <a:t>.)</a:t>
+            </a:r>
+          </a:p>
+          <a:p>
+            <a:pPr lvl="2"/>
+            <a:r>
+              <a:rPr lang="hu-HU" dirty="0" err="1" smtClean="0"/>
+              <a:t>it</a:t>
+            </a:r>
+            <a:r>
+              <a:rPr lang="hu-HU" dirty="0" smtClean="0"/>
+              <a:t> </a:t>
+            </a:r>
+            <a:r>
+              <a:rPr lang="hu-HU" dirty="0" err="1" smtClean="0"/>
+              <a:t>might</a:t>
+            </a:r>
+            <a:r>
+              <a:rPr lang="hu-HU" dirty="0" smtClean="0"/>
+              <a:t> </a:t>
+            </a:r>
+            <a:r>
+              <a:rPr lang="hu-HU" b="1" dirty="0" err="1" smtClean="0"/>
+              <a:t>not</a:t>
+            </a:r>
+            <a:r>
+              <a:rPr lang="hu-HU" b="1" dirty="0" smtClean="0"/>
+              <a:t> </a:t>
+            </a:r>
+            <a:r>
+              <a:rPr lang="hu-HU" b="1" dirty="0" err="1" smtClean="0"/>
+              <a:t>contain</a:t>
+            </a:r>
+            <a:r>
+              <a:rPr lang="hu-HU" b="1" dirty="0" smtClean="0"/>
+              <a:t> </a:t>
+            </a:r>
+            <a:r>
+              <a:rPr lang="hu-HU" b="1" dirty="0" err="1" smtClean="0"/>
+              <a:t>the</a:t>
+            </a:r>
+            <a:r>
+              <a:rPr lang="hu-HU" b="1" dirty="0" smtClean="0"/>
+              <a:t> </a:t>
+            </a:r>
+            <a:r>
+              <a:rPr lang="hu-HU" b="1" dirty="0" err="1" smtClean="0"/>
+              <a:t>solution</a:t>
+            </a:r>
+            <a:r>
+              <a:rPr lang="hu-HU" b="1" dirty="0" smtClean="0"/>
+              <a:t> </a:t>
+            </a:r>
+            <a:r>
+              <a:rPr lang="hu-HU" b="1" dirty="0" err="1" smtClean="0"/>
+              <a:t>at</a:t>
+            </a:r>
+            <a:r>
+              <a:rPr lang="hu-HU" b="1" dirty="0" smtClean="0"/>
+              <a:t> </a:t>
+            </a:r>
+            <a:r>
+              <a:rPr lang="hu-HU" b="1" dirty="0" err="1" smtClean="0"/>
+              <a:t>all</a:t>
+            </a:r>
+            <a:r>
+              <a:rPr lang="hu-HU" dirty="0" smtClean="0"/>
+              <a:t>, </a:t>
+            </a:r>
+            <a:r>
+              <a:rPr lang="hu-HU" dirty="0" err="1" smtClean="0"/>
+              <a:t>but</a:t>
+            </a:r>
+            <a:r>
+              <a:rPr lang="hu-HU" dirty="0" smtClean="0"/>
+              <a:t> </a:t>
+            </a:r>
+            <a:r>
+              <a:rPr lang="hu-HU" dirty="0" err="1" smtClean="0"/>
+              <a:t>unrelated</a:t>
+            </a:r>
+            <a:r>
+              <a:rPr lang="hu-HU" dirty="0" smtClean="0"/>
+              <a:t> </a:t>
+            </a:r>
+            <a:r>
+              <a:rPr lang="hu-HU" dirty="0" err="1" smtClean="0"/>
+              <a:t>useless</a:t>
+            </a:r>
+            <a:r>
+              <a:rPr lang="hu-HU" dirty="0" smtClean="0"/>
+              <a:t> output</a:t>
+            </a:r>
+          </a:p>
+          <a:p>
+            <a:pPr lvl="2"/>
+            <a:r>
+              <a:rPr lang="hu-HU" b="1" dirty="0" err="1" smtClean="0"/>
+              <a:t>Confidence</a:t>
+            </a:r>
+            <a:r>
+              <a:rPr lang="hu-HU" b="1" dirty="0" smtClean="0"/>
+              <a:t> is </a:t>
+            </a:r>
+            <a:r>
+              <a:rPr lang="hu-HU" b="1" dirty="0" err="1" smtClean="0"/>
+              <a:t>not</a:t>
+            </a:r>
+            <a:r>
+              <a:rPr lang="hu-HU" b="1" dirty="0" smtClean="0"/>
+              <a:t> </a:t>
+            </a:r>
+            <a:r>
+              <a:rPr lang="hu-HU" b="1" dirty="0" err="1" smtClean="0"/>
+              <a:t>interpretable</a:t>
+            </a:r>
+            <a:r>
+              <a:rPr lang="hu-HU" b="1" dirty="0" smtClean="0"/>
+              <a:t> </a:t>
+            </a:r>
+            <a:r>
+              <a:rPr lang="hu-HU" dirty="0" err="1" smtClean="0"/>
+              <a:t>in</a:t>
+            </a:r>
+            <a:r>
+              <a:rPr lang="hu-HU" dirty="0" smtClean="0"/>
+              <a:t> </a:t>
+            </a:r>
+            <a:r>
+              <a:rPr lang="hu-HU" dirty="0" err="1" smtClean="0"/>
+              <a:t>generative</a:t>
+            </a:r>
+            <a:r>
+              <a:rPr lang="hu-HU" dirty="0" smtClean="0"/>
+              <a:t> </a:t>
+            </a:r>
+            <a:r>
+              <a:rPr lang="hu-HU" dirty="0" err="1" smtClean="0"/>
+              <a:t>LMs</a:t>
+            </a:r>
+            <a:r>
+              <a:rPr lang="hu-HU" dirty="0" smtClean="0"/>
+              <a:t>, </a:t>
+            </a:r>
+            <a:r>
+              <a:rPr lang="hu-HU" dirty="0" err="1" smtClean="0"/>
+              <a:t>you</a:t>
+            </a:r>
+            <a:r>
+              <a:rPr lang="hu-HU" dirty="0" smtClean="0"/>
+              <a:t> </a:t>
+            </a:r>
+            <a:r>
+              <a:rPr lang="hu-HU" dirty="0" err="1" smtClean="0"/>
+              <a:t>cannot</a:t>
+            </a:r>
+            <a:r>
+              <a:rPr lang="hu-HU" dirty="0" smtClean="0"/>
+              <a:t> filter out </a:t>
+            </a:r>
+            <a:r>
+              <a:rPr lang="hu-HU" dirty="0" err="1" smtClean="0"/>
+              <a:t>low-confidence</a:t>
+            </a:r>
+            <a:r>
+              <a:rPr lang="hu-HU" dirty="0" smtClean="0"/>
+              <a:t> </a:t>
+            </a:r>
+            <a:r>
+              <a:rPr lang="hu-HU" dirty="0" err="1" smtClean="0"/>
+              <a:t>responses</a:t>
+            </a:r>
+            <a:endParaRPr lang="hu-HU" dirty="0" smtClean="0"/>
+          </a:p>
+          <a:p>
+            <a:pPr lvl="1"/>
+            <a:r>
+              <a:rPr lang="hu-HU" dirty="0" err="1" smtClean="0"/>
+              <a:t>Thus</a:t>
+            </a:r>
+            <a:r>
+              <a:rPr lang="hu-HU" dirty="0" smtClean="0"/>
+              <a:t> </a:t>
+            </a:r>
+            <a:r>
+              <a:rPr lang="hu-HU" b="1" dirty="0" err="1" smtClean="0"/>
+              <a:t>in</a:t>
+            </a:r>
+            <a:r>
+              <a:rPr lang="hu-HU" b="1" dirty="0" smtClean="0"/>
+              <a:t> </a:t>
+            </a:r>
+            <a:r>
+              <a:rPr lang="hu-HU" b="1" dirty="0" err="1" smtClean="0"/>
+              <a:t>practice</a:t>
+            </a:r>
+            <a:r>
+              <a:rPr lang="hu-HU" dirty="0" smtClean="0"/>
+              <a:t>, </a:t>
+            </a:r>
+            <a:r>
+              <a:rPr lang="hu-HU" dirty="0" err="1" smtClean="0"/>
+              <a:t>when</a:t>
+            </a:r>
+            <a:r>
+              <a:rPr lang="hu-HU" dirty="0" smtClean="0"/>
+              <a:t> </a:t>
+            </a:r>
+            <a:r>
+              <a:rPr lang="hu-HU" dirty="0" err="1" smtClean="0"/>
+              <a:t>using</a:t>
+            </a:r>
+            <a:r>
+              <a:rPr lang="hu-HU" dirty="0" smtClean="0"/>
+              <a:t> a </a:t>
+            </a:r>
+            <a:r>
+              <a:rPr lang="hu-HU" dirty="0" err="1" smtClean="0"/>
+              <a:t>generative</a:t>
+            </a:r>
+            <a:r>
+              <a:rPr lang="hu-HU" dirty="0" smtClean="0"/>
+              <a:t> LM </a:t>
+            </a:r>
+            <a:r>
+              <a:rPr lang="hu-HU" dirty="0" err="1" smtClean="0"/>
+              <a:t>to</a:t>
+            </a:r>
+            <a:r>
+              <a:rPr lang="hu-HU" dirty="0" smtClean="0"/>
+              <a:t> </a:t>
+            </a:r>
+            <a:r>
+              <a:rPr lang="hu-HU" dirty="0" err="1" smtClean="0"/>
+              <a:t>solve</a:t>
+            </a:r>
+            <a:r>
+              <a:rPr lang="hu-HU" dirty="0" smtClean="0"/>
+              <a:t> an </a:t>
+            </a:r>
+            <a:r>
+              <a:rPr lang="hu-HU" dirty="0" err="1" smtClean="0"/>
+              <a:t>NLP</a:t>
+            </a:r>
+            <a:r>
+              <a:rPr lang="hu-HU" dirty="0" smtClean="0"/>
+              <a:t> </a:t>
+            </a:r>
+            <a:r>
+              <a:rPr lang="hu-HU" dirty="0" err="1" smtClean="0"/>
+              <a:t>task</a:t>
+            </a:r>
+            <a:r>
+              <a:rPr lang="hu-HU" dirty="0" smtClean="0"/>
+              <a:t>, </a:t>
+            </a:r>
+            <a:r>
+              <a:rPr lang="hu-HU" dirty="0" err="1" smtClean="0"/>
+              <a:t>you</a:t>
+            </a:r>
+            <a:r>
+              <a:rPr lang="hu-HU" dirty="0" smtClean="0"/>
+              <a:t> </a:t>
+            </a:r>
+            <a:r>
+              <a:rPr lang="hu-HU" dirty="0" err="1" smtClean="0"/>
+              <a:t>give</a:t>
+            </a:r>
+            <a:r>
+              <a:rPr lang="hu-HU" dirty="0" smtClean="0"/>
+              <a:t> </a:t>
+            </a:r>
+            <a:r>
+              <a:rPr lang="hu-HU" dirty="0" err="1" smtClean="0"/>
+              <a:t>yourself</a:t>
+            </a:r>
+            <a:r>
+              <a:rPr lang="hu-HU" dirty="0" smtClean="0"/>
+              <a:t> a </a:t>
+            </a:r>
+            <a:r>
+              <a:rPr lang="hu-HU" b="1" dirty="0" err="1" smtClean="0"/>
+              <a:t>second</a:t>
+            </a:r>
+            <a:r>
+              <a:rPr lang="hu-HU" b="1" dirty="0" smtClean="0"/>
+              <a:t> </a:t>
+            </a:r>
+            <a:r>
+              <a:rPr lang="hu-HU" b="1" dirty="0" err="1" smtClean="0"/>
+              <a:t>NLP</a:t>
+            </a:r>
+            <a:r>
+              <a:rPr lang="hu-HU" b="1" dirty="0" smtClean="0"/>
+              <a:t> </a:t>
+            </a:r>
+            <a:r>
+              <a:rPr lang="hu-HU" b="1" dirty="0" err="1" smtClean="0"/>
+              <a:t>task</a:t>
+            </a:r>
+            <a:r>
+              <a:rPr lang="hu-HU" b="1" dirty="0" smtClean="0"/>
+              <a:t> </a:t>
+            </a:r>
+            <a:r>
+              <a:rPr lang="hu-HU" dirty="0" err="1" smtClean="0"/>
+              <a:t>that</a:t>
+            </a:r>
+            <a:r>
+              <a:rPr lang="hu-HU" dirty="0" smtClean="0"/>
+              <a:t> </a:t>
+            </a:r>
+            <a:r>
+              <a:rPr lang="hu-HU" dirty="0" err="1" smtClean="0"/>
+              <a:t>consists</a:t>
+            </a:r>
+            <a:r>
+              <a:rPr lang="hu-HU" dirty="0" smtClean="0"/>
+              <a:t> </a:t>
+            </a:r>
+            <a:r>
+              <a:rPr lang="hu-HU" dirty="0" err="1" smtClean="0"/>
+              <a:t>in</a:t>
+            </a:r>
+            <a:r>
+              <a:rPr lang="hu-HU" dirty="0" smtClean="0"/>
+              <a:t> </a:t>
+            </a:r>
+            <a:r>
+              <a:rPr lang="hu-HU" dirty="0" err="1" smtClean="0"/>
+              <a:t>extracting</a:t>
+            </a:r>
+            <a:r>
+              <a:rPr lang="hu-HU" dirty="0" smtClean="0"/>
+              <a:t> </a:t>
+            </a:r>
+            <a:r>
+              <a:rPr lang="hu-HU" dirty="0" err="1" smtClean="0"/>
+              <a:t>the</a:t>
+            </a:r>
+            <a:r>
+              <a:rPr lang="hu-HU" dirty="0" smtClean="0"/>
+              <a:t> </a:t>
+            </a:r>
+            <a:r>
+              <a:rPr lang="hu-HU" dirty="0" err="1" smtClean="0"/>
+              <a:t>useful</a:t>
+            </a:r>
+            <a:r>
+              <a:rPr lang="hu-HU" dirty="0" smtClean="0"/>
+              <a:t> </a:t>
+            </a:r>
+            <a:r>
+              <a:rPr lang="hu-HU" dirty="0" err="1" smtClean="0"/>
+              <a:t>information</a:t>
+            </a:r>
+            <a:r>
+              <a:rPr lang="hu-HU" dirty="0" smtClean="0"/>
+              <a:t> </a:t>
+            </a:r>
+            <a:r>
+              <a:rPr lang="hu-HU" dirty="0" err="1" smtClean="0"/>
+              <a:t>from</a:t>
+            </a:r>
+            <a:r>
+              <a:rPr lang="hu-HU" dirty="0" smtClean="0"/>
+              <a:t> </a:t>
+            </a:r>
+            <a:r>
+              <a:rPr lang="hu-HU" dirty="0" err="1" smtClean="0"/>
+              <a:t>the</a:t>
+            </a:r>
+            <a:r>
+              <a:rPr lang="hu-HU" dirty="0" smtClean="0"/>
+              <a:t> </a:t>
+            </a:r>
+            <a:r>
+              <a:rPr lang="hu-HU" dirty="0" err="1" smtClean="0"/>
+              <a:t>response</a:t>
+            </a:r>
+            <a:r>
+              <a:rPr lang="hu-HU" dirty="0" smtClean="0"/>
+              <a:t> </a:t>
+            </a:r>
+            <a:r>
+              <a:rPr lang="hu-HU" dirty="0" err="1" smtClean="0"/>
+              <a:t>generated</a:t>
+            </a:r>
+            <a:r>
+              <a:rPr lang="hu-HU" dirty="0" smtClean="0"/>
+              <a:t> </a:t>
+            </a:r>
+            <a:r>
+              <a:rPr lang="hu-HU" dirty="0" err="1" smtClean="0"/>
+              <a:t>by</a:t>
+            </a:r>
+            <a:r>
+              <a:rPr lang="hu-HU" dirty="0" smtClean="0"/>
+              <a:t> </a:t>
+            </a:r>
+            <a:r>
+              <a:rPr lang="hu-HU" dirty="0" err="1" smtClean="0"/>
+              <a:t>the</a:t>
+            </a:r>
+            <a:r>
+              <a:rPr lang="hu-HU" dirty="0" smtClean="0"/>
+              <a:t> </a:t>
+            </a:r>
+            <a:r>
+              <a:rPr lang="hu-HU" dirty="0" err="1" smtClean="0"/>
+              <a:t>model</a:t>
+            </a:r>
+            <a:r>
+              <a:rPr lang="hu-HU" dirty="0" smtClean="0"/>
+              <a:t>, and </a:t>
+            </a:r>
+            <a:r>
+              <a:rPr lang="hu-HU" dirty="0" err="1" smtClean="0"/>
+              <a:t>this</a:t>
+            </a:r>
+            <a:r>
+              <a:rPr lang="hu-HU" dirty="0" smtClean="0"/>
+              <a:t> </a:t>
+            </a:r>
+            <a:r>
+              <a:rPr lang="hu-HU" dirty="0" err="1" smtClean="0"/>
+              <a:t>task</a:t>
+            </a:r>
+            <a:r>
+              <a:rPr lang="hu-HU" dirty="0" smtClean="0"/>
+              <a:t> is </a:t>
+            </a:r>
+            <a:r>
+              <a:rPr lang="hu-HU" dirty="0" err="1" smtClean="0"/>
+              <a:t>usually</a:t>
+            </a:r>
+            <a:r>
+              <a:rPr lang="hu-HU" dirty="0" smtClean="0"/>
+              <a:t> no less </a:t>
+            </a:r>
+            <a:r>
+              <a:rPr lang="hu-HU" dirty="0" err="1" smtClean="0"/>
+              <a:t>difficult</a:t>
+            </a:r>
+            <a:r>
+              <a:rPr lang="hu-HU" dirty="0"/>
+              <a:t> </a:t>
+            </a:r>
+            <a:r>
+              <a:rPr lang="hu-HU" dirty="0" err="1" smtClean="0"/>
+              <a:t>than</a:t>
+            </a:r>
+            <a:r>
+              <a:rPr lang="hu-HU" dirty="0" smtClean="0"/>
+              <a:t> </a:t>
+            </a:r>
+            <a:r>
+              <a:rPr lang="hu-HU" dirty="0" err="1" smtClean="0"/>
+              <a:t>the</a:t>
+            </a:r>
+            <a:r>
+              <a:rPr lang="hu-HU" dirty="0" smtClean="0"/>
+              <a:t> </a:t>
+            </a:r>
+            <a:r>
+              <a:rPr lang="hu-HU" dirty="0" err="1" smtClean="0"/>
+              <a:t>original</a:t>
+            </a:r>
+            <a:r>
+              <a:rPr lang="hu-HU" dirty="0" smtClean="0"/>
+              <a:t> </a:t>
+            </a:r>
+            <a:r>
+              <a:rPr lang="hu-HU" dirty="0" err="1" smtClean="0"/>
+              <a:t>one</a:t>
+            </a:r>
+            <a:r>
+              <a:rPr lang="hu-HU" dirty="0" smtClean="0"/>
+              <a:t> </a:t>
+            </a:r>
+            <a:r>
+              <a:rPr lang="hu-HU" dirty="0" err="1" smtClean="0"/>
+              <a:t>was</a:t>
+            </a:r>
+            <a:r>
+              <a:rPr lang="hu-HU" dirty="0" smtClean="0"/>
+              <a:t>.</a:t>
+            </a:r>
+            <a:endParaRPr lang="hu-HU" dirty="0"/>
+          </a:p>
+        </p:txBody>
+      </p:sp>
+    </p:spTree>
+    <p:extLst>
+      <p:ext uri="{BB962C8B-B14F-4D97-AF65-F5344CB8AC3E}">
+        <p14:creationId xmlns:p14="http://schemas.microsoft.com/office/powerpoint/2010/main" val="1323609316"/>
+      </p:ext>
+    </p:extLst>
+  </p:cSld>
+  <p:clrMapOvr>
+    <a:masterClrMapping/>
+  </p:clrMapOvr>
+</p:sld>
+</file>
+
 <file path=ppt/slides/slide2.xml><?xml version="1.0" encoding="utf-8"?>
 <p:sld xmlns:a="http://schemas.openxmlformats.org/drawingml/2006/main" xmlns:r="http://schemas.openxmlformats.org/officeDocument/2006/relationships" xmlns:p="http://schemas.openxmlformats.org/presentationml/2006/main">
   <p:cSld>
@@ -10240,6 +15614,1152 @@
       </p:par>
     </p:tnLst>
   </p:timing>
+</p:sld>
+</file>
+
+<file path=ppt/slides/slide20.xml><?xml version="1.0" encoding="utf-8"?>
+<p:sld xmlns:a="http://schemas.openxmlformats.org/drawingml/2006/main" xmlns:r="http://schemas.openxmlformats.org/officeDocument/2006/relationships" xmlns:p="http://schemas.openxmlformats.org/presentationml/2006/main">
+  <p:cSld>
+    <p:spTree>
+      <p:nvGrpSpPr>
+        <p:cNvPr id="1" name=""/>
+        <p:cNvGrpSpPr/>
+        <p:nvPr/>
+      </p:nvGrpSpPr>
+      <p:grpSpPr>
+        <a:xfrm>
+          <a:off x="0" y="0"/>
+          <a:ext cx="0" cy="0"/>
+          <a:chOff x="0" y="0"/>
+          <a:chExt cx="0" cy="0"/>
+        </a:xfrm>
+      </p:grpSpPr>
+      <p:sp>
+        <p:nvSpPr>
+          <p:cNvPr id="2" name="Cím 1"/>
+          <p:cNvSpPr>
+            <a:spLocks noGrp="1"/>
+          </p:cNvSpPr>
+          <p:nvPr>
+            <p:ph type="title"/>
+          </p:nvPr>
+        </p:nvSpPr>
+        <p:spPr/>
+        <p:txBody>
+          <a:bodyPr>
+            <a:noAutofit/>
+          </a:bodyPr>
+          <a:lstStyle/>
+          <a:p>
+            <a:r>
+              <a:rPr lang="hu-HU" sz="3200" dirty="0" err="1"/>
+              <a:t>Generative</a:t>
+            </a:r>
+            <a:r>
+              <a:rPr lang="hu-HU" sz="3200" dirty="0"/>
+              <a:t> </a:t>
+            </a:r>
+            <a:r>
+              <a:rPr lang="hu-HU" sz="3200" dirty="0" err="1"/>
+              <a:t>AI</a:t>
+            </a:r>
+            <a:r>
+              <a:rPr lang="hu-HU" sz="3200" dirty="0"/>
+              <a:t> versus </a:t>
+            </a:r>
+            <a:br>
+              <a:rPr lang="hu-HU" sz="3200" dirty="0"/>
+            </a:br>
+            <a:r>
+              <a:rPr lang="hu-HU" sz="3200" dirty="0" err="1"/>
+              <a:t>Fine-Tuned</a:t>
+            </a:r>
+            <a:r>
+              <a:rPr lang="hu-HU" sz="3200" dirty="0"/>
+              <a:t> </a:t>
+            </a:r>
+            <a:r>
+              <a:rPr lang="hu-HU" sz="3200" dirty="0" err="1"/>
+              <a:t>Encoder</a:t>
+            </a:r>
+            <a:r>
+              <a:rPr lang="hu-HU" sz="3200" dirty="0"/>
+              <a:t> </a:t>
+            </a:r>
+            <a:r>
+              <a:rPr lang="hu-HU" sz="3200" dirty="0" err="1"/>
+              <a:t>Transformers</a:t>
+            </a:r>
+            <a:endParaRPr lang="en-GB" sz="3200" dirty="0"/>
+          </a:p>
+        </p:txBody>
+      </p:sp>
+      <p:sp>
+        <p:nvSpPr>
+          <p:cNvPr id="3" name="Tartalom helye 2"/>
+          <p:cNvSpPr>
+            <a:spLocks noGrp="1"/>
+          </p:cNvSpPr>
+          <p:nvPr>
+            <p:ph idx="1"/>
+          </p:nvPr>
+        </p:nvSpPr>
+        <p:spPr>
+          <a:xfrm>
+            <a:off x="467544" y="1628800"/>
+            <a:ext cx="8229600" cy="4709120"/>
+          </a:xfrm>
+        </p:spPr>
+        <p:txBody>
+          <a:bodyPr>
+            <a:normAutofit fontScale="70000" lnSpcReduction="20000"/>
+          </a:bodyPr>
+          <a:lstStyle/>
+          <a:p>
+            <a:r>
+              <a:rPr lang="hu-HU" dirty="0" err="1"/>
+              <a:t>Why</a:t>
+            </a:r>
+            <a:r>
+              <a:rPr lang="hu-HU" dirty="0"/>
+              <a:t> </a:t>
+            </a:r>
+            <a:r>
+              <a:rPr lang="hu-HU" dirty="0" err="1"/>
+              <a:t>not</a:t>
+            </a:r>
+            <a:r>
+              <a:rPr lang="hu-HU" dirty="0"/>
+              <a:t> </a:t>
+            </a:r>
+            <a:r>
+              <a:rPr lang="hu-HU" dirty="0" err="1"/>
+              <a:t>use</a:t>
+            </a:r>
+            <a:r>
+              <a:rPr lang="hu-HU" dirty="0"/>
+              <a:t> </a:t>
+            </a:r>
+            <a:r>
+              <a:rPr lang="hu-HU" dirty="0" err="1"/>
+              <a:t>generative</a:t>
+            </a:r>
+            <a:r>
+              <a:rPr lang="hu-HU" dirty="0"/>
+              <a:t> </a:t>
+            </a:r>
+            <a:r>
+              <a:rPr lang="hu-HU" dirty="0" err="1"/>
+              <a:t>LLMs</a:t>
+            </a:r>
+            <a:r>
+              <a:rPr lang="hu-HU" dirty="0"/>
+              <a:t> </a:t>
+            </a:r>
+            <a:r>
+              <a:rPr lang="hu-HU" dirty="0" err="1"/>
+              <a:t>for</a:t>
+            </a:r>
+            <a:r>
+              <a:rPr lang="hu-HU" dirty="0"/>
+              <a:t> </a:t>
+            </a:r>
+            <a:r>
+              <a:rPr lang="hu-HU" dirty="0" err="1"/>
+              <a:t>all</a:t>
+            </a:r>
+            <a:r>
+              <a:rPr lang="hu-HU" dirty="0"/>
+              <a:t> </a:t>
+            </a:r>
+            <a:r>
+              <a:rPr lang="hu-HU" dirty="0" err="1"/>
+              <a:t>NLP</a:t>
+            </a:r>
+            <a:r>
+              <a:rPr lang="hu-HU" dirty="0"/>
+              <a:t> </a:t>
+            </a:r>
+            <a:r>
+              <a:rPr lang="hu-HU" dirty="0" err="1" smtClean="0"/>
+              <a:t>tasks</a:t>
+            </a:r>
+            <a:r>
+              <a:rPr lang="hu-HU" dirty="0" smtClean="0"/>
+              <a:t>?</a:t>
+            </a:r>
+          </a:p>
+          <a:p>
+            <a:r>
+              <a:rPr lang="hu-HU" dirty="0" err="1" smtClean="0"/>
+              <a:t>Reason</a:t>
+            </a:r>
+            <a:r>
+              <a:rPr lang="hu-HU" dirty="0" smtClean="0"/>
+              <a:t> 3: </a:t>
+            </a:r>
+            <a:r>
+              <a:rPr lang="hu-HU" b="1" dirty="0" err="1" smtClean="0"/>
+              <a:t>costs</a:t>
+            </a:r>
+            <a:endParaRPr lang="hu-HU" b="1" dirty="0" smtClean="0"/>
+          </a:p>
+          <a:p>
+            <a:pPr lvl="1"/>
+            <a:r>
+              <a:rPr lang="hu-HU" dirty="0" err="1" smtClean="0"/>
+              <a:t>You</a:t>
+            </a:r>
+            <a:r>
+              <a:rPr lang="hu-HU" dirty="0" smtClean="0"/>
+              <a:t> </a:t>
+            </a:r>
+            <a:r>
+              <a:rPr lang="hu-HU" dirty="0" err="1" smtClean="0"/>
+              <a:t>normally</a:t>
+            </a:r>
+            <a:r>
+              <a:rPr lang="hu-HU" dirty="0" smtClean="0"/>
+              <a:t> </a:t>
+            </a:r>
+            <a:r>
+              <a:rPr lang="hu-HU" dirty="0" err="1" smtClean="0"/>
+              <a:t>use</a:t>
+            </a:r>
+            <a:r>
+              <a:rPr lang="hu-HU" dirty="0" smtClean="0"/>
+              <a:t> an </a:t>
+            </a:r>
+            <a:r>
+              <a:rPr lang="hu-HU" dirty="0" err="1" smtClean="0"/>
+              <a:t>encoder</a:t>
+            </a:r>
+            <a:r>
+              <a:rPr lang="hu-HU" dirty="0" smtClean="0"/>
+              <a:t> </a:t>
+            </a:r>
+            <a:r>
+              <a:rPr lang="hu-HU" dirty="0" err="1" smtClean="0"/>
+              <a:t>transformer</a:t>
+            </a:r>
+            <a:r>
+              <a:rPr lang="hu-HU" dirty="0" smtClean="0"/>
+              <a:t> </a:t>
+            </a:r>
+            <a:r>
+              <a:rPr lang="hu-HU" dirty="0" err="1" smtClean="0"/>
+              <a:t>on</a:t>
+            </a:r>
+            <a:r>
+              <a:rPr lang="hu-HU" dirty="0" smtClean="0"/>
+              <a:t> </a:t>
+            </a:r>
+            <a:r>
+              <a:rPr lang="hu-HU" dirty="0" err="1" smtClean="0"/>
+              <a:t>your</a:t>
+            </a:r>
+            <a:r>
+              <a:rPr lang="hu-HU" dirty="0" smtClean="0"/>
+              <a:t> </a:t>
+            </a:r>
+            <a:r>
+              <a:rPr lang="hu-HU" dirty="0" err="1" smtClean="0"/>
+              <a:t>own</a:t>
+            </a:r>
+            <a:r>
+              <a:rPr lang="hu-HU" dirty="0" smtClean="0"/>
+              <a:t>, </a:t>
+            </a:r>
+            <a:r>
+              <a:rPr lang="hu-HU" dirty="0" err="1" smtClean="0"/>
+              <a:t>GPU-equipped</a:t>
+            </a:r>
+            <a:r>
+              <a:rPr lang="hu-HU" dirty="0" smtClean="0"/>
+              <a:t> </a:t>
+            </a:r>
+            <a:r>
+              <a:rPr lang="hu-HU" dirty="0" err="1" smtClean="0"/>
+              <a:t>machine</a:t>
+            </a:r>
+            <a:endParaRPr lang="hu-HU" dirty="0" smtClean="0"/>
+          </a:p>
+          <a:p>
+            <a:pPr lvl="1"/>
+            <a:r>
+              <a:rPr lang="hu-HU" dirty="0" err="1" smtClean="0"/>
+              <a:t>Requires</a:t>
+            </a:r>
+            <a:r>
+              <a:rPr lang="hu-HU" dirty="0" smtClean="0"/>
+              <a:t> a </a:t>
+            </a:r>
+            <a:r>
+              <a:rPr lang="hu-HU" dirty="0" err="1" smtClean="0"/>
+              <a:t>one-time</a:t>
+            </a:r>
+            <a:r>
+              <a:rPr lang="hu-HU" dirty="0" smtClean="0"/>
+              <a:t> </a:t>
+            </a:r>
+            <a:r>
+              <a:rPr lang="hu-HU" dirty="0" err="1" smtClean="0"/>
+              <a:t>investment</a:t>
+            </a:r>
+            <a:r>
+              <a:rPr lang="hu-HU" dirty="0" smtClean="0"/>
+              <a:t>, </a:t>
+            </a:r>
+            <a:r>
+              <a:rPr lang="hu-HU" dirty="0" err="1" smtClean="0"/>
+              <a:t>you</a:t>
+            </a:r>
+            <a:r>
+              <a:rPr lang="hu-HU" dirty="0" smtClean="0"/>
+              <a:t> </a:t>
+            </a:r>
+            <a:r>
+              <a:rPr lang="hu-HU" dirty="0" err="1" smtClean="0"/>
+              <a:t>need</a:t>
+            </a:r>
+            <a:r>
+              <a:rPr lang="hu-HU" dirty="0" smtClean="0"/>
+              <a:t> </a:t>
+            </a:r>
+            <a:r>
+              <a:rPr lang="hu-HU" dirty="0" err="1" smtClean="0"/>
+              <a:t>to</a:t>
+            </a:r>
+            <a:r>
+              <a:rPr lang="hu-HU" dirty="0" smtClean="0"/>
+              <a:t> </a:t>
+            </a:r>
+            <a:r>
+              <a:rPr lang="hu-HU" dirty="0" err="1" smtClean="0"/>
+              <a:t>buy</a:t>
+            </a:r>
+            <a:r>
+              <a:rPr lang="hu-HU" dirty="0" smtClean="0"/>
+              <a:t> </a:t>
+            </a:r>
+            <a:r>
+              <a:rPr lang="hu-HU" dirty="0" err="1" smtClean="0"/>
+              <a:t>a</a:t>
+            </a:r>
+            <a:r>
+              <a:rPr lang="hu-HU" dirty="0" smtClean="0"/>
+              <a:t> computer </a:t>
+            </a:r>
+            <a:r>
+              <a:rPr lang="hu-HU" dirty="0" err="1" smtClean="0"/>
+              <a:t>with</a:t>
+            </a:r>
+            <a:r>
+              <a:rPr lang="hu-HU" dirty="0" smtClean="0"/>
+              <a:t> a </a:t>
+            </a:r>
+            <a:r>
+              <a:rPr lang="hu-HU" dirty="0" err="1" smtClean="0"/>
+              <a:t>GPU</a:t>
+            </a:r>
+            <a:r>
+              <a:rPr lang="hu-HU" dirty="0" smtClean="0"/>
+              <a:t>, </a:t>
+            </a:r>
+            <a:r>
+              <a:rPr lang="hu-HU" dirty="0" err="1" smtClean="0"/>
+              <a:t>which</a:t>
+            </a:r>
+            <a:r>
+              <a:rPr lang="hu-HU" dirty="0" smtClean="0"/>
+              <a:t> </a:t>
+            </a:r>
+            <a:r>
+              <a:rPr lang="hu-HU" dirty="0" err="1" smtClean="0"/>
+              <a:t>you</a:t>
+            </a:r>
+            <a:r>
+              <a:rPr lang="hu-HU" dirty="0" smtClean="0"/>
+              <a:t> </a:t>
+            </a:r>
+            <a:r>
+              <a:rPr lang="hu-HU" dirty="0" err="1" smtClean="0"/>
+              <a:t>might</a:t>
+            </a:r>
+            <a:r>
+              <a:rPr lang="hu-HU" dirty="0" smtClean="0"/>
+              <a:t> </a:t>
+            </a:r>
+            <a:r>
+              <a:rPr lang="hu-HU" dirty="0" err="1" smtClean="0"/>
+              <a:t>already</a:t>
+            </a:r>
+            <a:r>
+              <a:rPr lang="hu-HU" dirty="0" smtClean="0"/>
+              <a:t> </a:t>
+            </a:r>
+            <a:r>
+              <a:rPr lang="hu-HU" dirty="0" err="1" smtClean="0"/>
+              <a:t>own</a:t>
+            </a:r>
+            <a:r>
+              <a:rPr lang="hu-HU" dirty="0" smtClean="0"/>
+              <a:t> </a:t>
+            </a:r>
+            <a:r>
+              <a:rPr lang="hu-HU" dirty="0" err="1" smtClean="0"/>
+              <a:t>anyway</a:t>
+            </a:r>
+            <a:r>
+              <a:rPr lang="hu-HU" dirty="0" smtClean="0"/>
+              <a:t>.</a:t>
+            </a:r>
+          </a:p>
+          <a:p>
+            <a:pPr lvl="1"/>
+            <a:r>
+              <a:rPr lang="hu-HU" dirty="0" err="1" smtClean="0"/>
+              <a:t>Electricity</a:t>
+            </a:r>
+            <a:r>
+              <a:rPr lang="hu-HU" dirty="0" smtClean="0"/>
+              <a:t> </a:t>
+            </a:r>
+            <a:r>
+              <a:rPr lang="hu-HU" dirty="0" err="1" smtClean="0"/>
+              <a:t>costs</a:t>
+            </a:r>
+            <a:r>
+              <a:rPr lang="hu-HU" dirty="0" smtClean="0"/>
+              <a:t> </a:t>
+            </a:r>
+            <a:r>
+              <a:rPr lang="hu-HU" dirty="0" err="1" smtClean="0"/>
+              <a:t>are</a:t>
+            </a:r>
+            <a:r>
+              <a:rPr lang="hu-HU" dirty="0" smtClean="0"/>
+              <a:t> </a:t>
+            </a:r>
+            <a:r>
+              <a:rPr lang="hu-HU" dirty="0" err="1" smtClean="0"/>
+              <a:t>generally</a:t>
+            </a:r>
+            <a:r>
+              <a:rPr lang="hu-HU" dirty="0" smtClean="0"/>
+              <a:t> </a:t>
+            </a:r>
+            <a:r>
+              <a:rPr lang="hu-HU" dirty="0" err="1" smtClean="0"/>
+              <a:t>tolerable</a:t>
+            </a:r>
+            <a:r>
+              <a:rPr lang="hu-HU" dirty="0" smtClean="0"/>
+              <a:t>.</a:t>
+            </a:r>
+          </a:p>
+          <a:p>
+            <a:pPr lvl="1"/>
+            <a:r>
+              <a:rPr lang="hu-HU" dirty="0" err="1" smtClean="0"/>
+              <a:t>You</a:t>
+            </a:r>
+            <a:r>
+              <a:rPr lang="hu-HU" dirty="0" smtClean="0"/>
+              <a:t> </a:t>
+            </a:r>
+            <a:r>
+              <a:rPr lang="hu-HU" dirty="0" err="1" smtClean="0"/>
+              <a:t>do</a:t>
+            </a:r>
+            <a:r>
+              <a:rPr lang="hu-HU" dirty="0" smtClean="0"/>
+              <a:t> </a:t>
+            </a:r>
+            <a:r>
+              <a:rPr lang="hu-HU" dirty="0" err="1" smtClean="0"/>
+              <a:t>not</a:t>
+            </a:r>
+            <a:r>
+              <a:rPr lang="hu-HU" dirty="0" smtClean="0"/>
+              <a:t> </a:t>
+            </a:r>
+            <a:r>
+              <a:rPr lang="hu-HU" dirty="0" err="1" smtClean="0"/>
+              <a:t>run</a:t>
+            </a:r>
+            <a:r>
+              <a:rPr lang="hu-HU" dirty="0" smtClean="0"/>
+              <a:t> a </a:t>
+            </a:r>
+            <a:r>
+              <a:rPr lang="hu-HU" dirty="0" err="1" smtClean="0"/>
+              <a:t>generative</a:t>
+            </a:r>
+            <a:r>
+              <a:rPr lang="hu-HU" dirty="0" smtClean="0"/>
+              <a:t> LM </a:t>
+            </a:r>
+            <a:r>
+              <a:rPr lang="hu-HU" dirty="0" err="1" smtClean="0"/>
+              <a:t>generally</a:t>
+            </a:r>
+            <a:r>
+              <a:rPr lang="hu-HU" dirty="0" smtClean="0"/>
+              <a:t> </a:t>
+            </a:r>
+            <a:r>
+              <a:rPr lang="hu-HU" dirty="0" err="1" smtClean="0"/>
+              <a:t>on</a:t>
+            </a:r>
+            <a:r>
+              <a:rPr lang="hu-HU" dirty="0" smtClean="0"/>
+              <a:t> </a:t>
+            </a:r>
+            <a:r>
+              <a:rPr lang="hu-HU" dirty="0" err="1" smtClean="0"/>
+              <a:t>your</a:t>
+            </a:r>
+            <a:r>
+              <a:rPr lang="hu-HU" dirty="0" smtClean="0"/>
+              <a:t> </a:t>
+            </a:r>
+            <a:r>
+              <a:rPr lang="hu-HU" dirty="0" err="1" smtClean="0"/>
+              <a:t>own</a:t>
+            </a:r>
+            <a:r>
+              <a:rPr lang="hu-HU" dirty="0" smtClean="0"/>
+              <a:t> hardware</a:t>
+            </a:r>
+          </a:p>
+          <a:p>
+            <a:pPr lvl="2"/>
+            <a:r>
+              <a:rPr lang="hu-HU" dirty="0" err="1"/>
+              <a:t>I</a:t>
+            </a:r>
+            <a:r>
+              <a:rPr lang="hu-HU" dirty="0" err="1" smtClean="0"/>
+              <a:t>t</a:t>
+            </a:r>
+            <a:r>
+              <a:rPr lang="hu-HU" dirty="0" smtClean="0"/>
+              <a:t> </a:t>
+            </a:r>
+            <a:r>
+              <a:rPr lang="hu-HU" b="1" dirty="0" smtClean="0"/>
+              <a:t>is </a:t>
+            </a:r>
+            <a:r>
+              <a:rPr lang="hu-HU" dirty="0" err="1" smtClean="0"/>
+              <a:t>possible</a:t>
+            </a:r>
+            <a:r>
+              <a:rPr lang="hu-HU" dirty="0" smtClean="0"/>
+              <a:t> </a:t>
+            </a:r>
+            <a:r>
+              <a:rPr lang="hu-HU" dirty="0" err="1" smtClean="0"/>
+              <a:t>if</a:t>
+            </a:r>
+            <a:r>
+              <a:rPr lang="hu-HU" dirty="0" smtClean="0"/>
+              <a:t> </a:t>
+            </a:r>
+            <a:r>
+              <a:rPr lang="hu-HU" dirty="0" err="1" smtClean="0"/>
+              <a:t>you</a:t>
+            </a:r>
+            <a:r>
+              <a:rPr lang="hu-HU" dirty="0" smtClean="0"/>
+              <a:t> </a:t>
+            </a:r>
+            <a:r>
+              <a:rPr lang="hu-HU" dirty="0" err="1" smtClean="0"/>
+              <a:t>use</a:t>
+            </a:r>
+            <a:r>
+              <a:rPr lang="hu-HU" dirty="0" smtClean="0"/>
+              <a:t> an </a:t>
+            </a:r>
+            <a:r>
+              <a:rPr lang="hu-HU" b="1" dirty="0" err="1" smtClean="0"/>
+              <a:t>open</a:t>
+            </a:r>
+            <a:r>
+              <a:rPr lang="hu-HU" b="1" dirty="0"/>
+              <a:t> </a:t>
+            </a:r>
+            <a:r>
+              <a:rPr lang="hu-HU" b="1" dirty="0" err="1" smtClean="0"/>
+              <a:t>model</a:t>
+            </a:r>
+            <a:r>
+              <a:rPr lang="hu-HU" b="1" dirty="0" smtClean="0"/>
+              <a:t> </a:t>
+            </a:r>
+            <a:r>
+              <a:rPr lang="hu-HU" dirty="0" err="1" smtClean="0"/>
+              <a:t>like</a:t>
+            </a:r>
+            <a:r>
+              <a:rPr lang="hu-HU" dirty="0" smtClean="0"/>
+              <a:t> </a:t>
+            </a:r>
+            <a:r>
+              <a:rPr lang="hu-HU" dirty="0" err="1" smtClean="0"/>
+              <a:t>Llama</a:t>
+            </a:r>
+            <a:r>
+              <a:rPr lang="hu-HU" dirty="0" smtClean="0"/>
+              <a:t>, Gemma, </a:t>
+            </a:r>
+            <a:r>
+              <a:rPr lang="hu-HU" dirty="0" err="1" smtClean="0"/>
+              <a:t>Qwen</a:t>
+            </a:r>
+            <a:r>
+              <a:rPr lang="hu-HU" dirty="0" smtClean="0"/>
+              <a:t> </a:t>
+            </a:r>
+            <a:r>
+              <a:rPr lang="hu-HU" dirty="0" err="1" smtClean="0"/>
+              <a:t>or</a:t>
+            </a:r>
+            <a:r>
+              <a:rPr lang="hu-HU" dirty="0" smtClean="0"/>
+              <a:t> </a:t>
+            </a:r>
+            <a:r>
+              <a:rPr lang="hu-HU" dirty="0" err="1" smtClean="0"/>
+              <a:t>DeepSeek</a:t>
+            </a:r>
+            <a:r>
+              <a:rPr lang="hu-HU" dirty="0" smtClean="0"/>
+              <a:t>, </a:t>
+            </a:r>
+            <a:r>
+              <a:rPr lang="hu-HU" dirty="0" err="1" smtClean="0"/>
+              <a:t>but</a:t>
+            </a:r>
+            <a:r>
+              <a:rPr lang="hu-HU" dirty="0" smtClean="0"/>
+              <a:t> </a:t>
+            </a:r>
+            <a:r>
+              <a:rPr lang="hu-HU" dirty="0" err="1" smtClean="0"/>
+              <a:t>this</a:t>
+            </a:r>
+            <a:r>
+              <a:rPr lang="hu-HU" dirty="0" smtClean="0"/>
+              <a:t> </a:t>
+            </a:r>
+            <a:r>
+              <a:rPr lang="hu-HU" dirty="0" err="1" smtClean="0"/>
+              <a:t>requires</a:t>
+            </a:r>
+            <a:r>
+              <a:rPr lang="hu-HU" dirty="0" smtClean="0"/>
+              <a:t> </a:t>
+            </a:r>
+            <a:r>
+              <a:rPr lang="hu-HU" dirty="0" err="1" smtClean="0"/>
+              <a:t>substantially</a:t>
+            </a:r>
+            <a:r>
+              <a:rPr lang="hu-HU" dirty="0" smtClean="0"/>
+              <a:t> more </a:t>
+            </a:r>
+            <a:r>
+              <a:rPr lang="hu-HU" dirty="0" err="1" smtClean="0"/>
+              <a:t>GPU</a:t>
+            </a:r>
+            <a:r>
+              <a:rPr lang="hu-HU" dirty="0" smtClean="0"/>
+              <a:t> </a:t>
+            </a:r>
+            <a:r>
+              <a:rPr lang="hu-HU" dirty="0" err="1" smtClean="0"/>
+              <a:t>capacity</a:t>
+            </a:r>
+            <a:r>
+              <a:rPr lang="hu-HU" dirty="0" smtClean="0"/>
+              <a:t> and RAM </a:t>
+            </a:r>
+            <a:r>
+              <a:rPr lang="hu-HU" dirty="0" err="1" smtClean="0"/>
+              <a:t>than</a:t>
+            </a:r>
+            <a:r>
+              <a:rPr lang="hu-HU" dirty="0" smtClean="0"/>
+              <a:t> </a:t>
+            </a:r>
+            <a:r>
+              <a:rPr lang="hu-HU" dirty="0" err="1" smtClean="0"/>
+              <a:t>running</a:t>
+            </a:r>
+            <a:r>
+              <a:rPr lang="hu-HU" dirty="0" smtClean="0"/>
+              <a:t> a </a:t>
+            </a:r>
+            <a:r>
+              <a:rPr lang="hu-HU" dirty="0" err="1" smtClean="0"/>
+              <a:t>BERT</a:t>
+            </a:r>
+            <a:r>
+              <a:rPr lang="hu-HU" dirty="0" smtClean="0"/>
+              <a:t> </a:t>
+            </a:r>
+            <a:r>
+              <a:rPr lang="hu-HU" dirty="0" err="1" smtClean="0"/>
+              <a:t>model</a:t>
+            </a:r>
+            <a:endParaRPr lang="hu-HU" dirty="0" smtClean="0"/>
+          </a:p>
+          <a:p>
+            <a:pPr lvl="2"/>
+            <a:r>
+              <a:rPr lang="hu-HU" dirty="0" err="1" smtClean="0"/>
+              <a:t>Generative</a:t>
+            </a:r>
+            <a:r>
+              <a:rPr lang="hu-HU" dirty="0" smtClean="0"/>
+              <a:t> </a:t>
+            </a:r>
+            <a:r>
+              <a:rPr lang="hu-HU" dirty="0" err="1" smtClean="0"/>
+              <a:t>LMs</a:t>
+            </a:r>
+            <a:r>
+              <a:rPr lang="hu-HU" dirty="0" smtClean="0"/>
+              <a:t> </a:t>
+            </a:r>
+            <a:r>
+              <a:rPr lang="hu-HU" dirty="0" err="1" smtClean="0"/>
+              <a:t>are</a:t>
+            </a:r>
+            <a:r>
+              <a:rPr lang="hu-HU" dirty="0" smtClean="0"/>
+              <a:t> </a:t>
+            </a:r>
+            <a:r>
+              <a:rPr lang="hu-HU" dirty="0" err="1" smtClean="0"/>
+              <a:t>usually</a:t>
+            </a:r>
+            <a:r>
+              <a:rPr lang="hu-HU" dirty="0" smtClean="0"/>
+              <a:t> </a:t>
+            </a:r>
+            <a:r>
+              <a:rPr lang="hu-HU" dirty="0" err="1" smtClean="0"/>
+              <a:t>run</a:t>
+            </a:r>
+            <a:r>
+              <a:rPr lang="hu-HU" dirty="0" smtClean="0"/>
+              <a:t> </a:t>
+            </a:r>
+            <a:r>
+              <a:rPr lang="hu-HU" dirty="0" err="1" smtClean="0"/>
+              <a:t>using</a:t>
+            </a:r>
+            <a:r>
+              <a:rPr lang="hu-HU" dirty="0" smtClean="0"/>
+              <a:t> a </a:t>
+            </a:r>
+            <a:r>
+              <a:rPr lang="hu-HU" dirty="0" err="1" smtClean="0"/>
+              <a:t>cloud</a:t>
+            </a:r>
+            <a:r>
+              <a:rPr lang="hu-HU" dirty="0" smtClean="0"/>
+              <a:t> </a:t>
+            </a:r>
+            <a:r>
+              <a:rPr lang="hu-HU" dirty="0" err="1" smtClean="0"/>
+              <a:t>computing</a:t>
+            </a:r>
+            <a:r>
+              <a:rPr lang="hu-HU" dirty="0" smtClean="0"/>
+              <a:t> </a:t>
+            </a:r>
+            <a:r>
+              <a:rPr lang="hu-HU" dirty="0" err="1" smtClean="0"/>
+              <a:t>API</a:t>
+            </a:r>
+            <a:r>
+              <a:rPr lang="hu-HU" dirty="0" smtClean="0"/>
+              <a:t> </a:t>
+            </a:r>
+            <a:r>
+              <a:rPr lang="hu-HU" dirty="0" err="1" smtClean="0"/>
+              <a:t>on</a:t>
+            </a:r>
+            <a:r>
+              <a:rPr lang="hu-HU" dirty="0" smtClean="0"/>
+              <a:t> </a:t>
+            </a:r>
+            <a:r>
+              <a:rPr lang="hu-HU" dirty="0" err="1" smtClean="0"/>
+              <a:t>a</a:t>
+            </a:r>
+            <a:r>
+              <a:rPr lang="hu-HU" dirty="0" smtClean="0"/>
+              <a:t> platform </a:t>
+            </a:r>
+            <a:r>
+              <a:rPr lang="hu-HU" dirty="0" err="1" smtClean="0"/>
+              <a:t>such</a:t>
+            </a:r>
+            <a:r>
+              <a:rPr lang="hu-HU" dirty="0" smtClean="0"/>
+              <a:t> </a:t>
+            </a:r>
+            <a:r>
+              <a:rPr lang="hu-HU" dirty="0" err="1" smtClean="0"/>
+              <a:t>as</a:t>
+            </a:r>
+            <a:r>
+              <a:rPr lang="hu-HU" dirty="0" smtClean="0"/>
+              <a:t> </a:t>
+            </a:r>
+            <a:r>
+              <a:rPr lang="hu-HU" dirty="0" err="1" smtClean="0"/>
+              <a:t>AWS</a:t>
+            </a:r>
+            <a:r>
+              <a:rPr lang="hu-HU" dirty="0" smtClean="0"/>
+              <a:t>, Microsoft </a:t>
+            </a:r>
+            <a:r>
+              <a:rPr lang="hu-HU" dirty="0" err="1" smtClean="0"/>
+              <a:t>Azure</a:t>
+            </a:r>
+            <a:r>
+              <a:rPr lang="hu-HU" dirty="0" smtClean="0"/>
+              <a:t> </a:t>
+            </a:r>
+            <a:r>
+              <a:rPr lang="hu-HU" dirty="0" err="1" smtClean="0"/>
+              <a:t>or</a:t>
+            </a:r>
+            <a:r>
+              <a:rPr lang="hu-HU" dirty="0" smtClean="0"/>
+              <a:t> </a:t>
+            </a:r>
+            <a:r>
+              <a:rPr lang="hu-HU" dirty="0" err="1" smtClean="0"/>
+              <a:t>Google</a:t>
+            </a:r>
+            <a:r>
+              <a:rPr lang="hu-HU" dirty="0" smtClean="0"/>
+              <a:t> </a:t>
+            </a:r>
+            <a:r>
+              <a:rPr lang="hu-HU" dirty="0" err="1" smtClean="0"/>
+              <a:t>Cloud</a:t>
+            </a:r>
+            <a:endParaRPr lang="hu-HU" dirty="0" smtClean="0"/>
+          </a:p>
+          <a:p>
+            <a:pPr lvl="2"/>
+            <a:r>
+              <a:rPr lang="hu-HU" dirty="0" err="1" smtClean="0"/>
+              <a:t>Running</a:t>
+            </a:r>
+            <a:r>
+              <a:rPr lang="hu-HU" dirty="0" smtClean="0"/>
+              <a:t> a </a:t>
+            </a:r>
+            <a:r>
+              <a:rPr lang="hu-HU" b="1" dirty="0" err="1" smtClean="0"/>
+              <a:t>single</a:t>
+            </a:r>
+            <a:r>
+              <a:rPr lang="hu-HU" b="1" dirty="0" smtClean="0"/>
+              <a:t> </a:t>
+            </a:r>
+            <a:r>
+              <a:rPr lang="hu-HU" b="1" dirty="0" err="1" smtClean="0"/>
+              <a:t>request</a:t>
+            </a:r>
+            <a:r>
+              <a:rPr lang="hu-HU" b="1" dirty="0" smtClean="0"/>
+              <a:t> </a:t>
+            </a:r>
+            <a:r>
+              <a:rPr lang="hu-HU" b="1" dirty="0" err="1" smtClean="0"/>
+              <a:t>costs</a:t>
+            </a:r>
+            <a:r>
+              <a:rPr lang="hu-HU" b="1" dirty="0" smtClean="0"/>
+              <a:t> </a:t>
+            </a:r>
+            <a:r>
+              <a:rPr lang="hu-HU" b="1" dirty="0" err="1" smtClean="0"/>
+              <a:t>a</a:t>
+            </a:r>
+            <a:r>
+              <a:rPr lang="hu-HU" b="1" dirty="0" smtClean="0"/>
+              <a:t> </a:t>
+            </a:r>
+            <a:r>
+              <a:rPr lang="hu-HU" b="1" dirty="0" err="1" smtClean="0"/>
+              <a:t>fraction</a:t>
+            </a:r>
+            <a:r>
+              <a:rPr lang="hu-HU" b="1" dirty="0" smtClean="0"/>
+              <a:t> of a cent</a:t>
+            </a:r>
+            <a:r>
+              <a:rPr lang="hu-HU" dirty="0" smtClean="0"/>
+              <a:t>.</a:t>
+            </a:r>
+          </a:p>
+          <a:p>
+            <a:pPr lvl="3"/>
+            <a:r>
+              <a:rPr lang="hu-HU" dirty="0" err="1"/>
+              <a:t>R</a:t>
+            </a:r>
+            <a:r>
+              <a:rPr lang="hu-HU" dirty="0" err="1" smtClean="0"/>
+              <a:t>equests</a:t>
+            </a:r>
+            <a:r>
+              <a:rPr lang="hu-HU" dirty="0" smtClean="0"/>
+              <a:t> </a:t>
+            </a:r>
+            <a:r>
+              <a:rPr lang="hu-HU" dirty="0" err="1" smtClean="0"/>
+              <a:t>to</a:t>
+            </a:r>
+            <a:r>
+              <a:rPr lang="hu-HU" dirty="0" smtClean="0"/>
+              <a:t> a </a:t>
+            </a:r>
+            <a:r>
+              <a:rPr lang="hu-HU" dirty="0" err="1" smtClean="0"/>
+              <a:t>cloud-hosted</a:t>
+            </a:r>
+            <a:r>
+              <a:rPr lang="hu-HU" dirty="0" smtClean="0"/>
+              <a:t> </a:t>
+            </a:r>
+            <a:r>
+              <a:rPr lang="hu-HU" dirty="0" err="1" smtClean="0"/>
+              <a:t>LLM</a:t>
+            </a:r>
+            <a:r>
+              <a:rPr lang="hu-HU" dirty="0" smtClean="0"/>
+              <a:t> </a:t>
+            </a:r>
+            <a:r>
+              <a:rPr lang="hu-HU" dirty="0" err="1" smtClean="0"/>
+              <a:t>like</a:t>
+            </a:r>
+            <a:r>
+              <a:rPr lang="hu-HU" dirty="0" smtClean="0"/>
+              <a:t> </a:t>
+            </a:r>
+            <a:r>
+              <a:rPr lang="hu-HU" dirty="0" err="1" smtClean="0"/>
+              <a:t>Gemini</a:t>
+            </a:r>
+            <a:r>
+              <a:rPr lang="hu-HU" dirty="0" smtClean="0"/>
+              <a:t> </a:t>
+            </a:r>
+            <a:r>
+              <a:rPr lang="hu-HU" dirty="0" err="1" smtClean="0"/>
+              <a:t>or</a:t>
+            </a:r>
+            <a:r>
+              <a:rPr lang="hu-HU" dirty="0" smtClean="0"/>
+              <a:t> GPT-5 </a:t>
+            </a:r>
+            <a:r>
+              <a:rPr lang="hu-HU" dirty="0" err="1" smtClean="0"/>
+              <a:t>cost</a:t>
+            </a:r>
+            <a:r>
+              <a:rPr lang="hu-HU" dirty="0" smtClean="0"/>
+              <a:t> </a:t>
+            </a:r>
+            <a:r>
+              <a:rPr lang="hu-HU" dirty="0" err="1" smtClean="0"/>
+              <a:t>roughly</a:t>
+            </a:r>
+            <a:r>
+              <a:rPr lang="hu-HU" dirty="0" smtClean="0"/>
+              <a:t> </a:t>
+            </a:r>
+            <a:r>
+              <a:rPr lang="hu-HU" b="1" dirty="0" smtClean="0"/>
+              <a:t>1 </a:t>
+            </a:r>
+            <a:r>
+              <a:rPr lang="hu-HU" b="1" dirty="0" err="1" smtClean="0"/>
+              <a:t>dollar</a:t>
+            </a:r>
+            <a:r>
+              <a:rPr lang="hu-HU" b="1" dirty="0" smtClean="0"/>
+              <a:t> per 1 </a:t>
+            </a:r>
+            <a:r>
+              <a:rPr lang="hu-HU" b="1" dirty="0" err="1" smtClean="0"/>
+              <a:t>million</a:t>
+            </a:r>
+            <a:r>
+              <a:rPr lang="hu-HU" b="1" dirty="0" smtClean="0"/>
+              <a:t> input </a:t>
+            </a:r>
+            <a:r>
+              <a:rPr lang="hu-HU" b="1" dirty="0" err="1" smtClean="0"/>
+              <a:t>tokens</a:t>
+            </a:r>
+            <a:r>
+              <a:rPr lang="hu-HU" b="1" dirty="0" smtClean="0"/>
+              <a:t> </a:t>
+            </a:r>
+            <a:r>
+              <a:rPr lang="hu-HU" dirty="0" smtClean="0"/>
+              <a:t>and </a:t>
+            </a:r>
+            <a:r>
+              <a:rPr lang="hu-HU" b="1" dirty="0" smtClean="0"/>
+              <a:t>10 </a:t>
+            </a:r>
+            <a:r>
+              <a:rPr lang="hu-HU" b="1" dirty="0" err="1" smtClean="0"/>
+              <a:t>dollars</a:t>
+            </a:r>
+            <a:r>
+              <a:rPr lang="hu-HU" b="1" dirty="0" smtClean="0"/>
+              <a:t> per 1M output </a:t>
+            </a:r>
+            <a:r>
+              <a:rPr lang="hu-HU" b="1" dirty="0" err="1" smtClean="0"/>
+              <a:t>tokens</a:t>
+            </a:r>
+            <a:endParaRPr lang="hu-HU" b="1" dirty="0" smtClean="0"/>
+          </a:p>
+          <a:p>
+            <a:pPr lvl="2"/>
+            <a:r>
+              <a:rPr lang="hu-HU" dirty="0" err="1" smtClean="0"/>
+              <a:t>However</a:t>
+            </a:r>
+            <a:r>
+              <a:rPr lang="hu-HU" dirty="0" smtClean="0"/>
+              <a:t>, </a:t>
+            </a:r>
+            <a:r>
+              <a:rPr lang="hu-HU" dirty="0" err="1" smtClean="0"/>
+              <a:t>this</a:t>
+            </a:r>
+            <a:r>
+              <a:rPr lang="hu-HU" dirty="0" smtClean="0"/>
+              <a:t> </a:t>
+            </a:r>
+            <a:r>
+              <a:rPr lang="hu-HU" dirty="0" err="1" smtClean="0"/>
+              <a:t>multiplies</a:t>
+            </a:r>
+            <a:r>
+              <a:rPr lang="hu-HU" dirty="0" smtClean="0"/>
+              <a:t> </a:t>
+            </a:r>
+            <a:r>
+              <a:rPr lang="hu-HU" dirty="0" err="1" smtClean="0"/>
+              <a:t>very</a:t>
+            </a:r>
+            <a:r>
+              <a:rPr lang="hu-HU" dirty="0" smtClean="0"/>
+              <a:t> </a:t>
+            </a:r>
+            <a:r>
+              <a:rPr lang="hu-HU" dirty="0" err="1" smtClean="0"/>
+              <a:t>quickly</a:t>
+            </a:r>
+            <a:r>
+              <a:rPr lang="hu-HU" dirty="0" smtClean="0"/>
+              <a:t> </a:t>
+            </a:r>
+            <a:r>
+              <a:rPr lang="hu-HU" dirty="0" err="1" smtClean="0"/>
+              <a:t>when</a:t>
+            </a:r>
+            <a:r>
+              <a:rPr lang="hu-HU" dirty="0" smtClean="0"/>
+              <a:t> </a:t>
+            </a:r>
+            <a:r>
+              <a:rPr lang="hu-HU" dirty="0" err="1" smtClean="0"/>
+              <a:t>using</a:t>
+            </a:r>
+            <a:r>
+              <a:rPr lang="hu-HU" dirty="0" smtClean="0"/>
+              <a:t> </a:t>
+            </a:r>
+            <a:r>
+              <a:rPr lang="hu-HU" dirty="0" err="1" smtClean="0"/>
+              <a:t>LLMs</a:t>
+            </a:r>
+            <a:r>
+              <a:rPr lang="hu-HU" dirty="0" smtClean="0"/>
+              <a:t> </a:t>
+            </a:r>
+            <a:r>
+              <a:rPr lang="hu-HU" dirty="0" err="1" smtClean="0"/>
+              <a:t>for</a:t>
+            </a:r>
+            <a:r>
+              <a:rPr lang="hu-HU" dirty="0" smtClean="0"/>
+              <a:t> </a:t>
+            </a:r>
+            <a:r>
+              <a:rPr lang="hu-HU" dirty="0" err="1" smtClean="0"/>
+              <a:t>NLP</a:t>
+            </a:r>
+            <a:r>
+              <a:rPr lang="hu-HU" dirty="0" smtClean="0"/>
+              <a:t> </a:t>
+            </a:r>
+            <a:r>
+              <a:rPr lang="hu-HU" dirty="0" err="1" smtClean="0"/>
+              <a:t>jobs</a:t>
+            </a:r>
+            <a:r>
+              <a:rPr lang="hu-HU" dirty="0" smtClean="0"/>
+              <a:t> </a:t>
+            </a:r>
+            <a:r>
+              <a:rPr lang="hu-HU" dirty="0" err="1" smtClean="0"/>
+              <a:t>in</a:t>
+            </a:r>
+            <a:r>
+              <a:rPr lang="hu-HU" dirty="0" smtClean="0"/>
+              <a:t> </a:t>
+            </a:r>
+            <a:r>
+              <a:rPr lang="hu-HU" dirty="0" err="1" smtClean="0"/>
+              <a:t>production</a:t>
+            </a:r>
+            <a:endParaRPr lang="hu-HU" dirty="0"/>
+          </a:p>
+        </p:txBody>
+      </p:sp>
+    </p:spTree>
+    <p:extLst>
+      <p:ext uri="{BB962C8B-B14F-4D97-AF65-F5344CB8AC3E}">
+        <p14:creationId xmlns:p14="http://schemas.microsoft.com/office/powerpoint/2010/main" val="1342961928"/>
+      </p:ext>
+    </p:extLst>
+  </p:cSld>
+  <p:clrMapOvr>
+    <a:masterClrMapping/>
+  </p:clrMapOvr>
 </p:sld>
 </file>
 
@@ -13739,7 +20259,6 @@
               <a:rPr lang="hu-HU" dirty="0" smtClean="0"/>
               <a:t>.</a:t>
             </a:r>
-            <a:endParaRPr lang="hu-HU" dirty="0" smtClean="0"/>
           </a:p>
         </p:txBody>
       </p:sp>
@@ -15670,8 +22189,69 @@
             </a:r>
             <a:r>
               <a:rPr lang="hu-HU" dirty="0" smtClean="0"/>
-              <a:t> modelling</a:t>
-            </a:r>
+              <a:t> </a:t>
+            </a:r>
+            <a:r>
+              <a:rPr lang="hu-HU" dirty="0" smtClean="0"/>
+              <a:t>modelling (</a:t>
+            </a:r>
+            <a:r>
+              <a:rPr lang="hu-HU" dirty="0" err="1" smtClean="0"/>
+              <a:t>sometimes</a:t>
+            </a:r>
+            <a:r>
+              <a:rPr lang="hu-HU" dirty="0" smtClean="0"/>
+              <a:t> </a:t>
+            </a:r>
+            <a:r>
+              <a:rPr lang="hu-HU" dirty="0" err="1" smtClean="0"/>
+              <a:t>referred</a:t>
+            </a:r>
+            <a:r>
+              <a:rPr lang="hu-HU" dirty="0" smtClean="0"/>
+              <a:t> </a:t>
+            </a:r>
+            <a:r>
+              <a:rPr lang="hu-HU" dirty="0" err="1" smtClean="0"/>
+              <a:t>to</a:t>
+            </a:r>
+            <a:r>
+              <a:rPr lang="hu-HU" dirty="0" smtClean="0"/>
+              <a:t> </a:t>
+            </a:r>
+            <a:r>
+              <a:rPr lang="hu-HU" dirty="0" err="1" smtClean="0"/>
+              <a:t>as</a:t>
+            </a:r>
+            <a:r>
+              <a:rPr lang="hu-HU" dirty="0" smtClean="0"/>
+              <a:t> </a:t>
+            </a:r>
+            <a:r>
+              <a:rPr lang="hu-HU" dirty="0" err="1" smtClean="0"/>
+              <a:t>causal</a:t>
+            </a:r>
+            <a:r>
+              <a:rPr lang="hu-HU" dirty="0" smtClean="0"/>
+              <a:t> </a:t>
+            </a:r>
+            <a:r>
+              <a:rPr lang="hu-HU" dirty="0" err="1" smtClean="0"/>
+              <a:t>language</a:t>
+            </a:r>
+            <a:r>
+              <a:rPr lang="hu-HU" dirty="0" smtClean="0"/>
+              <a:t> </a:t>
+            </a:r>
+            <a:r>
+              <a:rPr lang="hu-HU" dirty="0" err="1" smtClean="0"/>
+              <a:t>modelling</a:t>
+            </a:r>
+            <a:r>
+              <a:rPr lang="hu-HU" dirty="0" smtClean="0"/>
+              <a:t>)</a:t>
+            </a:r>
+            <a:endParaRPr lang="hu-HU" dirty="0" smtClean="0"/>
           </a:p>
           <a:p>
             <a:r>
@@ -16619,7 +23199,6 @@
               <a:rPr lang="hu-HU" dirty="0" smtClean="0"/>
               <a:t>:</a:t>
             </a:r>
-            <a:endParaRPr lang="hu-HU" dirty="0" smtClean="0"/>
           </a:p>
           <a:p>
             <a:pPr lvl="1"/>
@@ -16858,11 +23437,7 @@
             <a:pPr lvl="2"/>
             <a:r>
               <a:rPr lang="hu-HU" dirty="0" err="1" smtClean="0"/>
-              <a:t>contrar</a:t>
-            </a:r>
-            <a:r>
-              <a:rPr lang="hu-HU" dirty="0" err="1" smtClean="0"/>
-              <a:t>y</a:t>
+              <a:t>contrary</a:t>
             </a:r>
             <a:r>
               <a:rPr lang="hu-HU" dirty="0" smtClean="0"/>
@@ -17120,7 +23695,6 @@
               <a:rPr lang="hu-HU" dirty="0" smtClean="0"/>
               <a:t> corpus</a:t>
             </a:r>
-            <a:endParaRPr lang="hu-HU" dirty="0" smtClean="0"/>
           </a:p>
         </p:txBody>
       </p:sp>
@@ -17659,11 +24233,7 @@
             </a:r>
             <a:r>
               <a:rPr lang="hu-HU" dirty="0" smtClean="0"/>
-              <a:t> </a:t>
-            </a:r>
-            <a:r>
-              <a:rPr lang="hu-HU" dirty="0" smtClean="0"/>
-              <a:t>text </a:t>
+              <a:t> text </a:t>
             </a:r>
             <a:r>
               <a:rPr lang="hu-HU" dirty="0" err="1" smtClean="0"/>

--- a/7.pptx
+++ b/7.pptx
@@ -24,7 +24,8 @@
     <p:sldId id="273" r:id="rId18"/>
     <p:sldId id="274" r:id="rId19"/>
     <p:sldId id="275" r:id="rId20"/>
-    <p:sldId id="276" r:id="rId21"/>
+    <p:sldId id="277" r:id="rId21"/>
+    <p:sldId id="276" r:id="rId22"/>
   </p:sldIdLst>
   <p:sldSz cx="9144000" cy="6858000" type="screen4x3"/>
   <p:notesSz cx="6858000" cy="9144000"/>
@@ -307,7 +308,7 @@
           <a:p>
             <a:fld id="{69E8F881-5088-4687-AB6A-7968DC3F49CA}" type="datetimeFigureOut">
               <a:rPr lang="en-GB" smtClean="0"/>
-              <a:t>09/12/2025</a:t>
+              <a:t>11/12/2025</a:t>
             </a:fld>
             <a:endParaRPr lang="en-GB"/>
           </a:p>
@@ -477,7 +478,7 @@
           <a:p>
             <a:fld id="{69E8F881-5088-4687-AB6A-7968DC3F49CA}" type="datetimeFigureOut">
               <a:rPr lang="en-GB" smtClean="0"/>
-              <a:t>09/12/2025</a:t>
+              <a:t>11/12/2025</a:t>
             </a:fld>
             <a:endParaRPr lang="en-GB"/>
           </a:p>
@@ -657,7 +658,7 @@
           <a:p>
             <a:fld id="{69E8F881-5088-4687-AB6A-7968DC3F49CA}" type="datetimeFigureOut">
               <a:rPr lang="en-GB" smtClean="0"/>
-              <a:t>09/12/2025</a:t>
+              <a:t>11/12/2025</a:t>
             </a:fld>
             <a:endParaRPr lang="en-GB"/>
           </a:p>
@@ -827,7 +828,7 @@
           <a:p>
             <a:fld id="{69E8F881-5088-4687-AB6A-7968DC3F49CA}" type="datetimeFigureOut">
               <a:rPr lang="en-GB" smtClean="0"/>
-              <a:t>09/12/2025</a:t>
+              <a:t>11/12/2025</a:t>
             </a:fld>
             <a:endParaRPr lang="en-GB"/>
           </a:p>
@@ -1073,7 +1074,7 @@
           <a:p>
             <a:fld id="{69E8F881-5088-4687-AB6A-7968DC3F49CA}" type="datetimeFigureOut">
               <a:rPr lang="en-GB" smtClean="0"/>
-              <a:t>09/12/2025</a:t>
+              <a:t>11/12/2025</a:t>
             </a:fld>
             <a:endParaRPr lang="en-GB"/>
           </a:p>
@@ -1361,7 +1362,7 @@
           <a:p>
             <a:fld id="{69E8F881-5088-4687-AB6A-7968DC3F49CA}" type="datetimeFigureOut">
               <a:rPr lang="en-GB" smtClean="0"/>
-              <a:t>09/12/2025</a:t>
+              <a:t>11/12/2025</a:t>
             </a:fld>
             <a:endParaRPr lang="en-GB"/>
           </a:p>
@@ -1783,7 +1784,7 @@
           <a:p>
             <a:fld id="{69E8F881-5088-4687-AB6A-7968DC3F49CA}" type="datetimeFigureOut">
               <a:rPr lang="en-GB" smtClean="0"/>
-              <a:t>09/12/2025</a:t>
+              <a:t>11/12/2025</a:t>
             </a:fld>
             <a:endParaRPr lang="en-GB"/>
           </a:p>
@@ -1901,7 +1902,7 @@
           <a:p>
             <a:fld id="{69E8F881-5088-4687-AB6A-7968DC3F49CA}" type="datetimeFigureOut">
               <a:rPr lang="en-GB" smtClean="0"/>
-              <a:t>09/12/2025</a:t>
+              <a:t>11/12/2025</a:t>
             </a:fld>
             <a:endParaRPr lang="en-GB"/>
           </a:p>
@@ -1996,7 +1997,7 @@
           <a:p>
             <a:fld id="{69E8F881-5088-4687-AB6A-7968DC3F49CA}" type="datetimeFigureOut">
               <a:rPr lang="en-GB" smtClean="0"/>
-              <a:t>09/12/2025</a:t>
+              <a:t>11/12/2025</a:t>
             </a:fld>
             <a:endParaRPr lang="en-GB"/>
           </a:p>
@@ -2273,7 +2274,7 @@
           <a:p>
             <a:fld id="{69E8F881-5088-4687-AB6A-7968DC3F49CA}" type="datetimeFigureOut">
               <a:rPr lang="en-GB" smtClean="0"/>
-              <a:t>09/12/2025</a:t>
+              <a:t>11/12/2025</a:t>
             </a:fld>
             <a:endParaRPr lang="en-GB"/>
           </a:p>
@@ -2526,7 +2527,7 @@
           <a:p>
             <a:fld id="{69E8F881-5088-4687-AB6A-7968DC3F49CA}" type="datetimeFigureOut">
               <a:rPr lang="en-GB" smtClean="0"/>
-              <a:t>09/12/2025</a:t>
+              <a:t>11/12/2025</a:t>
             </a:fld>
             <a:endParaRPr lang="en-GB"/>
           </a:p>
@@ -2739,7 +2740,7 @@
           <a:p>
             <a:fld id="{69E8F881-5088-4687-AB6A-7968DC3F49CA}" type="datetimeFigureOut">
               <a:rPr lang="en-GB" smtClean="0"/>
-              <a:t>09/12/2025</a:t>
+              <a:t>11/12/2025</a:t>
             </a:fld>
             <a:endParaRPr lang="en-GB"/>
           </a:p>
@@ -7753,7 +7754,7 @@
             </a:r>
             <a:r>
               <a:rPr lang="hu-HU" dirty="0" err="1" smtClean="0"/>
-              <a:t>trained</a:t>
+              <a:t>pre-trained</a:t>
             </a:r>
             <a:r>
               <a:rPr lang="hu-HU" dirty="0" smtClean="0"/>
@@ -8635,27 +8636,15 @@
             </a:r>
             <a:r>
               <a:rPr lang="hu-HU" dirty="0" smtClean="0"/>
-              <a:t> of </a:t>
-            </a:r>
-            <a:r>
-              <a:rPr lang="hu-HU" dirty="0" err="1" smtClean="0"/>
-              <a:t>so-called</a:t>
-            </a:r>
-            <a:r>
-              <a:rPr lang="hu-HU" dirty="0" smtClean="0"/>
-              <a:t> </a:t>
-            </a:r>
-            <a:r>
-              <a:rPr lang="hu-HU" dirty="0" err="1" smtClean="0"/>
-              <a:t>logits</a:t>
-            </a:r>
-            <a:r>
-              <a:rPr lang="hu-HU" dirty="0" smtClean="0"/>
               <a:t>, a </a:t>
             </a:r>
             <a:r>
-              <a:rPr lang="hu-HU" dirty="0" err="1" smtClean="0"/>
-              <a:t>k-dimensional</a:t>
+              <a:rPr lang="hu-HU" i="1" dirty="0" err="1" smtClean="0"/>
+              <a:t>k</a:t>
+            </a:r>
+            <a:r>
+              <a:rPr lang="hu-HU" dirty="0" err="1" smtClean="0"/>
+              <a:t>-dimensional</a:t>
             </a:r>
             <a:r>
               <a:rPr lang="hu-HU" dirty="0" smtClean="0"/>
@@ -9294,12 +9283,8 @@
               <a:t>contains</a:t>
             </a:r>
             <a:r>
-              <a:rPr lang="hu-HU" dirty="0" smtClean="0"/>
-              <a:t> </a:t>
-            </a:r>
-            <a:r>
-              <a:rPr lang="hu-HU" dirty="0" err="1" smtClean="0"/>
-              <a:t>tool</a:t>
+              <a:rPr lang="hu-HU" smtClean="0"/>
+              <a:t> a tool</a:t>
             </a:r>
             <a:r>
               <a:rPr lang="hu-HU" dirty="0" smtClean="0"/>
@@ -11153,7 +11138,7 @@
         <p:spPr/>
         <p:txBody>
           <a:bodyPr>
-            <a:normAutofit fontScale="92500" lnSpcReduction="10000"/>
+            <a:normAutofit fontScale="92500" lnSpcReduction="20000"/>
           </a:bodyPr>
           <a:lstStyle/>
           <a:p>
@@ -11198,11 +11183,99 @@
               <a:t>, </a:t>
             </a:r>
             <a:r>
-              <a:rPr lang="hu-HU" dirty="0" err="1"/>
+              <a:rPr lang="hu-HU" dirty="0" err="1" smtClean="0"/>
+              <a:t>but</a:t>
+            </a:r>
+            <a:r>
+              <a:rPr lang="hu-HU" dirty="0" smtClean="0"/>
+              <a:t> </a:t>
+            </a:r>
+            <a:r>
+              <a:rPr lang="hu-HU" dirty="0" err="1" smtClean="0"/>
+              <a:t>do</a:t>
+            </a:r>
+            <a:r>
+              <a:rPr lang="hu-HU" dirty="0" smtClean="0"/>
+              <a:t> </a:t>
+            </a:r>
+            <a:r>
+              <a:rPr lang="hu-HU" dirty="0" err="1" smtClean="0"/>
+              <a:t>not</a:t>
+            </a:r>
+            <a:r>
+              <a:rPr lang="hu-HU" dirty="0" smtClean="0"/>
+              <a:t> </a:t>
+            </a:r>
+            <a:r>
+              <a:rPr lang="hu-HU" dirty="0" err="1" smtClean="0"/>
+              <a:t>specify</a:t>
+            </a:r>
+            <a:r>
+              <a:rPr lang="hu-HU" dirty="0" smtClean="0"/>
+              <a:t> </a:t>
+            </a:r>
+            <a:r>
+              <a:rPr lang="hu-HU" dirty="0" err="1" smtClean="0"/>
+              <a:t>a</a:t>
+            </a:r>
+            <a:r>
+              <a:rPr lang="hu-HU" dirty="0" smtClean="0"/>
+              <a:t> </a:t>
+            </a:r>
+            <a:r>
+              <a:rPr lang="hu-HU" dirty="0" err="1" smtClean="0"/>
+              <a:t>model</a:t>
+            </a:r>
+            <a:r>
+              <a:rPr lang="hu-HU" dirty="0" smtClean="0"/>
+              <a:t> </a:t>
+            </a:r>
+            <a:r>
+              <a:rPr lang="hu-HU" dirty="0" err="1" smtClean="0"/>
+              <a:t>name</a:t>
+            </a:r>
+            <a:r>
+              <a:rPr lang="hu-HU" dirty="0" smtClean="0"/>
+              <a:t> </a:t>
+            </a:r>
+            <a:r>
+              <a:rPr lang="hu-HU" dirty="0" err="1" smtClean="0"/>
+              <a:t>in</a:t>
+            </a:r>
+            <a:r>
+              <a:rPr lang="hu-HU" dirty="0" smtClean="0"/>
+              <a:t> </a:t>
+            </a:r>
+            <a:r>
+              <a:rPr lang="hu-HU" dirty="0" err="1" smtClean="0"/>
               <a:t>the</a:t>
             </a:r>
             <a:r>
-              <a:rPr lang="hu-HU" dirty="0"/>
+              <a:rPr lang="hu-HU" dirty="0" smtClean="0"/>
+              <a:t> </a:t>
+            </a:r>
+            <a:r>
+              <a:rPr lang="hu-HU" dirty="0" err="1" smtClean="0"/>
+              <a:t>function</a:t>
+            </a:r>
+            <a:r>
+              <a:rPr lang="hu-HU" dirty="0" smtClean="0"/>
+              <a:t> </a:t>
+            </a:r>
+            <a:r>
+              <a:rPr lang="hu-HU" dirty="0" err="1" smtClean="0"/>
+              <a:t>call</a:t>
+            </a:r>
+            <a:r>
+              <a:rPr lang="hu-HU" dirty="0" smtClean="0"/>
+              <a:t>, </a:t>
+            </a:r>
+            <a:r>
+              <a:rPr lang="hu-HU" dirty="0" err="1" smtClean="0"/>
+              <a:t>the</a:t>
+            </a:r>
+            <a:r>
+              <a:rPr lang="hu-HU" dirty="0" smtClean="0"/>
               <a:t> </a:t>
             </a:r>
             <a:r>
@@ -11235,15 +11308,7 @@
             </a:r>
             <a:r>
               <a:rPr lang="hu-HU" dirty="0"/>
-              <a:t> </a:t>
-            </a:r>
-            <a:r>
-              <a:rPr lang="hu-HU" dirty="0" err="1"/>
-              <a:t>a</a:t>
-            </a:r>
-            <a:r>
-              <a:rPr lang="hu-HU" dirty="0"/>
-              <a:t> </a:t>
+              <a:t> a </a:t>
             </a:r>
             <a:r>
               <a:rPr lang="hu-HU" dirty="0" err="1"/>
@@ -11782,7 +11847,7 @@
         </p:spPr>
         <p:txBody>
           <a:bodyPr>
-            <a:normAutofit fontScale="70000" lnSpcReduction="20000"/>
+            <a:normAutofit fontScale="62500" lnSpcReduction="20000"/>
           </a:bodyPr>
           <a:lstStyle/>
           <a:p>
@@ -12238,11 +12303,27 @@
               <a:t> </a:t>
             </a:r>
             <a:r>
-              <a:rPr lang="hu-HU" dirty="0" err="1" smtClean="0"/>
+              <a:rPr lang="hu-HU" dirty="0" err="1"/>
+              <a:t>inside</a:t>
+            </a:r>
+            <a:r>
+              <a:rPr lang="hu-HU" dirty="0"/>
+              <a:t> </a:t>
+            </a:r>
+            <a:r>
+              <a:rPr lang="hu-HU" dirty="0" err="1"/>
+              <a:t>the</a:t>
+            </a:r>
+            <a:r>
+              <a:rPr lang="hu-HU" dirty="0"/>
+              <a:t> prompt </a:t>
+            </a:r>
+            <a:r>
+              <a:rPr lang="hu-HU" dirty="0" err="1"/>
               <a:t>for</a:t>
             </a:r>
             <a:r>
-              <a:rPr lang="hu-HU" dirty="0" smtClean="0"/>
+              <a:rPr lang="hu-HU" dirty="0"/>
               <a:t> </a:t>
             </a:r>
             <a:r>
@@ -12279,6 +12360,30 @@
             </a:r>
             <a:r>
               <a:rPr lang="hu-HU" dirty="0" err="1" smtClean="0"/>
+              <a:t>for</a:t>
+            </a:r>
+            <a:r>
+              <a:rPr lang="hu-HU" dirty="0" smtClean="0"/>
+              <a:t> </a:t>
+            </a:r>
+            <a:r>
+              <a:rPr lang="hu-HU" dirty="0" err="1" smtClean="0"/>
+              <a:t>the</a:t>
+            </a:r>
+            <a:r>
+              <a:rPr lang="hu-HU" dirty="0" smtClean="0"/>
+              <a:t> </a:t>
+            </a:r>
+            <a:r>
+              <a:rPr lang="hu-HU" dirty="0" err="1" smtClean="0"/>
+              <a:t>model</a:t>
+            </a:r>
+            <a:r>
+              <a:rPr lang="hu-HU" dirty="0" smtClean="0"/>
+              <a:t> </a:t>
+            </a:r>
+            <a:r>
+              <a:rPr lang="hu-HU" dirty="0" err="1" smtClean="0"/>
               <a:t>what</a:t>
             </a:r>
             <a:r>
@@ -12287,36 +12392,25 @@
             </a:r>
             <a:r>
               <a:rPr lang="hu-HU" dirty="0" err="1" smtClean="0"/>
-              <a:t>they</a:t>
-            </a:r>
-            <a:r>
-              <a:rPr lang="hu-HU" dirty="0" smtClean="0"/>
-              <a:t> </a:t>
-            </a:r>
-            <a:r>
-              <a:rPr lang="hu-HU" dirty="0" err="1" smtClean="0"/>
-              <a:t>mean</a:t>
-            </a:r>
-            <a:r>
-              <a:rPr lang="hu-HU" dirty="0" smtClean="0"/>
-              <a:t> </a:t>
-            </a:r>
-            <a:r>
-              <a:rPr lang="hu-HU" dirty="0" err="1" smtClean="0"/>
-              <a:t>inside</a:t>
-            </a:r>
-            <a:r>
-              <a:rPr lang="hu-HU" dirty="0" smtClean="0"/>
-              <a:t> </a:t>
-            </a:r>
-            <a:r>
-              <a:rPr lang="hu-HU" dirty="0" err="1" smtClean="0"/>
-              <a:t>the</a:t>
-            </a:r>
-            <a:r>
-              <a:rPr lang="hu-HU" dirty="0" smtClean="0"/>
-              <a:t> prompt</a:t>
-            </a:r>
+              <a:t>each</a:t>
+            </a:r>
+            <a:r>
+              <a:rPr lang="hu-HU" dirty="0" smtClean="0"/>
+              <a:t> </a:t>
+            </a:r>
+            <a:r>
+              <a:rPr lang="hu-HU" dirty="0" err="1" smtClean="0"/>
+              <a:t>label</a:t>
+            </a:r>
+            <a:r>
+              <a:rPr lang="hu-HU" dirty="0" smtClean="0"/>
+              <a:t> </a:t>
+            </a:r>
+            <a:r>
+              <a:rPr lang="hu-HU" dirty="0" err="1" smtClean="0"/>
+              <a:t>means</a:t>
+            </a:r>
+            <a:endParaRPr lang="hu-HU" dirty="0" smtClean="0"/>
           </a:p>
           <a:p>
             <a:pPr lvl="1"/>
@@ -12722,7 +12816,7 @@
         </p:spPr>
         <p:txBody>
           <a:bodyPr>
-            <a:normAutofit fontScale="55000" lnSpcReduction="20000"/>
+            <a:normAutofit fontScale="92500"/>
           </a:bodyPr>
           <a:lstStyle/>
           <a:p>
@@ -13054,7 +13148,27 @@
             <a:pPr lvl="2"/>
             <a:r>
               <a:rPr lang="hu-HU" dirty="0" err="1" smtClean="0"/>
-              <a:t>n-fold</a:t>
+              <a:t>up</a:t>
+            </a:r>
+            <a:r>
+              <a:rPr lang="hu-HU" dirty="0" smtClean="0"/>
+              <a:t> </a:t>
+            </a:r>
+            <a:r>
+              <a:rPr lang="hu-HU" dirty="0" err="1" smtClean="0"/>
+              <a:t>to</a:t>
+            </a:r>
+            <a:r>
+              <a:rPr lang="hu-HU" dirty="0" smtClean="0"/>
+              <a:t> </a:t>
+            </a:r>
+            <a:r>
+              <a:rPr lang="hu-HU" i="1" dirty="0" err="1" smtClean="0"/>
+              <a:t>n</a:t>
+            </a:r>
+            <a:r>
+              <a:rPr lang="hu-HU" dirty="0" err="1" smtClean="0"/>
+              <a:t>-fold</a:t>
             </a:r>
             <a:r>
               <a:rPr lang="hu-HU" dirty="0" smtClean="0"/>
@@ -13096,1462 +13210,131 @@
               <a:rPr lang="hu-HU" dirty="0" err="1" smtClean="0"/>
               <a:t>cost</a:t>
             </a:r>
+            <a:r>
+              <a:rPr lang="hu-HU" dirty="0" smtClean="0"/>
+              <a:t> </a:t>
+            </a:r>
+            <a:r>
+              <a:rPr lang="hu-HU" dirty="0" err="1" smtClean="0"/>
+              <a:t>for</a:t>
+            </a:r>
+            <a:r>
+              <a:rPr lang="hu-HU" dirty="0" smtClean="0"/>
+              <a:t> output </a:t>
+            </a:r>
+            <a:r>
+              <a:rPr lang="hu-HU" dirty="0" err="1" smtClean="0"/>
+              <a:t>that</a:t>
+            </a:r>
+            <a:r>
+              <a:rPr lang="hu-HU" dirty="0" smtClean="0"/>
+              <a:t> </a:t>
+            </a:r>
+            <a:r>
+              <a:rPr lang="hu-HU" dirty="0" err="1" smtClean="0"/>
+              <a:t>contains</a:t>
+            </a:r>
+            <a:r>
+              <a:rPr lang="hu-HU" dirty="0" smtClean="0"/>
+              <a:t> </a:t>
+            </a:r>
+            <a:r>
+              <a:rPr lang="hu-HU" i="1" dirty="0" smtClean="0"/>
+              <a:t>n </a:t>
+            </a:r>
+            <a:r>
+              <a:rPr lang="hu-HU" dirty="0" err="1" smtClean="0"/>
+              <a:t>tokens</a:t>
+            </a:r>
+            <a:r>
+              <a:rPr lang="hu-HU" dirty="0" smtClean="0"/>
+              <a:t>, </a:t>
+            </a:r>
+            <a:r>
+              <a:rPr lang="hu-HU" dirty="0" err="1" smtClean="0"/>
+              <a:t>although</a:t>
+            </a:r>
+            <a:r>
+              <a:rPr lang="hu-HU" dirty="0" smtClean="0"/>
+              <a:t> </a:t>
+            </a:r>
+            <a:r>
+              <a:rPr lang="hu-HU" dirty="0" err="1" smtClean="0"/>
+              <a:t>much</a:t>
+            </a:r>
+            <a:r>
+              <a:rPr lang="hu-HU" dirty="0" smtClean="0"/>
+              <a:t> less </a:t>
+            </a:r>
+            <a:r>
+              <a:rPr lang="hu-HU" dirty="0" err="1" smtClean="0"/>
+              <a:t>harsh</a:t>
+            </a:r>
+            <a:r>
+              <a:rPr lang="hu-HU" dirty="0" smtClean="0"/>
+              <a:t> </a:t>
+            </a:r>
+            <a:r>
+              <a:rPr lang="hu-HU" dirty="0" err="1" smtClean="0"/>
+              <a:t>increase</a:t>
+            </a:r>
+            <a:r>
+              <a:rPr lang="hu-HU" dirty="0" smtClean="0"/>
+              <a:t> </a:t>
+            </a:r>
+            <a:r>
+              <a:rPr lang="hu-HU" dirty="0" err="1" smtClean="0"/>
+              <a:t>in</a:t>
+            </a:r>
+            <a:r>
+              <a:rPr lang="hu-HU" dirty="0" smtClean="0"/>
+              <a:t> </a:t>
+            </a:r>
+            <a:r>
+              <a:rPr lang="hu-HU" dirty="0" err="1" smtClean="0"/>
+              <a:t>practice</a:t>
+            </a:r>
+            <a:r>
+              <a:rPr lang="hu-HU" dirty="0" smtClean="0"/>
+              <a:t> </a:t>
+            </a:r>
+            <a:r>
+              <a:rPr lang="hu-HU" dirty="0" err="1" smtClean="0"/>
+              <a:t>using</a:t>
+            </a:r>
+            <a:r>
+              <a:rPr lang="hu-HU" dirty="0" smtClean="0"/>
+              <a:t> </a:t>
+            </a:r>
+            <a:r>
+              <a:rPr lang="hu-HU" dirty="0" err="1" smtClean="0"/>
+              <a:t>proper</a:t>
+            </a:r>
+            <a:r>
+              <a:rPr lang="hu-HU" dirty="0" smtClean="0"/>
+              <a:t> </a:t>
+            </a:r>
+            <a:r>
+              <a:rPr lang="hu-HU" dirty="0" err="1" smtClean="0"/>
+              <a:t>caching</a:t>
+            </a:r>
+            <a:r>
+              <a:rPr lang="hu-HU" dirty="0" smtClean="0"/>
+              <a:t> of </a:t>
+            </a:r>
+            <a:r>
+              <a:rPr lang="hu-HU" dirty="0" err="1" smtClean="0"/>
+              <a:t>earlier</a:t>
+            </a:r>
+            <a:r>
+              <a:rPr lang="hu-HU" dirty="0" smtClean="0"/>
+              <a:t> </a:t>
+            </a:r>
+            <a:r>
+              <a:rPr lang="hu-HU" dirty="0" err="1" smtClean="0"/>
+              <a:t>calculations</a:t>
+            </a:r>
             <a:endParaRPr lang="hu-HU" dirty="0" smtClean="0"/>
-          </a:p>
-          <a:p>
-            <a:r>
-              <a:rPr lang="hu-HU" dirty="0" err="1" smtClean="0"/>
-              <a:t>Reason</a:t>
-            </a:r>
-            <a:r>
-              <a:rPr lang="hu-HU" dirty="0" smtClean="0"/>
-              <a:t> 2: </a:t>
-            </a:r>
-            <a:r>
-              <a:rPr lang="hu-HU" b="1" dirty="0" err="1" smtClean="0"/>
-              <a:t>reliability</a:t>
-            </a:r>
-            <a:endParaRPr lang="hu-HU" b="1" dirty="0" smtClean="0"/>
-          </a:p>
-          <a:p>
-            <a:pPr lvl="1"/>
-            <a:r>
-              <a:rPr lang="hu-HU" dirty="0" smtClean="0"/>
-              <a:t>an </a:t>
-            </a:r>
-            <a:r>
-              <a:rPr lang="hu-HU" dirty="0" err="1" smtClean="0"/>
-              <a:t>encoder</a:t>
-            </a:r>
-            <a:r>
-              <a:rPr lang="hu-HU" dirty="0" smtClean="0"/>
-              <a:t> </a:t>
-            </a:r>
-            <a:r>
-              <a:rPr lang="hu-HU" dirty="0" err="1" smtClean="0"/>
-              <a:t>transformer</a:t>
-            </a:r>
-            <a:r>
-              <a:rPr lang="hu-HU" dirty="0" smtClean="0"/>
-              <a:t> </a:t>
-            </a:r>
-            <a:r>
-              <a:rPr lang="hu-HU" dirty="0" err="1" smtClean="0"/>
-              <a:t>outputs</a:t>
-            </a:r>
-            <a:r>
-              <a:rPr lang="hu-HU" dirty="0" smtClean="0"/>
-              <a:t> a </a:t>
-            </a:r>
-            <a:r>
-              <a:rPr lang="hu-HU" b="1" dirty="0" err="1" smtClean="0"/>
-              <a:t>single</a:t>
-            </a:r>
-            <a:r>
-              <a:rPr lang="hu-HU" b="1" dirty="0" smtClean="0"/>
-              <a:t> </a:t>
-            </a:r>
-            <a:r>
-              <a:rPr lang="hu-HU" b="1" dirty="0" err="1" smtClean="0"/>
-              <a:t>real</a:t>
-            </a:r>
-            <a:r>
-              <a:rPr lang="hu-HU" b="1" dirty="0" smtClean="0"/>
-              <a:t> </a:t>
-            </a:r>
-            <a:r>
-              <a:rPr lang="hu-HU" b="1" dirty="0" err="1" smtClean="0"/>
-              <a:t>number</a:t>
-            </a:r>
-            <a:r>
-              <a:rPr lang="hu-HU" b="1" dirty="0" smtClean="0"/>
-              <a:t> </a:t>
-            </a:r>
-            <a:r>
-              <a:rPr lang="hu-HU" dirty="0" err="1" smtClean="0"/>
-              <a:t>when</a:t>
-            </a:r>
-            <a:r>
-              <a:rPr lang="hu-HU" dirty="0" smtClean="0"/>
-              <a:t> </a:t>
-            </a:r>
-            <a:r>
-              <a:rPr lang="hu-HU" dirty="0" err="1" smtClean="0"/>
-              <a:t>doing</a:t>
-            </a:r>
-            <a:r>
-              <a:rPr lang="hu-HU" dirty="0" smtClean="0"/>
-              <a:t> </a:t>
-            </a:r>
-            <a:r>
-              <a:rPr lang="hu-HU" dirty="0" err="1" smtClean="0"/>
-              <a:t>binary</a:t>
-            </a:r>
-            <a:r>
-              <a:rPr lang="hu-HU" dirty="0" smtClean="0"/>
-              <a:t> </a:t>
-            </a:r>
-            <a:r>
-              <a:rPr lang="hu-HU" dirty="0" err="1" smtClean="0"/>
-              <a:t>classification</a:t>
-            </a:r>
-            <a:r>
-              <a:rPr lang="hu-HU" dirty="0" smtClean="0"/>
-              <a:t> </a:t>
-            </a:r>
-            <a:r>
-              <a:rPr lang="hu-HU" dirty="0" err="1" smtClean="0"/>
-              <a:t>or</a:t>
-            </a:r>
-            <a:r>
-              <a:rPr lang="hu-HU" dirty="0" smtClean="0"/>
-              <a:t> </a:t>
-            </a:r>
-            <a:r>
-              <a:rPr lang="hu-HU" dirty="0" err="1" smtClean="0"/>
-              <a:t>a</a:t>
-            </a:r>
-            <a:r>
-              <a:rPr lang="hu-HU" dirty="0" smtClean="0"/>
-              <a:t> </a:t>
-            </a:r>
-            <a:r>
-              <a:rPr lang="hu-HU" dirty="0" err="1" smtClean="0"/>
-              <a:t>single</a:t>
-            </a:r>
-            <a:r>
-              <a:rPr lang="hu-HU" dirty="0" smtClean="0"/>
-              <a:t> </a:t>
-            </a:r>
-            <a:r>
-              <a:rPr lang="hu-HU" b="1" dirty="0" err="1" smtClean="0"/>
-              <a:t>real-valued</a:t>
-            </a:r>
-            <a:r>
-              <a:rPr lang="hu-HU" b="1" dirty="0" smtClean="0"/>
-              <a:t> </a:t>
-            </a:r>
-            <a:r>
-              <a:rPr lang="hu-HU" b="1" i="1" dirty="0" err="1" smtClean="0"/>
-              <a:t>k</a:t>
-            </a:r>
-            <a:r>
-              <a:rPr lang="hu-HU" b="1" dirty="0" err="1" smtClean="0"/>
-              <a:t>-dimensional</a:t>
-            </a:r>
-            <a:r>
-              <a:rPr lang="hu-HU" b="1" dirty="0" smtClean="0"/>
-              <a:t> </a:t>
-            </a:r>
-            <a:r>
-              <a:rPr lang="hu-HU" b="1" dirty="0" err="1" smtClean="0"/>
-              <a:t>numeric</a:t>
-            </a:r>
-            <a:r>
-              <a:rPr lang="hu-HU" b="1" dirty="0" smtClean="0"/>
-              <a:t> </a:t>
-            </a:r>
-            <a:r>
-              <a:rPr lang="hu-HU" b="1" dirty="0" err="1" smtClean="0"/>
-              <a:t>vector</a:t>
-            </a:r>
-            <a:r>
-              <a:rPr lang="hu-HU" b="1" dirty="0" smtClean="0"/>
-              <a:t> </a:t>
-            </a:r>
-            <a:r>
-              <a:rPr lang="hu-HU" dirty="0" err="1" smtClean="0"/>
-              <a:t>for</a:t>
-            </a:r>
-            <a:r>
-              <a:rPr lang="hu-HU" dirty="0" smtClean="0"/>
-              <a:t> </a:t>
-            </a:r>
-            <a:r>
-              <a:rPr lang="hu-HU" dirty="0" err="1" smtClean="0"/>
-              <a:t>classification</a:t>
-            </a:r>
-            <a:r>
-              <a:rPr lang="hu-HU" dirty="0" smtClean="0"/>
-              <a:t> </a:t>
-            </a:r>
-            <a:r>
-              <a:rPr lang="hu-HU" dirty="0" err="1" smtClean="0"/>
-              <a:t>into</a:t>
-            </a:r>
-            <a:r>
-              <a:rPr lang="hu-HU" dirty="0" smtClean="0"/>
-              <a:t> </a:t>
-            </a:r>
-            <a:r>
-              <a:rPr lang="hu-HU" i="1" dirty="0" smtClean="0"/>
-              <a:t>k </a:t>
-            </a:r>
-            <a:r>
-              <a:rPr lang="hu-HU" dirty="0" err="1" smtClean="0"/>
-              <a:t>classes</a:t>
-            </a:r>
-            <a:endParaRPr lang="hu-HU" dirty="0" smtClean="0"/>
-          </a:p>
-          <a:p>
-            <a:pPr lvl="2"/>
-            <a:r>
-              <a:rPr lang="hu-HU" dirty="0" err="1" smtClean="0"/>
-              <a:t>these</a:t>
-            </a:r>
-            <a:r>
-              <a:rPr lang="hu-HU" dirty="0" smtClean="0"/>
-              <a:t> </a:t>
-            </a:r>
-            <a:r>
-              <a:rPr lang="hu-HU" dirty="0" err="1" smtClean="0"/>
-              <a:t>numeric</a:t>
-            </a:r>
-            <a:r>
-              <a:rPr lang="hu-HU" dirty="0" smtClean="0"/>
-              <a:t> </a:t>
-            </a:r>
-            <a:r>
-              <a:rPr lang="hu-HU" dirty="0" err="1" smtClean="0"/>
-              <a:t>values</a:t>
-            </a:r>
-            <a:r>
-              <a:rPr lang="hu-HU" dirty="0" smtClean="0"/>
-              <a:t> </a:t>
-            </a:r>
-            <a:r>
-              <a:rPr lang="hu-HU" dirty="0" err="1" smtClean="0"/>
-              <a:t>always</a:t>
-            </a:r>
-            <a:r>
-              <a:rPr lang="hu-HU" dirty="0" smtClean="0"/>
-              <a:t> </a:t>
-            </a:r>
-            <a:r>
-              <a:rPr lang="hu-HU" dirty="0" err="1" smtClean="0"/>
-              <a:t>fall</a:t>
-            </a:r>
-            <a:r>
-              <a:rPr lang="hu-HU" dirty="0" smtClean="0"/>
-              <a:t> </a:t>
-            </a:r>
-            <a:r>
-              <a:rPr lang="hu-HU" dirty="0" err="1" smtClean="0"/>
-              <a:t>between</a:t>
-            </a:r>
-            <a:r>
-              <a:rPr lang="hu-HU" dirty="0" smtClean="0"/>
-              <a:t> 0 and 1, and </a:t>
-            </a:r>
-            <a:r>
-              <a:rPr lang="hu-HU" b="1" dirty="0" err="1" smtClean="0"/>
-              <a:t>can</a:t>
-            </a:r>
-            <a:r>
-              <a:rPr lang="hu-HU" b="1" dirty="0" smtClean="0"/>
-              <a:t> be </a:t>
-            </a:r>
-            <a:r>
-              <a:rPr lang="hu-HU" b="1" dirty="0" err="1" smtClean="0"/>
-              <a:t>interpreted</a:t>
-            </a:r>
-            <a:r>
-              <a:rPr lang="hu-HU" b="1" dirty="0" smtClean="0"/>
-              <a:t> </a:t>
-            </a:r>
-            <a:r>
-              <a:rPr lang="hu-HU" b="1" dirty="0" err="1" smtClean="0"/>
-              <a:t>as</a:t>
-            </a:r>
-            <a:r>
-              <a:rPr lang="hu-HU" b="1" dirty="0" smtClean="0"/>
-              <a:t> a </a:t>
-            </a:r>
-            <a:r>
-              <a:rPr lang="hu-HU" b="1" dirty="0" err="1" smtClean="0"/>
-              <a:t>probability</a:t>
-            </a:r>
-            <a:r>
-              <a:rPr lang="hu-HU" b="1" dirty="0" smtClean="0"/>
-              <a:t> </a:t>
-            </a:r>
-            <a:r>
-              <a:rPr lang="hu-HU" b="1" dirty="0" err="1" smtClean="0"/>
-              <a:t>or</a:t>
-            </a:r>
-            <a:r>
-              <a:rPr lang="hu-HU" b="1" dirty="0" smtClean="0"/>
-              <a:t> </a:t>
-            </a:r>
-            <a:r>
-              <a:rPr lang="hu-HU" b="1" dirty="0" err="1" smtClean="0"/>
-              <a:t>a</a:t>
-            </a:r>
-            <a:r>
-              <a:rPr lang="hu-HU" b="1" dirty="0" smtClean="0"/>
-              <a:t> </a:t>
-            </a:r>
-            <a:r>
-              <a:rPr lang="hu-HU" b="1" dirty="0" err="1" smtClean="0"/>
-              <a:t>confidence</a:t>
-            </a:r>
-            <a:r>
-              <a:rPr lang="hu-HU" b="1" dirty="0" smtClean="0"/>
-              <a:t> </a:t>
-            </a:r>
-            <a:r>
-              <a:rPr lang="hu-HU" b="1" dirty="0" err="1" smtClean="0"/>
-              <a:t>score</a:t>
-            </a:r>
-            <a:r>
-              <a:rPr lang="hu-HU" b="1" dirty="0" smtClean="0"/>
-              <a:t> </a:t>
-            </a:r>
-            <a:r>
-              <a:rPr lang="hu-HU" dirty="0" err="1" smtClean="0"/>
-              <a:t>that</a:t>
-            </a:r>
-            <a:r>
-              <a:rPr lang="hu-HU" dirty="0" smtClean="0"/>
-              <a:t> </a:t>
-            </a:r>
-            <a:r>
-              <a:rPr lang="hu-HU" dirty="0" err="1" smtClean="0"/>
-              <a:t>expresses</a:t>
-            </a:r>
-            <a:r>
-              <a:rPr lang="hu-HU" dirty="0" smtClean="0"/>
-              <a:t> </a:t>
-            </a:r>
-            <a:r>
-              <a:rPr lang="hu-HU" dirty="0" err="1" smtClean="0"/>
-              <a:t>how</a:t>
-            </a:r>
-            <a:r>
-              <a:rPr lang="hu-HU" dirty="0" smtClean="0"/>
-              <a:t> </a:t>
-            </a:r>
-            <a:r>
-              <a:rPr lang="hu-HU" dirty="0" err="1" smtClean="0"/>
-              <a:t>confident</a:t>
-            </a:r>
-            <a:r>
-              <a:rPr lang="hu-HU" dirty="0" smtClean="0"/>
-              <a:t> </a:t>
-            </a:r>
-            <a:r>
-              <a:rPr lang="hu-HU" dirty="0" err="1" smtClean="0"/>
-              <a:t>the</a:t>
-            </a:r>
-            <a:r>
-              <a:rPr lang="hu-HU" dirty="0" smtClean="0"/>
-              <a:t> </a:t>
-            </a:r>
-            <a:r>
-              <a:rPr lang="hu-HU" dirty="0" err="1" smtClean="0"/>
-              <a:t>model</a:t>
-            </a:r>
-            <a:r>
-              <a:rPr lang="hu-HU" dirty="0" smtClean="0"/>
-              <a:t> is </a:t>
-            </a:r>
-            <a:r>
-              <a:rPr lang="hu-HU" dirty="0" err="1" smtClean="0"/>
-              <a:t>in</a:t>
-            </a:r>
-            <a:r>
-              <a:rPr lang="hu-HU" dirty="0" smtClean="0"/>
-              <a:t> </a:t>
-            </a:r>
-            <a:r>
-              <a:rPr lang="hu-HU" dirty="0" err="1" smtClean="0"/>
-              <a:t>assigning</a:t>
-            </a:r>
-            <a:r>
-              <a:rPr lang="hu-HU" dirty="0" smtClean="0"/>
-              <a:t> </a:t>
-            </a:r>
-            <a:r>
-              <a:rPr lang="hu-HU" dirty="0" err="1" smtClean="0"/>
-              <a:t>that</a:t>
-            </a:r>
-            <a:r>
-              <a:rPr lang="hu-HU" dirty="0" smtClean="0"/>
-              <a:t> </a:t>
-            </a:r>
-            <a:r>
-              <a:rPr lang="hu-HU" dirty="0" err="1" smtClean="0"/>
-              <a:t>label</a:t>
-            </a:r>
-            <a:r>
-              <a:rPr lang="hu-HU" dirty="0" smtClean="0"/>
-              <a:t> </a:t>
-            </a:r>
-            <a:r>
-              <a:rPr lang="hu-HU" dirty="0" err="1" smtClean="0"/>
-              <a:t>to</a:t>
-            </a:r>
-            <a:r>
-              <a:rPr lang="hu-HU" dirty="0" smtClean="0"/>
-              <a:t> </a:t>
-            </a:r>
-            <a:r>
-              <a:rPr lang="hu-HU" dirty="0" err="1" smtClean="0"/>
-              <a:t>the</a:t>
-            </a:r>
-            <a:r>
-              <a:rPr lang="hu-HU" dirty="0" smtClean="0"/>
-              <a:t> input</a:t>
-            </a:r>
-          </a:p>
-          <a:p>
-            <a:pPr lvl="1"/>
-            <a:r>
-              <a:rPr lang="hu-HU" dirty="0" smtClean="0"/>
-              <a:t>a </a:t>
-            </a:r>
-            <a:r>
-              <a:rPr lang="hu-HU" dirty="0" err="1" smtClean="0"/>
-              <a:t>generative</a:t>
-            </a:r>
-            <a:r>
-              <a:rPr lang="hu-HU" dirty="0" smtClean="0"/>
-              <a:t> LM </a:t>
-            </a:r>
-            <a:r>
-              <a:rPr lang="hu-HU" b="1" dirty="0" err="1" smtClean="0"/>
-              <a:t>never</a:t>
-            </a:r>
-            <a:r>
-              <a:rPr lang="hu-HU" b="1" dirty="0" smtClean="0"/>
-              <a:t> </a:t>
-            </a:r>
-            <a:r>
-              <a:rPr lang="hu-HU" b="1" dirty="0" err="1" smtClean="0"/>
-              <a:t>calculates</a:t>
-            </a:r>
-            <a:r>
-              <a:rPr lang="hu-HU" b="1" dirty="0" smtClean="0"/>
-              <a:t> a </a:t>
-            </a:r>
-            <a:r>
-              <a:rPr lang="hu-HU" b="1" dirty="0" err="1" smtClean="0"/>
-              <a:t>label</a:t>
-            </a:r>
-            <a:r>
-              <a:rPr lang="hu-HU" dirty="0" smtClean="0"/>
-              <a:t>, </a:t>
-            </a:r>
-            <a:r>
-              <a:rPr lang="hu-HU" dirty="0" err="1" smtClean="0"/>
-              <a:t>it</a:t>
-            </a:r>
-            <a:r>
-              <a:rPr lang="hu-HU" dirty="0" smtClean="0"/>
-              <a:t> </a:t>
-            </a:r>
-            <a:r>
-              <a:rPr lang="hu-HU" b="1" dirty="0" err="1" smtClean="0"/>
-              <a:t>generates</a:t>
-            </a:r>
-            <a:r>
-              <a:rPr lang="hu-HU" b="1" dirty="0" smtClean="0"/>
-              <a:t> </a:t>
-            </a:r>
-            <a:r>
-              <a:rPr lang="hu-HU" b="1" dirty="0" err="1" smtClean="0"/>
-              <a:t>free-form</a:t>
-            </a:r>
-            <a:r>
-              <a:rPr lang="hu-HU" b="1" dirty="0" smtClean="0"/>
-              <a:t> text</a:t>
-            </a:r>
-            <a:r>
-              <a:rPr lang="hu-HU" dirty="0" smtClean="0"/>
-              <a:t>, and </a:t>
-            </a:r>
-            <a:r>
-              <a:rPr lang="hu-HU" dirty="0" err="1" smtClean="0"/>
-              <a:t>there</a:t>
-            </a:r>
-            <a:r>
-              <a:rPr lang="hu-HU" dirty="0" smtClean="0"/>
-              <a:t> </a:t>
-            </a:r>
-            <a:r>
-              <a:rPr lang="hu-HU" dirty="0" err="1" smtClean="0"/>
-              <a:t>can</a:t>
-            </a:r>
-            <a:r>
-              <a:rPr lang="hu-HU" dirty="0" smtClean="0"/>
-              <a:t> be </a:t>
-            </a:r>
-            <a:r>
-              <a:rPr lang="hu-HU" b="1" dirty="0" smtClean="0"/>
-              <a:t>no </a:t>
-            </a:r>
-            <a:r>
-              <a:rPr lang="hu-HU" b="1" dirty="0" err="1" smtClean="0"/>
-              <a:t>guarantee</a:t>
-            </a:r>
-            <a:r>
-              <a:rPr lang="hu-HU" b="1" dirty="0" smtClean="0"/>
-              <a:t> </a:t>
-            </a:r>
-            <a:r>
-              <a:rPr lang="hu-HU" b="1" dirty="0" err="1" smtClean="0"/>
-              <a:t>that</a:t>
-            </a:r>
-            <a:r>
-              <a:rPr lang="hu-HU" b="1" dirty="0" smtClean="0"/>
-              <a:t> </a:t>
-            </a:r>
-            <a:r>
-              <a:rPr lang="hu-HU" b="1" dirty="0" err="1" smtClean="0"/>
-              <a:t>the</a:t>
-            </a:r>
-            <a:r>
-              <a:rPr lang="hu-HU" b="1" dirty="0" smtClean="0"/>
-              <a:t> text being </a:t>
-            </a:r>
-            <a:r>
-              <a:rPr lang="hu-HU" b="1" dirty="0" err="1" smtClean="0"/>
-              <a:t>generated</a:t>
-            </a:r>
-            <a:r>
-              <a:rPr lang="hu-HU" b="1" dirty="0" smtClean="0"/>
-              <a:t> </a:t>
-            </a:r>
-            <a:r>
-              <a:rPr lang="hu-HU" b="1" dirty="0" err="1" smtClean="0"/>
-              <a:t>contains</a:t>
-            </a:r>
-            <a:r>
-              <a:rPr lang="hu-HU" b="1" dirty="0" smtClean="0"/>
-              <a:t> </a:t>
-            </a:r>
-            <a:r>
-              <a:rPr lang="hu-HU" b="1" dirty="0" err="1" smtClean="0"/>
-              <a:t>the</a:t>
-            </a:r>
-            <a:r>
-              <a:rPr lang="hu-HU" b="1" dirty="0" smtClean="0"/>
-              <a:t> </a:t>
-            </a:r>
-            <a:r>
-              <a:rPr lang="hu-HU" b="1" dirty="0" err="1" smtClean="0"/>
-              <a:t>solution</a:t>
-            </a:r>
-            <a:r>
-              <a:rPr lang="hu-HU" b="1" dirty="0" smtClean="0"/>
-              <a:t> </a:t>
-            </a:r>
-            <a:r>
-              <a:rPr lang="hu-HU" b="1" dirty="0" err="1" smtClean="0"/>
-              <a:t>to</a:t>
-            </a:r>
-            <a:r>
-              <a:rPr lang="hu-HU" b="1" dirty="0" smtClean="0"/>
-              <a:t> </a:t>
-            </a:r>
-            <a:r>
-              <a:rPr lang="hu-HU" b="1" dirty="0" err="1" smtClean="0"/>
-              <a:t>the</a:t>
-            </a:r>
-            <a:r>
-              <a:rPr lang="hu-HU" b="1" dirty="0" smtClean="0"/>
-              <a:t> </a:t>
-            </a:r>
-            <a:r>
-              <a:rPr lang="hu-HU" b="1" dirty="0" err="1" smtClean="0"/>
-              <a:t>task</a:t>
-            </a:r>
-            <a:r>
-              <a:rPr lang="hu-HU" dirty="0" smtClean="0"/>
-              <a:t>, </a:t>
-            </a:r>
-            <a:r>
-              <a:rPr lang="hu-HU" dirty="0" err="1" smtClean="0"/>
-              <a:t>e.g</a:t>
-            </a:r>
-            <a:r>
-              <a:rPr lang="hu-HU" dirty="0" smtClean="0"/>
-              <a:t>. </a:t>
-            </a:r>
-            <a:r>
-              <a:rPr lang="hu-HU" dirty="0" err="1" smtClean="0"/>
-              <a:t>the</a:t>
-            </a:r>
-            <a:r>
-              <a:rPr lang="hu-HU" dirty="0" smtClean="0"/>
-              <a:t> </a:t>
-            </a:r>
-            <a:r>
-              <a:rPr lang="hu-HU" dirty="0" err="1" smtClean="0"/>
-              <a:t>class</a:t>
-            </a:r>
-            <a:r>
-              <a:rPr lang="hu-HU" dirty="0" smtClean="0"/>
-              <a:t> </a:t>
-            </a:r>
-            <a:r>
-              <a:rPr lang="hu-HU" dirty="0" err="1" smtClean="0"/>
-              <a:t>label</a:t>
-            </a:r>
-            <a:endParaRPr lang="hu-HU" dirty="0" smtClean="0"/>
-          </a:p>
-          <a:p>
-            <a:pPr lvl="2"/>
-            <a:r>
-              <a:rPr lang="hu-HU" dirty="0" err="1" smtClean="0"/>
-              <a:t>the</a:t>
-            </a:r>
-            <a:r>
-              <a:rPr lang="hu-HU" dirty="0" smtClean="0"/>
-              <a:t> </a:t>
-            </a:r>
-            <a:r>
-              <a:rPr lang="hu-HU" dirty="0" err="1" smtClean="0"/>
-              <a:t>answer</a:t>
-            </a:r>
-            <a:r>
-              <a:rPr lang="hu-HU" dirty="0" smtClean="0"/>
-              <a:t> </a:t>
-            </a:r>
-            <a:r>
-              <a:rPr lang="hu-HU" b="1" dirty="0" err="1" smtClean="0"/>
-              <a:t>might</a:t>
-            </a:r>
-            <a:r>
-              <a:rPr lang="hu-HU" dirty="0" smtClean="0"/>
-              <a:t> </a:t>
-            </a:r>
-            <a:r>
-              <a:rPr lang="hu-HU" dirty="0" err="1" smtClean="0"/>
-              <a:t>contain</a:t>
-            </a:r>
-            <a:r>
-              <a:rPr lang="hu-HU" dirty="0" smtClean="0"/>
-              <a:t> </a:t>
-            </a:r>
-            <a:r>
-              <a:rPr lang="hu-HU" dirty="0" err="1" smtClean="0"/>
-              <a:t>the</a:t>
-            </a:r>
-            <a:r>
-              <a:rPr lang="hu-HU" dirty="0" smtClean="0"/>
-              <a:t> </a:t>
-            </a:r>
-            <a:r>
-              <a:rPr lang="hu-HU" dirty="0" err="1" smtClean="0"/>
-              <a:t>class</a:t>
-            </a:r>
-            <a:r>
-              <a:rPr lang="hu-HU" dirty="0" smtClean="0"/>
-              <a:t> </a:t>
-            </a:r>
-            <a:r>
-              <a:rPr lang="hu-HU" dirty="0" err="1" smtClean="0"/>
-              <a:t>label</a:t>
-            </a:r>
-            <a:r>
-              <a:rPr lang="hu-HU" dirty="0" smtClean="0"/>
-              <a:t> </a:t>
-            </a:r>
-            <a:r>
-              <a:rPr lang="hu-HU" dirty="0" err="1" smtClean="0"/>
-              <a:t>somewhere</a:t>
-            </a:r>
-            <a:r>
-              <a:rPr lang="hu-HU" dirty="0" smtClean="0"/>
-              <a:t> </a:t>
-            </a:r>
-            <a:r>
-              <a:rPr lang="hu-HU" b="1" dirty="0" err="1" smtClean="0"/>
-              <a:t>along</a:t>
-            </a:r>
-            <a:r>
-              <a:rPr lang="hu-HU" b="1" dirty="0" smtClean="0"/>
-              <a:t> </a:t>
-            </a:r>
-            <a:r>
-              <a:rPr lang="hu-HU" b="1" dirty="0" err="1" smtClean="0"/>
-              <a:t>with</a:t>
-            </a:r>
-            <a:r>
-              <a:rPr lang="hu-HU" b="1" dirty="0" smtClean="0"/>
-              <a:t> </a:t>
-            </a:r>
-            <a:r>
-              <a:rPr lang="hu-HU" b="1" dirty="0" err="1" smtClean="0"/>
-              <a:t>other</a:t>
-            </a:r>
-            <a:r>
-              <a:rPr lang="hu-HU" b="1" dirty="0" smtClean="0"/>
-              <a:t> </a:t>
-            </a:r>
-            <a:r>
-              <a:rPr lang="hu-HU" b="1" dirty="0" err="1" smtClean="0"/>
-              <a:t>junk</a:t>
-            </a:r>
-            <a:r>
-              <a:rPr lang="hu-HU" b="1" dirty="0" smtClean="0"/>
-              <a:t> </a:t>
-            </a:r>
-            <a:r>
-              <a:rPr lang="hu-HU" i="1" dirty="0" smtClean="0"/>
-              <a:t>(Of </a:t>
-            </a:r>
-            <a:r>
-              <a:rPr lang="hu-HU" i="1" dirty="0" err="1" smtClean="0"/>
-              <a:t>course</a:t>
-            </a:r>
-            <a:r>
-              <a:rPr lang="hu-HU" i="1" dirty="0" smtClean="0"/>
-              <a:t>. I </a:t>
-            </a:r>
-            <a:r>
-              <a:rPr lang="hu-HU" i="1" dirty="0" err="1" smtClean="0"/>
-              <a:t>will</a:t>
-            </a:r>
-            <a:r>
-              <a:rPr lang="hu-HU" i="1" dirty="0" smtClean="0"/>
-              <a:t> </a:t>
-            </a:r>
-            <a:r>
-              <a:rPr lang="hu-HU" i="1" dirty="0" err="1" smtClean="0"/>
-              <a:t>gladly</a:t>
-            </a:r>
-            <a:r>
-              <a:rPr lang="hu-HU" i="1" dirty="0" smtClean="0"/>
-              <a:t> </a:t>
-            </a:r>
-            <a:r>
-              <a:rPr lang="hu-HU" i="1" dirty="0" err="1" smtClean="0"/>
-              <a:t>help</a:t>
-            </a:r>
-            <a:r>
-              <a:rPr lang="hu-HU" i="1" dirty="0" smtClean="0"/>
-              <a:t> </a:t>
-            </a:r>
-            <a:r>
-              <a:rPr lang="hu-HU" i="1" dirty="0" err="1" smtClean="0"/>
-              <a:t>you</a:t>
-            </a:r>
-            <a:r>
-              <a:rPr lang="hu-HU" i="1" dirty="0" smtClean="0"/>
-              <a:t> </a:t>
-            </a:r>
-            <a:r>
-              <a:rPr lang="hu-HU" i="1" dirty="0" err="1" smtClean="0"/>
-              <a:t>with</a:t>
-            </a:r>
-            <a:r>
-              <a:rPr lang="hu-HU" i="1" dirty="0" smtClean="0"/>
-              <a:t> </a:t>
-            </a:r>
-            <a:r>
-              <a:rPr lang="hu-HU" i="1" dirty="0" err="1" smtClean="0"/>
-              <a:t>this</a:t>
-            </a:r>
-            <a:r>
-              <a:rPr lang="hu-HU" i="1" dirty="0" smtClean="0"/>
-              <a:t>. The </a:t>
-            </a:r>
-            <a:r>
-              <a:rPr lang="hu-HU" i="1" dirty="0" err="1" smtClean="0"/>
-              <a:t>sentence</a:t>
-            </a:r>
-            <a:r>
-              <a:rPr lang="hu-HU" i="1" dirty="0" smtClean="0"/>
-              <a:t> ... </a:t>
-            </a:r>
-            <a:r>
-              <a:rPr lang="hu-HU" i="1" dirty="0" err="1" smtClean="0"/>
-              <a:t>expresses</a:t>
-            </a:r>
-            <a:r>
-              <a:rPr lang="hu-HU" i="1" dirty="0" smtClean="0"/>
-              <a:t> a </a:t>
-            </a:r>
-            <a:r>
-              <a:rPr lang="hu-HU" i="1" u="sng" dirty="0" err="1" smtClean="0"/>
-              <a:t>positive</a:t>
-            </a:r>
-            <a:r>
-              <a:rPr lang="hu-HU" i="1" dirty="0" smtClean="0"/>
-              <a:t> </a:t>
-            </a:r>
-            <a:r>
-              <a:rPr lang="hu-HU" i="1" dirty="0" err="1" smtClean="0"/>
-              <a:t>sentiment</a:t>
-            </a:r>
-            <a:r>
-              <a:rPr lang="hu-HU" i="1" dirty="0" smtClean="0"/>
-              <a:t>.)</a:t>
-            </a:r>
-          </a:p>
-          <a:p>
-            <a:pPr lvl="2"/>
-            <a:r>
-              <a:rPr lang="hu-HU" dirty="0" err="1" smtClean="0"/>
-              <a:t>it</a:t>
-            </a:r>
-            <a:r>
-              <a:rPr lang="hu-HU" dirty="0" smtClean="0"/>
-              <a:t> </a:t>
-            </a:r>
-            <a:r>
-              <a:rPr lang="hu-HU" dirty="0" err="1" smtClean="0"/>
-              <a:t>might</a:t>
-            </a:r>
-            <a:r>
-              <a:rPr lang="hu-HU" dirty="0" smtClean="0"/>
-              <a:t> </a:t>
-            </a:r>
-            <a:r>
-              <a:rPr lang="hu-HU" dirty="0" err="1" smtClean="0"/>
-              <a:t>contain</a:t>
-            </a:r>
-            <a:r>
-              <a:rPr lang="hu-HU" dirty="0" smtClean="0"/>
-              <a:t> a </a:t>
-            </a:r>
-            <a:r>
-              <a:rPr lang="hu-HU" dirty="0" err="1" smtClean="0"/>
-              <a:t>solution</a:t>
-            </a:r>
-            <a:r>
-              <a:rPr lang="hu-HU" dirty="0" smtClean="0"/>
-              <a:t> </a:t>
-            </a:r>
-            <a:r>
-              <a:rPr lang="hu-HU" dirty="0" err="1" smtClean="0"/>
-              <a:t>to</a:t>
-            </a:r>
-            <a:r>
-              <a:rPr lang="hu-HU" dirty="0" smtClean="0"/>
-              <a:t> </a:t>
-            </a:r>
-            <a:r>
-              <a:rPr lang="hu-HU" dirty="0" err="1" smtClean="0"/>
-              <a:t>the</a:t>
-            </a:r>
-            <a:r>
-              <a:rPr lang="hu-HU" dirty="0" smtClean="0"/>
-              <a:t> </a:t>
-            </a:r>
-            <a:r>
-              <a:rPr lang="hu-HU" dirty="0" err="1" smtClean="0"/>
-              <a:t>problem</a:t>
-            </a:r>
-            <a:r>
-              <a:rPr lang="hu-HU" dirty="0" smtClean="0"/>
-              <a:t>, </a:t>
-            </a:r>
-            <a:r>
-              <a:rPr lang="hu-HU" dirty="0" err="1" smtClean="0"/>
-              <a:t>but</a:t>
-            </a:r>
-            <a:r>
-              <a:rPr lang="hu-HU" dirty="0" smtClean="0"/>
-              <a:t> </a:t>
-            </a:r>
-            <a:r>
-              <a:rPr lang="hu-HU" b="1" dirty="0" err="1" smtClean="0"/>
-              <a:t>phrased</a:t>
-            </a:r>
-            <a:r>
-              <a:rPr lang="hu-HU" b="1" dirty="0" smtClean="0"/>
-              <a:t> </a:t>
-            </a:r>
-            <a:r>
-              <a:rPr lang="hu-HU" b="1" dirty="0" err="1" smtClean="0"/>
-              <a:t>in</a:t>
-            </a:r>
-            <a:r>
-              <a:rPr lang="hu-HU" b="1" dirty="0" smtClean="0"/>
-              <a:t> an </a:t>
-            </a:r>
-            <a:r>
-              <a:rPr lang="hu-HU" b="1" dirty="0" err="1" smtClean="0"/>
-              <a:t>unexpected</a:t>
-            </a:r>
-            <a:r>
-              <a:rPr lang="hu-HU" b="1" dirty="0" smtClean="0"/>
-              <a:t> </a:t>
-            </a:r>
-            <a:r>
-              <a:rPr lang="hu-HU" b="1" dirty="0" err="1" smtClean="0"/>
-              <a:t>way</a:t>
-            </a:r>
-            <a:r>
-              <a:rPr lang="hu-HU" b="1" dirty="0" smtClean="0"/>
-              <a:t> </a:t>
-            </a:r>
-            <a:r>
-              <a:rPr lang="hu-HU" i="1" dirty="0" smtClean="0"/>
-              <a:t>(The </a:t>
-            </a:r>
-            <a:r>
-              <a:rPr lang="hu-HU" i="1" dirty="0" err="1" smtClean="0"/>
-              <a:t>sentence</a:t>
-            </a:r>
-            <a:r>
-              <a:rPr lang="hu-HU" i="1" dirty="0" smtClean="0"/>
-              <a:t> </a:t>
-            </a:r>
-            <a:r>
-              <a:rPr lang="hu-HU" i="1" dirty="0" err="1" smtClean="0"/>
-              <a:t>expresses</a:t>
-            </a:r>
-            <a:r>
-              <a:rPr lang="hu-HU" i="1" dirty="0" smtClean="0"/>
-              <a:t> </a:t>
-            </a:r>
-            <a:r>
-              <a:rPr lang="hu-HU" i="1" dirty="0" err="1" smtClean="0"/>
-              <a:t>that</a:t>
-            </a:r>
-            <a:r>
-              <a:rPr lang="hu-HU" i="1" dirty="0" smtClean="0"/>
-              <a:t> </a:t>
-            </a:r>
-            <a:r>
-              <a:rPr lang="hu-HU" i="1" dirty="0" err="1" smtClean="0"/>
-              <a:t>the</a:t>
-            </a:r>
-            <a:r>
-              <a:rPr lang="hu-HU" i="1" dirty="0" smtClean="0"/>
-              <a:t> </a:t>
-            </a:r>
-            <a:r>
-              <a:rPr lang="hu-HU" i="1" dirty="0" err="1" smtClean="0"/>
-              <a:t>customer</a:t>
-            </a:r>
-            <a:r>
-              <a:rPr lang="hu-HU" i="1" dirty="0" smtClean="0"/>
-              <a:t> is </a:t>
-            </a:r>
-            <a:r>
-              <a:rPr lang="hu-HU" i="1" u="sng" dirty="0" err="1" smtClean="0"/>
-              <a:t>pleased</a:t>
-            </a:r>
-            <a:r>
-              <a:rPr lang="hu-HU" i="1" u="sng" dirty="0" smtClean="0"/>
-              <a:t> </a:t>
-            </a:r>
-            <a:r>
-              <a:rPr lang="hu-HU" i="1" u="sng" dirty="0" err="1" smtClean="0"/>
-              <a:t>with</a:t>
-            </a:r>
-            <a:r>
-              <a:rPr lang="hu-HU" i="1" dirty="0" smtClean="0"/>
-              <a:t> </a:t>
-            </a:r>
-            <a:r>
-              <a:rPr lang="hu-HU" i="1" dirty="0" err="1" smtClean="0"/>
-              <a:t>the</a:t>
-            </a:r>
-            <a:r>
-              <a:rPr lang="hu-HU" i="1" dirty="0" smtClean="0"/>
-              <a:t> </a:t>
-            </a:r>
-            <a:r>
-              <a:rPr lang="hu-HU" i="1" dirty="0" err="1" smtClean="0"/>
-              <a:t>product</a:t>
-            </a:r>
-            <a:r>
-              <a:rPr lang="hu-HU" i="1" dirty="0" smtClean="0"/>
-              <a:t>.)</a:t>
-            </a:r>
-          </a:p>
-          <a:p>
-            <a:pPr lvl="2"/>
-            <a:r>
-              <a:rPr lang="hu-HU" dirty="0" err="1" smtClean="0"/>
-              <a:t>it</a:t>
-            </a:r>
-            <a:r>
-              <a:rPr lang="hu-HU" dirty="0" smtClean="0"/>
-              <a:t> </a:t>
-            </a:r>
-            <a:r>
-              <a:rPr lang="hu-HU" dirty="0" err="1" smtClean="0"/>
-              <a:t>might</a:t>
-            </a:r>
-            <a:r>
-              <a:rPr lang="hu-HU" dirty="0" smtClean="0"/>
-              <a:t> </a:t>
-            </a:r>
-            <a:r>
-              <a:rPr lang="hu-HU" b="1" dirty="0" err="1" smtClean="0"/>
-              <a:t>not</a:t>
-            </a:r>
-            <a:r>
-              <a:rPr lang="hu-HU" b="1" dirty="0" smtClean="0"/>
-              <a:t> </a:t>
-            </a:r>
-            <a:r>
-              <a:rPr lang="hu-HU" b="1" dirty="0" err="1" smtClean="0"/>
-              <a:t>contain</a:t>
-            </a:r>
-            <a:r>
-              <a:rPr lang="hu-HU" b="1" dirty="0" smtClean="0"/>
-              <a:t> </a:t>
-            </a:r>
-            <a:r>
-              <a:rPr lang="hu-HU" b="1" dirty="0" err="1" smtClean="0"/>
-              <a:t>the</a:t>
-            </a:r>
-            <a:r>
-              <a:rPr lang="hu-HU" b="1" dirty="0" smtClean="0"/>
-              <a:t> </a:t>
-            </a:r>
-            <a:r>
-              <a:rPr lang="hu-HU" b="1" dirty="0" err="1" smtClean="0"/>
-              <a:t>solution</a:t>
-            </a:r>
-            <a:r>
-              <a:rPr lang="hu-HU" b="1" dirty="0" smtClean="0"/>
-              <a:t> </a:t>
-            </a:r>
-            <a:r>
-              <a:rPr lang="hu-HU" b="1" dirty="0" err="1" smtClean="0"/>
-              <a:t>at</a:t>
-            </a:r>
-            <a:r>
-              <a:rPr lang="hu-HU" b="1" dirty="0" smtClean="0"/>
-              <a:t> </a:t>
-            </a:r>
-            <a:r>
-              <a:rPr lang="hu-HU" b="1" dirty="0" err="1" smtClean="0"/>
-              <a:t>all</a:t>
-            </a:r>
-            <a:r>
-              <a:rPr lang="hu-HU" dirty="0" smtClean="0"/>
-              <a:t>, </a:t>
-            </a:r>
-            <a:r>
-              <a:rPr lang="hu-HU" dirty="0" err="1" smtClean="0"/>
-              <a:t>but</a:t>
-            </a:r>
-            <a:r>
-              <a:rPr lang="hu-HU" dirty="0" smtClean="0"/>
-              <a:t> </a:t>
-            </a:r>
-            <a:r>
-              <a:rPr lang="hu-HU" dirty="0" err="1" smtClean="0"/>
-              <a:t>unrelated</a:t>
-            </a:r>
-            <a:r>
-              <a:rPr lang="hu-HU" dirty="0" smtClean="0"/>
-              <a:t> </a:t>
-            </a:r>
-            <a:r>
-              <a:rPr lang="hu-HU" dirty="0" err="1" smtClean="0"/>
-              <a:t>useless</a:t>
-            </a:r>
-            <a:r>
-              <a:rPr lang="hu-HU" dirty="0" smtClean="0"/>
-              <a:t> output</a:t>
-            </a:r>
-          </a:p>
-          <a:p>
-            <a:pPr lvl="2"/>
-            <a:r>
-              <a:rPr lang="hu-HU" b="1" dirty="0" err="1" smtClean="0"/>
-              <a:t>Confidence</a:t>
-            </a:r>
-            <a:r>
-              <a:rPr lang="hu-HU" b="1" dirty="0" smtClean="0"/>
-              <a:t> is </a:t>
-            </a:r>
-            <a:r>
-              <a:rPr lang="hu-HU" b="1" dirty="0" err="1" smtClean="0"/>
-              <a:t>not</a:t>
-            </a:r>
-            <a:r>
-              <a:rPr lang="hu-HU" b="1" dirty="0" smtClean="0"/>
-              <a:t> </a:t>
-            </a:r>
-            <a:r>
-              <a:rPr lang="hu-HU" b="1" dirty="0" err="1" smtClean="0"/>
-              <a:t>interpretable</a:t>
-            </a:r>
-            <a:r>
-              <a:rPr lang="hu-HU" b="1" dirty="0" smtClean="0"/>
-              <a:t> </a:t>
-            </a:r>
-            <a:r>
-              <a:rPr lang="hu-HU" dirty="0" err="1" smtClean="0"/>
-              <a:t>in</a:t>
-            </a:r>
-            <a:r>
-              <a:rPr lang="hu-HU" dirty="0" smtClean="0"/>
-              <a:t> </a:t>
-            </a:r>
-            <a:r>
-              <a:rPr lang="hu-HU" dirty="0" err="1" smtClean="0"/>
-              <a:t>generative</a:t>
-            </a:r>
-            <a:r>
-              <a:rPr lang="hu-HU" dirty="0" smtClean="0"/>
-              <a:t> </a:t>
-            </a:r>
-            <a:r>
-              <a:rPr lang="hu-HU" dirty="0" err="1" smtClean="0"/>
-              <a:t>LMs</a:t>
-            </a:r>
-            <a:r>
-              <a:rPr lang="hu-HU" dirty="0" smtClean="0"/>
-              <a:t>, </a:t>
-            </a:r>
-            <a:r>
-              <a:rPr lang="hu-HU" dirty="0" err="1" smtClean="0"/>
-              <a:t>you</a:t>
-            </a:r>
-            <a:r>
-              <a:rPr lang="hu-HU" dirty="0" smtClean="0"/>
-              <a:t> </a:t>
-            </a:r>
-            <a:r>
-              <a:rPr lang="hu-HU" dirty="0" err="1" smtClean="0"/>
-              <a:t>cannot</a:t>
-            </a:r>
-            <a:r>
-              <a:rPr lang="hu-HU" dirty="0" smtClean="0"/>
-              <a:t> filter out </a:t>
-            </a:r>
-            <a:r>
-              <a:rPr lang="hu-HU" dirty="0" err="1" smtClean="0"/>
-              <a:t>low-confidence</a:t>
-            </a:r>
-            <a:r>
-              <a:rPr lang="hu-HU" dirty="0" smtClean="0"/>
-              <a:t> </a:t>
-            </a:r>
-            <a:r>
-              <a:rPr lang="hu-HU" dirty="0" err="1" smtClean="0"/>
-              <a:t>responses</a:t>
-            </a:r>
-            <a:endParaRPr lang="hu-HU" dirty="0" smtClean="0"/>
-          </a:p>
-          <a:p>
-            <a:pPr lvl="1"/>
-            <a:r>
-              <a:rPr lang="hu-HU" dirty="0" err="1" smtClean="0"/>
-              <a:t>Thus</a:t>
-            </a:r>
-            <a:r>
-              <a:rPr lang="hu-HU" dirty="0" smtClean="0"/>
-              <a:t> </a:t>
-            </a:r>
-            <a:r>
-              <a:rPr lang="hu-HU" b="1" dirty="0" err="1" smtClean="0"/>
-              <a:t>in</a:t>
-            </a:r>
-            <a:r>
-              <a:rPr lang="hu-HU" b="1" dirty="0" smtClean="0"/>
-              <a:t> </a:t>
-            </a:r>
-            <a:r>
-              <a:rPr lang="hu-HU" b="1" dirty="0" err="1" smtClean="0"/>
-              <a:t>practice</a:t>
-            </a:r>
-            <a:r>
-              <a:rPr lang="hu-HU" dirty="0" smtClean="0"/>
-              <a:t>, </a:t>
-            </a:r>
-            <a:r>
-              <a:rPr lang="hu-HU" dirty="0" err="1" smtClean="0"/>
-              <a:t>when</a:t>
-            </a:r>
-            <a:r>
-              <a:rPr lang="hu-HU" dirty="0" smtClean="0"/>
-              <a:t> </a:t>
-            </a:r>
-            <a:r>
-              <a:rPr lang="hu-HU" dirty="0" err="1" smtClean="0"/>
-              <a:t>using</a:t>
-            </a:r>
-            <a:r>
-              <a:rPr lang="hu-HU" dirty="0" smtClean="0"/>
-              <a:t> a </a:t>
-            </a:r>
-            <a:r>
-              <a:rPr lang="hu-HU" dirty="0" err="1" smtClean="0"/>
-              <a:t>generative</a:t>
-            </a:r>
-            <a:r>
-              <a:rPr lang="hu-HU" dirty="0" smtClean="0"/>
-              <a:t> LM </a:t>
-            </a:r>
-            <a:r>
-              <a:rPr lang="hu-HU" dirty="0" err="1" smtClean="0"/>
-              <a:t>to</a:t>
-            </a:r>
-            <a:r>
-              <a:rPr lang="hu-HU" dirty="0" smtClean="0"/>
-              <a:t> </a:t>
-            </a:r>
-            <a:r>
-              <a:rPr lang="hu-HU" dirty="0" err="1" smtClean="0"/>
-              <a:t>solve</a:t>
-            </a:r>
-            <a:r>
-              <a:rPr lang="hu-HU" dirty="0" smtClean="0"/>
-              <a:t> an </a:t>
-            </a:r>
-            <a:r>
-              <a:rPr lang="hu-HU" dirty="0" err="1" smtClean="0"/>
-              <a:t>NLP</a:t>
-            </a:r>
-            <a:r>
-              <a:rPr lang="hu-HU" dirty="0" smtClean="0"/>
-              <a:t> </a:t>
-            </a:r>
-            <a:r>
-              <a:rPr lang="hu-HU" dirty="0" err="1" smtClean="0"/>
-              <a:t>task</a:t>
-            </a:r>
-            <a:r>
-              <a:rPr lang="hu-HU" dirty="0" smtClean="0"/>
-              <a:t>, </a:t>
-            </a:r>
-            <a:r>
-              <a:rPr lang="hu-HU" dirty="0" err="1" smtClean="0"/>
-              <a:t>you</a:t>
-            </a:r>
-            <a:r>
-              <a:rPr lang="hu-HU" dirty="0" smtClean="0"/>
-              <a:t> </a:t>
-            </a:r>
-            <a:r>
-              <a:rPr lang="hu-HU" dirty="0" err="1" smtClean="0"/>
-              <a:t>give</a:t>
-            </a:r>
-            <a:r>
-              <a:rPr lang="hu-HU" dirty="0" smtClean="0"/>
-              <a:t> </a:t>
-            </a:r>
-            <a:r>
-              <a:rPr lang="hu-HU" dirty="0" err="1" smtClean="0"/>
-              <a:t>yourself</a:t>
-            </a:r>
-            <a:r>
-              <a:rPr lang="hu-HU" dirty="0" smtClean="0"/>
-              <a:t> a </a:t>
-            </a:r>
-            <a:r>
-              <a:rPr lang="hu-HU" b="1" dirty="0" err="1" smtClean="0"/>
-              <a:t>second</a:t>
-            </a:r>
-            <a:r>
-              <a:rPr lang="hu-HU" b="1" dirty="0" smtClean="0"/>
-              <a:t> </a:t>
-            </a:r>
-            <a:r>
-              <a:rPr lang="hu-HU" b="1" dirty="0" err="1" smtClean="0"/>
-              <a:t>NLP</a:t>
-            </a:r>
-            <a:r>
-              <a:rPr lang="hu-HU" b="1" dirty="0" smtClean="0"/>
-              <a:t> </a:t>
-            </a:r>
-            <a:r>
-              <a:rPr lang="hu-HU" b="1" dirty="0" err="1" smtClean="0"/>
-              <a:t>task</a:t>
-            </a:r>
-            <a:r>
-              <a:rPr lang="hu-HU" b="1" dirty="0" smtClean="0"/>
-              <a:t> </a:t>
-            </a:r>
-            <a:r>
-              <a:rPr lang="hu-HU" dirty="0" err="1" smtClean="0"/>
-              <a:t>that</a:t>
-            </a:r>
-            <a:r>
-              <a:rPr lang="hu-HU" dirty="0" smtClean="0"/>
-              <a:t> </a:t>
-            </a:r>
-            <a:r>
-              <a:rPr lang="hu-HU" dirty="0" err="1" smtClean="0"/>
-              <a:t>consists</a:t>
-            </a:r>
-            <a:r>
-              <a:rPr lang="hu-HU" dirty="0" smtClean="0"/>
-              <a:t> </a:t>
-            </a:r>
-            <a:r>
-              <a:rPr lang="hu-HU" dirty="0" err="1" smtClean="0"/>
-              <a:t>in</a:t>
-            </a:r>
-            <a:r>
-              <a:rPr lang="hu-HU" dirty="0" smtClean="0"/>
-              <a:t> </a:t>
-            </a:r>
-            <a:r>
-              <a:rPr lang="hu-HU" dirty="0" err="1" smtClean="0"/>
-              <a:t>extracting</a:t>
-            </a:r>
-            <a:r>
-              <a:rPr lang="hu-HU" dirty="0" smtClean="0"/>
-              <a:t> </a:t>
-            </a:r>
-            <a:r>
-              <a:rPr lang="hu-HU" dirty="0" err="1" smtClean="0"/>
-              <a:t>the</a:t>
-            </a:r>
-            <a:r>
-              <a:rPr lang="hu-HU" dirty="0" smtClean="0"/>
-              <a:t> </a:t>
-            </a:r>
-            <a:r>
-              <a:rPr lang="hu-HU" dirty="0" err="1" smtClean="0"/>
-              <a:t>useful</a:t>
-            </a:r>
-            <a:r>
-              <a:rPr lang="hu-HU" dirty="0" smtClean="0"/>
-              <a:t> </a:t>
-            </a:r>
-            <a:r>
-              <a:rPr lang="hu-HU" dirty="0" err="1" smtClean="0"/>
-              <a:t>information</a:t>
-            </a:r>
-            <a:r>
-              <a:rPr lang="hu-HU" dirty="0" smtClean="0"/>
-              <a:t> </a:t>
-            </a:r>
-            <a:r>
-              <a:rPr lang="hu-HU" dirty="0" err="1" smtClean="0"/>
-              <a:t>from</a:t>
-            </a:r>
-            <a:r>
-              <a:rPr lang="hu-HU" dirty="0" smtClean="0"/>
-              <a:t> </a:t>
-            </a:r>
-            <a:r>
-              <a:rPr lang="hu-HU" dirty="0" err="1" smtClean="0"/>
-              <a:t>the</a:t>
-            </a:r>
-            <a:r>
-              <a:rPr lang="hu-HU" dirty="0" smtClean="0"/>
-              <a:t> </a:t>
-            </a:r>
-            <a:r>
-              <a:rPr lang="hu-HU" dirty="0" err="1" smtClean="0"/>
-              <a:t>response</a:t>
-            </a:r>
-            <a:r>
-              <a:rPr lang="hu-HU" dirty="0" smtClean="0"/>
-              <a:t> </a:t>
-            </a:r>
-            <a:r>
-              <a:rPr lang="hu-HU" dirty="0" err="1" smtClean="0"/>
-              <a:t>generated</a:t>
-            </a:r>
-            <a:r>
-              <a:rPr lang="hu-HU" dirty="0" smtClean="0"/>
-              <a:t> </a:t>
-            </a:r>
-            <a:r>
-              <a:rPr lang="hu-HU" dirty="0" err="1" smtClean="0"/>
-              <a:t>by</a:t>
-            </a:r>
-            <a:r>
-              <a:rPr lang="hu-HU" dirty="0" smtClean="0"/>
-              <a:t> </a:t>
-            </a:r>
-            <a:r>
-              <a:rPr lang="hu-HU" dirty="0" err="1" smtClean="0"/>
-              <a:t>the</a:t>
-            </a:r>
-            <a:r>
-              <a:rPr lang="hu-HU" dirty="0" smtClean="0"/>
-              <a:t> </a:t>
-            </a:r>
-            <a:r>
-              <a:rPr lang="hu-HU" dirty="0" err="1" smtClean="0"/>
-              <a:t>model</a:t>
-            </a:r>
-            <a:r>
-              <a:rPr lang="hu-HU" dirty="0" smtClean="0"/>
-              <a:t>, and </a:t>
-            </a:r>
-            <a:r>
-              <a:rPr lang="hu-HU" dirty="0" err="1" smtClean="0"/>
-              <a:t>this</a:t>
-            </a:r>
-            <a:r>
-              <a:rPr lang="hu-HU" dirty="0" smtClean="0"/>
-              <a:t> </a:t>
-            </a:r>
-            <a:r>
-              <a:rPr lang="hu-HU" dirty="0" err="1" smtClean="0"/>
-              <a:t>task</a:t>
-            </a:r>
-            <a:r>
-              <a:rPr lang="hu-HU" dirty="0" smtClean="0"/>
-              <a:t> is </a:t>
-            </a:r>
-            <a:r>
-              <a:rPr lang="hu-HU" dirty="0" err="1" smtClean="0"/>
-              <a:t>usually</a:t>
-            </a:r>
-            <a:r>
-              <a:rPr lang="hu-HU" dirty="0" smtClean="0"/>
-              <a:t> no less </a:t>
-            </a:r>
-            <a:r>
-              <a:rPr lang="hu-HU" dirty="0" err="1" smtClean="0"/>
-              <a:t>difficult</a:t>
-            </a:r>
-            <a:r>
-              <a:rPr lang="hu-HU" dirty="0"/>
-              <a:t> </a:t>
-            </a:r>
-            <a:r>
-              <a:rPr lang="hu-HU" dirty="0" err="1" smtClean="0"/>
-              <a:t>than</a:t>
-            </a:r>
-            <a:r>
-              <a:rPr lang="hu-HU" dirty="0" smtClean="0"/>
-              <a:t> </a:t>
-            </a:r>
-            <a:r>
-              <a:rPr lang="hu-HU" dirty="0" err="1" smtClean="0"/>
-              <a:t>the</a:t>
-            </a:r>
-            <a:r>
-              <a:rPr lang="hu-HU" dirty="0" smtClean="0"/>
-              <a:t> </a:t>
-            </a:r>
-            <a:r>
-              <a:rPr lang="hu-HU" dirty="0" err="1" smtClean="0"/>
-              <a:t>original</a:t>
-            </a:r>
-            <a:r>
-              <a:rPr lang="hu-HU" dirty="0" smtClean="0"/>
-              <a:t> </a:t>
-            </a:r>
-            <a:r>
-              <a:rPr lang="hu-HU" dirty="0" err="1" smtClean="0"/>
-              <a:t>one</a:t>
-            </a:r>
-            <a:r>
-              <a:rPr lang="hu-HU" dirty="0" smtClean="0"/>
-              <a:t> </a:t>
-            </a:r>
-            <a:r>
-              <a:rPr lang="hu-HU" dirty="0" err="1" smtClean="0"/>
-              <a:t>was</a:t>
-            </a:r>
-            <a:r>
-              <a:rPr lang="hu-HU" dirty="0" smtClean="0"/>
-              <a:t>.</a:t>
-            </a:r>
-            <a:endParaRPr lang="hu-HU" dirty="0"/>
           </a:p>
         </p:txBody>
       </p:sp>
@@ -15707,16 +14490,1642 @@
         <p:spPr>
           <a:xfrm>
             <a:off x="467544" y="1628800"/>
-            <a:ext cx="8229600" cy="4709120"/>
+            <a:ext cx="8229600" cy="4824536"/>
           </a:xfrm>
         </p:spPr>
         <p:txBody>
           <a:bodyPr>
-            <a:normAutofit fontScale="70000" lnSpcReduction="20000"/>
+            <a:noAutofit/>
           </a:bodyPr>
           <a:lstStyle/>
           <a:p>
             <a:r>
+              <a:rPr lang="hu-HU" sz="2000" dirty="0" err="1"/>
+              <a:t>Why</a:t>
+            </a:r>
+            <a:r>
+              <a:rPr lang="hu-HU" sz="2000" dirty="0"/>
+              <a:t> </a:t>
+            </a:r>
+            <a:r>
+              <a:rPr lang="hu-HU" sz="2000" dirty="0" err="1"/>
+              <a:t>not</a:t>
+            </a:r>
+            <a:r>
+              <a:rPr lang="hu-HU" sz="2000" dirty="0"/>
+              <a:t> </a:t>
+            </a:r>
+            <a:r>
+              <a:rPr lang="hu-HU" sz="2000" dirty="0" err="1"/>
+              <a:t>use</a:t>
+            </a:r>
+            <a:r>
+              <a:rPr lang="hu-HU" sz="2000" dirty="0"/>
+              <a:t> </a:t>
+            </a:r>
+            <a:r>
+              <a:rPr lang="hu-HU" sz="2000" dirty="0" err="1"/>
+              <a:t>generative</a:t>
+            </a:r>
+            <a:r>
+              <a:rPr lang="hu-HU" sz="2000" dirty="0"/>
+              <a:t> </a:t>
+            </a:r>
+            <a:r>
+              <a:rPr lang="hu-HU" sz="2000" dirty="0" err="1"/>
+              <a:t>LLMs</a:t>
+            </a:r>
+            <a:r>
+              <a:rPr lang="hu-HU" sz="2000" dirty="0"/>
+              <a:t> </a:t>
+            </a:r>
+            <a:r>
+              <a:rPr lang="hu-HU" sz="2000" dirty="0" err="1"/>
+              <a:t>for</a:t>
+            </a:r>
+            <a:r>
+              <a:rPr lang="hu-HU" sz="2000" dirty="0"/>
+              <a:t> </a:t>
+            </a:r>
+            <a:r>
+              <a:rPr lang="hu-HU" sz="2000" dirty="0" err="1"/>
+              <a:t>all</a:t>
+            </a:r>
+            <a:r>
+              <a:rPr lang="hu-HU" sz="2000" dirty="0"/>
+              <a:t> </a:t>
+            </a:r>
+            <a:r>
+              <a:rPr lang="hu-HU" sz="2000" dirty="0" err="1"/>
+              <a:t>NLP</a:t>
+            </a:r>
+            <a:r>
+              <a:rPr lang="hu-HU" sz="2000" dirty="0"/>
+              <a:t> </a:t>
+            </a:r>
+            <a:r>
+              <a:rPr lang="hu-HU" sz="2000" dirty="0" err="1" smtClean="0"/>
+              <a:t>tasks</a:t>
+            </a:r>
+            <a:r>
+              <a:rPr lang="hu-HU" sz="2000" dirty="0" smtClean="0"/>
+              <a:t>?</a:t>
+            </a:r>
+          </a:p>
+          <a:p>
+            <a:r>
+              <a:rPr lang="hu-HU" sz="2000" dirty="0" err="1" smtClean="0"/>
+              <a:t>Reason</a:t>
+            </a:r>
+            <a:r>
+              <a:rPr lang="hu-HU" sz="2000" dirty="0" smtClean="0"/>
+              <a:t> 2: </a:t>
+            </a:r>
+            <a:r>
+              <a:rPr lang="hu-HU" sz="2000" b="1" dirty="0" err="1" smtClean="0"/>
+              <a:t>reliability</a:t>
+            </a:r>
+            <a:endParaRPr lang="hu-HU" sz="2000" b="1" dirty="0" smtClean="0"/>
+          </a:p>
+          <a:p>
+            <a:pPr lvl="1"/>
+            <a:r>
+              <a:rPr lang="hu-HU" sz="1600" dirty="0" smtClean="0"/>
+              <a:t>an </a:t>
+            </a:r>
+            <a:r>
+              <a:rPr lang="hu-HU" sz="1600" dirty="0" err="1" smtClean="0"/>
+              <a:t>encoder</a:t>
+            </a:r>
+            <a:r>
+              <a:rPr lang="hu-HU" sz="1600" dirty="0" smtClean="0"/>
+              <a:t> </a:t>
+            </a:r>
+            <a:r>
+              <a:rPr lang="hu-HU" sz="1600" dirty="0" err="1" smtClean="0"/>
+              <a:t>transformer</a:t>
+            </a:r>
+            <a:r>
+              <a:rPr lang="hu-HU" sz="1600" dirty="0" smtClean="0"/>
+              <a:t> </a:t>
+            </a:r>
+            <a:r>
+              <a:rPr lang="hu-HU" sz="1600" dirty="0" err="1" smtClean="0"/>
+              <a:t>outputs</a:t>
+            </a:r>
+            <a:r>
+              <a:rPr lang="hu-HU" sz="1600" dirty="0" smtClean="0"/>
+              <a:t> a </a:t>
+            </a:r>
+            <a:r>
+              <a:rPr lang="hu-HU" sz="1600" b="1" dirty="0" err="1" smtClean="0"/>
+              <a:t>single</a:t>
+            </a:r>
+            <a:r>
+              <a:rPr lang="hu-HU" sz="1600" b="1" dirty="0" smtClean="0"/>
+              <a:t> </a:t>
+            </a:r>
+            <a:r>
+              <a:rPr lang="hu-HU" sz="1600" b="1" dirty="0" err="1" smtClean="0"/>
+              <a:t>real</a:t>
+            </a:r>
+            <a:r>
+              <a:rPr lang="hu-HU" sz="1600" b="1" dirty="0" smtClean="0"/>
+              <a:t> </a:t>
+            </a:r>
+            <a:r>
+              <a:rPr lang="hu-HU" sz="1600" b="1" dirty="0" err="1" smtClean="0"/>
+              <a:t>number</a:t>
+            </a:r>
+            <a:r>
+              <a:rPr lang="hu-HU" sz="1600" b="1" dirty="0" smtClean="0"/>
+              <a:t> </a:t>
+            </a:r>
+            <a:r>
+              <a:rPr lang="hu-HU" sz="1600" dirty="0" err="1" smtClean="0"/>
+              <a:t>when</a:t>
+            </a:r>
+            <a:r>
+              <a:rPr lang="hu-HU" sz="1600" dirty="0" smtClean="0"/>
+              <a:t> </a:t>
+            </a:r>
+            <a:r>
+              <a:rPr lang="hu-HU" sz="1600" dirty="0" err="1" smtClean="0"/>
+              <a:t>doing</a:t>
+            </a:r>
+            <a:r>
+              <a:rPr lang="hu-HU" sz="1600" dirty="0" smtClean="0"/>
+              <a:t> </a:t>
+            </a:r>
+            <a:r>
+              <a:rPr lang="hu-HU" sz="1600" dirty="0" err="1" smtClean="0"/>
+              <a:t>binary</a:t>
+            </a:r>
+            <a:r>
+              <a:rPr lang="hu-HU" sz="1600" dirty="0" smtClean="0"/>
+              <a:t> </a:t>
+            </a:r>
+            <a:r>
+              <a:rPr lang="hu-HU" sz="1600" dirty="0" err="1" smtClean="0"/>
+              <a:t>classification</a:t>
+            </a:r>
+            <a:r>
+              <a:rPr lang="hu-HU" sz="1600" dirty="0" smtClean="0"/>
+              <a:t> </a:t>
+            </a:r>
+            <a:r>
+              <a:rPr lang="hu-HU" sz="1600" dirty="0" err="1" smtClean="0"/>
+              <a:t>or</a:t>
+            </a:r>
+            <a:r>
+              <a:rPr lang="hu-HU" sz="1600" dirty="0" smtClean="0"/>
+              <a:t> </a:t>
+            </a:r>
+            <a:r>
+              <a:rPr lang="hu-HU" sz="1600" dirty="0" err="1" smtClean="0"/>
+              <a:t>a</a:t>
+            </a:r>
+            <a:r>
+              <a:rPr lang="hu-HU" sz="1600" dirty="0" smtClean="0"/>
+              <a:t> </a:t>
+            </a:r>
+            <a:r>
+              <a:rPr lang="hu-HU" sz="1600" dirty="0" err="1" smtClean="0"/>
+              <a:t>single</a:t>
+            </a:r>
+            <a:r>
+              <a:rPr lang="hu-HU" sz="1600" dirty="0" smtClean="0"/>
+              <a:t> </a:t>
+            </a:r>
+            <a:r>
+              <a:rPr lang="hu-HU" sz="1600" b="1" dirty="0" err="1" smtClean="0"/>
+              <a:t>real-valued</a:t>
+            </a:r>
+            <a:r>
+              <a:rPr lang="hu-HU" sz="1600" b="1" dirty="0" smtClean="0"/>
+              <a:t> </a:t>
+            </a:r>
+            <a:r>
+              <a:rPr lang="hu-HU" sz="1600" b="1" i="1" dirty="0" err="1" smtClean="0"/>
+              <a:t>k</a:t>
+            </a:r>
+            <a:r>
+              <a:rPr lang="hu-HU" sz="1600" b="1" dirty="0" err="1" smtClean="0"/>
+              <a:t>-dimensional</a:t>
+            </a:r>
+            <a:r>
+              <a:rPr lang="hu-HU" sz="1600" b="1" dirty="0" smtClean="0"/>
+              <a:t> </a:t>
+            </a:r>
+            <a:r>
+              <a:rPr lang="hu-HU" sz="1600" b="1" dirty="0" err="1" smtClean="0"/>
+              <a:t>numeric</a:t>
+            </a:r>
+            <a:r>
+              <a:rPr lang="hu-HU" sz="1600" b="1" dirty="0" smtClean="0"/>
+              <a:t> </a:t>
+            </a:r>
+            <a:r>
+              <a:rPr lang="hu-HU" sz="1600" b="1" dirty="0" err="1" smtClean="0"/>
+              <a:t>vector</a:t>
+            </a:r>
+            <a:r>
+              <a:rPr lang="hu-HU" sz="1600" b="1" dirty="0" smtClean="0"/>
+              <a:t> </a:t>
+            </a:r>
+            <a:r>
+              <a:rPr lang="hu-HU" sz="1600" dirty="0" err="1" smtClean="0"/>
+              <a:t>for</a:t>
+            </a:r>
+            <a:r>
+              <a:rPr lang="hu-HU" sz="1600" dirty="0" smtClean="0"/>
+              <a:t> </a:t>
+            </a:r>
+            <a:r>
+              <a:rPr lang="hu-HU" sz="1600" dirty="0" err="1" smtClean="0"/>
+              <a:t>classification</a:t>
+            </a:r>
+            <a:r>
+              <a:rPr lang="hu-HU" sz="1600" dirty="0" smtClean="0"/>
+              <a:t> </a:t>
+            </a:r>
+            <a:r>
+              <a:rPr lang="hu-HU" sz="1600" dirty="0" err="1" smtClean="0"/>
+              <a:t>into</a:t>
+            </a:r>
+            <a:r>
+              <a:rPr lang="hu-HU" sz="1600" dirty="0" smtClean="0"/>
+              <a:t> </a:t>
+            </a:r>
+            <a:r>
+              <a:rPr lang="hu-HU" sz="1600" i="1" dirty="0" smtClean="0"/>
+              <a:t>k </a:t>
+            </a:r>
+            <a:r>
+              <a:rPr lang="hu-HU" sz="1600" dirty="0" err="1" smtClean="0"/>
+              <a:t>classes</a:t>
+            </a:r>
+            <a:endParaRPr lang="hu-HU" sz="1600" dirty="0" smtClean="0"/>
+          </a:p>
+          <a:p>
+            <a:pPr lvl="2"/>
+            <a:r>
+              <a:rPr lang="hu-HU" sz="1400" dirty="0" err="1" smtClean="0"/>
+              <a:t>these</a:t>
+            </a:r>
+            <a:r>
+              <a:rPr lang="hu-HU" sz="1400" dirty="0" smtClean="0"/>
+              <a:t> </a:t>
+            </a:r>
+            <a:r>
+              <a:rPr lang="hu-HU" sz="1400" dirty="0" err="1" smtClean="0"/>
+              <a:t>numeric</a:t>
+            </a:r>
+            <a:r>
+              <a:rPr lang="hu-HU" sz="1400" dirty="0" smtClean="0"/>
+              <a:t> </a:t>
+            </a:r>
+            <a:r>
+              <a:rPr lang="hu-HU" sz="1400" dirty="0" err="1" smtClean="0"/>
+              <a:t>values</a:t>
+            </a:r>
+            <a:r>
+              <a:rPr lang="hu-HU" sz="1400" dirty="0" smtClean="0"/>
+              <a:t> </a:t>
+            </a:r>
+            <a:r>
+              <a:rPr lang="hu-HU" sz="1400" dirty="0" err="1" smtClean="0"/>
+              <a:t>always</a:t>
+            </a:r>
+            <a:r>
+              <a:rPr lang="hu-HU" sz="1400" dirty="0" smtClean="0"/>
+              <a:t> </a:t>
+            </a:r>
+            <a:r>
+              <a:rPr lang="hu-HU" sz="1400" dirty="0" err="1" smtClean="0"/>
+              <a:t>fall</a:t>
+            </a:r>
+            <a:r>
+              <a:rPr lang="hu-HU" sz="1400" dirty="0" smtClean="0"/>
+              <a:t> </a:t>
+            </a:r>
+            <a:r>
+              <a:rPr lang="hu-HU" sz="1400" dirty="0" err="1" smtClean="0"/>
+              <a:t>between</a:t>
+            </a:r>
+            <a:r>
+              <a:rPr lang="hu-HU" sz="1400" dirty="0" smtClean="0"/>
+              <a:t> 0 and 1, and </a:t>
+            </a:r>
+            <a:r>
+              <a:rPr lang="hu-HU" sz="1400" b="1" dirty="0" err="1" smtClean="0"/>
+              <a:t>can</a:t>
+            </a:r>
+            <a:r>
+              <a:rPr lang="hu-HU" sz="1400" b="1" dirty="0" smtClean="0"/>
+              <a:t> be </a:t>
+            </a:r>
+            <a:r>
+              <a:rPr lang="hu-HU" sz="1400" b="1" dirty="0" err="1" smtClean="0"/>
+              <a:t>interpreted</a:t>
+            </a:r>
+            <a:r>
+              <a:rPr lang="hu-HU" sz="1400" b="1" dirty="0" smtClean="0"/>
+              <a:t> </a:t>
+            </a:r>
+            <a:r>
+              <a:rPr lang="hu-HU" sz="1400" b="1" dirty="0" err="1" smtClean="0"/>
+              <a:t>as</a:t>
+            </a:r>
+            <a:r>
+              <a:rPr lang="hu-HU" sz="1400" b="1" dirty="0" smtClean="0"/>
+              <a:t> a </a:t>
+            </a:r>
+            <a:r>
+              <a:rPr lang="hu-HU" sz="1400" b="1" dirty="0" err="1" smtClean="0"/>
+              <a:t>probability</a:t>
+            </a:r>
+            <a:r>
+              <a:rPr lang="hu-HU" sz="1400" b="1" dirty="0" smtClean="0"/>
+              <a:t> </a:t>
+            </a:r>
+            <a:r>
+              <a:rPr lang="hu-HU" sz="1400" b="1" dirty="0" err="1" smtClean="0"/>
+              <a:t>or</a:t>
+            </a:r>
+            <a:r>
+              <a:rPr lang="hu-HU" sz="1400" b="1" dirty="0" smtClean="0"/>
+              <a:t> </a:t>
+            </a:r>
+            <a:r>
+              <a:rPr lang="hu-HU" sz="1400" b="1" dirty="0" err="1" smtClean="0"/>
+              <a:t>a</a:t>
+            </a:r>
+            <a:r>
+              <a:rPr lang="hu-HU" sz="1400" b="1" dirty="0" smtClean="0"/>
+              <a:t> </a:t>
+            </a:r>
+            <a:r>
+              <a:rPr lang="hu-HU" sz="1400" b="1" dirty="0" err="1" smtClean="0"/>
+              <a:t>confidence</a:t>
+            </a:r>
+            <a:r>
+              <a:rPr lang="hu-HU" sz="1400" b="1" dirty="0" smtClean="0"/>
+              <a:t> </a:t>
+            </a:r>
+            <a:r>
+              <a:rPr lang="hu-HU" sz="1400" b="1" dirty="0" err="1" smtClean="0"/>
+              <a:t>score</a:t>
+            </a:r>
+            <a:r>
+              <a:rPr lang="hu-HU" sz="1400" b="1" dirty="0" smtClean="0"/>
+              <a:t> </a:t>
+            </a:r>
+            <a:r>
+              <a:rPr lang="hu-HU" sz="1400" dirty="0" err="1" smtClean="0"/>
+              <a:t>that</a:t>
+            </a:r>
+            <a:r>
+              <a:rPr lang="hu-HU" sz="1400" dirty="0" smtClean="0"/>
+              <a:t> </a:t>
+            </a:r>
+            <a:r>
+              <a:rPr lang="hu-HU" sz="1400" dirty="0" err="1" smtClean="0"/>
+              <a:t>expresses</a:t>
+            </a:r>
+            <a:r>
+              <a:rPr lang="hu-HU" sz="1400" dirty="0" smtClean="0"/>
+              <a:t> </a:t>
+            </a:r>
+            <a:r>
+              <a:rPr lang="hu-HU" sz="1400" dirty="0" err="1" smtClean="0"/>
+              <a:t>how</a:t>
+            </a:r>
+            <a:r>
+              <a:rPr lang="hu-HU" sz="1400" dirty="0" smtClean="0"/>
+              <a:t> </a:t>
+            </a:r>
+            <a:r>
+              <a:rPr lang="hu-HU" sz="1400" dirty="0" err="1" smtClean="0"/>
+              <a:t>confident</a:t>
+            </a:r>
+            <a:r>
+              <a:rPr lang="hu-HU" sz="1400" dirty="0" smtClean="0"/>
+              <a:t> </a:t>
+            </a:r>
+            <a:r>
+              <a:rPr lang="hu-HU" sz="1400" dirty="0" err="1" smtClean="0"/>
+              <a:t>the</a:t>
+            </a:r>
+            <a:r>
+              <a:rPr lang="hu-HU" sz="1400" dirty="0" smtClean="0"/>
+              <a:t> </a:t>
+            </a:r>
+            <a:r>
+              <a:rPr lang="hu-HU" sz="1400" dirty="0" err="1" smtClean="0"/>
+              <a:t>model</a:t>
+            </a:r>
+            <a:r>
+              <a:rPr lang="hu-HU" sz="1400" dirty="0" smtClean="0"/>
+              <a:t> is </a:t>
+            </a:r>
+            <a:r>
+              <a:rPr lang="hu-HU" sz="1400" dirty="0" err="1" smtClean="0"/>
+              <a:t>in</a:t>
+            </a:r>
+            <a:r>
+              <a:rPr lang="hu-HU" sz="1400" dirty="0" smtClean="0"/>
+              <a:t> </a:t>
+            </a:r>
+            <a:r>
+              <a:rPr lang="hu-HU" sz="1400" dirty="0" err="1" smtClean="0"/>
+              <a:t>assigning</a:t>
+            </a:r>
+            <a:r>
+              <a:rPr lang="hu-HU" sz="1400" dirty="0" smtClean="0"/>
+              <a:t> </a:t>
+            </a:r>
+            <a:r>
+              <a:rPr lang="hu-HU" sz="1400" dirty="0" err="1" smtClean="0"/>
+              <a:t>that</a:t>
+            </a:r>
+            <a:r>
+              <a:rPr lang="hu-HU" sz="1400" dirty="0" smtClean="0"/>
+              <a:t> </a:t>
+            </a:r>
+            <a:r>
+              <a:rPr lang="hu-HU" sz="1400" dirty="0" err="1" smtClean="0"/>
+              <a:t>label</a:t>
+            </a:r>
+            <a:r>
+              <a:rPr lang="hu-HU" sz="1400" dirty="0" smtClean="0"/>
+              <a:t> </a:t>
+            </a:r>
+            <a:r>
+              <a:rPr lang="hu-HU" sz="1400" dirty="0" err="1" smtClean="0"/>
+              <a:t>to</a:t>
+            </a:r>
+            <a:r>
+              <a:rPr lang="hu-HU" sz="1400" dirty="0" smtClean="0"/>
+              <a:t> </a:t>
+            </a:r>
+            <a:r>
+              <a:rPr lang="hu-HU" sz="1400" dirty="0" err="1" smtClean="0"/>
+              <a:t>the</a:t>
+            </a:r>
+            <a:r>
+              <a:rPr lang="hu-HU" sz="1400" dirty="0" smtClean="0"/>
+              <a:t> input</a:t>
+            </a:r>
+          </a:p>
+          <a:p>
+            <a:pPr lvl="1"/>
+            <a:r>
+              <a:rPr lang="hu-HU" sz="1600" dirty="0" smtClean="0"/>
+              <a:t>a </a:t>
+            </a:r>
+            <a:r>
+              <a:rPr lang="hu-HU" sz="1600" dirty="0" err="1" smtClean="0"/>
+              <a:t>generative</a:t>
+            </a:r>
+            <a:r>
+              <a:rPr lang="hu-HU" sz="1600" dirty="0" smtClean="0"/>
+              <a:t> LM </a:t>
+            </a:r>
+            <a:r>
+              <a:rPr lang="hu-HU" sz="1600" b="1" dirty="0" err="1" smtClean="0"/>
+              <a:t>never</a:t>
+            </a:r>
+            <a:r>
+              <a:rPr lang="hu-HU" sz="1600" b="1" dirty="0" smtClean="0"/>
+              <a:t> </a:t>
+            </a:r>
+            <a:r>
+              <a:rPr lang="hu-HU" sz="1600" b="1" dirty="0" err="1" smtClean="0"/>
+              <a:t>calculates</a:t>
+            </a:r>
+            <a:r>
+              <a:rPr lang="hu-HU" sz="1600" b="1" dirty="0" smtClean="0"/>
+              <a:t> a </a:t>
+            </a:r>
+            <a:r>
+              <a:rPr lang="hu-HU" sz="1600" b="1" dirty="0" err="1" smtClean="0"/>
+              <a:t>label</a:t>
+            </a:r>
+            <a:r>
+              <a:rPr lang="hu-HU" sz="1600" dirty="0" smtClean="0"/>
+              <a:t>, </a:t>
+            </a:r>
+            <a:r>
+              <a:rPr lang="hu-HU" sz="1600" dirty="0" err="1" smtClean="0"/>
+              <a:t>it</a:t>
+            </a:r>
+            <a:r>
+              <a:rPr lang="hu-HU" sz="1600" dirty="0" smtClean="0"/>
+              <a:t> </a:t>
+            </a:r>
+            <a:r>
+              <a:rPr lang="hu-HU" sz="1600" b="1" dirty="0" err="1" smtClean="0"/>
+              <a:t>generates</a:t>
+            </a:r>
+            <a:r>
+              <a:rPr lang="hu-HU" sz="1600" b="1" dirty="0" smtClean="0"/>
+              <a:t> </a:t>
+            </a:r>
+            <a:r>
+              <a:rPr lang="hu-HU" sz="1600" b="1" dirty="0" err="1" smtClean="0"/>
+              <a:t>free-form</a:t>
+            </a:r>
+            <a:r>
+              <a:rPr lang="hu-HU" sz="1600" b="1" dirty="0" smtClean="0"/>
+              <a:t> text</a:t>
+            </a:r>
+            <a:r>
+              <a:rPr lang="hu-HU" sz="1600" dirty="0" smtClean="0"/>
+              <a:t>, and </a:t>
+            </a:r>
+            <a:r>
+              <a:rPr lang="hu-HU" sz="1600" dirty="0" err="1" smtClean="0"/>
+              <a:t>there</a:t>
+            </a:r>
+            <a:r>
+              <a:rPr lang="hu-HU" sz="1600" dirty="0" smtClean="0"/>
+              <a:t> </a:t>
+            </a:r>
+            <a:r>
+              <a:rPr lang="hu-HU" sz="1600" dirty="0" err="1" smtClean="0"/>
+              <a:t>can</a:t>
+            </a:r>
+            <a:r>
+              <a:rPr lang="hu-HU" sz="1600" dirty="0" smtClean="0"/>
+              <a:t> be </a:t>
+            </a:r>
+            <a:r>
+              <a:rPr lang="hu-HU" sz="1600" b="1" dirty="0" smtClean="0"/>
+              <a:t>no </a:t>
+            </a:r>
+            <a:r>
+              <a:rPr lang="hu-HU" sz="1600" b="1" dirty="0" err="1" smtClean="0"/>
+              <a:t>guarantee</a:t>
+            </a:r>
+            <a:r>
+              <a:rPr lang="hu-HU" sz="1600" b="1" dirty="0" smtClean="0"/>
+              <a:t> </a:t>
+            </a:r>
+            <a:r>
+              <a:rPr lang="hu-HU" sz="1600" b="1" dirty="0" err="1" smtClean="0"/>
+              <a:t>that</a:t>
+            </a:r>
+            <a:r>
+              <a:rPr lang="hu-HU" sz="1600" b="1" dirty="0" smtClean="0"/>
+              <a:t> </a:t>
+            </a:r>
+            <a:r>
+              <a:rPr lang="hu-HU" sz="1600" b="1" dirty="0" err="1" smtClean="0"/>
+              <a:t>the</a:t>
+            </a:r>
+            <a:r>
+              <a:rPr lang="hu-HU" sz="1600" b="1" dirty="0" smtClean="0"/>
+              <a:t> text being </a:t>
+            </a:r>
+            <a:r>
+              <a:rPr lang="hu-HU" sz="1600" b="1" dirty="0" err="1" smtClean="0"/>
+              <a:t>generated</a:t>
+            </a:r>
+            <a:r>
+              <a:rPr lang="hu-HU" sz="1600" b="1" dirty="0" smtClean="0"/>
+              <a:t> </a:t>
+            </a:r>
+            <a:r>
+              <a:rPr lang="hu-HU" sz="1600" b="1" dirty="0" err="1" smtClean="0"/>
+              <a:t>contains</a:t>
+            </a:r>
+            <a:r>
+              <a:rPr lang="hu-HU" sz="1600" b="1" dirty="0" smtClean="0"/>
+              <a:t> </a:t>
+            </a:r>
+            <a:r>
+              <a:rPr lang="hu-HU" sz="1600" b="1" dirty="0" err="1" smtClean="0"/>
+              <a:t>the</a:t>
+            </a:r>
+            <a:r>
+              <a:rPr lang="hu-HU" sz="1600" b="1" dirty="0" smtClean="0"/>
+              <a:t> </a:t>
+            </a:r>
+            <a:r>
+              <a:rPr lang="hu-HU" sz="1600" b="1" dirty="0" err="1" smtClean="0"/>
+              <a:t>solution</a:t>
+            </a:r>
+            <a:r>
+              <a:rPr lang="hu-HU" sz="1600" b="1" dirty="0" smtClean="0"/>
+              <a:t> </a:t>
+            </a:r>
+            <a:r>
+              <a:rPr lang="hu-HU" sz="1600" b="1" dirty="0" err="1" smtClean="0"/>
+              <a:t>to</a:t>
+            </a:r>
+            <a:r>
+              <a:rPr lang="hu-HU" sz="1600" b="1" dirty="0" smtClean="0"/>
+              <a:t> </a:t>
+            </a:r>
+            <a:r>
+              <a:rPr lang="hu-HU" sz="1600" b="1" dirty="0" err="1" smtClean="0"/>
+              <a:t>the</a:t>
+            </a:r>
+            <a:r>
+              <a:rPr lang="hu-HU" sz="1600" b="1" dirty="0" smtClean="0"/>
+              <a:t> </a:t>
+            </a:r>
+            <a:r>
+              <a:rPr lang="hu-HU" sz="1600" b="1" dirty="0" err="1" smtClean="0"/>
+              <a:t>task</a:t>
+            </a:r>
+            <a:r>
+              <a:rPr lang="hu-HU" sz="1600" dirty="0" smtClean="0"/>
+              <a:t>, </a:t>
+            </a:r>
+            <a:r>
+              <a:rPr lang="hu-HU" sz="1600" dirty="0" err="1" smtClean="0"/>
+              <a:t>e.g</a:t>
+            </a:r>
+            <a:r>
+              <a:rPr lang="hu-HU" sz="1600" dirty="0" smtClean="0"/>
+              <a:t>. </a:t>
+            </a:r>
+            <a:r>
+              <a:rPr lang="hu-HU" sz="1600" dirty="0" err="1" smtClean="0"/>
+              <a:t>the</a:t>
+            </a:r>
+            <a:r>
+              <a:rPr lang="hu-HU" sz="1600" dirty="0" smtClean="0"/>
+              <a:t> </a:t>
+            </a:r>
+            <a:r>
+              <a:rPr lang="hu-HU" sz="1600" dirty="0" err="1" smtClean="0"/>
+              <a:t>class</a:t>
+            </a:r>
+            <a:r>
+              <a:rPr lang="hu-HU" sz="1600" dirty="0" smtClean="0"/>
+              <a:t> </a:t>
+            </a:r>
+            <a:r>
+              <a:rPr lang="hu-HU" sz="1600" dirty="0" err="1" smtClean="0"/>
+              <a:t>label</a:t>
+            </a:r>
+            <a:endParaRPr lang="hu-HU" sz="1600" dirty="0" smtClean="0"/>
+          </a:p>
+          <a:p>
+            <a:pPr lvl="2"/>
+            <a:r>
+              <a:rPr lang="hu-HU" sz="1400" dirty="0" err="1" smtClean="0"/>
+              <a:t>the</a:t>
+            </a:r>
+            <a:r>
+              <a:rPr lang="hu-HU" sz="1400" dirty="0" smtClean="0"/>
+              <a:t> </a:t>
+            </a:r>
+            <a:r>
+              <a:rPr lang="hu-HU" sz="1400" dirty="0" err="1" smtClean="0"/>
+              <a:t>answer</a:t>
+            </a:r>
+            <a:r>
+              <a:rPr lang="hu-HU" sz="1400" dirty="0" smtClean="0"/>
+              <a:t> </a:t>
+            </a:r>
+            <a:r>
+              <a:rPr lang="hu-HU" sz="1400" b="1" dirty="0" err="1" smtClean="0"/>
+              <a:t>might</a:t>
+            </a:r>
+            <a:r>
+              <a:rPr lang="hu-HU" sz="1400" dirty="0" smtClean="0"/>
+              <a:t> </a:t>
+            </a:r>
+            <a:r>
+              <a:rPr lang="hu-HU" sz="1400" dirty="0" err="1" smtClean="0"/>
+              <a:t>contain</a:t>
+            </a:r>
+            <a:r>
+              <a:rPr lang="hu-HU" sz="1400" dirty="0" smtClean="0"/>
+              <a:t> </a:t>
+            </a:r>
+            <a:r>
+              <a:rPr lang="hu-HU" sz="1400" dirty="0" err="1" smtClean="0"/>
+              <a:t>the</a:t>
+            </a:r>
+            <a:r>
+              <a:rPr lang="hu-HU" sz="1400" dirty="0" smtClean="0"/>
+              <a:t> </a:t>
+            </a:r>
+            <a:r>
+              <a:rPr lang="hu-HU" sz="1400" dirty="0" err="1" smtClean="0"/>
+              <a:t>class</a:t>
+            </a:r>
+            <a:r>
+              <a:rPr lang="hu-HU" sz="1400" dirty="0" smtClean="0"/>
+              <a:t> </a:t>
+            </a:r>
+            <a:r>
+              <a:rPr lang="hu-HU" sz="1400" dirty="0" err="1" smtClean="0"/>
+              <a:t>label</a:t>
+            </a:r>
+            <a:r>
+              <a:rPr lang="hu-HU" sz="1400" dirty="0" smtClean="0"/>
+              <a:t> </a:t>
+            </a:r>
+            <a:r>
+              <a:rPr lang="hu-HU" sz="1400" dirty="0" err="1" smtClean="0"/>
+              <a:t>somewhere</a:t>
+            </a:r>
+            <a:r>
+              <a:rPr lang="hu-HU" sz="1400" dirty="0" smtClean="0"/>
+              <a:t> </a:t>
+            </a:r>
+            <a:r>
+              <a:rPr lang="hu-HU" sz="1400" b="1" dirty="0" err="1" smtClean="0"/>
+              <a:t>along</a:t>
+            </a:r>
+            <a:r>
+              <a:rPr lang="hu-HU" sz="1400" b="1" dirty="0" smtClean="0"/>
+              <a:t> </a:t>
+            </a:r>
+            <a:r>
+              <a:rPr lang="hu-HU" sz="1400" b="1" dirty="0" err="1" smtClean="0"/>
+              <a:t>with</a:t>
+            </a:r>
+            <a:r>
+              <a:rPr lang="hu-HU" sz="1400" b="1" dirty="0" smtClean="0"/>
+              <a:t> </a:t>
+            </a:r>
+            <a:r>
+              <a:rPr lang="hu-HU" sz="1400" b="1" dirty="0" err="1" smtClean="0"/>
+              <a:t>other</a:t>
+            </a:r>
+            <a:r>
+              <a:rPr lang="hu-HU" sz="1400" b="1" dirty="0" smtClean="0"/>
+              <a:t> </a:t>
+            </a:r>
+            <a:r>
+              <a:rPr lang="hu-HU" sz="1400" b="1" dirty="0" err="1" smtClean="0"/>
+              <a:t>junk</a:t>
+            </a:r>
+            <a:r>
+              <a:rPr lang="hu-HU" sz="1400" b="1" dirty="0" smtClean="0"/>
+              <a:t> </a:t>
+            </a:r>
+            <a:r>
+              <a:rPr lang="hu-HU" sz="1400" i="1" dirty="0" smtClean="0"/>
+              <a:t>(Of </a:t>
+            </a:r>
+            <a:r>
+              <a:rPr lang="hu-HU" sz="1400" i="1" dirty="0" err="1" smtClean="0"/>
+              <a:t>course</a:t>
+            </a:r>
+            <a:r>
+              <a:rPr lang="hu-HU" sz="1400" i="1" dirty="0" smtClean="0"/>
+              <a:t>. I </a:t>
+            </a:r>
+            <a:r>
+              <a:rPr lang="hu-HU" sz="1400" i="1" dirty="0" err="1" smtClean="0"/>
+              <a:t>will</a:t>
+            </a:r>
+            <a:r>
+              <a:rPr lang="hu-HU" sz="1400" i="1" dirty="0" smtClean="0"/>
+              <a:t> </a:t>
+            </a:r>
+            <a:r>
+              <a:rPr lang="hu-HU" sz="1400" i="1" dirty="0" err="1" smtClean="0"/>
+              <a:t>gladly</a:t>
+            </a:r>
+            <a:r>
+              <a:rPr lang="hu-HU" sz="1400" i="1" dirty="0" smtClean="0"/>
+              <a:t> </a:t>
+            </a:r>
+            <a:r>
+              <a:rPr lang="hu-HU" sz="1400" i="1" dirty="0" err="1" smtClean="0"/>
+              <a:t>help</a:t>
+            </a:r>
+            <a:r>
+              <a:rPr lang="hu-HU" sz="1400" i="1" dirty="0" smtClean="0"/>
+              <a:t> </a:t>
+            </a:r>
+            <a:r>
+              <a:rPr lang="hu-HU" sz="1400" i="1" dirty="0" err="1" smtClean="0"/>
+              <a:t>you</a:t>
+            </a:r>
+            <a:r>
+              <a:rPr lang="hu-HU" sz="1400" i="1" dirty="0" smtClean="0"/>
+              <a:t> </a:t>
+            </a:r>
+            <a:r>
+              <a:rPr lang="hu-HU" sz="1400" i="1" dirty="0" err="1" smtClean="0"/>
+              <a:t>with</a:t>
+            </a:r>
+            <a:r>
+              <a:rPr lang="hu-HU" sz="1400" i="1" dirty="0" smtClean="0"/>
+              <a:t> </a:t>
+            </a:r>
+            <a:r>
+              <a:rPr lang="hu-HU" sz="1400" i="1" dirty="0" err="1" smtClean="0"/>
+              <a:t>this</a:t>
+            </a:r>
+            <a:r>
+              <a:rPr lang="hu-HU" sz="1400" i="1" dirty="0" smtClean="0"/>
+              <a:t>. The </a:t>
+            </a:r>
+            <a:r>
+              <a:rPr lang="hu-HU" sz="1400" i="1" dirty="0" err="1" smtClean="0"/>
+              <a:t>sentence</a:t>
+            </a:r>
+            <a:r>
+              <a:rPr lang="hu-HU" sz="1400" i="1" dirty="0" smtClean="0"/>
+              <a:t> ... </a:t>
+            </a:r>
+            <a:r>
+              <a:rPr lang="hu-HU" sz="1400" i="1" dirty="0" err="1" smtClean="0"/>
+              <a:t>expresses</a:t>
+            </a:r>
+            <a:r>
+              <a:rPr lang="hu-HU" sz="1400" i="1" dirty="0" smtClean="0"/>
+              <a:t> a </a:t>
+            </a:r>
+            <a:r>
+              <a:rPr lang="hu-HU" sz="1400" i="1" u="sng" dirty="0" err="1" smtClean="0"/>
+              <a:t>positive</a:t>
+            </a:r>
+            <a:r>
+              <a:rPr lang="hu-HU" sz="1400" i="1" dirty="0" smtClean="0"/>
+              <a:t> </a:t>
+            </a:r>
+            <a:r>
+              <a:rPr lang="hu-HU" sz="1400" i="1" dirty="0" err="1" smtClean="0"/>
+              <a:t>sentiment</a:t>
+            </a:r>
+            <a:r>
+              <a:rPr lang="hu-HU" sz="1400" i="1" dirty="0" smtClean="0"/>
+              <a:t>.)</a:t>
+            </a:r>
+          </a:p>
+          <a:p>
+            <a:pPr lvl="2"/>
+            <a:r>
+              <a:rPr lang="hu-HU" sz="1400" dirty="0" err="1" smtClean="0"/>
+              <a:t>it</a:t>
+            </a:r>
+            <a:r>
+              <a:rPr lang="hu-HU" sz="1400" dirty="0" smtClean="0"/>
+              <a:t> </a:t>
+            </a:r>
+            <a:r>
+              <a:rPr lang="hu-HU" sz="1400" dirty="0" err="1" smtClean="0"/>
+              <a:t>might</a:t>
+            </a:r>
+            <a:r>
+              <a:rPr lang="hu-HU" sz="1400" dirty="0" smtClean="0"/>
+              <a:t> </a:t>
+            </a:r>
+            <a:r>
+              <a:rPr lang="hu-HU" sz="1400" dirty="0" err="1" smtClean="0"/>
+              <a:t>contain</a:t>
+            </a:r>
+            <a:r>
+              <a:rPr lang="hu-HU" sz="1400" dirty="0" smtClean="0"/>
+              <a:t> a </a:t>
+            </a:r>
+            <a:r>
+              <a:rPr lang="hu-HU" sz="1400" dirty="0" err="1" smtClean="0"/>
+              <a:t>solution</a:t>
+            </a:r>
+            <a:r>
+              <a:rPr lang="hu-HU" sz="1400" dirty="0" smtClean="0"/>
+              <a:t> </a:t>
+            </a:r>
+            <a:r>
+              <a:rPr lang="hu-HU" sz="1400" dirty="0" err="1" smtClean="0"/>
+              <a:t>to</a:t>
+            </a:r>
+            <a:r>
+              <a:rPr lang="hu-HU" sz="1400" dirty="0" smtClean="0"/>
+              <a:t> </a:t>
+            </a:r>
+            <a:r>
+              <a:rPr lang="hu-HU" sz="1400" dirty="0" err="1" smtClean="0"/>
+              <a:t>the</a:t>
+            </a:r>
+            <a:r>
+              <a:rPr lang="hu-HU" sz="1400" dirty="0" smtClean="0"/>
+              <a:t> </a:t>
+            </a:r>
+            <a:r>
+              <a:rPr lang="hu-HU" sz="1400" dirty="0" err="1" smtClean="0"/>
+              <a:t>problem</a:t>
+            </a:r>
+            <a:r>
+              <a:rPr lang="hu-HU" sz="1400" dirty="0" smtClean="0"/>
+              <a:t>, </a:t>
+            </a:r>
+            <a:r>
+              <a:rPr lang="hu-HU" sz="1400" dirty="0" err="1" smtClean="0"/>
+              <a:t>but</a:t>
+            </a:r>
+            <a:r>
+              <a:rPr lang="hu-HU" sz="1400" dirty="0" smtClean="0"/>
+              <a:t> </a:t>
+            </a:r>
+            <a:r>
+              <a:rPr lang="hu-HU" sz="1400" b="1" dirty="0" err="1" smtClean="0"/>
+              <a:t>phrased</a:t>
+            </a:r>
+            <a:r>
+              <a:rPr lang="hu-HU" sz="1400" b="1" dirty="0" smtClean="0"/>
+              <a:t> </a:t>
+            </a:r>
+            <a:r>
+              <a:rPr lang="hu-HU" sz="1400" b="1" dirty="0" err="1" smtClean="0"/>
+              <a:t>in</a:t>
+            </a:r>
+            <a:r>
+              <a:rPr lang="hu-HU" sz="1400" b="1" dirty="0" smtClean="0"/>
+              <a:t> an </a:t>
+            </a:r>
+            <a:r>
+              <a:rPr lang="hu-HU" sz="1400" b="1" dirty="0" err="1" smtClean="0"/>
+              <a:t>unexpected</a:t>
+            </a:r>
+            <a:r>
+              <a:rPr lang="hu-HU" sz="1400" b="1" dirty="0" smtClean="0"/>
+              <a:t> </a:t>
+            </a:r>
+            <a:r>
+              <a:rPr lang="hu-HU" sz="1400" b="1" dirty="0" err="1" smtClean="0"/>
+              <a:t>way</a:t>
+            </a:r>
+            <a:r>
+              <a:rPr lang="hu-HU" sz="1400" b="1" dirty="0" smtClean="0"/>
+              <a:t> </a:t>
+            </a:r>
+            <a:r>
+              <a:rPr lang="hu-HU" sz="1400" i="1" dirty="0" smtClean="0"/>
+              <a:t>(The </a:t>
+            </a:r>
+            <a:r>
+              <a:rPr lang="hu-HU" sz="1400" i="1" dirty="0" err="1" smtClean="0"/>
+              <a:t>sentence</a:t>
+            </a:r>
+            <a:r>
+              <a:rPr lang="hu-HU" sz="1400" i="1" dirty="0" smtClean="0"/>
+              <a:t> </a:t>
+            </a:r>
+            <a:r>
+              <a:rPr lang="hu-HU" sz="1400" i="1" dirty="0" err="1" smtClean="0"/>
+              <a:t>expresses</a:t>
+            </a:r>
+            <a:r>
+              <a:rPr lang="hu-HU" sz="1400" i="1" dirty="0" smtClean="0"/>
+              <a:t> </a:t>
+            </a:r>
+            <a:r>
+              <a:rPr lang="hu-HU" sz="1400" i="1" dirty="0" err="1" smtClean="0"/>
+              <a:t>that</a:t>
+            </a:r>
+            <a:r>
+              <a:rPr lang="hu-HU" sz="1400" i="1" dirty="0" smtClean="0"/>
+              <a:t> </a:t>
+            </a:r>
+            <a:r>
+              <a:rPr lang="hu-HU" sz="1400" i="1" dirty="0" err="1" smtClean="0"/>
+              <a:t>the</a:t>
+            </a:r>
+            <a:r>
+              <a:rPr lang="hu-HU" sz="1400" i="1" dirty="0" smtClean="0"/>
+              <a:t> </a:t>
+            </a:r>
+            <a:r>
+              <a:rPr lang="hu-HU" sz="1400" i="1" dirty="0" err="1" smtClean="0"/>
+              <a:t>customer</a:t>
+            </a:r>
+            <a:r>
+              <a:rPr lang="hu-HU" sz="1400" i="1" dirty="0" smtClean="0"/>
+              <a:t> is </a:t>
+            </a:r>
+            <a:r>
+              <a:rPr lang="hu-HU" sz="1400" i="1" u="sng" dirty="0" err="1" smtClean="0"/>
+              <a:t>pleased</a:t>
+            </a:r>
+            <a:r>
+              <a:rPr lang="hu-HU" sz="1400" i="1" u="sng" dirty="0" smtClean="0"/>
+              <a:t> </a:t>
+            </a:r>
+            <a:r>
+              <a:rPr lang="hu-HU" sz="1400" i="1" u="sng" dirty="0" err="1" smtClean="0"/>
+              <a:t>with</a:t>
+            </a:r>
+            <a:r>
+              <a:rPr lang="hu-HU" sz="1400" i="1" dirty="0" smtClean="0"/>
+              <a:t> </a:t>
+            </a:r>
+            <a:r>
+              <a:rPr lang="hu-HU" sz="1400" i="1" dirty="0" err="1" smtClean="0"/>
+              <a:t>the</a:t>
+            </a:r>
+            <a:r>
+              <a:rPr lang="hu-HU" sz="1400" i="1" dirty="0" smtClean="0"/>
+              <a:t> </a:t>
+            </a:r>
+            <a:r>
+              <a:rPr lang="hu-HU" sz="1400" i="1" dirty="0" err="1" smtClean="0"/>
+              <a:t>product</a:t>
+            </a:r>
+            <a:r>
+              <a:rPr lang="hu-HU" sz="1400" i="1" dirty="0" smtClean="0"/>
+              <a:t>.)</a:t>
+            </a:r>
+          </a:p>
+          <a:p>
+            <a:pPr lvl="2"/>
+            <a:r>
+              <a:rPr lang="hu-HU" sz="1400" dirty="0" err="1" smtClean="0"/>
+              <a:t>it</a:t>
+            </a:r>
+            <a:r>
+              <a:rPr lang="hu-HU" sz="1400" dirty="0" smtClean="0"/>
+              <a:t> </a:t>
+            </a:r>
+            <a:r>
+              <a:rPr lang="hu-HU" sz="1400" dirty="0" err="1" smtClean="0"/>
+              <a:t>might</a:t>
+            </a:r>
+            <a:r>
+              <a:rPr lang="hu-HU" sz="1400" dirty="0" smtClean="0"/>
+              <a:t> </a:t>
+            </a:r>
+            <a:r>
+              <a:rPr lang="hu-HU" sz="1400" b="1" dirty="0" err="1" smtClean="0"/>
+              <a:t>not</a:t>
+            </a:r>
+            <a:r>
+              <a:rPr lang="hu-HU" sz="1400" b="1" dirty="0" smtClean="0"/>
+              <a:t> </a:t>
+            </a:r>
+            <a:r>
+              <a:rPr lang="hu-HU" sz="1400" b="1" dirty="0" err="1" smtClean="0"/>
+              <a:t>contain</a:t>
+            </a:r>
+            <a:r>
+              <a:rPr lang="hu-HU" sz="1400" b="1" dirty="0" smtClean="0"/>
+              <a:t> </a:t>
+            </a:r>
+            <a:r>
+              <a:rPr lang="hu-HU" sz="1400" b="1" dirty="0" err="1" smtClean="0"/>
+              <a:t>the</a:t>
+            </a:r>
+            <a:r>
+              <a:rPr lang="hu-HU" sz="1400" b="1" dirty="0" smtClean="0"/>
+              <a:t> </a:t>
+            </a:r>
+            <a:r>
+              <a:rPr lang="hu-HU" sz="1400" b="1" dirty="0" err="1" smtClean="0"/>
+              <a:t>solution</a:t>
+            </a:r>
+            <a:r>
+              <a:rPr lang="hu-HU" sz="1400" b="1" dirty="0" smtClean="0"/>
+              <a:t> </a:t>
+            </a:r>
+            <a:r>
+              <a:rPr lang="hu-HU" sz="1400" b="1" dirty="0" err="1" smtClean="0"/>
+              <a:t>at</a:t>
+            </a:r>
+            <a:r>
+              <a:rPr lang="hu-HU" sz="1400" b="1" dirty="0" smtClean="0"/>
+              <a:t> </a:t>
+            </a:r>
+            <a:r>
+              <a:rPr lang="hu-HU" sz="1400" b="1" dirty="0" err="1" smtClean="0"/>
+              <a:t>all</a:t>
+            </a:r>
+            <a:r>
+              <a:rPr lang="hu-HU" sz="1400" dirty="0" smtClean="0"/>
+              <a:t>, </a:t>
+            </a:r>
+            <a:r>
+              <a:rPr lang="hu-HU" sz="1400" dirty="0" err="1" smtClean="0"/>
+              <a:t>but</a:t>
+            </a:r>
+            <a:r>
+              <a:rPr lang="hu-HU" sz="1400" dirty="0" smtClean="0"/>
+              <a:t> </a:t>
+            </a:r>
+            <a:r>
+              <a:rPr lang="hu-HU" sz="1400" dirty="0" err="1" smtClean="0"/>
+              <a:t>unrelated</a:t>
+            </a:r>
+            <a:r>
+              <a:rPr lang="hu-HU" sz="1400" dirty="0" smtClean="0"/>
+              <a:t> </a:t>
+            </a:r>
+            <a:r>
+              <a:rPr lang="hu-HU" sz="1400" dirty="0" err="1" smtClean="0"/>
+              <a:t>useless</a:t>
+            </a:r>
+            <a:r>
+              <a:rPr lang="hu-HU" sz="1400" dirty="0" smtClean="0"/>
+              <a:t> output</a:t>
+            </a:r>
+          </a:p>
+          <a:p>
+            <a:pPr lvl="2"/>
+            <a:r>
+              <a:rPr lang="hu-HU" sz="1400" b="1" dirty="0" err="1" smtClean="0"/>
+              <a:t>Confidence</a:t>
+            </a:r>
+            <a:r>
+              <a:rPr lang="hu-HU" sz="1400" b="1" dirty="0" smtClean="0"/>
+              <a:t> is </a:t>
+            </a:r>
+            <a:r>
+              <a:rPr lang="hu-HU" sz="1400" b="1" dirty="0" err="1" smtClean="0"/>
+              <a:t>not</a:t>
+            </a:r>
+            <a:r>
+              <a:rPr lang="hu-HU" sz="1400" b="1" dirty="0" smtClean="0"/>
+              <a:t> </a:t>
+            </a:r>
+            <a:r>
+              <a:rPr lang="hu-HU" sz="1400" b="1" dirty="0" err="1" smtClean="0"/>
+              <a:t>interpretable</a:t>
+            </a:r>
+            <a:r>
+              <a:rPr lang="hu-HU" sz="1400" b="1" dirty="0" smtClean="0"/>
+              <a:t> </a:t>
+            </a:r>
+            <a:r>
+              <a:rPr lang="hu-HU" sz="1400" dirty="0" err="1" smtClean="0"/>
+              <a:t>in</a:t>
+            </a:r>
+            <a:r>
+              <a:rPr lang="hu-HU" sz="1400" dirty="0" smtClean="0"/>
+              <a:t> </a:t>
+            </a:r>
+            <a:r>
+              <a:rPr lang="hu-HU" sz="1400" dirty="0" err="1" smtClean="0"/>
+              <a:t>generative</a:t>
+            </a:r>
+            <a:r>
+              <a:rPr lang="hu-HU" sz="1400" dirty="0" smtClean="0"/>
+              <a:t> </a:t>
+            </a:r>
+            <a:r>
+              <a:rPr lang="hu-HU" sz="1400" dirty="0" err="1" smtClean="0"/>
+              <a:t>LMs</a:t>
+            </a:r>
+            <a:r>
+              <a:rPr lang="hu-HU" sz="1400" dirty="0" smtClean="0"/>
+              <a:t>, no </a:t>
+            </a:r>
+            <a:r>
+              <a:rPr lang="hu-HU" sz="1400" dirty="0" err="1" smtClean="0"/>
+              <a:t>filtering</a:t>
+            </a:r>
+            <a:r>
+              <a:rPr lang="hu-HU" sz="1400" dirty="0" smtClean="0"/>
+              <a:t> out of </a:t>
+            </a:r>
+            <a:r>
+              <a:rPr lang="hu-HU" sz="1400" dirty="0" err="1" smtClean="0"/>
+              <a:t>low-confidence</a:t>
+            </a:r>
+            <a:r>
+              <a:rPr lang="hu-HU" sz="1400" dirty="0" smtClean="0"/>
+              <a:t> </a:t>
+            </a:r>
+            <a:r>
+              <a:rPr lang="hu-HU" sz="1400" dirty="0" err="1" smtClean="0"/>
+              <a:t>responses</a:t>
+            </a:r>
+            <a:endParaRPr lang="hu-HU" sz="1400" dirty="0" smtClean="0"/>
+          </a:p>
+          <a:p>
+            <a:pPr lvl="1"/>
+            <a:r>
+              <a:rPr lang="hu-HU" sz="1600" b="1" dirty="0" err="1" smtClean="0"/>
+              <a:t>Thus</a:t>
+            </a:r>
+            <a:r>
+              <a:rPr lang="hu-HU" sz="1600" b="1" dirty="0" smtClean="0"/>
+              <a:t> </a:t>
+            </a:r>
+            <a:r>
+              <a:rPr lang="hu-HU" sz="1600" b="1" dirty="0" err="1" smtClean="0"/>
+              <a:t>in</a:t>
+            </a:r>
+            <a:r>
+              <a:rPr lang="hu-HU" sz="1600" b="1" dirty="0" smtClean="0"/>
+              <a:t> </a:t>
+            </a:r>
+            <a:r>
+              <a:rPr lang="hu-HU" sz="1600" b="1" dirty="0" err="1" smtClean="0"/>
+              <a:t>practice</a:t>
+            </a:r>
+            <a:r>
+              <a:rPr lang="hu-HU" sz="1600" dirty="0" smtClean="0"/>
+              <a:t>, </a:t>
+            </a:r>
+            <a:r>
+              <a:rPr lang="hu-HU" sz="1600" dirty="0" err="1" smtClean="0"/>
+              <a:t>when</a:t>
+            </a:r>
+            <a:r>
+              <a:rPr lang="hu-HU" sz="1600" dirty="0" smtClean="0"/>
+              <a:t> </a:t>
+            </a:r>
+            <a:r>
+              <a:rPr lang="hu-HU" sz="1600" dirty="0" err="1" smtClean="0"/>
+              <a:t>using</a:t>
+            </a:r>
+            <a:r>
+              <a:rPr lang="hu-HU" sz="1600" dirty="0" smtClean="0"/>
+              <a:t> a </a:t>
+            </a:r>
+            <a:r>
+              <a:rPr lang="hu-HU" sz="1600" dirty="0" err="1" smtClean="0"/>
+              <a:t>generative</a:t>
+            </a:r>
+            <a:r>
+              <a:rPr lang="hu-HU" sz="1600" dirty="0" smtClean="0"/>
+              <a:t> LM </a:t>
+            </a:r>
+            <a:r>
+              <a:rPr lang="hu-HU" sz="1600" dirty="0" err="1" smtClean="0"/>
+              <a:t>to</a:t>
+            </a:r>
+            <a:r>
+              <a:rPr lang="hu-HU" sz="1600" dirty="0" smtClean="0"/>
+              <a:t> </a:t>
+            </a:r>
+            <a:r>
+              <a:rPr lang="hu-HU" sz="1600" dirty="0" err="1" smtClean="0"/>
+              <a:t>solve</a:t>
+            </a:r>
+            <a:r>
+              <a:rPr lang="hu-HU" sz="1600" dirty="0" smtClean="0"/>
+              <a:t> an </a:t>
+            </a:r>
+            <a:r>
+              <a:rPr lang="hu-HU" sz="1600" dirty="0" err="1" smtClean="0"/>
+              <a:t>NLP</a:t>
+            </a:r>
+            <a:r>
+              <a:rPr lang="hu-HU" sz="1600" dirty="0" smtClean="0"/>
+              <a:t> </a:t>
+            </a:r>
+            <a:r>
+              <a:rPr lang="hu-HU" sz="1600" dirty="0" err="1" smtClean="0"/>
+              <a:t>task</a:t>
+            </a:r>
+            <a:r>
+              <a:rPr lang="hu-HU" sz="1600" dirty="0" smtClean="0"/>
+              <a:t>, </a:t>
+            </a:r>
+            <a:r>
+              <a:rPr lang="hu-HU" sz="1600" dirty="0" err="1" smtClean="0"/>
+              <a:t>you</a:t>
+            </a:r>
+            <a:r>
+              <a:rPr lang="hu-HU" sz="1600" dirty="0" smtClean="0"/>
+              <a:t> </a:t>
+            </a:r>
+            <a:r>
+              <a:rPr lang="hu-HU" sz="1600" dirty="0" err="1" smtClean="0"/>
+              <a:t>give</a:t>
+            </a:r>
+            <a:r>
+              <a:rPr lang="hu-HU" sz="1600" dirty="0" smtClean="0"/>
+              <a:t> </a:t>
+            </a:r>
+            <a:r>
+              <a:rPr lang="hu-HU" sz="1600" dirty="0" err="1" smtClean="0"/>
+              <a:t>yourself</a:t>
+            </a:r>
+            <a:r>
+              <a:rPr lang="hu-HU" sz="1600" dirty="0" smtClean="0"/>
+              <a:t> a </a:t>
+            </a:r>
+            <a:r>
+              <a:rPr lang="hu-HU" sz="1600" b="1" dirty="0" err="1" smtClean="0"/>
+              <a:t>second</a:t>
+            </a:r>
+            <a:r>
+              <a:rPr lang="hu-HU" sz="1600" b="1" dirty="0" smtClean="0"/>
+              <a:t> </a:t>
+            </a:r>
+            <a:r>
+              <a:rPr lang="hu-HU" sz="1600" b="1" dirty="0" err="1" smtClean="0"/>
+              <a:t>NLP</a:t>
+            </a:r>
+            <a:r>
+              <a:rPr lang="hu-HU" sz="1600" b="1" dirty="0" smtClean="0"/>
+              <a:t> </a:t>
+            </a:r>
+            <a:r>
+              <a:rPr lang="hu-HU" sz="1600" b="1" dirty="0" err="1" smtClean="0"/>
+              <a:t>task</a:t>
+            </a:r>
+            <a:r>
+              <a:rPr lang="hu-HU" sz="1600" b="1" dirty="0" smtClean="0"/>
+              <a:t> </a:t>
+            </a:r>
+            <a:r>
+              <a:rPr lang="hu-HU" sz="1600" dirty="0" err="1" smtClean="0"/>
+              <a:t>that</a:t>
+            </a:r>
+            <a:r>
+              <a:rPr lang="hu-HU" sz="1600" dirty="0" smtClean="0"/>
+              <a:t> </a:t>
+            </a:r>
+            <a:r>
+              <a:rPr lang="hu-HU" sz="1600" dirty="0" err="1" smtClean="0"/>
+              <a:t>consists</a:t>
+            </a:r>
+            <a:r>
+              <a:rPr lang="hu-HU" sz="1600" dirty="0" smtClean="0"/>
+              <a:t> </a:t>
+            </a:r>
+            <a:r>
+              <a:rPr lang="hu-HU" sz="1600" dirty="0" err="1" smtClean="0"/>
+              <a:t>in</a:t>
+            </a:r>
+            <a:r>
+              <a:rPr lang="hu-HU" sz="1600" dirty="0" smtClean="0"/>
+              <a:t> </a:t>
+            </a:r>
+            <a:r>
+              <a:rPr lang="hu-HU" sz="1600" dirty="0" err="1" smtClean="0"/>
+              <a:t>extracting</a:t>
+            </a:r>
+            <a:r>
+              <a:rPr lang="hu-HU" sz="1600" dirty="0" smtClean="0"/>
+              <a:t> </a:t>
+            </a:r>
+            <a:r>
+              <a:rPr lang="hu-HU" sz="1600" dirty="0" err="1" smtClean="0"/>
+              <a:t>the</a:t>
+            </a:r>
+            <a:r>
+              <a:rPr lang="hu-HU" sz="1600" dirty="0" smtClean="0"/>
+              <a:t> </a:t>
+            </a:r>
+            <a:r>
+              <a:rPr lang="hu-HU" sz="1600" dirty="0" err="1" smtClean="0"/>
+              <a:t>useful</a:t>
+            </a:r>
+            <a:r>
+              <a:rPr lang="hu-HU" sz="1600" dirty="0" smtClean="0"/>
+              <a:t> </a:t>
+            </a:r>
+            <a:r>
+              <a:rPr lang="hu-HU" sz="1600" dirty="0" err="1" smtClean="0"/>
+              <a:t>information</a:t>
+            </a:r>
+            <a:r>
+              <a:rPr lang="hu-HU" sz="1600" dirty="0" smtClean="0"/>
+              <a:t> </a:t>
+            </a:r>
+            <a:r>
+              <a:rPr lang="hu-HU" sz="1600" dirty="0" err="1" smtClean="0"/>
+              <a:t>from</a:t>
+            </a:r>
+            <a:r>
+              <a:rPr lang="hu-HU" sz="1600" dirty="0" smtClean="0"/>
+              <a:t> </a:t>
+            </a:r>
+            <a:r>
+              <a:rPr lang="hu-HU" sz="1600" dirty="0" err="1" smtClean="0"/>
+              <a:t>the</a:t>
+            </a:r>
+            <a:r>
+              <a:rPr lang="hu-HU" sz="1600" dirty="0" smtClean="0"/>
+              <a:t> </a:t>
+            </a:r>
+            <a:r>
+              <a:rPr lang="hu-HU" sz="1600" dirty="0" err="1" smtClean="0"/>
+              <a:t>response</a:t>
+            </a:r>
+            <a:r>
+              <a:rPr lang="hu-HU" sz="1600" dirty="0" smtClean="0"/>
+              <a:t> </a:t>
+            </a:r>
+            <a:r>
+              <a:rPr lang="hu-HU" sz="1600" dirty="0" err="1" smtClean="0"/>
+              <a:t>generated</a:t>
+            </a:r>
+            <a:r>
+              <a:rPr lang="hu-HU" sz="1600" dirty="0" smtClean="0"/>
+              <a:t> </a:t>
+            </a:r>
+            <a:r>
+              <a:rPr lang="hu-HU" sz="1600" dirty="0" err="1" smtClean="0"/>
+              <a:t>by</a:t>
+            </a:r>
+            <a:r>
+              <a:rPr lang="hu-HU" sz="1600" dirty="0" smtClean="0"/>
+              <a:t> </a:t>
+            </a:r>
+            <a:r>
+              <a:rPr lang="hu-HU" sz="1600" dirty="0" err="1" smtClean="0"/>
+              <a:t>the</a:t>
+            </a:r>
+            <a:r>
+              <a:rPr lang="hu-HU" sz="1600" dirty="0" smtClean="0"/>
+              <a:t> </a:t>
+            </a:r>
+            <a:r>
+              <a:rPr lang="hu-HU" sz="1600" dirty="0" err="1" smtClean="0"/>
+              <a:t>model</a:t>
+            </a:r>
+            <a:r>
+              <a:rPr lang="hu-HU" sz="1600" dirty="0" smtClean="0"/>
+              <a:t>, and </a:t>
+            </a:r>
+            <a:r>
+              <a:rPr lang="hu-HU" sz="1600" dirty="0" err="1" smtClean="0"/>
+              <a:t>this</a:t>
+            </a:r>
+            <a:r>
+              <a:rPr lang="hu-HU" sz="1600" dirty="0" smtClean="0"/>
+              <a:t> </a:t>
+            </a:r>
+            <a:r>
+              <a:rPr lang="hu-HU" sz="1600" dirty="0" err="1" smtClean="0"/>
+              <a:t>task</a:t>
+            </a:r>
+            <a:r>
+              <a:rPr lang="hu-HU" sz="1600" dirty="0" smtClean="0"/>
+              <a:t> is </a:t>
+            </a:r>
+            <a:r>
+              <a:rPr lang="hu-HU" sz="1600" dirty="0" err="1" smtClean="0"/>
+              <a:t>usually</a:t>
+            </a:r>
+            <a:r>
+              <a:rPr lang="hu-HU" sz="1600" dirty="0" smtClean="0"/>
+              <a:t> no less </a:t>
+            </a:r>
+            <a:r>
+              <a:rPr lang="hu-HU" sz="1600" dirty="0" err="1" smtClean="0"/>
+              <a:t>difficult</a:t>
+            </a:r>
+            <a:r>
+              <a:rPr lang="hu-HU" sz="1600" dirty="0"/>
+              <a:t> </a:t>
+            </a:r>
+            <a:r>
+              <a:rPr lang="hu-HU" sz="1600" dirty="0" err="1" smtClean="0"/>
+              <a:t>than</a:t>
+            </a:r>
+            <a:r>
+              <a:rPr lang="hu-HU" sz="1600" dirty="0" smtClean="0"/>
+              <a:t> </a:t>
+            </a:r>
+            <a:r>
+              <a:rPr lang="hu-HU" sz="1600" dirty="0" err="1" smtClean="0"/>
+              <a:t>the</a:t>
+            </a:r>
+            <a:r>
+              <a:rPr lang="hu-HU" sz="1600" dirty="0" smtClean="0"/>
+              <a:t> </a:t>
+            </a:r>
+            <a:r>
+              <a:rPr lang="hu-HU" sz="1600" dirty="0" err="1" smtClean="0"/>
+              <a:t>original</a:t>
+            </a:r>
+            <a:r>
+              <a:rPr lang="hu-HU" sz="1600" dirty="0" smtClean="0"/>
+              <a:t> </a:t>
+            </a:r>
+            <a:r>
+              <a:rPr lang="hu-HU" sz="1600" dirty="0" err="1" smtClean="0"/>
+              <a:t>one</a:t>
+            </a:r>
+            <a:r>
+              <a:rPr lang="hu-HU" sz="1600" dirty="0" smtClean="0"/>
+              <a:t>.</a:t>
+            </a:r>
+            <a:endParaRPr lang="hu-HU" sz="1600" dirty="0"/>
+          </a:p>
+        </p:txBody>
+      </p:sp>
+    </p:spTree>
+    <p:extLst>
+      <p:ext uri="{BB962C8B-B14F-4D97-AF65-F5344CB8AC3E}">
+        <p14:creationId xmlns:p14="http://schemas.microsoft.com/office/powerpoint/2010/main" val="2551359342"/>
+      </p:ext>
+    </p:extLst>
+  </p:cSld>
+  <p:clrMapOvr>
+    <a:masterClrMapping/>
+  </p:clrMapOvr>
+</p:sld>
+</file>
+
+<file path=ppt/slides/slide21.xml><?xml version="1.0" encoding="utf-8"?>
+<p:sld xmlns:a="http://schemas.openxmlformats.org/drawingml/2006/main" xmlns:r="http://schemas.openxmlformats.org/officeDocument/2006/relationships" xmlns:p="http://schemas.openxmlformats.org/presentationml/2006/main">
+  <p:cSld>
+    <p:spTree>
+      <p:nvGrpSpPr>
+        <p:cNvPr id="1" name=""/>
+        <p:cNvGrpSpPr/>
+        <p:nvPr/>
+      </p:nvGrpSpPr>
+      <p:grpSpPr>
+        <a:xfrm>
+          <a:off x="0" y="0"/>
+          <a:ext cx="0" cy="0"/>
+          <a:chOff x="0" y="0"/>
+          <a:chExt cx="0" cy="0"/>
+        </a:xfrm>
+      </p:grpSpPr>
+      <p:sp>
+        <p:nvSpPr>
+          <p:cNvPr id="2" name="Cím 1"/>
+          <p:cNvSpPr>
+            <a:spLocks noGrp="1"/>
+          </p:cNvSpPr>
+          <p:nvPr>
+            <p:ph type="title"/>
+          </p:nvPr>
+        </p:nvSpPr>
+        <p:spPr/>
+        <p:txBody>
+          <a:bodyPr>
+            <a:noAutofit/>
+          </a:bodyPr>
+          <a:lstStyle/>
+          <a:p>
+            <a:r>
+              <a:rPr lang="hu-HU" sz="3200" dirty="0" err="1"/>
+              <a:t>Generative</a:t>
+            </a:r>
+            <a:r>
+              <a:rPr lang="hu-HU" sz="3200" dirty="0"/>
+              <a:t> </a:t>
+            </a:r>
+            <a:r>
+              <a:rPr lang="hu-HU" sz="3200" dirty="0" err="1"/>
+              <a:t>AI</a:t>
+            </a:r>
+            <a:r>
+              <a:rPr lang="hu-HU" sz="3200" dirty="0"/>
+              <a:t> versus </a:t>
+            </a:r>
+            <a:br>
+              <a:rPr lang="hu-HU" sz="3200" dirty="0"/>
+            </a:br>
+            <a:r>
+              <a:rPr lang="hu-HU" sz="3200" dirty="0" err="1"/>
+              <a:t>Fine-Tuned</a:t>
+            </a:r>
+            <a:r>
+              <a:rPr lang="hu-HU" sz="3200" dirty="0"/>
+              <a:t> </a:t>
+            </a:r>
+            <a:r>
+              <a:rPr lang="hu-HU" sz="3200" dirty="0" err="1"/>
+              <a:t>Encoder</a:t>
+            </a:r>
+            <a:r>
+              <a:rPr lang="hu-HU" sz="3200" dirty="0"/>
+              <a:t> </a:t>
+            </a:r>
+            <a:r>
+              <a:rPr lang="hu-HU" sz="3200" dirty="0" err="1"/>
+              <a:t>Transformers</a:t>
+            </a:r>
+            <a:endParaRPr lang="en-GB" sz="3200" dirty="0"/>
+          </a:p>
+        </p:txBody>
+      </p:sp>
+      <p:sp>
+        <p:nvSpPr>
+          <p:cNvPr id="3" name="Tartalom helye 2"/>
+          <p:cNvSpPr>
+            <a:spLocks noGrp="1"/>
+          </p:cNvSpPr>
+          <p:nvPr>
+            <p:ph idx="1"/>
+          </p:nvPr>
+        </p:nvSpPr>
+        <p:spPr>
+          <a:xfrm>
+            <a:off x="467544" y="1628800"/>
+            <a:ext cx="8229600" cy="4680520"/>
+          </a:xfrm>
+        </p:spPr>
+        <p:txBody>
+          <a:bodyPr>
+            <a:normAutofit fontScale="55000" lnSpcReduction="20000"/>
+          </a:bodyPr>
+          <a:lstStyle/>
+          <a:p>
+            <a:r>
               <a:rPr lang="hu-HU" dirty="0" err="1"/>
               <a:t>Why</a:t>
             </a:r>
@@ -15885,7 +16294,7 @@
             <a:endParaRPr lang="hu-HU" dirty="0" smtClean="0"/>
           </a:p>
           <a:p>
-            <a:pPr lvl="1"/>
+            <a:pPr lvl="2"/>
             <a:r>
               <a:rPr lang="hu-HU" dirty="0" err="1" smtClean="0"/>
               <a:t>Requires</a:t>
@@ -16016,7 +16425,7 @@
             </a:r>
           </a:p>
           <a:p>
-            <a:pPr lvl="1"/>
+            <a:pPr lvl="2"/>
             <a:r>
               <a:rPr lang="hu-HU" dirty="0" err="1" smtClean="0"/>
               <a:t>Electricity</a:t>
@@ -16355,9 +16764,77 @@
               <a:rPr lang="hu-HU" dirty="0" err="1" smtClean="0"/>
               <a:t>run</a:t>
             </a:r>
-            <a:r>
-              <a:rPr lang="hu-HU" dirty="0" smtClean="0"/>
-              <a:t> </a:t>
+            <a:endParaRPr lang="hu-HU" dirty="0"/>
+          </a:p>
+          <a:p>
+            <a:pPr lvl="3"/>
+            <a:r>
+              <a:rPr lang="hu-HU" dirty="0" err="1" smtClean="0"/>
+              <a:t>either</a:t>
+            </a:r>
+            <a:r>
+              <a:rPr lang="hu-HU" dirty="0" smtClean="0"/>
+              <a:t> </a:t>
+            </a:r>
+            <a:r>
+              <a:rPr lang="hu-HU" dirty="0" err="1" smtClean="0"/>
+              <a:t>in</a:t>
+            </a:r>
+            <a:r>
+              <a:rPr lang="hu-HU" dirty="0" smtClean="0"/>
+              <a:t> a </a:t>
+            </a:r>
+            <a:r>
+              <a:rPr lang="hu-HU" dirty="0" smtClean="0"/>
+              <a:t>browser, </a:t>
+            </a:r>
+            <a:r>
+              <a:rPr lang="hu-HU" dirty="0" err="1" smtClean="0"/>
+              <a:t>in</a:t>
+            </a:r>
+            <a:r>
+              <a:rPr lang="hu-HU" dirty="0" smtClean="0"/>
+              <a:t> a chat </a:t>
+            </a:r>
+            <a:r>
+              <a:rPr lang="hu-HU" dirty="0" err="1" smtClean="0"/>
+              <a:t>window</a:t>
+            </a:r>
+            <a:endParaRPr lang="hu-HU" dirty="0" smtClean="0"/>
+          </a:p>
+          <a:p>
+            <a:pPr lvl="3"/>
+            <a:r>
+              <a:rPr lang="hu-HU" dirty="0" err="1" smtClean="0"/>
+              <a:t>or</a:t>
+            </a:r>
+            <a:r>
+              <a:rPr lang="hu-HU" dirty="0" smtClean="0"/>
+              <a:t> </a:t>
+            </a:r>
+            <a:r>
+              <a:rPr lang="hu-HU" dirty="0" err="1" smtClean="0"/>
+              <a:t>in</a:t>
+            </a:r>
+            <a:r>
+              <a:rPr lang="hu-HU" dirty="0" smtClean="0"/>
+              <a:t> an </a:t>
+            </a:r>
+            <a:r>
+              <a:rPr lang="hu-HU" dirty="0" err="1" smtClean="0"/>
+              <a:t>automated</a:t>
+            </a:r>
+            <a:r>
+              <a:rPr lang="hu-HU" dirty="0" smtClean="0"/>
+              <a:t> </a:t>
+            </a:r>
+            <a:r>
+              <a:rPr lang="hu-HU" dirty="0" err="1" smtClean="0"/>
+              <a:t>way</a:t>
+            </a:r>
+            <a:r>
+              <a:rPr lang="hu-HU" dirty="0" smtClean="0"/>
+              <a:t>, </a:t>
             </a:r>
             <a:r>
               <a:rPr lang="hu-HU" dirty="0" err="1" smtClean="0"/>
@@ -16365,23 +16842,258 @@
             </a:r>
             <a:r>
               <a:rPr lang="hu-HU" dirty="0" smtClean="0"/>
+              <a:t> </a:t>
+            </a:r>
+            <a:r>
+              <a:rPr lang="hu-HU" dirty="0" smtClean="0"/>
+              <a:t>a </a:t>
+            </a:r>
+            <a:r>
+              <a:rPr lang="hu-HU" dirty="0" err="1" smtClean="0"/>
+              <a:t>cloud</a:t>
+            </a:r>
+            <a:r>
+              <a:rPr lang="hu-HU" dirty="0" smtClean="0"/>
+              <a:t> </a:t>
+            </a:r>
+            <a:r>
+              <a:rPr lang="hu-HU" dirty="0" err="1" smtClean="0"/>
+              <a:t>computing</a:t>
+            </a:r>
+            <a:r>
+              <a:rPr lang="hu-HU" dirty="0" smtClean="0"/>
+              <a:t> </a:t>
+            </a:r>
+            <a:r>
+              <a:rPr lang="hu-HU" dirty="0" err="1" smtClean="0"/>
+              <a:t>API</a:t>
+            </a:r>
+            <a:r>
+              <a:rPr lang="hu-HU" dirty="0" smtClean="0"/>
+              <a:t> </a:t>
+            </a:r>
+            <a:r>
+              <a:rPr lang="hu-HU" dirty="0" err="1" smtClean="0"/>
+              <a:t>on</a:t>
+            </a:r>
+            <a:r>
+              <a:rPr lang="hu-HU" dirty="0" smtClean="0"/>
+              <a:t> </a:t>
+            </a:r>
+            <a:r>
+              <a:rPr lang="hu-HU" dirty="0" err="1" smtClean="0"/>
+              <a:t>a</a:t>
+            </a:r>
+            <a:r>
+              <a:rPr lang="hu-HU" dirty="0" smtClean="0"/>
+              <a:t> platform </a:t>
+            </a:r>
+            <a:r>
+              <a:rPr lang="hu-HU" dirty="0" err="1" smtClean="0"/>
+              <a:t>such</a:t>
+            </a:r>
+            <a:r>
+              <a:rPr lang="hu-HU" dirty="0" smtClean="0"/>
+              <a:t> </a:t>
+            </a:r>
+            <a:r>
+              <a:rPr lang="hu-HU" dirty="0" err="1" smtClean="0"/>
+              <a:t>as</a:t>
+            </a:r>
+            <a:r>
+              <a:rPr lang="hu-HU" dirty="0" smtClean="0"/>
+              <a:t> </a:t>
+            </a:r>
+            <a:r>
+              <a:rPr lang="hu-HU" dirty="0" err="1" smtClean="0"/>
+              <a:t>AWS</a:t>
+            </a:r>
+            <a:r>
+              <a:rPr lang="hu-HU" dirty="0" smtClean="0"/>
+              <a:t>, Microsoft </a:t>
+            </a:r>
+            <a:r>
+              <a:rPr lang="hu-HU" dirty="0" err="1" smtClean="0"/>
+              <a:t>Azure</a:t>
+            </a:r>
+            <a:r>
+              <a:rPr lang="hu-HU" dirty="0" smtClean="0"/>
+              <a:t> </a:t>
+            </a:r>
+            <a:r>
+              <a:rPr lang="hu-HU" dirty="0" err="1" smtClean="0"/>
+              <a:t>or</a:t>
+            </a:r>
+            <a:r>
+              <a:rPr lang="hu-HU" dirty="0" smtClean="0"/>
+              <a:t> </a:t>
+            </a:r>
+            <a:r>
+              <a:rPr lang="hu-HU" dirty="0" err="1" smtClean="0"/>
+              <a:t>Google</a:t>
+            </a:r>
+            <a:r>
+              <a:rPr lang="hu-HU" dirty="0" smtClean="0"/>
+              <a:t> </a:t>
+            </a:r>
+            <a:r>
+              <a:rPr lang="hu-HU" dirty="0" err="1" smtClean="0"/>
+              <a:t>Cloud</a:t>
+            </a:r>
+            <a:endParaRPr lang="hu-HU" dirty="0" smtClean="0"/>
+          </a:p>
+          <a:p>
+            <a:pPr lvl="2"/>
+            <a:r>
+              <a:rPr lang="hu-HU" dirty="0" err="1" smtClean="0"/>
+              <a:t>Running</a:t>
+            </a:r>
+            <a:r>
+              <a:rPr lang="hu-HU" dirty="0" smtClean="0"/>
+              <a:t> </a:t>
+            </a:r>
+            <a:r>
+              <a:rPr lang="hu-HU" dirty="0" err="1" smtClean="0"/>
+              <a:t>NLP</a:t>
+            </a:r>
+            <a:r>
+              <a:rPr lang="hu-HU" dirty="0" smtClean="0"/>
+              <a:t> </a:t>
+            </a:r>
+            <a:r>
+              <a:rPr lang="hu-HU" dirty="0" err="1" smtClean="0"/>
+              <a:t>tasks</a:t>
+            </a:r>
+            <a:r>
+              <a:rPr lang="hu-HU" dirty="0" smtClean="0"/>
+              <a:t> </a:t>
+            </a:r>
+            <a:r>
+              <a:rPr lang="hu-HU" dirty="0" err="1" smtClean="0"/>
+              <a:t>in</a:t>
+            </a:r>
+            <a:r>
+              <a:rPr lang="hu-HU" dirty="0" smtClean="0"/>
               <a:t> a </a:t>
             </a:r>
             <a:r>
-              <a:rPr lang="hu-HU" dirty="0" err="1" smtClean="0"/>
-              <a:t>cloud</a:t>
-            </a:r>
-            <a:r>
-              <a:rPr lang="hu-HU" dirty="0" smtClean="0"/>
-              <a:t> </a:t>
-            </a:r>
-            <a:r>
-              <a:rPr lang="hu-HU" dirty="0" err="1" smtClean="0"/>
-              <a:t>computing</a:t>
-            </a:r>
-            <a:r>
-              <a:rPr lang="hu-HU" dirty="0" smtClean="0"/>
-              <a:t> </a:t>
+              <a:rPr lang="hu-HU" b="1" dirty="0" smtClean="0"/>
+              <a:t>browser chat is </a:t>
+            </a:r>
+            <a:r>
+              <a:rPr lang="hu-HU" b="1" dirty="0" err="1" smtClean="0"/>
+              <a:t>extremely</a:t>
+            </a:r>
+            <a:r>
+              <a:rPr lang="hu-HU" b="1" dirty="0" smtClean="0"/>
+              <a:t> </a:t>
+            </a:r>
+            <a:r>
+              <a:rPr lang="hu-HU" b="1" dirty="0" err="1" smtClean="0"/>
+              <a:t>cumbersome</a:t>
+            </a:r>
+            <a:r>
+              <a:rPr lang="hu-HU" dirty="0" smtClean="0"/>
+              <a:t>, </a:t>
+            </a:r>
+            <a:r>
+              <a:rPr lang="hu-HU" b="1" dirty="0" err="1" smtClean="0"/>
+              <a:t>not</a:t>
+            </a:r>
+            <a:r>
+              <a:rPr lang="hu-HU" b="1" dirty="0" smtClean="0"/>
+              <a:t> </a:t>
+            </a:r>
+            <a:r>
+              <a:rPr lang="hu-HU" b="1" dirty="0" err="1" smtClean="0"/>
+              <a:t>feasible</a:t>
+            </a:r>
+            <a:r>
+              <a:rPr lang="hu-HU" b="1" dirty="0" smtClean="0"/>
+              <a:t> </a:t>
+            </a:r>
+            <a:r>
+              <a:rPr lang="hu-HU" dirty="0" err="1" smtClean="0"/>
+              <a:t>in</a:t>
+            </a:r>
+            <a:r>
+              <a:rPr lang="hu-HU" dirty="0" smtClean="0"/>
+              <a:t> </a:t>
+            </a:r>
+            <a:r>
+              <a:rPr lang="hu-HU" dirty="0" err="1" smtClean="0"/>
+              <a:t>practice</a:t>
+            </a:r>
+            <a:r>
+              <a:rPr lang="hu-HU" dirty="0" smtClean="0"/>
+              <a:t> </a:t>
+            </a:r>
+            <a:r>
+              <a:rPr lang="hu-HU" dirty="0" err="1" smtClean="0"/>
+              <a:t>even</a:t>
+            </a:r>
+            <a:r>
+              <a:rPr lang="hu-HU" dirty="0" smtClean="0"/>
+              <a:t> </a:t>
+            </a:r>
+            <a:r>
+              <a:rPr lang="hu-HU" dirty="0" err="1" smtClean="0"/>
+              <a:t>for</a:t>
+            </a:r>
+            <a:r>
+              <a:rPr lang="hu-HU" dirty="0" smtClean="0"/>
+              <a:t> </a:t>
+            </a:r>
+            <a:r>
+              <a:rPr lang="hu-HU" dirty="0" err="1" smtClean="0"/>
+              <a:t>smaller</a:t>
+            </a:r>
+            <a:r>
+              <a:rPr lang="hu-HU" dirty="0" smtClean="0"/>
+              <a:t> </a:t>
+            </a:r>
+            <a:r>
+              <a:rPr lang="hu-HU" dirty="0" err="1" smtClean="0"/>
+              <a:t>amounts</a:t>
+            </a:r>
+            <a:r>
+              <a:rPr lang="hu-HU" dirty="0" smtClean="0"/>
+              <a:t> of text, </a:t>
+            </a:r>
+            <a:r>
+              <a:rPr lang="hu-HU" dirty="0" err="1" smtClean="0"/>
+              <a:t>like</a:t>
+            </a:r>
+            <a:r>
+              <a:rPr lang="hu-HU" dirty="0" smtClean="0"/>
+              <a:t> </a:t>
+            </a:r>
+            <a:r>
+              <a:rPr lang="hu-HU" dirty="0" err="1" smtClean="0"/>
+              <a:t>tens</a:t>
+            </a:r>
+            <a:r>
+              <a:rPr lang="hu-HU" dirty="0" smtClean="0"/>
+              <a:t> of </a:t>
+            </a:r>
+            <a:r>
+              <a:rPr lang="hu-HU" dirty="0" err="1" smtClean="0"/>
+              <a:t>documents</a:t>
+            </a:r>
+            <a:r>
+              <a:rPr lang="hu-HU" dirty="0" smtClean="0"/>
+              <a:t>.</a:t>
+            </a:r>
+          </a:p>
+          <a:p>
+            <a:pPr lvl="2"/>
+            <a:r>
+              <a:rPr lang="hu-HU" dirty="0" err="1" smtClean="0"/>
+              <a:t>Using</a:t>
+            </a:r>
+            <a:r>
+              <a:rPr lang="hu-HU" dirty="0" smtClean="0"/>
+              <a:t> an </a:t>
             </a:r>
             <a:r>
               <a:rPr lang="hu-HU" dirty="0" err="1" smtClean="0"/>
@@ -16392,84 +17104,36 @@
               <a:t> </a:t>
             </a:r>
             <a:r>
-              <a:rPr lang="hu-HU" dirty="0" err="1" smtClean="0"/>
-              <a:t>on</a:t>
-            </a:r>
-            <a:r>
-              <a:rPr lang="hu-HU" dirty="0" smtClean="0"/>
-              <a:t> </a:t>
-            </a:r>
-            <a:r>
-              <a:rPr lang="hu-HU" dirty="0" err="1" smtClean="0"/>
-              <a:t>a</a:t>
-            </a:r>
-            <a:r>
-              <a:rPr lang="hu-HU" dirty="0" smtClean="0"/>
-              <a:t> platform </a:t>
-            </a:r>
-            <a:r>
-              <a:rPr lang="hu-HU" dirty="0" err="1" smtClean="0"/>
-              <a:t>such</a:t>
-            </a:r>
-            <a:r>
-              <a:rPr lang="hu-HU" dirty="0" smtClean="0"/>
-              <a:t> </a:t>
-            </a:r>
-            <a:r>
-              <a:rPr lang="hu-HU" dirty="0" err="1" smtClean="0"/>
-              <a:t>as</a:t>
-            </a:r>
-            <a:r>
-              <a:rPr lang="hu-HU" dirty="0" smtClean="0"/>
-              <a:t> </a:t>
-            </a:r>
-            <a:r>
-              <a:rPr lang="hu-HU" dirty="0" err="1" smtClean="0"/>
-              <a:t>AWS</a:t>
-            </a:r>
-            <a:r>
-              <a:rPr lang="hu-HU" dirty="0" smtClean="0"/>
-              <a:t>, Microsoft </a:t>
-            </a:r>
-            <a:r>
-              <a:rPr lang="hu-HU" dirty="0" err="1" smtClean="0"/>
-              <a:t>Azure</a:t>
-            </a:r>
-            <a:r>
-              <a:rPr lang="hu-HU" dirty="0" smtClean="0"/>
-              <a:t> </a:t>
-            </a:r>
-            <a:r>
-              <a:rPr lang="hu-HU" dirty="0" err="1" smtClean="0"/>
-              <a:t>or</a:t>
-            </a:r>
-            <a:r>
-              <a:rPr lang="hu-HU" dirty="0" smtClean="0"/>
-              <a:t> </a:t>
-            </a:r>
-            <a:r>
-              <a:rPr lang="hu-HU" dirty="0" err="1" smtClean="0"/>
-              <a:t>Google</a:t>
-            </a:r>
-            <a:r>
-              <a:rPr lang="hu-HU" dirty="0" smtClean="0"/>
-              <a:t> </a:t>
-            </a:r>
-            <a:r>
-              <a:rPr lang="hu-HU" dirty="0" err="1" smtClean="0"/>
-              <a:t>Cloud</a:t>
-            </a:r>
-            <a:endParaRPr lang="hu-HU" dirty="0" smtClean="0"/>
-          </a:p>
-          <a:p>
-            <a:pPr lvl="2"/>
-            <a:r>
-              <a:rPr lang="hu-HU" dirty="0" err="1" smtClean="0"/>
-              <a:t>Running</a:t>
-            </a:r>
-            <a:r>
-              <a:rPr lang="hu-HU" dirty="0" smtClean="0"/>
-              <a:t> a </a:t>
+              <a:rPr lang="hu-HU" b="1" dirty="0" err="1" smtClean="0"/>
+              <a:t>costs</a:t>
+            </a:r>
+            <a:r>
+              <a:rPr lang="hu-HU" b="1" dirty="0" smtClean="0"/>
+              <a:t> </a:t>
+            </a:r>
+            <a:r>
+              <a:rPr lang="hu-HU" b="1" dirty="0" err="1" smtClean="0"/>
+              <a:t>money</a:t>
+            </a:r>
+            <a:r>
+              <a:rPr lang="hu-HU" dirty="0" smtClean="0"/>
+              <a:t>. </a:t>
+            </a:r>
+            <a:r>
+              <a:rPr lang="hu-HU" dirty="0" err="1" smtClean="0"/>
+              <a:t>R</a:t>
+            </a:r>
+            <a:r>
+              <a:rPr lang="hu-HU" dirty="0" err="1" smtClean="0"/>
+              <a:t>unning</a:t>
+            </a:r>
+            <a:r>
+              <a:rPr lang="hu-HU" dirty="0" smtClean="0"/>
+              <a:t> </a:t>
+            </a:r>
+            <a:r>
+              <a:rPr lang="hu-HU" dirty="0" smtClean="0"/>
+              <a:t>a </a:t>
             </a:r>
             <a:r>
               <a:rPr lang="hu-HU" b="1" dirty="0" err="1" smtClean="0"/>
@@ -16489,14 +17153,6 @@
             </a:r>
             <a:r>
               <a:rPr lang="hu-HU" b="1" dirty="0" err="1" smtClean="0"/>
-              <a:t>costs</a:t>
-            </a:r>
-            <a:r>
-              <a:rPr lang="hu-HU" b="1" dirty="0" smtClean="0"/>
-              <a:t> </a:t>
-            </a:r>
-            <a:r>
-              <a:rPr lang="hu-HU" b="1" dirty="0" err="1" smtClean="0"/>
               <a:t>a</a:t>
             </a:r>
             <a:r>
@@ -16745,6 +17401,360 @@
             <a:r>
               <a:rPr lang="hu-HU" dirty="0" err="1" smtClean="0"/>
               <a:t>production</a:t>
+            </a:r>
+            <a:r>
+              <a:rPr lang="hu-HU" dirty="0" smtClean="0"/>
+              <a:t>.</a:t>
+            </a:r>
+          </a:p>
+          <a:p>
+            <a:r>
+              <a:rPr lang="hu-HU" dirty="0" err="1" smtClean="0"/>
+              <a:t>For</a:t>
+            </a:r>
+            <a:r>
+              <a:rPr lang="hu-HU" dirty="0" smtClean="0"/>
+              <a:t> </a:t>
+            </a:r>
+            <a:r>
+              <a:rPr lang="hu-HU" dirty="0" err="1" smtClean="0"/>
+              <a:t>these</a:t>
+            </a:r>
+            <a:r>
+              <a:rPr lang="hu-HU" dirty="0" smtClean="0"/>
+              <a:t> </a:t>
+            </a:r>
+            <a:r>
+              <a:rPr lang="hu-HU" dirty="0" err="1" smtClean="0"/>
+              <a:t>reasons</a:t>
+            </a:r>
+            <a:r>
+              <a:rPr lang="hu-HU" dirty="0" smtClean="0"/>
+              <a:t>, </a:t>
+            </a:r>
+            <a:r>
+              <a:rPr lang="hu-HU" b="1" dirty="0" err="1" smtClean="0"/>
+              <a:t>locally</a:t>
+            </a:r>
+            <a:r>
+              <a:rPr lang="hu-HU" b="1" dirty="0" smtClean="0"/>
+              <a:t> </a:t>
+            </a:r>
+            <a:r>
+              <a:rPr lang="hu-HU" b="1" dirty="0" err="1" smtClean="0"/>
+              <a:t>running</a:t>
+            </a:r>
+            <a:r>
+              <a:rPr lang="hu-HU" b="1" dirty="0" smtClean="0"/>
+              <a:t> </a:t>
+            </a:r>
+            <a:r>
+              <a:rPr lang="hu-HU" b="1" dirty="0" err="1" smtClean="0"/>
+              <a:t>encoder</a:t>
+            </a:r>
+            <a:r>
+              <a:rPr lang="hu-HU" b="1" dirty="0" smtClean="0"/>
+              <a:t> </a:t>
+            </a:r>
+            <a:r>
+              <a:rPr lang="hu-HU" b="1" dirty="0" err="1" smtClean="0"/>
+              <a:t>LLMs</a:t>
+            </a:r>
+            <a:r>
+              <a:rPr lang="hu-HU" b="1" dirty="0" smtClean="0"/>
+              <a:t> </a:t>
+            </a:r>
+            <a:r>
+              <a:rPr lang="hu-HU" dirty="0" err="1" smtClean="0"/>
+              <a:t>for</a:t>
+            </a:r>
+            <a:r>
+              <a:rPr lang="hu-HU" dirty="0" smtClean="0"/>
+              <a:t> </a:t>
+            </a:r>
+            <a:r>
+              <a:rPr lang="hu-HU" dirty="0" err="1" smtClean="0"/>
+              <a:t>NLP</a:t>
+            </a:r>
+            <a:r>
+              <a:rPr lang="hu-HU" dirty="0" smtClean="0"/>
+              <a:t> is </a:t>
+            </a:r>
+            <a:r>
+              <a:rPr lang="hu-HU" dirty="0" err="1" smtClean="0"/>
+              <a:t>still</a:t>
+            </a:r>
+            <a:r>
+              <a:rPr lang="hu-HU" dirty="0" smtClean="0"/>
+              <a:t> </a:t>
+            </a:r>
+            <a:r>
+              <a:rPr lang="hu-HU" b="1" dirty="0" err="1" smtClean="0"/>
+              <a:t>generally</a:t>
+            </a:r>
+            <a:r>
+              <a:rPr lang="hu-HU" b="1" dirty="0" smtClean="0"/>
+              <a:t> </a:t>
+            </a:r>
+            <a:r>
+              <a:rPr lang="hu-HU" b="1" dirty="0" err="1" smtClean="0"/>
+              <a:t>the</a:t>
+            </a:r>
+            <a:r>
+              <a:rPr lang="hu-HU" b="1" dirty="0" smtClean="0"/>
+              <a:t> </a:t>
+            </a:r>
+            <a:r>
+              <a:rPr lang="hu-HU" b="1" dirty="0" err="1" smtClean="0"/>
+              <a:t>correct</a:t>
+            </a:r>
+            <a:r>
+              <a:rPr lang="hu-HU" b="1" dirty="0" smtClean="0"/>
+              <a:t> </a:t>
+            </a:r>
+            <a:r>
+              <a:rPr lang="hu-HU" b="1" dirty="0" err="1" smtClean="0"/>
+              <a:t>choice</a:t>
+            </a:r>
+            <a:endParaRPr lang="hu-HU" b="1" dirty="0" smtClean="0"/>
+          </a:p>
+          <a:p>
+            <a:pPr lvl="1"/>
+            <a:r>
+              <a:rPr lang="hu-HU" dirty="0" err="1" smtClean="0"/>
+              <a:t>even</a:t>
+            </a:r>
+            <a:r>
+              <a:rPr lang="hu-HU" dirty="0" smtClean="0"/>
+              <a:t> </a:t>
+            </a:r>
+            <a:r>
+              <a:rPr lang="hu-HU" dirty="0" err="1" smtClean="0"/>
+              <a:t>if</a:t>
+            </a:r>
+            <a:r>
+              <a:rPr lang="hu-HU" dirty="0" smtClean="0"/>
+              <a:t> </a:t>
+            </a:r>
+            <a:r>
+              <a:rPr lang="hu-HU" dirty="0" err="1" smtClean="0"/>
+              <a:t>you</a:t>
+            </a:r>
+            <a:r>
+              <a:rPr lang="hu-HU" dirty="0" smtClean="0"/>
+              <a:t> </a:t>
+            </a:r>
+            <a:r>
+              <a:rPr lang="hu-HU" dirty="0" err="1" smtClean="0"/>
+              <a:t>have</a:t>
+            </a:r>
+            <a:r>
+              <a:rPr lang="hu-HU" dirty="0" smtClean="0"/>
+              <a:t> an </a:t>
+            </a:r>
+            <a:r>
+              <a:rPr lang="hu-HU" dirty="0" err="1" smtClean="0"/>
+              <a:t>unlimited</a:t>
+            </a:r>
+            <a:r>
+              <a:rPr lang="hu-HU" dirty="0" smtClean="0"/>
+              <a:t> </a:t>
+            </a:r>
+            <a:r>
+              <a:rPr lang="hu-HU" dirty="0" err="1" smtClean="0"/>
+              <a:t>compute</a:t>
+            </a:r>
+            <a:r>
+              <a:rPr lang="hu-HU" dirty="0" smtClean="0"/>
+              <a:t> </a:t>
+            </a:r>
+            <a:r>
+              <a:rPr lang="hu-HU" dirty="0" err="1" smtClean="0"/>
+              <a:t>budget</a:t>
+            </a:r>
+            <a:r>
+              <a:rPr lang="hu-HU" dirty="0" smtClean="0"/>
+              <a:t> </a:t>
+            </a:r>
+            <a:r>
+              <a:rPr lang="hu-HU" dirty="0" err="1" smtClean="0"/>
+              <a:t>at</a:t>
+            </a:r>
+            <a:r>
+              <a:rPr lang="hu-HU" dirty="0" smtClean="0"/>
+              <a:t> </a:t>
+            </a:r>
+            <a:r>
+              <a:rPr lang="hu-HU" dirty="0" err="1" smtClean="0"/>
+              <a:t>your</a:t>
+            </a:r>
+            <a:r>
+              <a:rPr lang="hu-HU" dirty="0" smtClean="0"/>
+              <a:t> </a:t>
+            </a:r>
+            <a:r>
+              <a:rPr lang="hu-HU" dirty="0" err="1" smtClean="0"/>
+              <a:t>disposal</a:t>
+            </a:r>
+            <a:r>
+              <a:rPr lang="hu-HU" dirty="0" smtClean="0"/>
+              <a:t>, and </a:t>
+            </a:r>
+            <a:r>
+              <a:rPr lang="hu-HU" dirty="0" err="1" smtClean="0"/>
+              <a:t>especially</a:t>
+            </a:r>
+            <a:r>
+              <a:rPr lang="hu-HU" dirty="0" smtClean="0"/>
+              <a:t> </a:t>
+            </a:r>
+            <a:r>
+              <a:rPr lang="hu-HU" dirty="0" err="1" smtClean="0"/>
+              <a:t>if</a:t>
+            </a:r>
+            <a:r>
+              <a:rPr lang="hu-HU" dirty="0" smtClean="0"/>
+              <a:t> </a:t>
+            </a:r>
+            <a:r>
+              <a:rPr lang="hu-HU" dirty="0" err="1" smtClean="0"/>
+              <a:t>you</a:t>
+            </a:r>
+            <a:r>
+              <a:rPr lang="hu-HU" dirty="0" smtClean="0"/>
+              <a:t> </a:t>
+            </a:r>
+            <a:r>
+              <a:rPr lang="hu-HU" dirty="0" err="1" smtClean="0"/>
+              <a:t>do</a:t>
+            </a:r>
+            <a:r>
+              <a:rPr lang="hu-HU" dirty="0" smtClean="0"/>
+              <a:t> </a:t>
+            </a:r>
+            <a:r>
+              <a:rPr lang="hu-HU" dirty="0" err="1" smtClean="0"/>
+              <a:t>not</a:t>
+            </a:r>
+            <a:endParaRPr lang="hu-HU" dirty="0" smtClean="0"/>
+          </a:p>
+          <a:p>
+            <a:pPr lvl="1"/>
+            <a:r>
+              <a:rPr lang="hu-HU" dirty="0" err="1" smtClean="0"/>
+              <a:t>except</a:t>
+            </a:r>
+            <a:r>
+              <a:rPr lang="hu-HU" dirty="0" smtClean="0"/>
+              <a:t> </a:t>
+            </a:r>
+            <a:r>
+              <a:rPr lang="hu-HU" dirty="0" err="1" smtClean="0"/>
+              <a:t>if</a:t>
+            </a:r>
+            <a:r>
+              <a:rPr lang="hu-HU" dirty="0" smtClean="0"/>
+              <a:t> </a:t>
+            </a:r>
+            <a:r>
+              <a:rPr lang="hu-HU" dirty="0" err="1" smtClean="0"/>
+              <a:t>you</a:t>
+            </a:r>
+            <a:r>
+              <a:rPr lang="hu-HU" dirty="0" smtClean="0"/>
+              <a:t> </a:t>
+            </a:r>
+            <a:r>
+              <a:rPr lang="hu-HU" dirty="0" err="1" smtClean="0"/>
+              <a:t>need</a:t>
+            </a:r>
+            <a:r>
+              <a:rPr lang="hu-HU" dirty="0" smtClean="0"/>
+              <a:t> text </a:t>
+            </a:r>
+            <a:r>
+              <a:rPr lang="hu-HU" dirty="0" err="1" smtClean="0"/>
+              <a:t>generation</a:t>
+            </a:r>
+            <a:r>
+              <a:rPr lang="hu-HU" dirty="0" smtClean="0"/>
+              <a:t>, </a:t>
+            </a:r>
+            <a:r>
+              <a:rPr lang="hu-HU" dirty="0" err="1" smtClean="0"/>
+              <a:t>like</a:t>
+            </a:r>
+            <a:r>
+              <a:rPr lang="hu-HU" dirty="0" smtClean="0"/>
+              <a:t> </a:t>
+            </a:r>
+            <a:r>
+              <a:rPr lang="hu-HU" dirty="0" err="1" smtClean="0"/>
+              <a:t>for</a:t>
+            </a:r>
+            <a:r>
+              <a:rPr lang="hu-HU" dirty="0" smtClean="0"/>
+              <a:t> </a:t>
+            </a:r>
+            <a:r>
+              <a:rPr lang="hu-HU" dirty="0" err="1" smtClean="0"/>
+              <a:t>MT</a:t>
+            </a:r>
+            <a:r>
+              <a:rPr lang="hu-HU" dirty="0" smtClean="0"/>
+              <a:t> </a:t>
+            </a:r>
+            <a:r>
+              <a:rPr lang="hu-HU" dirty="0" err="1" smtClean="0"/>
+              <a:t>or</a:t>
+            </a:r>
+            <a:r>
+              <a:rPr lang="hu-HU" dirty="0" smtClean="0"/>
+              <a:t> a chatbot; </a:t>
+            </a:r>
+            <a:r>
+              <a:rPr lang="hu-HU" dirty="0" err="1" smtClean="0"/>
+              <a:t>this</a:t>
+            </a:r>
+            <a:r>
+              <a:rPr lang="hu-HU" dirty="0" smtClean="0"/>
+              <a:t> is </a:t>
+            </a:r>
+            <a:r>
+              <a:rPr lang="hu-HU" dirty="0" err="1" smtClean="0"/>
+              <a:t>what</a:t>
+            </a:r>
+            <a:r>
+              <a:rPr lang="hu-HU" dirty="0" smtClean="0"/>
+              <a:t> </a:t>
+            </a:r>
+            <a:r>
+              <a:rPr lang="hu-HU" dirty="0" err="1" smtClean="0"/>
+              <a:t>generative</a:t>
+            </a:r>
+            <a:r>
+              <a:rPr lang="hu-HU" dirty="0" smtClean="0"/>
+              <a:t> </a:t>
+            </a:r>
+            <a:r>
+              <a:rPr lang="hu-HU" dirty="0" err="1" smtClean="0"/>
+              <a:t>LMs</a:t>
+            </a:r>
+            <a:r>
+              <a:rPr lang="hu-HU" dirty="0" smtClean="0"/>
+              <a:t> </a:t>
+            </a:r>
+            <a:r>
+              <a:rPr lang="hu-HU" dirty="0" err="1" smtClean="0"/>
+              <a:t>are</a:t>
+            </a:r>
+            <a:r>
+              <a:rPr lang="hu-HU" dirty="0" smtClean="0"/>
+              <a:t> </a:t>
+            </a:r>
+            <a:r>
+              <a:rPr lang="hu-HU" dirty="0" err="1" smtClean="0"/>
+              <a:t>for</a:t>
             </a:r>
             <a:endParaRPr lang="hu-HU" dirty="0"/>
           </a:p>
@@ -18075,16 +19085,24 @@
               <a:t> a </a:t>
             </a:r>
             <a:r>
+              <a:rPr lang="hu-HU" i="1" dirty="0"/>
+              <a:t>n</a:t>
+            </a:r>
+            <a:r>
               <a:rPr lang="hu-HU" i="1" dirty="0" smtClean="0"/>
-              <a:t>k </a:t>
+              <a:t> </a:t>
             </a:r>
             <a:r>
               <a:rPr lang="hu-HU" dirty="0" smtClean="0"/>
               <a:t>x </a:t>
             </a:r>
             <a:r>
+              <a:rPr lang="hu-HU" i="1" dirty="0"/>
+              <a:t>k</a:t>
+            </a:r>
+            <a:r>
               <a:rPr lang="hu-HU" i="1" dirty="0" smtClean="0"/>
-              <a:t>n </a:t>
+              <a:t> </a:t>
             </a:r>
             <a:r>
               <a:rPr lang="hu-HU" dirty="0" err="1" smtClean="0"/>
@@ -18405,16 +19423,24 @@
               <a:t> </a:t>
             </a:r>
             <a:r>
+              <a:rPr lang="hu-HU" i="1" dirty="0"/>
+              <a:t>n</a:t>
+            </a:r>
+            <a:r>
               <a:rPr lang="hu-HU" i="1" dirty="0" smtClean="0"/>
-              <a:t>k </a:t>
+              <a:t> </a:t>
             </a:r>
             <a:r>
               <a:rPr lang="hu-HU" dirty="0" smtClean="0"/>
               <a:t>x </a:t>
             </a:r>
             <a:r>
+              <a:rPr lang="hu-HU" i="1" dirty="0"/>
+              <a:t>k</a:t>
+            </a:r>
+            <a:r>
               <a:rPr lang="hu-HU" i="1" dirty="0" smtClean="0"/>
-              <a:t>n </a:t>
+              <a:t> </a:t>
             </a:r>
             <a:r>
               <a:rPr lang="hu-HU" dirty="0" smtClean="0"/>
@@ -22189,11 +23215,7 @@
             </a:r>
             <a:r>
               <a:rPr lang="hu-HU" dirty="0" smtClean="0"/>
-              <a:t> </a:t>
-            </a:r>
-            <a:r>
-              <a:rPr lang="hu-HU" dirty="0" smtClean="0"/>
-              <a:t>modelling (</a:t>
+              <a:t> modelling (</a:t>
             </a:r>
             <a:r>
               <a:rPr lang="hu-HU" dirty="0" err="1" smtClean="0"/>
@@ -22251,7 +23273,6 @@
               <a:rPr lang="hu-HU" dirty="0" smtClean="0"/>
               <a:t>)</a:t>
             </a:r>
-            <a:endParaRPr lang="hu-HU" dirty="0" smtClean="0"/>
           </a:p>
           <a:p>
             <a:r>
@@ -24763,6 +25784,14 @@
             </a:r>
             <a:r>
               <a:rPr lang="hu-HU" b="1" dirty="0" err="1" smtClean="0"/>
+              <a:t>expected</a:t>
+            </a:r>
+            <a:r>
+              <a:rPr lang="hu-HU" b="1" dirty="0" smtClean="0"/>
+              <a:t> </a:t>
+            </a:r>
+            <a:r>
+              <a:rPr lang="hu-HU" b="1" dirty="0" err="1" smtClean="0"/>
               <a:t>outputs</a:t>
             </a:r>
             <a:r>
@@ -24771,7 +25800,7 @@
             </a:r>
             <a:r>
               <a:rPr lang="hu-HU" dirty="0" err="1" smtClean="0"/>
-              <a:t>corresponding</a:t>
+              <a:t>for</a:t>
             </a:r>
             <a:r>
               <a:rPr lang="hu-HU" dirty="0" smtClean="0"/>
@@ -24860,6 +25889,22 @@
             <a:r>
               <a:rPr lang="hu-HU" dirty="0" err="1" smtClean="0"/>
               <a:t>model</a:t>
+            </a:r>
+            <a:r>
+              <a:rPr lang="hu-HU" dirty="0" smtClean="0"/>
+              <a:t> </a:t>
+            </a:r>
+            <a:r>
+              <a:rPr lang="hu-HU" dirty="0" err="1" smtClean="0"/>
+              <a:t>during</a:t>
+            </a:r>
+            <a:r>
+              <a:rPr lang="hu-HU" dirty="0" smtClean="0"/>
+              <a:t> </a:t>
+            </a:r>
+            <a:r>
+              <a:rPr lang="hu-HU" dirty="0" err="1" smtClean="0"/>
+              <a:t>training</a:t>
             </a:r>
             <a:endParaRPr lang="hu-HU" dirty="0" smtClean="0"/>
           </a:p>
